--- a/public/downloads/praesentation/M16.pptx
+++ b/public/downloads/praesentation/M16.pptx
@@ -19,6 +19,13 @@
     <p:sldId id="267" r:id="rId18"/>
     <p:sldId id="268" r:id="rId19"/>
     <p:sldId id="269" r:id="rId20"/>
+    <p:sldId id="270" r:id="rId21"/>
+    <p:sldId id="271" r:id="rId22"/>
+    <p:sldId id="272" r:id="rId23"/>
+    <p:sldId id="273" r:id="rId24"/>
+    <p:sldId id="274" r:id="rId25"/>
+    <p:sldId id="275" r:id="rId26"/>
+    <p:sldId id="276" r:id="rId27"/>
   </p:sldIdLst>
   <p:sldSz cx="12188952" cy="6858000" type="screen4x3"/>
   <p:notesSz cx="6858000" cy="9144000"/>
@@ -3160,8 +3167,8 @@
         </p:nvSpPr>
         <p:spPr>
           <a:xfrm>
-            <a:off x="365760" y="365760"/>
-            <a:ext cx="11430000" cy="457200"/>
+            <a:off x="365760" y="320040"/>
+            <a:ext cx="11430000" cy="411480"/>
           </a:xfrm>
           <a:prstGeom prst="rect">
             <a:avLst/>
@@ -3176,13 +3183,13 @@
           <a:p>
             <a:pPr algn="l"/>
             <a:r>
-              <a:rPr sz="1100" b="0">
-                <a:solidFill>
-                  <a:srgbClr val="FFFFFF"/>
+              <a:rPr sz="1100" b="0" i="0">
+                <a:solidFill>
+                  <a:srgbClr val="BBCCEE"/>
                 </a:solidFill>
                 <a:latin typeface="Arial"/>
               </a:rPr>
-              <a:t>M16  ·  K-04 Vertrieb &amp; Ertragsoptimierung  ·  Berater  ·  90 Min.</a:t>
+              <a:t>M16  ·  K-04 Vertrieb &amp; Ertragsoptimierung  ·  Zielstufe: Berater  ·  90 Min.</a:t>
             </a:r>
           </a:p>
         </p:txBody>
@@ -3195,14 +3202,14 @@
         </p:nvSpPr>
         <p:spPr>
           <a:xfrm>
-            <a:off x="365760" y="868680"/>
-            <a:ext cx="7315200" cy="27432"/>
+            <a:off x="365760" y="804672"/>
+            <a:ext cx="8229600" cy="22860"/>
           </a:xfrm>
           <a:prstGeom prst="rect">
             <a:avLst/>
           </a:prstGeom>
           <a:solidFill>
-            <a:srgbClr val="FFFFFF"/>
+            <a:srgbClr val="335CC0"/>
           </a:solidFill>
           <a:ln>
             <a:noFill/>
@@ -3238,8 +3245,8 @@
         </p:nvSpPr>
         <p:spPr>
           <a:xfrm>
-            <a:off x="365760" y="1097280"/>
-            <a:ext cx="11430000" cy="2286000"/>
+            <a:off x="365760" y="1005840"/>
+            <a:ext cx="11430000" cy="2560320"/>
           </a:xfrm>
           <a:prstGeom prst="rect">
             <a:avLst/>
@@ -3254,7 +3261,7 @@
           <a:p>
             <a:pPr algn="l"/>
             <a:r>
-              <a:rPr sz="4000" b="1">
+              <a:rPr sz="4200" b="1" i="0">
                 <a:solidFill>
                   <a:srgbClr val="FFFFFF"/>
                 </a:solidFill>
@@ -3273,8 +3280,8 @@
         </p:nvSpPr>
         <p:spPr>
           <a:xfrm>
-            <a:off x="365760" y="3200400"/>
-            <a:ext cx="9144000" cy="914400"/>
+            <a:off x="365760" y="3383280"/>
+            <a:ext cx="10058400" cy="822960"/>
           </a:xfrm>
           <a:prstGeom prst="rect">
             <a:avLst/>
@@ -3289,7 +3296,7 @@
           <a:p>
             <a:pPr algn="l"/>
             <a:r>
-              <a:rPr sz="2000" b="0">
+              <a:rPr sz="2000" b="0" i="1">
                 <a:solidFill>
                   <a:srgbClr val="CCD6F0"/>
                 </a:solidFill>
@@ -3308,8 +3315,8 @@
         </p:nvSpPr>
         <p:spPr>
           <a:xfrm>
-            <a:off x="365760" y="6217920"/>
-            <a:ext cx="11430000" cy="457200"/>
+            <a:off x="365760" y="6309360"/>
+            <a:ext cx="11430000" cy="365760"/>
           </a:xfrm>
           <a:prstGeom prst="rect">
             <a:avLst/>
@@ -3324,9 +3331,9 @@
           <a:p>
             <a:pPr algn="l"/>
             <a:r>
-              <a:rPr sz="1000" b="0">
-                <a:solidFill>
-                  <a:srgbClr val="99AACC"/>
+              <a:rPr sz="900" b="0" i="0">
+                <a:solidFill>
+                  <a:srgbClr val="889ACC"/>
                 </a:solidFill>
                 <a:latin typeface="Arial"/>
               </a:rPr>
@@ -3344,6 +3351,1156 @@
 </file>
 
 <file path=ppt/slides/slide10.xml><?xml version="1.0" encoding="utf-8"?>
+<p:sld xmlns:a="http://schemas.openxmlformats.org/drawingml/2006/main" xmlns:p="http://schemas.openxmlformats.org/presentationml/2006/main" xmlns:r="http://schemas.openxmlformats.org/officeDocument/2006/relationships">
+  <p:cSld>
+    <p:bg>
+      <p:bgPr>
+        <a:solidFill>
+          <a:srgbClr val="FFFFFF"/>
+        </a:solidFill>
+        <a:effectLst/>
+      </p:bgPr>
+    </p:bg>
+    <p:spTree>
+      <p:nvGrpSpPr>
+        <p:cNvPr id="1" name=""/>
+        <p:cNvGrpSpPr/>
+        <p:nvPr/>
+      </p:nvGrpSpPr>
+      <p:grpSpPr/>
+      <p:sp>
+        <p:nvSpPr>
+          <p:cNvPr id="2" name="Rectangle 1"/>
+          <p:cNvSpPr/>
+          <p:nvPr/>
+        </p:nvSpPr>
+        <p:spPr>
+          <a:xfrm>
+            <a:off x="0" y="0"/>
+            <a:ext cx="73152" cy="6858000"/>
+          </a:xfrm>
+          <a:prstGeom prst="rect">
+            <a:avLst/>
+          </a:prstGeom>
+          <a:solidFill>
+            <a:srgbClr val="003DA5"/>
+          </a:solidFill>
+          <a:ln>
+            <a:noFill/>
+          </a:ln>
+        </p:spPr>
+        <p:style>
+          <a:lnRef idx="1">
+            <a:schemeClr val="accent1"/>
+          </a:lnRef>
+          <a:fillRef idx="3">
+            <a:schemeClr val="accent1"/>
+          </a:fillRef>
+          <a:effectRef idx="2">
+            <a:schemeClr val="accent1"/>
+          </a:effectRef>
+          <a:fontRef idx="minor">
+            <a:schemeClr val="lt1"/>
+          </a:fontRef>
+        </p:style>
+        <p:txBody>
+          <a:bodyPr rtlCol="0" anchor="ctr"/>
+          <a:lstStyle/>
+          <a:p>
+            <a:pPr algn="ctr"/>
+          </a:p>
+        </p:txBody>
+      </p:sp>
+      <p:sp>
+        <p:nvSpPr>
+          <p:cNvPr id="3" name="TextBox 2"/>
+          <p:cNvSpPr txBox="1"/>
+          <p:nvPr/>
+        </p:nvSpPr>
+        <p:spPr>
+          <a:xfrm>
+            <a:off x="228600" y="182880"/>
+            <a:ext cx="11430000" cy="320040"/>
+          </a:xfrm>
+          <a:prstGeom prst="rect">
+            <a:avLst/>
+          </a:prstGeom>
+          <a:noFill/>
+        </p:spPr>
+        <p:txBody>
+          <a:bodyPr wrap="square">
+            <a:spAutoFit/>
+          </a:bodyPr>
+          <a:lstStyle/>
+          <a:p>
+            <a:pPr algn="l"/>
+            <a:r>
+              <a:rPr sz="900" b="0" i="0">
+                <a:solidFill>
+                  <a:srgbClr val="556575"/>
+                </a:solidFill>
+                <a:latin typeface="Arial"/>
+              </a:rPr>
+              <a:t>M16 · 4.3 NMZ-Berichte in agree lesen</a:t>
+            </a:r>
+          </a:p>
+        </p:txBody>
+      </p:sp>
+      <p:sp>
+        <p:nvSpPr>
+          <p:cNvPr id="4" name="TextBox 3"/>
+          <p:cNvSpPr txBox="1"/>
+          <p:nvPr/>
+        </p:nvSpPr>
+        <p:spPr>
+          <a:xfrm>
+            <a:off x="365760" y="274320"/>
+            <a:ext cx="11430000" cy="777240"/>
+          </a:xfrm>
+          <a:prstGeom prst="rect">
+            <a:avLst/>
+          </a:prstGeom>
+          <a:noFill/>
+        </p:spPr>
+        <p:txBody>
+          <a:bodyPr wrap="square">
+            <a:spAutoFit/>
+          </a:bodyPr>
+          <a:lstStyle/>
+          <a:p>
+            <a:pPr algn="l"/>
+            <a:r>
+              <a:rPr sz="2200" b="1" i="0">
+                <a:solidFill>
+                  <a:srgbClr val="003DA5"/>
+                </a:solidFill>
+                <a:latin typeface="Arial"/>
+              </a:rPr>
+              <a:t>Leseübung: NMZ-Ranking interpretieren</a:t>
+            </a:r>
+          </a:p>
+        </p:txBody>
+      </p:sp>
+      <p:sp>
+        <p:nvSpPr>
+          <p:cNvPr id="5" name="Rectangle 4"/>
+          <p:cNvSpPr/>
+          <p:nvPr/>
+        </p:nvSpPr>
+        <p:spPr>
+          <a:xfrm>
+            <a:off x="365760" y="1005840"/>
+            <a:ext cx="11430000" cy="27432"/>
+          </a:xfrm>
+          <a:prstGeom prst="rect">
+            <a:avLst/>
+          </a:prstGeom>
+          <a:solidFill>
+            <a:srgbClr val="D1D5DB"/>
+          </a:solidFill>
+          <a:ln>
+            <a:noFill/>
+          </a:ln>
+        </p:spPr>
+        <p:style>
+          <a:lnRef idx="1">
+            <a:schemeClr val="accent1"/>
+          </a:lnRef>
+          <a:fillRef idx="3">
+            <a:schemeClr val="accent1"/>
+          </a:fillRef>
+          <a:effectRef idx="2">
+            <a:schemeClr val="accent1"/>
+          </a:effectRef>
+          <a:fontRef idx="minor">
+            <a:schemeClr val="lt1"/>
+          </a:fontRef>
+        </p:style>
+        <p:txBody>
+          <a:bodyPr rtlCol="0" anchor="ctr"/>
+          <a:lstStyle/>
+          <a:p>
+            <a:pPr algn="ctr"/>
+          </a:p>
+        </p:txBody>
+      </p:sp>
+      <p:graphicFrame>
+        <p:nvGraphicFramePr>
+          <p:cNvPr id="6" name="Table 5"/>
+          <p:cNvGraphicFramePr>
+            <a:graphicFrameLocks noGrp="1"/>
+          </p:cNvGraphicFramePr>
+          <p:nvPr/>
+        </p:nvGraphicFramePr>
+        <p:xfrm>
+          <a:off x="365760" y="1143000"/>
+          <a:ext cx="11430000" cy="3328416"/>
+        </p:xfrm>
+        <a:graphic>
+          <a:graphicData uri="http://schemas.openxmlformats.org/drawingml/2006/table">
+            <a:tbl>
+              <a:tblPr firstRow="1" bandRow="1">
+                <a:tableStyleId>{5C22544A-7EE6-4342-B048-85BDC9FD1C3A}</a:tableStyleId>
+              </a:tblPr>
+              <a:tblGrid>
+                <a:gridCol w="1905000"/>
+                <a:gridCol w="1905000"/>
+                <a:gridCol w="1905000"/>
+                <a:gridCol w="1905000"/>
+                <a:gridCol w="1905000"/>
+                <a:gridCol w="1905000"/>
+              </a:tblGrid>
+              <a:tr h="475488">
+                <a:tc>
+                  <a:txBody>
+                    <a:bodyPr wrap="square"/>
+                    <a:lstStyle/>
+                    <a:p>
+                      <a:r>
+                        <a:rPr sz="1100" b="1">
+                          <a:solidFill>
+                            <a:srgbClr val="FFFFFF"/>
+                          </a:solidFill>
+                          <a:latin typeface="Arial"/>
+                        </a:rPr>
+                        <a:t>Rang</a:t>
+                      </a:r>
+                    </a:p>
+                  </a:txBody>
+                  <a:tcPr>
+                    <a:solidFill>
+                      <a:srgbClr val="003DA5"/>
+                    </a:solidFill>
+                  </a:tcPr>
+                </a:tc>
+                <a:tc>
+                  <a:txBody>
+                    <a:bodyPr wrap="square"/>
+                    <a:lstStyle/>
+                    <a:p>
+                      <a:r>
+                        <a:rPr sz="1100" b="1">
+                          <a:solidFill>
+                            <a:srgbClr val="FFFFFF"/>
+                          </a:solidFill>
+                          <a:latin typeface="Arial"/>
+                        </a:rPr>
+                        <a:t>Kunde</a:t>
+                      </a:r>
+                    </a:p>
+                  </a:txBody>
+                  <a:tcPr>
+                    <a:solidFill>
+                      <a:srgbClr val="003DA5"/>
+                    </a:solidFill>
+                  </a:tcPr>
+                </a:tc>
+                <a:tc>
+                  <a:txBody>
+                    <a:bodyPr wrap="square"/>
+                    <a:lstStyle/>
+                    <a:p>
+                      <a:r>
+                        <a:rPr sz="1100" b="1">
+                          <a:solidFill>
+                            <a:srgbClr val="FFFFFF"/>
+                          </a:solidFill>
+                          <a:latin typeface="Arial"/>
+                        </a:rPr>
+                        <a:t>Kreditvolumen</a:t>
+                      </a:r>
+                    </a:p>
+                  </a:txBody>
+                  <a:tcPr>
+                    <a:solidFill>
+                      <a:srgbClr val="003DA5"/>
+                    </a:solidFill>
+                  </a:tcPr>
+                </a:tc>
+                <a:tc>
+                  <a:txBody>
+                    <a:bodyPr wrap="square"/>
+                    <a:lstStyle/>
+                    <a:p>
+                      <a:r>
+                        <a:rPr sz="1100" b="1">
+                          <a:solidFill>
+                            <a:srgbClr val="FFFFFF"/>
+                          </a:solidFill>
+                          <a:latin typeface="Arial"/>
+                        </a:rPr>
+                        <a:t>DB II</a:t>
+                      </a:r>
+                    </a:p>
+                  </a:txBody>
+                  <a:tcPr>
+                    <a:solidFill>
+                      <a:srgbClr val="003DA5"/>
+                    </a:solidFill>
+                  </a:tcPr>
+                </a:tc>
+                <a:tc>
+                  <a:txBody>
+                    <a:bodyPr wrap="square"/>
+                    <a:lstStyle/>
+                    <a:p>
+                      <a:r>
+                        <a:rPr sz="1100" b="1">
+                          <a:solidFill>
+                            <a:srgbClr val="FFFFFF"/>
+                          </a:solidFill>
+                          <a:latin typeface="Arial"/>
+                        </a:rPr>
+                        <a:t>NMZ</a:t>
+                      </a:r>
+                    </a:p>
+                  </a:txBody>
+                  <a:tcPr>
+                    <a:solidFill>
+                      <a:srgbClr val="003DA5"/>
+                    </a:solidFill>
+                  </a:tcPr>
+                </a:tc>
+                <a:tc>
+                  <a:txBody>
+                    <a:bodyPr wrap="square"/>
+                    <a:lstStyle/>
+                    <a:p>
+                      <a:r>
+                        <a:rPr sz="1100" b="1">
+                          <a:solidFill>
+                            <a:srgbClr val="FFFFFF"/>
+                          </a:solidFill>
+                          <a:latin typeface="Arial"/>
+                        </a:rPr>
+                        <a:t>Hauptschwäche</a:t>
+                      </a:r>
+                    </a:p>
+                  </a:txBody>
+                  <a:tcPr>
+                    <a:solidFill>
+                      <a:srgbClr val="003DA5"/>
+                    </a:solidFill>
+                  </a:tcPr>
+                </a:tc>
+              </a:tr>
+              <a:tr h="475488">
+                <a:tc>
+                  <a:txBody>
+                    <a:bodyPr wrap="square"/>
+                    <a:lstStyle/>
+                    <a:p>
+                      <a:r>
+                        <a:rPr sz="1100" b="0">
+                          <a:solidFill>
+                            <a:srgbClr val="1A1A1A"/>
+                          </a:solidFill>
+                          <a:latin typeface="Arial"/>
+                        </a:rPr>
+                        <a:t>1</a:t>
+                      </a:r>
+                    </a:p>
+                  </a:txBody>
+                  <a:tcPr>
+                    <a:solidFill>
+                      <a:srgbClr val="FFFFFF"/>
+                    </a:solidFill>
+                  </a:tcPr>
+                </a:tc>
+                <a:tc>
+                  <a:txBody>
+                    <a:bodyPr wrap="square"/>
+                    <a:lstStyle/>
+                    <a:p>
+                      <a:r>
+                        <a:rPr sz="1100" b="0">
+                          <a:solidFill>
+                            <a:srgbClr val="1A1A1A"/>
+                          </a:solidFill>
+                          <a:latin typeface="Arial"/>
+                        </a:rPr>
+                        <a:t>Müller GmbH</a:t>
+                      </a:r>
+                    </a:p>
+                  </a:txBody>
+                  <a:tcPr>
+                    <a:solidFill>
+                      <a:srgbClr val="FFFFFF"/>
+                    </a:solidFill>
+                  </a:tcPr>
+                </a:tc>
+                <a:tc>
+                  <a:txBody>
+                    <a:bodyPr wrap="square"/>
+                    <a:lstStyle/>
+                    <a:p>
+                      <a:r>
+                        <a:rPr sz="1100" b="0">
+                          <a:solidFill>
+                            <a:srgbClr val="1A1A1A"/>
+                          </a:solidFill>
+                          <a:latin typeface="Arial"/>
+                        </a:rPr>
+                        <a:t>800.000</a:t>
+                      </a:r>
+                    </a:p>
+                  </a:txBody>
+                  <a:tcPr>
+                    <a:solidFill>
+                      <a:srgbClr val="FFFFFF"/>
+                    </a:solidFill>
+                  </a:tcPr>
+                </a:tc>
+                <a:tc>
+                  <a:txBody>
+                    <a:bodyPr wrap="square"/>
+                    <a:lstStyle/>
+                    <a:p>
+                      <a:r>
+                        <a:rPr sz="1100" b="0">
+                          <a:solidFill>
+                            <a:srgbClr val="1A1A1A"/>
+                          </a:solidFill>
+                          <a:latin typeface="Arial"/>
+                        </a:rPr>
+                        <a:t>12.600</a:t>
+                      </a:r>
+                    </a:p>
+                  </a:txBody>
+                  <a:tcPr>
+                    <a:solidFill>
+                      <a:srgbClr val="FFFFFF"/>
+                    </a:solidFill>
+                  </a:tcPr>
+                </a:tc>
+                <a:tc>
+                  <a:txBody>
+                    <a:bodyPr wrap="square"/>
+                    <a:lstStyle/>
+                    <a:p>
+                      <a:r>
+                        <a:rPr sz="1100" b="0">
+                          <a:solidFill>
+                            <a:srgbClr val="1A1A1A"/>
+                          </a:solidFill>
+                          <a:latin typeface="Arial"/>
+                        </a:rPr>
+                        <a:t>1,58 %</a:t>
+                      </a:r>
+                    </a:p>
+                  </a:txBody>
+                  <a:tcPr>
+                    <a:solidFill>
+                      <a:srgbClr val="FFFFFF"/>
+                    </a:solidFill>
+                  </a:tcPr>
+                </a:tc>
+                <a:tc>
+                  <a:txBody>
+                    <a:bodyPr wrap="square"/>
+                    <a:lstStyle/>
+                    <a:p>
+                      <a:r>
+                        <a:rPr sz="1100" b="0">
+                          <a:solidFill>
+                            <a:srgbClr val="1A1A1A"/>
+                          </a:solidFill>
+                          <a:latin typeface="Arial"/>
+                        </a:rPr>
+                        <a:t>–</a:t>
+                      </a:r>
+                    </a:p>
+                  </a:txBody>
+                  <a:tcPr>
+                    <a:solidFill>
+                      <a:srgbClr val="FFFFFF"/>
+                    </a:solidFill>
+                  </a:tcPr>
+                </a:tc>
+              </a:tr>
+              <a:tr h="475488">
+                <a:tc>
+                  <a:txBody>
+                    <a:bodyPr wrap="square"/>
+                    <a:lstStyle/>
+                    <a:p>
+                      <a:r>
+                        <a:rPr sz="1100" b="0">
+                          <a:solidFill>
+                            <a:srgbClr val="1A1A1A"/>
+                          </a:solidFill>
+                          <a:latin typeface="Arial"/>
+                        </a:rPr>
+                        <a:t>2</a:t>
+                      </a:r>
+                    </a:p>
+                  </a:txBody>
+                  <a:tcPr>
+                    <a:solidFill>
+                      <a:srgbClr val="F4F6FA"/>
+                    </a:solidFill>
+                  </a:tcPr>
+                </a:tc>
+                <a:tc>
+                  <a:txBody>
+                    <a:bodyPr wrap="square"/>
+                    <a:lstStyle/>
+                    <a:p>
+                      <a:r>
+                        <a:rPr sz="1100" b="0">
+                          <a:solidFill>
+                            <a:srgbClr val="1A1A1A"/>
+                          </a:solidFill>
+                          <a:latin typeface="Arial"/>
+                        </a:rPr>
+                        <a:t>Wagner KG</a:t>
+                      </a:r>
+                    </a:p>
+                  </a:txBody>
+                  <a:tcPr>
+                    <a:solidFill>
+                      <a:srgbClr val="F4F6FA"/>
+                    </a:solidFill>
+                  </a:tcPr>
+                </a:tc>
+                <a:tc>
+                  <a:txBody>
+                    <a:bodyPr wrap="square"/>
+                    <a:lstStyle/>
+                    <a:p>
+                      <a:r>
+                        <a:rPr sz="1100" b="0">
+                          <a:solidFill>
+                            <a:srgbClr val="1A1A1A"/>
+                          </a:solidFill>
+                          <a:latin typeface="Arial"/>
+                        </a:rPr>
+                        <a:t>1.200.000</a:t>
+                      </a:r>
+                    </a:p>
+                  </a:txBody>
+                  <a:tcPr>
+                    <a:solidFill>
+                      <a:srgbClr val="F4F6FA"/>
+                    </a:solidFill>
+                  </a:tcPr>
+                </a:tc>
+                <a:tc>
+                  <a:txBody>
+                    <a:bodyPr wrap="square"/>
+                    <a:lstStyle/>
+                    <a:p>
+                      <a:r>
+                        <a:rPr sz="1100" b="0">
+                          <a:solidFill>
+                            <a:srgbClr val="1A1A1A"/>
+                          </a:solidFill>
+                          <a:latin typeface="Arial"/>
+                        </a:rPr>
+                        <a:t>15.200</a:t>
+                      </a:r>
+                    </a:p>
+                  </a:txBody>
+                  <a:tcPr>
+                    <a:solidFill>
+                      <a:srgbClr val="F4F6FA"/>
+                    </a:solidFill>
+                  </a:tcPr>
+                </a:tc>
+                <a:tc>
+                  <a:txBody>
+                    <a:bodyPr wrap="square"/>
+                    <a:lstStyle/>
+                    <a:p>
+                      <a:r>
+                        <a:rPr sz="1100" b="0">
+                          <a:solidFill>
+                            <a:srgbClr val="1A1A1A"/>
+                          </a:solidFill>
+                          <a:latin typeface="Arial"/>
+                        </a:rPr>
+                        <a:t>1,27 %</a:t>
+                      </a:r>
+                    </a:p>
+                  </a:txBody>
+                  <a:tcPr>
+                    <a:solidFill>
+                      <a:srgbClr val="F4F6FA"/>
+                    </a:solidFill>
+                  </a:tcPr>
+                </a:tc>
+                <a:tc>
+                  <a:txBody>
+                    <a:bodyPr wrap="square"/>
+                    <a:lstStyle/>
+                    <a:p>
+                      <a:r>
+                        <a:rPr sz="1100" b="0">
+                          <a:solidFill>
+                            <a:srgbClr val="1A1A1A"/>
+                          </a:solidFill>
+                          <a:latin typeface="Arial"/>
+                        </a:rPr>
+                        <a:t>Kein Verbund</a:t>
+                      </a:r>
+                    </a:p>
+                  </a:txBody>
+                  <a:tcPr>
+                    <a:solidFill>
+                      <a:srgbClr val="F4F6FA"/>
+                    </a:solidFill>
+                  </a:tcPr>
+                </a:tc>
+              </a:tr>
+              <a:tr h="475488">
+                <a:tc>
+                  <a:txBody>
+                    <a:bodyPr wrap="square"/>
+                    <a:lstStyle/>
+                    <a:p>
+                      <a:r>
+                        <a:rPr sz="1100" b="0">
+                          <a:solidFill>
+                            <a:srgbClr val="1A1A1A"/>
+                          </a:solidFill>
+                          <a:latin typeface="Arial"/>
+                        </a:rPr>
+                        <a:t>…</a:t>
+                      </a:r>
+                    </a:p>
+                  </a:txBody>
+                  <a:tcPr>
+                    <a:solidFill>
+                      <a:srgbClr val="FFFFFF"/>
+                    </a:solidFill>
+                  </a:tcPr>
+                </a:tc>
+                <a:tc>
+                  <a:txBody>
+                    <a:bodyPr wrap="square"/>
+                    <a:lstStyle/>
+                    <a:p>
+                      <a:r>
+                        <a:rPr sz="1100" b="0">
+                          <a:solidFill>
+                            <a:srgbClr val="1A1A1A"/>
+                          </a:solidFill>
+                          <a:latin typeface="Arial"/>
+                        </a:rPr>
+                        <a:t>…</a:t>
+                      </a:r>
+                    </a:p>
+                  </a:txBody>
+                  <a:tcPr>
+                    <a:solidFill>
+                      <a:srgbClr val="FFFFFF"/>
+                    </a:solidFill>
+                  </a:tcPr>
+                </a:tc>
+                <a:tc>
+                  <a:txBody>
+                    <a:bodyPr wrap="square"/>
+                    <a:lstStyle/>
+                    <a:p>
+                      <a:r>
+                        <a:rPr sz="1100" b="0">
+                          <a:solidFill>
+                            <a:srgbClr val="1A1A1A"/>
+                          </a:solidFill>
+                          <a:latin typeface="Arial"/>
+                        </a:rPr>
+                        <a:t>…</a:t>
+                      </a:r>
+                    </a:p>
+                  </a:txBody>
+                  <a:tcPr>
+                    <a:solidFill>
+                      <a:srgbClr val="FFFFFF"/>
+                    </a:solidFill>
+                  </a:tcPr>
+                </a:tc>
+                <a:tc>
+                  <a:txBody>
+                    <a:bodyPr wrap="square"/>
+                    <a:lstStyle/>
+                    <a:p>
+                      <a:r>
+                        <a:rPr sz="1100" b="0">
+                          <a:solidFill>
+                            <a:srgbClr val="1A1A1A"/>
+                          </a:solidFill>
+                          <a:latin typeface="Arial"/>
+                        </a:rPr>
+                        <a:t>…</a:t>
+                      </a:r>
+                    </a:p>
+                  </a:txBody>
+                  <a:tcPr>
+                    <a:solidFill>
+                      <a:srgbClr val="FFFFFF"/>
+                    </a:solidFill>
+                  </a:tcPr>
+                </a:tc>
+                <a:tc>
+                  <a:txBody>
+                    <a:bodyPr wrap="square"/>
+                    <a:lstStyle/>
+                    <a:p>
+                      <a:r>
+                        <a:rPr sz="1100" b="0">
+                          <a:solidFill>
+                            <a:srgbClr val="1A1A1A"/>
+                          </a:solidFill>
+                          <a:latin typeface="Arial"/>
+                        </a:rPr>
+                        <a:t>…</a:t>
+                      </a:r>
+                    </a:p>
+                  </a:txBody>
+                  <a:tcPr>
+                    <a:solidFill>
+                      <a:srgbClr val="FFFFFF"/>
+                    </a:solidFill>
+                  </a:tcPr>
+                </a:tc>
+                <a:tc>
+                  <a:txBody>
+                    <a:bodyPr wrap="square"/>
+                    <a:lstStyle/>
+                    <a:p>
+                      <a:r>
+                        <a:rPr sz="1100" b="0">
+                          <a:solidFill>
+                            <a:srgbClr val="1A1A1A"/>
+                          </a:solidFill>
+                          <a:latin typeface="Arial"/>
+                        </a:rPr>
+                        <a:t>…</a:t>
+                      </a:r>
+                    </a:p>
+                  </a:txBody>
+                  <a:tcPr>
+                    <a:solidFill>
+                      <a:srgbClr val="FFFFFF"/>
+                    </a:solidFill>
+                  </a:tcPr>
+                </a:tc>
+              </a:tr>
+              <a:tr h="475488">
+                <a:tc>
+                  <a:txBody>
+                    <a:bodyPr wrap="square"/>
+                    <a:lstStyle/>
+                    <a:p>
+                      <a:r>
+                        <a:rPr sz="1100" b="0">
+                          <a:solidFill>
+                            <a:srgbClr val="1A1A1A"/>
+                          </a:solidFill>
+                          <a:latin typeface="Arial"/>
+                        </a:rPr>
+                        <a:t>38</a:t>
+                      </a:r>
+                    </a:p>
+                  </a:txBody>
+                  <a:tcPr>
+                    <a:solidFill>
+                      <a:srgbClr val="F4F6FA"/>
+                    </a:solidFill>
+                  </a:tcPr>
+                </a:tc>
+                <a:tc>
+                  <a:txBody>
+                    <a:bodyPr wrap="square"/>
+                    <a:lstStyle/>
+                    <a:p>
+                      <a:r>
+                        <a:rPr sz="1100" b="0">
+                          <a:solidFill>
+                            <a:srgbClr val="1A1A1A"/>
+                          </a:solidFill>
+                          <a:latin typeface="Arial"/>
+                        </a:rPr>
+                        <a:t>Bauer &amp; Söhne</a:t>
+                      </a:r>
+                    </a:p>
+                  </a:txBody>
+                  <a:tcPr>
+                    <a:solidFill>
+                      <a:srgbClr val="F4F6FA"/>
+                    </a:solidFill>
+                  </a:tcPr>
+                </a:tc>
+                <a:tc>
+                  <a:txBody>
+                    <a:bodyPr wrap="square"/>
+                    <a:lstStyle/>
+                    <a:p>
+                      <a:r>
+                        <a:rPr sz="1100" b="0">
+                          <a:solidFill>
+                            <a:srgbClr val="1A1A1A"/>
+                          </a:solidFill>
+                          <a:latin typeface="Arial"/>
+                        </a:rPr>
+                        <a:t>1.200.000</a:t>
+                      </a:r>
+                    </a:p>
+                  </a:txBody>
+                  <a:tcPr>
+                    <a:solidFill>
+                      <a:srgbClr val="F4F6FA"/>
+                    </a:solidFill>
+                  </a:tcPr>
+                </a:tc>
+                <a:tc>
+                  <a:txBody>
+                    <a:bodyPr wrap="square"/>
+                    <a:lstStyle/>
+                    <a:p>
+                      <a:r>
+                        <a:rPr sz="1100" b="0">
+                          <a:solidFill>
+                            <a:srgbClr val="1A1A1A"/>
+                          </a:solidFill>
+                          <a:latin typeface="Arial"/>
+                        </a:rPr>
+                        <a:t>8.040</a:t>
+                      </a:r>
+                    </a:p>
+                  </a:txBody>
+                  <a:tcPr>
+                    <a:solidFill>
+                      <a:srgbClr val="F4F6FA"/>
+                    </a:solidFill>
+                  </a:tcPr>
+                </a:tc>
+                <a:tc>
+                  <a:txBody>
+                    <a:bodyPr wrap="square"/>
+                    <a:lstStyle/>
+                    <a:p>
+                      <a:r>
+                        <a:rPr sz="1100" b="0">
+                          <a:solidFill>
+                            <a:srgbClr val="1A1A1A"/>
+                          </a:solidFill>
+                          <a:latin typeface="Arial"/>
+                        </a:rPr>
+                        <a:t>0,67 %</a:t>
+                      </a:r>
+                    </a:p>
+                  </a:txBody>
+                  <a:tcPr>
+                    <a:solidFill>
+                      <a:srgbClr val="F4F6FA"/>
+                    </a:solidFill>
+                  </a:tcPr>
+                </a:tc>
+                <a:tc>
+                  <a:txBody>
+                    <a:bodyPr wrap="square"/>
+                    <a:lstStyle/>
+                    <a:p>
+                      <a:r>
+                        <a:rPr sz="1100" b="0">
+                          <a:solidFill>
+                            <a:srgbClr val="1A1A1A"/>
+                          </a:solidFill>
+                          <a:latin typeface="Arial"/>
+                        </a:rPr>
+                        <a:t>Niedrige Marge, kein Verbund</a:t>
+                      </a:r>
+                    </a:p>
+                  </a:txBody>
+                  <a:tcPr>
+                    <a:solidFill>
+                      <a:srgbClr val="F4F6FA"/>
+                    </a:solidFill>
+                  </a:tcPr>
+                </a:tc>
+              </a:tr>
+              <a:tr h="475488">
+                <a:tc>
+                  <a:txBody>
+                    <a:bodyPr wrap="square"/>
+                    <a:lstStyle/>
+                    <a:p>
+                      <a:r>
+                        <a:rPr sz="1100" b="0">
+                          <a:solidFill>
+                            <a:srgbClr val="1A1A1A"/>
+                          </a:solidFill>
+                          <a:latin typeface="Arial"/>
+                        </a:rPr>
+                        <a:t>44</a:t>
+                      </a:r>
+                    </a:p>
+                  </a:txBody>
+                  <a:tcPr>
+                    <a:solidFill>
+                      <a:srgbClr val="FFFFFF"/>
+                    </a:solidFill>
+                  </a:tcPr>
+                </a:tc>
+                <a:tc>
+                  <a:txBody>
+                    <a:bodyPr wrap="square"/>
+                    <a:lstStyle/>
+                    <a:p>
+                      <a:r>
+                        <a:rPr sz="1100" b="0">
+                          <a:solidFill>
+                            <a:srgbClr val="1A1A1A"/>
+                          </a:solidFill>
+                          <a:latin typeface="Arial"/>
+                        </a:rPr>
+                        <a:t>Huber Bau GmbH</a:t>
+                      </a:r>
+                    </a:p>
+                  </a:txBody>
+                  <a:tcPr>
+                    <a:solidFill>
+                      <a:srgbClr val="FFFFFF"/>
+                    </a:solidFill>
+                  </a:tcPr>
+                </a:tc>
+                <a:tc>
+                  <a:txBody>
+                    <a:bodyPr wrap="square"/>
+                    <a:lstStyle/>
+                    <a:p>
+                      <a:r>
+                        <a:rPr sz="1100" b="0">
+                          <a:solidFill>
+                            <a:srgbClr val="1A1A1A"/>
+                          </a:solidFill>
+                          <a:latin typeface="Arial"/>
+                        </a:rPr>
+                        <a:t>900.000</a:t>
+                      </a:r>
+                    </a:p>
+                  </a:txBody>
+                  <a:tcPr>
+                    <a:solidFill>
+                      <a:srgbClr val="FFFFFF"/>
+                    </a:solidFill>
+                  </a:tcPr>
+                </a:tc>
+                <a:tc>
+                  <a:txBody>
+                    <a:bodyPr wrap="square"/>
+                    <a:lstStyle/>
+                    <a:p>
+                      <a:r>
+                        <a:rPr sz="1100" b="0">
+                          <a:solidFill>
+                            <a:srgbClr val="1A1A1A"/>
+                          </a:solidFill>
+                          <a:latin typeface="Arial"/>
+                        </a:rPr>
+                        <a:t>2.700</a:t>
+                      </a:r>
+                    </a:p>
+                  </a:txBody>
+                  <a:tcPr>
+                    <a:solidFill>
+                      <a:srgbClr val="FFFFFF"/>
+                    </a:solidFill>
+                  </a:tcPr>
+                </a:tc>
+                <a:tc>
+                  <a:txBody>
+                    <a:bodyPr wrap="square"/>
+                    <a:lstStyle/>
+                    <a:p>
+                      <a:r>
+                        <a:rPr sz="1100" b="0">
+                          <a:solidFill>
+                            <a:srgbClr val="1A1A1A"/>
+                          </a:solidFill>
+                          <a:latin typeface="Arial"/>
+                        </a:rPr>
+                        <a:t>0,30 %</a:t>
+                      </a:r>
+                    </a:p>
+                  </a:txBody>
+                  <a:tcPr>
+                    <a:solidFill>
+                      <a:srgbClr val="FFFFFF"/>
+                    </a:solidFill>
+                  </a:tcPr>
+                </a:tc>
+                <a:tc>
+                  <a:txBody>
+                    <a:bodyPr wrap="square"/>
+                    <a:lstStyle/>
+                    <a:p>
+                      <a:r>
+                        <a:rPr sz="1100" b="0">
+                          <a:solidFill>
+                            <a:srgbClr val="1A1A1A"/>
+                          </a:solidFill>
+                          <a:latin typeface="Arial"/>
+                        </a:rPr>
+                        <a:t>Rating C, Marge zu niedrig</a:t>
+                      </a:r>
+                    </a:p>
+                  </a:txBody>
+                  <a:tcPr>
+                    <a:solidFill>
+                      <a:srgbClr val="FFFFFF"/>
+                    </a:solidFill>
+                  </a:tcPr>
+                </a:tc>
+              </a:tr>
+              <a:tr h="475488">
+                <a:tc>
+                  <a:txBody>
+                    <a:bodyPr wrap="square"/>
+                    <a:lstStyle/>
+                    <a:p>
+                      <a:r>
+                        <a:rPr sz="1100" b="0">
+                          <a:solidFill>
+                            <a:srgbClr val="1A1A1A"/>
+                          </a:solidFill>
+                          <a:latin typeface="Arial"/>
+                        </a:rPr>
+                        <a:t>45</a:t>
+                      </a:r>
+                    </a:p>
+                  </a:txBody>
+                  <a:tcPr>
+                    <a:solidFill>
+                      <a:srgbClr val="F4F6FA"/>
+                    </a:solidFill>
+                  </a:tcPr>
+                </a:tc>
+                <a:tc>
+                  <a:txBody>
+                    <a:bodyPr wrap="square"/>
+                    <a:lstStyle/>
+                    <a:p>
+                      <a:r>
+                        <a:rPr sz="1100" b="0">
+                          <a:solidFill>
+                            <a:srgbClr val="1A1A1A"/>
+                          </a:solidFill>
+                          <a:latin typeface="Arial"/>
+                        </a:rPr>
+                        <a:t>Fischer Transport</a:t>
+                      </a:r>
+                    </a:p>
+                  </a:txBody>
+                  <a:tcPr>
+                    <a:solidFill>
+                      <a:srgbClr val="F4F6FA"/>
+                    </a:solidFill>
+                  </a:tcPr>
+                </a:tc>
+                <a:tc>
+                  <a:txBody>
+                    <a:bodyPr wrap="square"/>
+                    <a:lstStyle/>
+                    <a:p>
+                      <a:r>
+                        <a:rPr sz="1100" b="0">
+                          <a:solidFill>
+                            <a:srgbClr val="1A1A1A"/>
+                          </a:solidFill>
+                          <a:latin typeface="Arial"/>
+                        </a:rPr>
+                        <a:t>600.000</a:t>
+                      </a:r>
+                    </a:p>
+                  </a:txBody>
+                  <a:tcPr>
+                    <a:solidFill>
+                      <a:srgbClr val="F4F6FA"/>
+                    </a:solidFill>
+                  </a:tcPr>
+                </a:tc>
+                <a:tc>
+                  <a:txBody>
+                    <a:bodyPr wrap="square"/>
+                    <a:lstStyle/>
+                    <a:p>
+                      <a:r>
+                        <a:rPr sz="1100" b="0">
+                          <a:solidFill>
+                            <a:srgbClr val="1A1A1A"/>
+                          </a:solidFill>
+                          <a:latin typeface="Arial"/>
+                        </a:rPr>
+                        <a:t>−1.800</a:t>
+                      </a:r>
+                    </a:p>
+                  </a:txBody>
+                  <a:tcPr>
+                    <a:solidFill>
+                      <a:srgbClr val="F4F6FA"/>
+                    </a:solidFill>
+                  </a:tcPr>
+                </a:tc>
+                <a:tc>
+                  <a:txBody>
+                    <a:bodyPr wrap="square"/>
+                    <a:lstStyle/>
+                    <a:p>
+                      <a:r>
+                        <a:rPr sz="1100" b="0">
+                          <a:solidFill>
+                            <a:srgbClr val="1A1A1A"/>
+                          </a:solidFill>
+                          <a:latin typeface="Arial"/>
+                        </a:rPr>
+                        <a:t>−0,30 %</a:t>
+                      </a:r>
+                    </a:p>
+                  </a:txBody>
+                  <a:tcPr>
+                    <a:solidFill>
+                      <a:srgbClr val="F4F6FA"/>
+                    </a:solidFill>
+                  </a:tcPr>
+                </a:tc>
+                <a:tc>
+                  <a:txBody>
+                    <a:bodyPr wrap="square"/>
+                    <a:lstStyle/>
+                    <a:p>
+                      <a:r>
+                        <a:rPr sz="1100" b="0">
+                          <a:solidFill>
+                            <a:srgbClr val="1A1A1A"/>
+                          </a:solidFill>
+                          <a:latin typeface="Arial"/>
+                        </a:rPr>
+                        <a:t>Negativer DB</a:t>
+                      </a:r>
+                    </a:p>
+                  </a:txBody>
+                  <a:tcPr>
+                    <a:solidFill>
+                      <a:srgbClr val="F4F6FA"/>
+                    </a:solidFill>
+                  </a:tcPr>
+                </a:tc>
+              </a:tr>
+            </a:tbl>
+          </a:graphicData>
+        </a:graphic>
+      </p:graphicFrame>
+    </p:spTree>
+  </p:cSld>
+  <p:clrMapOvr>
+    <a:masterClrMapping/>
+  </p:clrMapOvr>
+</p:sld>
+</file>
+
+<file path=ppt/slides/slide11.xml><?xml version="1.0" encoding="utf-8"?>
 <p:sld xmlns:a="http://schemas.openxmlformats.org/drawingml/2006/main" xmlns:p="http://schemas.openxmlformats.org/presentationml/2006/main" xmlns:r="http://schemas.openxmlformats.org/officeDocument/2006/relationships">
   <p:cSld>
     <p:bg>
@@ -3412,8 +4569,8 @@
         </p:nvSpPr>
         <p:spPr>
           <a:xfrm>
-            <a:off x="365760" y="2286000"/>
-            <a:ext cx="11430000" cy="1828800"/>
+            <a:off x="365760" y="2011680"/>
+            <a:ext cx="11430000" cy="2011680"/>
           </a:xfrm>
           <a:prstGeom prst="rect">
             <a:avLst/>
@@ -3428,13 +4585,13 @@
           <a:p>
             <a:pPr algn="l"/>
             <a:r>
-              <a:rPr sz="3600" b="1">
+              <a:rPr sz="3600" b="1" i="0">
                 <a:solidFill>
                   <a:srgbClr val="FFFFFF"/>
                 </a:solidFill>
                 <a:latin typeface="Arial"/>
               </a:rPr>
-              <a:t>Arbeitsblatt A: Mein NMZ-Bestandsbild</a:t>
+              <a:t>Schritt 1: Identifizieren (monatlich, 30 Minuten)</a:t>
             </a:r>
           </a:p>
         </p:txBody>
@@ -3447,7 +4604,262 @@
 </p:sld>
 </file>
 
-<file path=ppt/slides/slide11.xml><?xml version="1.0" encoding="utf-8"?>
+<file path=ppt/slides/slide12.xml><?xml version="1.0" encoding="utf-8"?>
+<p:sld xmlns:a="http://schemas.openxmlformats.org/drawingml/2006/main" xmlns:p="http://schemas.openxmlformats.org/presentationml/2006/main" xmlns:r="http://schemas.openxmlformats.org/officeDocument/2006/relationships">
+  <p:cSld>
+    <p:bg>
+      <p:bgPr>
+        <a:solidFill>
+          <a:srgbClr val="FFFFFF"/>
+        </a:solidFill>
+        <a:effectLst/>
+      </p:bgPr>
+    </p:bg>
+    <p:spTree>
+      <p:nvGrpSpPr>
+        <p:cNvPr id="1" name=""/>
+        <p:cNvGrpSpPr/>
+        <p:nvPr/>
+      </p:nvGrpSpPr>
+      <p:grpSpPr/>
+      <p:sp>
+        <p:nvSpPr>
+          <p:cNvPr id="2" name="Rectangle 1"/>
+          <p:cNvSpPr/>
+          <p:nvPr/>
+        </p:nvSpPr>
+        <p:spPr>
+          <a:xfrm>
+            <a:off x="0" y="0"/>
+            <a:ext cx="73152" cy="6858000"/>
+          </a:xfrm>
+          <a:prstGeom prst="rect">
+            <a:avLst/>
+          </a:prstGeom>
+          <a:solidFill>
+            <a:srgbClr val="003DA5"/>
+          </a:solidFill>
+          <a:ln>
+            <a:noFill/>
+          </a:ln>
+        </p:spPr>
+        <p:style>
+          <a:lnRef idx="1">
+            <a:schemeClr val="accent1"/>
+          </a:lnRef>
+          <a:fillRef idx="3">
+            <a:schemeClr val="accent1"/>
+          </a:fillRef>
+          <a:effectRef idx="2">
+            <a:schemeClr val="accent1"/>
+          </a:effectRef>
+          <a:fontRef idx="minor">
+            <a:schemeClr val="lt1"/>
+          </a:fontRef>
+        </p:style>
+        <p:txBody>
+          <a:bodyPr rtlCol="0" anchor="ctr"/>
+          <a:lstStyle/>
+          <a:p>
+            <a:pPr algn="ctr"/>
+          </a:p>
+        </p:txBody>
+      </p:sp>
+      <p:sp>
+        <p:nvSpPr>
+          <p:cNvPr id="3" name="TextBox 2"/>
+          <p:cNvSpPr txBox="1"/>
+          <p:nvPr/>
+        </p:nvSpPr>
+        <p:spPr>
+          <a:xfrm>
+            <a:off x="228600" y="182880"/>
+            <a:ext cx="11430000" cy="320040"/>
+          </a:xfrm>
+          <a:prstGeom prst="rect">
+            <a:avLst/>
+          </a:prstGeom>
+          <a:noFill/>
+        </p:spPr>
+        <p:txBody>
+          <a:bodyPr wrap="square">
+            <a:spAutoFit/>
+          </a:bodyPr>
+          <a:lstStyle/>
+          <a:p>
+            <a:pPr algn="l"/>
+            <a:r>
+              <a:rPr sz="900" b="0" i="0">
+                <a:solidFill>
+                  <a:srgbClr val="556575"/>
+                </a:solidFill>
+                <a:latin typeface="Arial"/>
+              </a:rPr>
+              <a:t>M16 · 4.4 Der NMZ-Optimierungsprozess: 3 Schritte</a:t>
+            </a:r>
+          </a:p>
+        </p:txBody>
+      </p:sp>
+      <p:sp>
+        <p:nvSpPr>
+          <p:cNvPr id="4" name="TextBox 3"/>
+          <p:cNvSpPr txBox="1"/>
+          <p:nvPr/>
+        </p:nvSpPr>
+        <p:spPr>
+          <a:xfrm>
+            <a:off x="365760" y="274320"/>
+            <a:ext cx="11430000" cy="777240"/>
+          </a:xfrm>
+          <a:prstGeom prst="rect">
+            <a:avLst/>
+          </a:prstGeom>
+          <a:noFill/>
+        </p:spPr>
+        <p:txBody>
+          <a:bodyPr wrap="square">
+            <a:spAutoFit/>
+          </a:bodyPr>
+          <a:lstStyle/>
+          <a:p>
+            <a:pPr algn="l"/>
+            <a:r>
+              <a:rPr sz="2200" b="1" i="0">
+                <a:solidFill>
+                  <a:srgbClr val="003DA5"/>
+                </a:solidFill>
+                <a:latin typeface="Arial"/>
+              </a:rPr>
+              <a:t>Schritt 1: Identifizieren (monatlich, 30 Minuten)</a:t>
+            </a:r>
+          </a:p>
+        </p:txBody>
+      </p:sp>
+      <p:sp>
+        <p:nvSpPr>
+          <p:cNvPr id="5" name="Rectangle 4"/>
+          <p:cNvSpPr/>
+          <p:nvPr/>
+        </p:nvSpPr>
+        <p:spPr>
+          <a:xfrm>
+            <a:off x="365760" y="1005840"/>
+            <a:ext cx="11430000" cy="27432"/>
+          </a:xfrm>
+          <a:prstGeom prst="rect">
+            <a:avLst/>
+          </a:prstGeom>
+          <a:solidFill>
+            <a:srgbClr val="D1D5DB"/>
+          </a:solidFill>
+          <a:ln>
+            <a:noFill/>
+          </a:ln>
+        </p:spPr>
+        <p:style>
+          <a:lnRef idx="1">
+            <a:schemeClr val="accent1"/>
+          </a:lnRef>
+          <a:fillRef idx="3">
+            <a:schemeClr val="accent1"/>
+          </a:fillRef>
+          <a:effectRef idx="2">
+            <a:schemeClr val="accent1"/>
+          </a:effectRef>
+          <a:fontRef idx="minor">
+            <a:schemeClr val="lt1"/>
+          </a:fontRef>
+        </p:style>
+        <p:txBody>
+          <a:bodyPr rtlCol="0" anchor="ctr"/>
+          <a:lstStyle/>
+          <a:p>
+            <a:pPr algn="ctr"/>
+          </a:p>
+        </p:txBody>
+      </p:sp>
+      <p:sp>
+        <p:nvSpPr>
+          <p:cNvPr id="6" name="TextBox 5"/>
+          <p:cNvSpPr txBox="1"/>
+          <p:nvPr/>
+        </p:nvSpPr>
+        <p:spPr>
+          <a:xfrm>
+            <a:off x="365760" y="1143000"/>
+            <a:ext cx="11430000" cy="5212080"/>
+          </a:xfrm>
+          <a:prstGeom prst="rect">
+            <a:avLst/>
+          </a:prstGeom>
+          <a:noFill/>
+        </p:spPr>
+        <p:txBody>
+          <a:bodyPr wrap="square">
+            <a:spAutoFit/>
+          </a:bodyPr>
+          <a:lstStyle/>
+          <a:p>
+            <a:pPr>
+              <a:spcBef>
+                <a:spcPts val="500"/>
+              </a:spcBef>
+            </a:pPr>
+            <a:r>
+              <a:rPr sz="1500">
+                <a:solidFill>
+                  <a:srgbClr val="003DA5"/>
+                </a:solidFill>
+                <a:latin typeface="Arial"/>
+              </a:rPr>
+              <a:t>▪  </a:t>
+            </a:r>
+            <a:r>
+              <a:rPr sz="1700">
+                <a:solidFill>
+                  <a:srgbClr val="1A1A1A"/>
+                </a:solidFill>
+                <a:latin typeface="Arial"/>
+              </a:rPr>
+              <a:t>Einmal im Monat: agree-NMZ-Ranking aufrufen. Die fünf Kunden mit der niedrigsten NMZ markieren. Für jeden prüfen: Was ist die Hauptursache? (Marge? Kein…</a:t>
+            </a:r>
+          </a:p>
+          <a:p>
+            <a:pPr>
+              <a:spcBef>
+                <a:spcPts val="500"/>
+              </a:spcBef>
+            </a:pPr>
+            <a:r>
+              <a:rPr sz="1500">
+                <a:solidFill>
+                  <a:srgbClr val="003DA5"/>
+                </a:solidFill>
+                <a:latin typeface="Arial"/>
+              </a:rPr>
+              <a:t>▪  </a:t>
+            </a:r>
+            <a:r>
+              <a:rPr sz="1700">
+                <a:solidFill>
+                  <a:srgbClr val="1A1A1A"/>
+                </a:solidFill>
+                <a:latin typeface="Arial"/>
+              </a:rPr>
+              <a:t>&gt; Praxistipp – Datenaktualität: Die NMZ in agree ist kein Echtzeit-Wert. In den meisten VR-Banken wird sie monatlich oder quartalsweise aktualisiert –…</a:t>
+            </a:r>
+          </a:p>
+        </p:txBody>
+      </p:sp>
+    </p:spTree>
+  </p:cSld>
+  <p:clrMapOvr>
+    <a:masterClrMapping/>
+  </p:clrMapOvr>
+</p:sld>
+</file>
+
+<file path=ppt/slides/slide13.xml><?xml version="1.0" encoding="utf-8"?>
 <p:sld xmlns:a="http://schemas.openxmlformats.org/drawingml/2006/main" xmlns:p="http://schemas.openxmlformats.org/presentationml/2006/main" xmlns:r="http://schemas.openxmlformats.org/officeDocument/2006/relationships">
   <p:cSld>
     <p:bg>
@@ -3516,8 +4928,8 @@
         </p:nvSpPr>
         <p:spPr>
           <a:xfrm>
-            <a:off x="365760" y="2286000"/>
-            <a:ext cx="11430000" cy="1828800"/>
+            <a:off x="365760" y="2011680"/>
+            <a:ext cx="11430000" cy="2011680"/>
           </a:xfrm>
           <a:prstGeom prst="rect">
             <a:avLst/>
@@ -3532,13 +4944,13 @@
           <a:p>
             <a:pPr algn="l"/>
             <a:r>
-              <a:rPr sz="3600" b="1">
+              <a:rPr sz="3600" b="1" i="0">
                 <a:solidFill>
                   <a:srgbClr val="FFFFFF"/>
                 </a:solidFill>
                 <a:latin typeface="Arial"/>
               </a:rPr>
-              <a:t>Arbeitsblatt B: Maßnahmenplan</a:t>
+              <a:t>Schritt 2: Priorisieren</a:t>
             </a:r>
           </a:p>
         </p:txBody>
@@ -3551,7 +4963,420 @@
 </p:sld>
 </file>
 
-<file path=ppt/slides/slide12.xml><?xml version="1.0" encoding="utf-8"?>
+<file path=ppt/slides/slide14.xml><?xml version="1.0" encoding="utf-8"?>
+<p:sld xmlns:a="http://schemas.openxmlformats.org/drawingml/2006/main" xmlns:p="http://schemas.openxmlformats.org/presentationml/2006/main" xmlns:r="http://schemas.openxmlformats.org/officeDocument/2006/relationships">
+  <p:cSld>
+    <p:bg>
+      <p:bgPr>
+        <a:solidFill>
+          <a:srgbClr val="FFFFFF"/>
+        </a:solidFill>
+        <a:effectLst/>
+      </p:bgPr>
+    </p:bg>
+    <p:spTree>
+      <p:nvGrpSpPr>
+        <p:cNvPr id="1" name=""/>
+        <p:cNvGrpSpPr/>
+        <p:nvPr/>
+      </p:nvGrpSpPr>
+      <p:grpSpPr/>
+      <p:sp>
+        <p:nvSpPr>
+          <p:cNvPr id="2" name="Rectangle 1"/>
+          <p:cNvSpPr/>
+          <p:nvPr/>
+        </p:nvSpPr>
+        <p:spPr>
+          <a:xfrm>
+            <a:off x="0" y="0"/>
+            <a:ext cx="73152" cy="6858000"/>
+          </a:xfrm>
+          <a:prstGeom prst="rect">
+            <a:avLst/>
+          </a:prstGeom>
+          <a:solidFill>
+            <a:srgbClr val="003DA5"/>
+          </a:solidFill>
+          <a:ln>
+            <a:noFill/>
+          </a:ln>
+        </p:spPr>
+        <p:style>
+          <a:lnRef idx="1">
+            <a:schemeClr val="accent1"/>
+          </a:lnRef>
+          <a:fillRef idx="3">
+            <a:schemeClr val="accent1"/>
+          </a:fillRef>
+          <a:effectRef idx="2">
+            <a:schemeClr val="accent1"/>
+          </a:effectRef>
+          <a:fontRef idx="minor">
+            <a:schemeClr val="lt1"/>
+          </a:fontRef>
+        </p:style>
+        <p:txBody>
+          <a:bodyPr rtlCol="0" anchor="ctr"/>
+          <a:lstStyle/>
+          <a:p>
+            <a:pPr algn="ctr"/>
+          </a:p>
+        </p:txBody>
+      </p:sp>
+      <p:sp>
+        <p:nvSpPr>
+          <p:cNvPr id="3" name="TextBox 2"/>
+          <p:cNvSpPr txBox="1"/>
+          <p:nvPr/>
+        </p:nvSpPr>
+        <p:spPr>
+          <a:xfrm>
+            <a:off x="228600" y="182880"/>
+            <a:ext cx="11430000" cy="320040"/>
+          </a:xfrm>
+          <a:prstGeom prst="rect">
+            <a:avLst/>
+          </a:prstGeom>
+          <a:noFill/>
+        </p:spPr>
+        <p:txBody>
+          <a:bodyPr wrap="square">
+            <a:spAutoFit/>
+          </a:bodyPr>
+          <a:lstStyle/>
+          <a:p>
+            <a:pPr algn="l"/>
+            <a:r>
+              <a:rPr sz="900" b="0" i="0">
+                <a:solidFill>
+                  <a:srgbClr val="556575"/>
+                </a:solidFill>
+                <a:latin typeface="Arial"/>
+              </a:rPr>
+              <a:t>M16 · 4.4 Der NMZ-Optimierungsprozess: 3 Schritte</a:t>
+            </a:r>
+          </a:p>
+        </p:txBody>
+      </p:sp>
+      <p:sp>
+        <p:nvSpPr>
+          <p:cNvPr id="4" name="TextBox 3"/>
+          <p:cNvSpPr txBox="1"/>
+          <p:nvPr/>
+        </p:nvSpPr>
+        <p:spPr>
+          <a:xfrm>
+            <a:off x="365760" y="274320"/>
+            <a:ext cx="11430000" cy="777240"/>
+          </a:xfrm>
+          <a:prstGeom prst="rect">
+            <a:avLst/>
+          </a:prstGeom>
+          <a:noFill/>
+        </p:spPr>
+        <p:txBody>
+          <a:bodyPr wrap="square">
+            <a:spAutoFit/>
+          </a:bodyPr>
+          <a:lstStyle/>
+          <a:p>
+            <a:pPr algn="l"/>
+            <a:r>
+              <a:rPr sz="2200" b="1" i="0">
+                <a:solidFill>
+                  <a:srgbClr val="003DA5"/>
+                </a:solidFill>
+                <a:latin typeface="Arial"/>
+              </a:rPr>
+              <a:t>Schritt 2: Priorisieren</a:t>
+            </a:r>
+          </a:p>
+        </p:txBody>
+      </p:sp>
+      <p:sp>
+        <p:nvSpPr>
+          <p:cNvPr id="5" name="Rectangle 4"/>
+          <p:cNvSpPr/>
+          <p:nvPr/>
+        </p:nvSpPr>
+        <p:spPr>
+          <a:xfrm>
+            <a:off x="365760" y="1005840"/>
+            <a:ext cx="11430000" cy="27432"/>
+          </a:xfrm>
+          <a:prstGeom prst="rect">
+            <a:avLst/>
+          </a:prstGeom>
+          <a:solidFill>
+            <a:srgbClr val="D1D5DB"/>
+          </a:solidFill>
+          <a:ln>
+            <a:noFill/>
+          </a:ln>
+        </p:spPr>
+        <p:style>
+          <a:lnRef idx="1">
+            <a:schemeClr val="accent1"/>
+          </a:lnRef>
+          <a:fillRef idx="3">
+            <a:schemeClr val="accent1"/>
+          </a:fillRef>
+          <a:effectRef idx="2">
+            <a:schemeClr val="accent1"/>
+          </a:effectRef>
+          <a:fontRef idx="minor">
+            <a:schemeClr val="lt1"/>
+          </a:fontRef>
+        </p:style>
+        <p:txBody>
+          <a:bodyPr rtlCol="0" anchor="ctr"/>
+          <a:lstStyle/>
+          <a:p>
+            <a:pPr algn="ctr"/>
+          </a:p>
+        </p:txBody>
+      </p:sp>
+      <p:graphicFrame>
+        <p:nvGraphicFramePr>
+          <p:cNvPr id="6" name="Table 5"/>
+          <p:cNvGraphicFramePr>
+            <a:graphicFrameLocks noGrp="1"/>
+          </p:cNvGraphicFramePr>
+          <p:nvPr/>
+        </p:nvGraphicFramePr>
+        <p:xfrm>
+          <a:off x="365760" y="1143000"/>
+          <a:ext cx="11430000" cy="1426464"/>
+        </p:xfrm>
+        <a:graphic>
+          <a:graphicData uri="http://schemas.openxmlformats.org/drawingml/2006/table">
+            <a:tbl>
+              <a:tblPr firstRow="1" bandRow="1">
+                <a:tableStyleId>{5C22544A-7EE6-4342-B048-85BDC9FD1C3A}</a:tableStyleId>
+              </a:tblPr>
+              <a:tblGrid>
+                <a:gridCol w="3810000"/>
+                <a:gridCol w="3810000"/>
+                <a:gridCol w="3810000"/>
+              </a:tblGrid>
+              <a:tr h="475488">
+                <a:tc>
+                  <a:txBody>
+                    <a:bodyPr wrap="square"/>
+                    <a:lstStyle/>
+                    <a:p>
+                      <a:r>
+                        <a:rPr sz="1100" b="1">
+                          <a:solidFill>
+                            <a:srgbClr val="FFFFFF"/>
+                          </a:solidFill>
+                          <a:latin typeface="Arial"/>
+                        </a:rPr>
+                        <a:t/>
+                      </a:r>
+                    </a:p>
+                  </a:txBody>
+                  <a:tcPr>
+                    <a:solidFill>
+                      <a:srgbClr val="003DA5"/>
+                    </a:solidFill>
+                  </a:tcPr>
+                </a:tc>
+                <a:tc>
+                  <a:txBody>
+                    <a:bodyPr wrap="square"/>
+                    <a:lstStyle/>
+                    <a:p>
+                      <a:r>
+                        <a:rPr sz="1100" b="1">
+                          <a:solidFill>
+                            <a:srgbClr val="FFFFFF"/>
+                          </a:solidFill>
+                          <a:latin typeface="Arial"/>
+                        </a:rPr>
+                        <a:t>Schnell umsetzbar</a:t>
+                      </a:r>
+                    </a:p>
+                  </a:txBody>
+                  <a:tcPr>
+                    <a:solidFill>
+                      <a:srgbClr val="003DA5"/>
+                    </a:solidFill>
+                  </a:tcPr>
+                </a:tc>
+                <a:tc>
+                  <a:txBody>
+                    <a:bodyPr wrap="square"/>
+                    <a:lstStyle/>
+                    <a:p>
+                      <a:r>
+                        <a:rPr sz="1100" b="1">
+                          <a:solidFill>
+                            <a:srgbClr val="FFFFFF"/>
+                          </a:solidFill>
+                          <a:latin typeface="Arial"/>
+                        </a:rPr>
+                        <a:t>Langfristig</a:t>
+                      </a:r>
+                    </a:p>
+                  </a:txBody>
+                  <a:tcPr>
+                    <a:solidFill>
+                      <a:srgbClr val="003DA5"/>
+                    </a:solidFill>
+                  </a:tcPr>
+                </a:tc>
+              </a:tr>
+              <a:tr h="475488">
+                <a:tc>
+                  <a:txBody>
+                    <a:bodyPr wrap="square"/>
+                    <a:lstStyle/>
+                    <a:p>
+                      <a:r>
+                        <a:rPr sz="1100" b="0">
+                          <a:solidFill>
+                            <a:srgbClr val="1A1A1A"/>
+                          </a:solidFill>
+                          <a:latin typeface="Arial"/>
+                        </a:rPr>
+                        <a:t>Hohes Verbesserungspotenzial</a:t>
+                      </a:r>
+                    </a:p>
+                  </a:txBody>
+                  <a:tcPr>
+                    <a:solidFill>
+                      <a:srgbClr val="FFFFFF"/>
+                    </a:solidFill>
+                  </a:tcPr>
+                </a:tc>
+                <a:tc>
+                  <a:txBody>
+                    <a:bodyPr wrap="square"/>
+                    <a:lstStyle/>
+                    <a:p>
+                      <a:r>
+                        <a:rPr sz="1100" b="0">
+                          <a:solidFill>
+                            <a:srgbClr val="1A1A1A"/>
+                          </a:solidFill>
+                          <a:latin typeface="Arial"/>
+                        </a:rPr>
+                        <a:t>Sofort angehen (Prio 1)</a:t>
+                      </a:r>
+                    </a:p>
+                  </a:txBody>
+                  <a:tcPr>
+                    <a:solidFill>
+                      <a:srgbClr val="FFFFFF"/>
+                    </a:solidFill>
+                  </a:tcPr>
+                </a:tc>
+                <a:tc>
+                  <a:txBody>
+                    <a:bodyPr wrap="square"/>
+                    <a:lstStyle/>
+                    <a:p>
+                      <a:r>
+                        <a:rPr sz="1100" b="0">
+                          <a:solidFill>
+                            <a:srgbClr val="1A1A1A"/>
+                          </a:solidFill>
+                          <a:latin typeface="Arial"/>
+                        </a:rPr>
+                        <a:t>Mittelfristig planen (Prio 2)</a:t>
+                      </a:r>
+                    </a:p>
+                  </a:txBody>
+                  <a:tcPr>
+                    <a:solidFill>
+                      <a:srgbClr val="FFFFFF"/>
+                    </a:solidFill>
+                  </a:tcPr>
+                </a:tc>
+              </a:tr>
+              <a:tr h="475488">
+                <a:tc>
+                  <a:txBody>
+                    <a:bodyPr wrap="square"/>
+                    <a:lstStyle/>
+                    <a:p>
+                      <a:r>
+                        <a:rPr sz="1100" b="0">
+                          <a:solidFill>
+                            <a:srgbClr val="1A1A1A"/>
+                          </a:solidFill>
+                          <a:latin typeface="Arial"/>
+                        </a:rPr>
+                        <a:t>Niedriges Verbesserungspotenzial</a:t>
+                      </a:r>
+                    </a:p>
+                  </a:txBody>
+                  <a:tcPr>
+                    <a:solidFill>
+                      <a:srgbClr val="F4F6FA"/>
+                    </a:solidFill>
+                  </a:tcPr>
+                </a:tc>
+                <a:tc>
+                  <a:txBody>
+                    <a:bodyPr wrap="square"/>
+                    <a:lstStyle/>
+                    <a:p>
+                      <a:r>
+                        <a:rPr sz="1100" b="0">
+                          <a:solidFill>
+                            <a:srgbClr val="1A1A1A"/>
+                          </a:solidFill>
+                          <a:latin typeface="Arial"/>
+                        </a:rPr>
+                        <a:t>Opportunistisch (Prio 3)</a:t>
+                      </a:r>
+                    </a:p>
+                  </a:txBody>
+                  <a:tcPr>
+                    <a:solidFill>
+                      <a:srgbClr val="F4F6FA"/>
+                    </a:solidFill>
+                  </a:tcPr>
+                </a:tc>
+                <a:tc>
+                  <a:txBody>
+                    <a:bodyPr wrap="square"/>
+                    <a:lstStyle/>
+                    <a:p>
+                      <a:r>
+                        <a:rPr sz="1100" b="0">
+                          <a:solidFill>
+                            <a:srgbClr val="1A1A1A"/>
+                          </a:solidFill>
+                          <a:latin typeface="Arial"/>
+                        </a:rPr>
+                        <a:t>Deprioritisieren (Prio 4)</a:t>
+                      </a:r>
+                    </a:p>
+                  </a:txBody>
+                  <a:tcPr>
+                    <a:solidFill>
+                      <a:srgbClr val="F4F6FA"/>
+                    </a:solidFill>
+                  </a:tcPr>
+                </a:tc>
+              </a:tr>
+            </a:tbl>
+          </a:graphicData>
+        </a:graphic>
+      </p:graphicFrame>
+    </p:spTree>
+  </p:cSld>
+  <p:clrMapOvr>
+    <a:masterClrMapping/>
+  </p:clrMapOvr>
+</p:sld>
+</file>
+
+<file path=ppt/slides/slide15.xml><?xml version="1.0" encoding="utf-8"?>
 <p:sld xmlns:a="http://schemas.openxmlformats.org/drawingml/2006/main" xmlns:p="http://schemas.openxmlformats.org/presentationml/2006/main" xmlns:r="http://schemas.openxmlformats.org/officeDocument/2006/relationships">
   <p:cSld>
     <p:bg>
@@ -3620,8 +5445,8 @@
         </p:nvSpPr>
         <p:spPr>
           <a:xfrm>
-            <a:off x="365760" y="2286000"/>
-            <a:ext cx="11430000" cy="1828800"/>
+            <a:off x="365760" y="2011680"/>
+            <a:ext cx="11430000" cy="2011680"/>
           </a:xfrm>
           <a:prstGeom prst="rect">
             <a:avLst/>
@@ -3636,13 +5461,13 @@
           <a:p>
             <a:pPr algn="l"/>
             <a:r>
-              <a:rPr sz="3600" b="1">
+              <a:rPr sz="3600" b="1" i="0">
                 <a:solidFill>
                   <a:srgbClr val="FFFFFF"/>
                 </a:solidFill>
                 <a:latin typeface="Arial"/>
               </a:rPr>
-              <a:t>Fachlich</a:t>
+              <a:t>Schritt 3: Handeln und dokumentieren</a:t>
             </a:r>
           </a:p>
         </p:txBody>
@@ -3655,7 +5480,518 @@
 </p:sld>
 </file>
 
-<file path=ppt/slides/slide13.xml><?xml version="1.0" encoding="utf-8"?>
+<file path=ppt/slides/slide16.xml><?xml version="1.0" encoding="utf-8"?>
+<p:sld xmlns:a="http://schemas.openxmlformats.org/drawingml/2006/main" xmlns:p="http://schemas.openxmlformats.org/presentationml/2006/main" xmlns:r="http://schemas.openxmlformats.org/officeDocument/2006/relationships">
+  <p:cSld>
+    <p:bg>
+      <p:bgPr>
+        <a:solidFill>
+          <a:srgbClr val="FFFFFF"/>
+        </a:solidFill>
+        <a:effectLst/>
+      </p:bgPr>
+    </p:bg>
+    <p:spTree>
+      <p:nvGrpSpPr>
+        <p:cNvPr id="1" name=""/>
+        <p:cNvGrpSpPr/>
+        <p:nvPr/>
+      </p:nvGrpSpPr>
+      <p:grpSpPr/>
+      <p:sp>
+        <p:nvSpPr>
+          <p:cNvPr id="2" name="Rectangle 1"/>
+          <p:cNvSpPr/>
+          <p:nvPr/>
+        </p:nvSpPr>
+        <p:spPr>
+          <a:xfrm>
+            <a:off x="0" y="0"/>
+            <a:ext cx="73152" cy="6858000"/>
+          </a:xfrm>
+          <a:prstGeom prst="rect">
+            <a:avLst/>
+          </a:prstGeom>
+          <a:solidFill>
+            <a:srgbClr val="003DA5"/>
+          </a:solidFill>
+          <a:ln>
+            <a:noFill/>
+          </a:ln>
+        </p:spPr>
+        <p:style>
+          <a:lnRef idx="1">
+            <a:schemeClr val="accent1"/>
+          </a:lnRef>
+          <a:fillRef idx="3">
+            <a:schemeClr val="accent1"/>
+          </a:fillRef>
+          <a:effectRef idx="2">
+            <a:schemeClr val="accent1"/>
+          </a:effectRef>
+          <a:fontRef idx="minor">
+            <a:schemeClr val="lt1"/>
+          </a:fontRef>
+        </p:style>
+        <p:txBody>
+          <a:bodyPr rtlCol="0" anchor="ctr"/>
+          <a:lstStyle/>
+          <a:p>
+            <a:pPr algn="ctr"/>
+          </a:p>
+        </p:txBody>
+      </p:sp>
+      <p:sp>
+        <p:nvSpPr>
+          <p:cNvPr id="3" name="TextBox 2"/>
+          <p:cNvSpPr txBox="1"/>
+          <p:nvPr/>
+        </p:nvSpPr>
+        <p:spPr>
+          <a:xfrm>
+            <a:off x="228600" y="182880"/>
+            <a:ext cx="11430000" cy="320040"/>
+          </a:xfrm>
+          <a:prstGeom prst="rect">
+            <a:avLst/>
+          </a:prstGeom>
+          <a:noFill/>
+        </p:spPr>
+        <p:txBody>
+          <a:bodyPr wrap="square">
+            <a:spAutoFit/>
+          </a:bodyPr>
+          <a:lstStyle/>
+          <a:p>
+            <a:pPr algn="l"/>
+            <a:r>
+              <a:rPr sz="900" b="0" i="0">
+                <a:solidFill>
+                  <a:srgbClr val="556575"/>
+                </a:solidFill>
+                <a:latin typeface="Arial"/>
+              </a:rPr>
+              <a:t>M16 · 4.4 Der NMZ-Optimierungsprozess: 3 Schritte</a:t>
+            </a:r>
+          </a:p>
+        </p:txBody>
+      </p:sp>
+      <p:sp>
+        <p:nvSpPr>
+          <p:cNvPr id="4" name="TextBox 3"/>
+          <p:cNvSpPr txBox="1"/>
+          <p:nvPr/>
+        </p:nvSpPr>
+        <p:spPr>
+          <a:xfrm>
+            <a:off x="365760" y="274320"/>
+            <a:ext cx="11430000" cy="777240"/>
+          </a:xfrm>
+          <a:prstGeom prst="rect">
+            <a:avLst/>
+          </a:prstGeom>
+          <a:noFill/>
+        </p:spPr>
+        <p:txBody>
+          <a:bodyPr wrap="square">
+            <a:spAutoFit/>
+          </a:bodyPr>
+          <a:lstStyle/>
+          <a:p>
+            <a:pPr algn="l"/>
+            <a:r>
+              <a:rPr sz="2200" b="1" i="0">
+                <a:solidFill>
+                  <a:srgbClr val="003DA5"/>
+                </a:solidFill>
+                <a:latin typeface="Arial"/>
+              </a:rPr>
+              <a:t>Schritt 3: Handeln und dokumentieren</a:t>
+            </a:r>
+          </a:p>
+        </p:txBody>
+      </p:sp>
+      <p:sp>
+        <p:nvSpPr>
+          <p:cNvPr id="5" name="Rectangle 4"/>
+          <p:cNvSpPr/>
+          <p:nvPr/>
+        </p:nvSpPr>
+        <p:spPr>
+          <a:xfrm>
+            <a:off x="365760" y="1005840"/>
+            <a:ext cx="11430000" cy="27432"/>
+          </a:xfrm>
+          <a:prstGeom prst="rect">
+            <a:avLst/>
+          </a:prstGeom>
+          <a:solidFill>
+            <a:srgbClr val="D1D5DB"/>
+          </a:solidFill>
+          <a:ln>
+            <a:noFill/>
+          </a:ln>
+        </p:spPr>
+        <p:style>
+          <a:lnRef idx="1">
+            <a:schemeClr val="accent1"/>
+          </a:lnRef>
+          <a:fillRef idx="3">
+            <a:schemeClr val="accent1"/>
+          </a:fillRef>
+          <a:effectRef idx="2">
+            <a:schemeClr val="accent1"/>
+          </a:effectRef>
+          <a:fontRef idx="minor">
+            <a:schemeClr val="lt1"/>
+          </a:fontRef>
+        </p:style>
+        <p:txBody>
+          <a:bodyPr rtlCol="0" anchor="ctr"/>
+          <a:lstStyle/>
+          <a:p>
+            <a:pPr algn="ctr"/>
+          </a:p>
+        </p:txBody>
+      </p:sp>
+      <p:sp>
+        <p:nvSpPr>
+          <p:cNvPr id="6" name="TextBox 5"/>
+          <p:cNvSpPr txBox="1"/>
+          <p:nvPr/>
+        </p:nvSpPr>
+        <p:spPr>
+          <a:xfrm>
+            <a:off x="365760" y="1143000"/>
+            <a:ext cx="11430000" cy="5212080"/>
+          </a:xfrm>
+          <a:prstGeom prst="rect">
+            <a:avLst/>
+          </a:prstGeom>
+          <a:noFill/>
+        </p:spPr>
+        <p:txBody>
+          <a:bodyPr wrap="square">
+            <a:spAutoFit/>
+          </a:bodyPr>
+          <a:lstStyle/>
+          <a:p>
+            <a:pPr>
+              <a:spcBef>
+                <a:spcPts val="500"/>
+              </a:spcBef>
+            </a:pPr>
+            <a:r>
+              <a:rPr sz="1500">
+                <a:solidFill>
+                  <a:srgbClr val="003DA5"/>
+                </a:solidFill>
+                <a:latin typeface="Arial"/>
+              </a:rPr>
+              <a:t>▪  </a:t>
+            </a:r>
+            <a:r>
+              <a:rPr sz="1700" b="1">
+                <a:solidFill>
+                  <a:srgbClr val="003DA5"/>
+                </a:solidFill>
+                <a:latin typeface="Arial"/>
+              </a:rPr>
+              <a:t>Zinshebel: </a:t>
+            </a:r>
+            <a:r>
+              <a:rPr sz="1700">
+                <a:solidFill>
+                  <a:srgbClr val="1A1A1A"/>
+                </a:solidFill>
+                <a:latin typeface="Arial"/>
+              </a:rPr>
+              <a:t>Konditionengespräch vorbereiten (→ M14) -</a:t>
+            </a:r>
+          </a:p>
+          <a:p>
+            <a:pPr>
+              <a:spcBef>
+                <a:spcPts val="500"/>
+              </a:spcBef>
+            </a:pPr>
+            <a:r>
+              <a:rPr sz="1500">
+                <a:solidFill>
+                  <a:srgbClr val="003DA5"/>
+                </a:solidFill>
+                <a:latin typeface="Arial"/>
+              </a:rPr>
+              <a:t>▪  </a:t>
+            </a:r>
+            <a:r>
+              <a:rPr sz="1700" b="1">
+                <a:solidFill>
+                  <a:srgbClr val="003DA5"/>
+                </a:solidFill>
+                <a:latin typeface="Arial"/>
+              </a:rPr>
+              <a:t>Verbundhebel: </a:t>
+            </a:r>
+            <a:r>
+              <a:rPr sz="1700">
+                <a:solidFill>
+                  <a:srgbClr val="1A1A1A"/>
+                </a:solidFill>
+                <a:latin typeface="Arial"/>
+              </a:rPr>
+              <a:t>Verbundpartner-Termin vereinbaren (→ M13) -</a:t>
+            </a:r>
+          </a:p>
+          <a:p>
+            <a:pPr>
+              <a:spcBef>
+                <a:spcPts val="500"/>
+              </a:spcBef>
+            </a:pPr>
+            <a:r>
+              <a:rPr sz="1500">
+                <a:solidFill>
+                  <a:srgbClr val="003DA5"/>
+                </a:solidFill>
+                <a:latin typeface="Arial"/>
+              </a:rPr>
+              <a:t>▪  </a:t>
+            </a:r>
+            <a:r>
+              <a:rPr sz="1700" b="1">
+                <a:solidFill>
+                  <a:srgbClr val="003DA5"/>
+                </a:solidFill>
+                <a:latin typeface="Arial"/>
+              </a:rPr>
+              <a:t>Risikohebel: </a:t>
+            </a:r>
+            <a:r>
+              <a:rPr sz="1700">
+                <a:solidFill>
+                  <a:srgbClr val="1A1A1A"/>
+                </a:solidFill>
+                <a:latin typeface="Arial"/>
+              </a:rPr>
+              <a:t>Rating-Gespräch, Besicherungsoptimierung (gemeinsam mit Marktfolge/Kredit) -</a:t>
+            </a:r>
+          </a:p>
+          <a:p>
+            <a:pPr>
+              <a:spcBef>
+                <a:spcPts val="500"/>
+              </a:spcBef>
+            </a:pPr>
+            <a:r>
+              <a:rPr sz="1500">
+                <a:solidFill>
+                  <a:srgbClr val="003DA5"/>
+                </a:solidFill>
+                <a:latin typeface="Arial"/>
+              </a:rPr>
+              <a:t>▪  </a:t>
+            </a:r>
+            <a:r>
+              <a:rPr sz="1700" b="1">
+                <a:solidFill>
+                  <a:srgbClr val="003DA5"/>
+                </a:solidFill>
+                <a:latin typeface="Arial"/>
+              </a:rPr>
+              <a:t>Kostenhebel: </a:t>
+            </a:r>
+            <a:r>
+              <a:rPr sz="1700">
+                <a:solidFill>
+                  <a:srgbClr val="1A1A1A"/>
+                </a:solidFill>
+                <a:latin typeface="Arial"/>
+              </a:rPr>
+              <a:t>Betreuungsintensität überprüfen (Führungsgespräch)</a:t>
+            </a:r>
+          </a:p>
+          <a:p>
+            <a:pPr>
+              <a:spcBef>
+                <a:spcPts val="500"/>
+              </a:spcBef>
+            </a:pPr>
+            <a:r>
+              <a:rPr sz="1500">
+                <a:solidFill>
+                  <a:srgbClr val="003DA5"/>
+                </a:solidFill>
+                <a:latin typeface="Arial"/>
+              </a:rPr>
+              <a:t>▪  </a:t>
+            </a:r>
+            <a:r>
+              <a:rPr sz="1700" b="1">
+                <a:solidFill>
+                  <a:srgbClr val="003DA5"/>
+                </a:solidFill>
+                <a:latin typeface="Arial"/>
+              </a:rPr>
+              <a:t>Stichwort-Leitfaden: Margenverteidigung im Konditionsgespräch: </a:t>
+            </a:r>
+            <a:r>
+              <a:rPr sz="1700">
+                <a:solidFill>
+                  <a:srgbClr val="1A1A1A"/>
+                </a:solidFill>
+                <a:latin typeface="Arial"/>
+              </a:rPr>
+              <a:t>&gt; &gt; Das Ablesen der NMZ ist der einfache Teil. Das Gespräch mit dem Kunden über eine Margenanpassung ist der schwierige. Drei praxiserprobte Argumentationslinien: &gt; &gt;</a:t>
+            </a:r>
+          </a:p>
+          <a:p>
+            <a:pPr>
+              <a:spcBef>
+                <a:spcPts val="500"/>
+              </a:spcBef>
+            </a:pPr>
+            <a:r>
+              <a:rPr sz="1500">
+                <a:solidFill>
+                  <a:srgbClr val="003DA5"/>
+                </a:solidFill>
+                <a:latin typeface="Arial"/>
+              </a:rPr>
+              <a:t>▪  </a:t>
+            </a:r>
+            <a:r>
+              <a:rPr sz="1700" b="1">
+                <a:solidFill>
+                  <a:srgbClr val="003DA5"/>
+                </a:solidFill>
+                <a:latin typeface="Arial"/>
+              </a:rPr>
+              <a:t>1. Risikogerechtes Pricing: </a:t>
+            </a:r>
+            <a:r>
+              <a:rPr sz="1700">
+                <a:solidFill>
+                  <a:srgbClr val="1A1A1A"/>
+                </a:solidFill>
+                <a:latin typeface="Arial"/>
+              </a:rPr>
+              <a:t>„Ihr aktuelles Rating C erfordert nach unseren MaRisk-konformen Richtlinien eine Mindestmarge von X %. Das ist keine individuelle Entscheidung – das ist unser Steuerungsrahmen." &gt;…</a:t>
+            </a:r>
+          </a:p>
+          <a:p>
+            <a:pPr>
+              <a:spcBef>
+                <a:spcPts val="500"/>
+              </a:spcBef>
+            </a:pPr>
+            <a:r>
+              <a:rPr sz="1500">
+                <a:solidFill>
+                  <a:srgbClr val="003DA5"/>
+                </a:solidFill>
+                <a:latin typeface="Arial"/>
+              </a:rPr>
+              <a:t>▪  </a:t>
+            </a:r>
+            <a:r>
+              <a:rPr sz="1700" b="1">
+                <a:solidFill>
+                  <a:srgbClr val="003DA5"/>
+                </a:solidFill>
+                <a:latin typeface="Arial"/>
+              </a:rPr>
+              <a:t>2. Gestiegene Refinanzierungskosten: </a:t>
+            </a:r>
+            <a:r>
+              <a:rPr sz="1700">
+                <a:solidFill>
+                  <a:srgbClr val="1A1A1A"/>
+                </a:solidFill>
+                <a:latin typeface="Arial"/>
+              </a:rPr>
+              <a:t>„Seit unserem letzten Abschluss vor 3 Jahren hat sich das Zinsniveau verändert. Wir müssen das jetzt anpassen, damit wir diese Partnerschaft auf Dauer solide führen können." &gt; &gt;</a:t>
+            </a:r>
+          </a:p>
+          <a:p>
+            <a:pPr>
+              <a:spcBef>
+                <a:spcPts val="500"/>
+              </a:spcBef>
+            </a:pPr>
+            <a:r>
+              <a:rPr sz="1500">
+                <a:solidFill>
+                  <a:srgbClr val="003DA5"/>
+                </a:solidFill>
+                <a:latin typeface="Arial"/>
+              </a:rPr>
+              <a:t>▪  </a:t>
+            </a:r>
+            <a:r>
+              <a:rPr sz="1700" b="1">
+                <a:solidFill>
+                  <a:srgbClr val="003DA5"/>
+                </a:solidFill>
+                <a:latin typeface="Arial"/>
+              </a:rPr>
+              <a:t>3. Mehrwert betonen: </a:t>
+            </a:r>
+            <a:r>
+              <a:rPr sz="1700">
+                <a:solidFill>
+                  <a:srgbClr val="1A1A1A"/>
+                </a:solidFill>
+                <a:latin typeface="Arial"/>
+              </a:rPr>
+              <a:t>„Wir haben in den letzten 18 Monaten die R+V-Betriebsunterbrechung eingebunden. Der Mehrwert, den wir Ihnen bieten, ist gewachsen – es ist fair, dass sich das auch in der…</a:t>
+            </a:r>
+          </a:p>
+          <a:p>
+            <a:pPr>
+              <a:spcBef>
+                <a:spcPts val="500"/>
+              </a:spcBef>
+            </a:pPr>
+            <a:r>
+              <a:rPr sz="1500">
+                <a:solidFill>
+                  <a:srgbClr val="003DA5"/>
+                </a:solidFill>
+                <a:latin typeface="Arial"/>
+              </a:rPr>
+              <a:t>▪  </a:t>
+            </a:r>
+            <a:r>
+              <a:rPr sz="1700" b="1">
+                <a:solidFill>
+                  <a:srgbClr val="003DA5"/>
+                </a:solidFill>
+                <a:latin typeface="Arial"/>
+              </a:rPr>
+              <a:t>Wenn der Kunde sagt „dann gehe ich zur Sparkasse": </a:t>
+            </a:r>
+            <a:r>
+              <a:rPr sz="1700">
+                <a:solidFill>
+                  <a:srgbClr val="1A1A1A"/>
+                </a:solidFill>
+                <a:latin typeface="Arial"/>
+              </a:rPr>
+              <a:t>Nicht sofort nachgeben. Ruhig antworten: „Das verstehe ich. Wenn Sie das Angebot vorliegen haben, schauen wir es uns gerne gemeinsam an. Ich bin überzeugt, dass wir im Gesamtpaket…</a:t>
+            </a:r>
+          </a:p>
+        </p:txBody>
+      </p:sp>
+    </p:spTree>
+  </p:cSld>
+  <p:clrMapOvr>
+    <a:masterClrMapping/>
+  </p:clrMapOvr>
+</p:sld>
+</file>
+
+<file path=ppt/slides/slide17.xml><?xml version="1.0" encoding="utf-8"?>
 <p:sld xmlns:a="http://schemas.openxmlformats.org/drawingml/2006/main" xmlns:p="http://schemas.openxmlformats.org/presentationml/2006/main" xmlns:r="http://schemas.openxmlformats.org/officeDocument/2006/relationships">
   <p:cSld>
     <p:bg>
@@ -3724,8 +6060,8 @@
         </p:nvSpPr>
         <p:spPr>
           <a:xfrm>
-            <a:off x="365760" y="2286000"/>
-            <a:ext cx="11430000" cy="1828800"/>
+            <a:off x="365760" y="2011680"/>
+            <a:ext cx="11430000" cy="2011680"/>
           </a:xfrm>
           <a:prstGeom prst="rect">
             <a:avLst/>
@@ -3740,13 +6076,13 @@
           <a:p>
             <a:pPr algn="l"/>
             <a:r>
-              <a:rPr sz="3600" b="1">
+              <a:rPr sz="3600" b="1" i="0">
                 <a:solidFill>
                   <a:srgbClr val="FFFFFF"/>
                 </a:solidFill>
                 <a:latin typeface="Arial"/>
               </a:rPr>
-              <a:t>Praxismaterialien</a:t>
+              <a:t>Arbeitsblatt A: Mein NMZ-Bestandsbild</a:t>
             </a:r>
           </a:p>
         </p:txBody>
@@ -3759,13 +6095,896 @@
 </p:sld>
 </file>
 
-<file path=ppt/slides/slide14.xml><?xml version="1.0" encoding="utf-8"?>
+<file path=ppt/slides/slide18.xml><?xml version="1.0" encoding="utf-8"?>
 <p:sld xmlns:a="http://schemas.openxmlformats.org/drawingml/2006/main" xmlns:p="http://schemas.openxmlformats.org/presentationml/2006/main" xmlns:r="http://schemas.openxmlformats.org/officeDocument/2006/relationships">
   <p:cSld>
     <p:bg>
       <p:bgPr>
         <a:solidFill>
-          <a:srgbClr val="003DA5"/>
+          <a:srgbClr val="FFFFFF"/>
+        </a:solidFill>
+        <a:effectLst/>
+      </p:bgPr>
+    </p:bg>
+    <p:spTree>
+      <p:nvGrpSpPr>
+        <p:cNvPr id="1" name=""/>
+        <p:cNvGrpSpPr/>
+        <p:nvPr/>
+      </p:nvGrpSpPr>
+      <p:grpSpPr/>
+      <p:sp>
+        <p:nvSpPr>
+          <p:cNvPr id="2" name="Rectangle 1"/>
+          <p:cNvSpPr/>
+          <p:nvPr/>
+        </p:nvSpPr>
+        <p:spPr>
+          <a:xfrm>
+            <a:off x="0" y="0"/>
+            <a:ext cx="73152" cy="6858000"/>
+          </a:xfrm>
+          <a:prstGeom prst="rect">
+            <a:avLst/>
+          </a:prstGeom>
+          <a:solidFill>
+            <a:srgbClr val="003DA5"/>
+          </a:solidFill>
+          <a:ln>
+            <a:noFill/>
+          </a:ln>
+        </p:spPr>
+        <p:style>
+          <a:lnRef idx="1">
+            <a:schemeClr val="accent1"/>
+          </a:lnRef>
+          <a:fillRef idx="3">
+            <a:schemeClr val="accent1"/>
+          </a:fillRef>
+          <a:effectRef idx="2">
+            <a:schemeClr val="accent1"/>
+          </a:effectRef>
+          <a:fontRef idx="minor">
+            <a:schemeClr val="lt1"/>
+          </a:fontRef>
+        </p:style>
+        <p:txBody>
+          <a:bodyPr rtlCol="0" anchor="ctr"/>
+          <a:lstStyle/>
+          <a:p>
+            <a:pPr algn="ctr"/>
+          </a:p>
+        </p:txBody>
+      </p:sp>
+      <p:sp>
+        <p:nvSpPr>
+          <p:cNvPr id="3" name="TextBox 2"/>
+          <p:cNvSpPr txBox="1"/>
+          <p:nvPr/>
+        </p:nvSpPr>
+        <p:spPr>
+          <a:xfrm>
+            <a:off x="228600" y="182880"/>
+            <a:ext cx="11430000" cy="320040"/>
+          </a:xfrm>
+          <a:prstGeom prst="rect">
+            <a:avLst/>
+          </a:prstGeom>
+          <a:noFill/>
+        </p:spPr>
+        <p:txBody>
+          <a:bodyPr wrap="square">
+            <a:spAutoFit/>
+          </a:bodyPr>
+          <a:lstStyle/>
+          <a:p>
+            <a:pPr algn="l"/>
+            <a:r>
+              <a:rPr sz="900" b="0" i="0">
+                <a:solidFill>
+                  <a:srgbClr val="556575"/>
+                </a:solidFill>
+                <a:latin typeface="Arial"/>
+              </a:rPr>
+              <a:t>M16 · 4.6 Arbeitsblätter</a:t>
+            </a:r>
+          </a:p>
+        </p:txBody>
+      </p:sp>
+      <p:sp>
+        <p:nvSpPr>
+          <p:cNvPr id="4" name="TextBox 3"/>
+          <p:cNvSpPr txBox="1"/>
+          <p:nvPr/>
+        </p:nvSpPr>
+        <p:spPr>
+          <a:xfrm>
+            <a:off x="365760" y="274320"/>
+            <a:ext cx="11430000" cy="777240"/>
+          </a:xfrm>
+          <a:prstGeom prst="rect">
+            <a:avLst/>
+          </a:prstGeom>
+          <a:noFill/>
+        </p:spPr>
+        <p:txBody>
+          <a:bodyPr wrap="square">
+            <a:spAutoFit/>
+          </a:bodyPr>
+          <a:lstStyle/>
+          <a:p>
+            <a:pPr algn="l"/>
+            <a:r>
+              <a:rPr sz="2200" b="1" i="0">
+                <a:solidFill>
+                  <a:srgbClr val="003DA5"/>
+                </a:solidFill>
+                <a:latin typeface="Arial"/>
+              </a:rPr>
+              <a:t>Arbeitsblatt A: Mein NMZ-Bestandsbild</a:t>
+            </a:r>
+          </a:p>
+        </p:txBody>
+      </p:sp>
+      <p:sp>
+        <p:nvSpPr>
+          <p:cNvPr id="5" name="Rectangle 4"/>
+          <p:cNvSpPr/>
+          <p:nvPr/>
+        </p:nvSpPr>
+        <p:spPr>
+          <a:xfrm>
+            <a:off x="365760" y="1005840"/>
+            <a:ext cx="11430000" cy="27432"/>
+          </a:xfrm>
+          <a:prstGeom prst="rect">
+            <a:avLst/>
+          </a:prstGeom>
+          <a:solidFill>
+            <a:srgbClr val="D1D5DB"/>
+          </a:solidFill>
+          <a:ln>
+            <a:noFill/>
+          </a:ln>
+        </p:spPr>
+        <p:style>
+          <a:lnRef idx="1">
+            <a:schemeClr val="accent1"/>
+          </a:lnRef>
+          <a:fillRef idx="3">
+            <a:schemeClr val="accent1"/>
+          </a:fillRef>
+          <a:effectRef idx="2">
+            <a:schemeClr val="accent1"/>
+          </a:effectRef>
+          <a:fontRef idx="minor">
+            <a:schemeClr val="lt1"/>
+          </a:fontRef>
+        </p:style>
+        <p:txBody>
+          <a:bodyPr rtlCol="0" anchor="ctr"/>
+          <a:lstStyle/>
+          <a:p>
+            <a:pPr algn="ctr"/>
+          </a:p>
+        </p:txBody>
+      </p:sp>
+      <p:graphicFrame>
+        <p:nvGraphicFramePr>
+          <p:cNvPr id="6" name="Table 5"/>
+          <p:cNvGraphicFramePr>
+            <a:graphicFrameLocks noGrp="1"/>
+          </p:cNvGraphicFramePr>
+          <p:nvPr/>
+        </p:nvGraphicFramePr>
+        <p:xfrm>
+          <a:off x="365760" y="1143000"/>
+          <a:ext cx="11430000" cy="2852928"/>
+        </p:xfrm>
+        <a:graphic>
+          <a:graphicData uri="http://schemas.openxmlformats.org/drawingml/2006/table">
+            <a:tbl>
+              <a:tblPr firstRow="1" bandRow="1">
+                <a:tableStyleId>{5C22544A-7EE6-4342-B048-85BDC9FD1C3A}</a:tableStyleId>
+              </a:tblPr>
+              <a:tblGrid>
+                <a:gridCol w="2286000"/>
+                <a:gridCol w="2286000"/>
+                <a:gridCol w="2286000"/>
+                <a:gridCol w="2286000"/>
+                <a:gridCol w="2286000"/>
+              </a:tblGrid>
+              <a:tr h="475488">
+                <a:tc>
+                  <a:txBody>
+                    <a:bodyPr wrap="square"/>
+                    <a:lstStyle/>
+                    <a:p>
+                      <a:r>
+                        <a:rPr sz="1100" b="1">
+                          <a:solidFill>
+                            <a:srgbClr val="FFFFFF"/>
+                          </a:solidFill>
+                          <a:latin typeface="Arial"/>
+                        </a:rPr>
+                        <a:t>Rang (von unten)</a:t>
+                      </a:r>
+                    </a:p>
+                  </a:txBody>
+                  <a:tcPr>
+                    <a:solidFill>
+                      <a:srgbClr val="003DA5"/>
+                    </a:solidFill>
+                  </a:tcPr>
+                </a:tc>
+                <a:tc>
+                  <a:txBody>
+                    <a:bodyPr wrap="square"/>
+                    <a:lstStyle/>
+                    <a:p>
+                      <a:r>
+                        <a:rPr sz="1100" b="1">
+                          <a:solidFill>
+                            <a:srgbClr val="FFFFFF"/>
+                          </a:solidFill>
+                          <a:latin typeface="Arial"/>
+                        </a:rPr>
+                        <a:t>Kunde (anonymisiert)</a:t>
+                      </a:r>
+                    </a:p>
+                  </a:txBody>
+                  <a:tcPr>
+                    <a:solidFill>
+                      <a:srgbClr val="003DA5"/>
+                    </a:solidFill>
+                  </a:tcPr>
+                </a:tc>
+                <a:tc>
+                  <a:txBody>
+                    <a:bodyPr wrap="square"/>
+                    <a:lstStyle/>
+                    <a:p>
+                      <a:r>
+                        <a:rPr sz="1100" b="1">
+                          <a:solidFill>
+                            <a:srgbClr val="FFFFFF"/>
+                          </a:solidFill>
+                          <a:latin typeface="Arial"/>
+                        </a:rPr>
+                        <a:t>NMZ</a:t>
+                      </a:r>
+                    </a:p>
+                  </a:txBody>
+                  <a:tcPr>
+                    <a:solidFill>
+                      <a:srgbClr val="003DA5"/>
+                    </a:solidFill>
+                  </a:tcPr>
+                </a:tc>
+                <a:tc>
+                  <a:txBody>
+                    <a:bodyPr wrap="square"/>
+                    <a:lstStyle/>
+                    <a:p>
+                      <a:r>
+                        <a:rPr sz="1100" b="1">
+                          <a:solidFill>
+                            <a:srgbClr val="FFFFFF"/>
+                          </a:solidFill>
+                          <a:latin typeface="Arial"/>
+                        </a:rPr>
+                        <a:t>Hauptursache</a:t>
+                      </a:r>
+                    </a:p>
+                  </a:txBody>
+                  <a:tcPr>
+                    <a:solidFill>
+                      <a:srgbClr val="003DA5"/>
+                    </a:solidFill>
+                  </a:tcPr>
+                </a:tc>
+                <a:tc>
+                  <a:txBody>
+                    <a:bodyPr wrap="square"/>
+                    <a:lstStyle/>
+                    <a:p>
+                      <a:r>
+                        <a:rPr sz="1100" b="1">
+                          <a:solidFill>
+                            <a:srgbClr val="FFFFFF"/>
+                          </a:solidFill>
+                          <a:latin typeface="Arial"/>
+                        </a:rPr>
+                        <a:t>Hebel</a:t>
+                      </a:r>
+                    </a:p>
+                  </a:txBody>
+                  <a:tcPr>
+                    <a:solidFill>
+                      <a:srgbClr val="003DA5"/>
+                    </a:solidFill>
+                  </a:tcPr>
+                </a:tc>
+              </a:tr>
+              <a:tr h="475488">
+                <a:tc>
+                  <a:txBody>
+                    <a:bodyPr wrap="square"/>
+                    <a:lstStyle/>
+                    <a:p>
+                      <a:r>
+                        <a:rPr sz="1100" b="0">
+                          <a:solidFill>
+                            <a:srgbClr val="1A1A1A"/>
+                          </a:solidFill>
+                          <a:latin typeface="Arial"/>
+                        </a:rPr>
+                        <a:t>1</a:t>
+                      </a:r>
+                    </a:p>
+                  </a:txBody>
+                  <a:tcPr>
+                    <a:solidFill>
+                      <a:srgbClr val="FFFFFF"/>
+                    </a:solidFill>
+                  </a:tcPr>
+                </a:tc>
+                <a:tc>
+                  <a:txBody>
+                    <a:bodyPr wrap="square"/>
+                    <a:lstStyle/>
+                    <a:p>
+                      <a:r>
+                        <a:rPr sz="1100" b="0">
+                          <a:solidFill>
+                            <a:srgbClr val="1A1A1A"/>
+                          </a:solidFill>
+                          <a:latin typeface="Arial"/>
+                        </a:rPr>
+                        <a:t/>
+                      </a:r>
+                    </a:p>
+                  </a:txBody>
+                  <a:tcPr>
+                    <a:solidFill>
+                      <a:srgbClr val="FFFFFF"/>
+                    </a:solidFill>
+                  </a:tcPr>
+                </a:tc>
+                <a:tc>
+                  <a:txBody>
+                    <a:bodyPr wrap="square"/>
+                    <a:lstStyle/>
+                    <a:p>
+                      <a:r>
+                        <a:rPr sz="1100" b="0">
+                          <a:solidFill>
+                            <a:srgbClr val="1A1A1A"/>
+                          </a:solidFill>
+                          <a:latin typeface="Arial"/>
+                        </a:rPr>
+                        <a:t/>
+                      </a:r>
+                    </a:p>
+                  </a:txBody>
+                  <a:tcPr>
+                    <a:solidFill>
+                      <a:srgbClr val="FFFFFF"/>
+                    </a:solidFill>
+                  </a:tcPr>
+                </a:tc>
+                <a:tc>
+                  <a:txBody>
+                    <a:bodyPr wrap="square"/>
+                    <a:lstStyle/>
+                    <a:p>
+                      <a:r>
+                        <a:rPr sz="1100" b="0">
+                          <a:solidFill>
+                            <a:srgbClr val="1A1A1A"/>
+                          </a:solidFill>
+                          <a:latin typeface="Arial"/>
+                        </a:rPr>
+                        <a:t/>
+                      </a:r>
+                    </a:p>
+                  </a:txBody>
+                  <a:tcPr>
+                    <a:solidFill>
+                      <a:srgbClr val="FFFFFF"/>
+                    </a:solidFill>
+                  </a:tcPr>
+                </a:tc>
+                <a:tc>
+                  <a:txBody>
+                    <a:bodyPr wrap="square"/>
+                    <a:lstStyle/>
+                    <a:p>
+                      <a:r>
+                        <a:rPr sz="1100" b="0">
+                          <a:solidFill>
+                            <a:srgbClr val="1A1A1A"/>
+                          </a:solidFill>
+                          <a:latin typeface="Arial"/>
+                        </a:rPr>
+                        <a:t/>
+                      </a:r>
+                    </a:p>
+                  </a:txBody>
+                  <a:tcPr>
+                    <a:solidFill>
+                      <a:srgbClr val="FFFFFF"/>
+                    </a:solidFill>
+                  </a:tcPr>
+                </a:tc>
+              </a:tr>
+              <a:tr h="475488">
+                <a:tc>
+                  <a:txBody>
+                    <a:bodyPr wrap="square"/>
+                    <a:lstStyle/>
+                    <a:p>
+                      <a:r>
+                        <a:rPr sz="1100" b="0">
+                          <a:solidFill>
+                            <a:srgbClr val="1A1A1A"/>
+                          </a:solidFill>
+                          <a:latin typeface="Arial"/>
+                        </a:rPr>
+                        <a:t>2</a:t>
+                      </a:r>
+                    </a:p>
+                  </a:txBody>
+                  <a:tcPr>
+                    <a:solidFill>
+                      <a:srgbClr val="F4F6FA"/>
+                    </a:solidFill>
+                  </a:tcPr>
+                </a:tc>
+                <a:tc>
+                  <a:txBody>
+                    <a:bodyPr wrap="square"/>
+                    <a:lstStyle/>
+                    <a:p>
+                      <a:r>
+                        <a:rPr sz="1100" b="0">
+                          <a:solidFill>
+                            <a:srgbClr val="1A1A1A"/>
+                          </a:solidFill>
+                          <a:latin typeface="Arial"/>
+                        </a:rPr>
+                        <a:t/>
+                      </a:r>
+                    </a:p>
+                  </a:txBody>
+                  <a:tcPr>
+                    <a:solidFill>
+                      <a:srgbClr val="F4F6FA"/>
+                    </a:solidFill>
+                  </a:tcPr>
+                </a:tc>
+                <a:tc>
+                  <a:txBody>
+                    <a:bodyPr wrap="square"/>
+                    <a:lstStyle/>
+                    <a:p>
+                      <a:r>
+                        <a:rPr sz="1100" b="0">
+                          <a:solidFill>
+                            <a:srgbClr val="1A1A1A"/>
+                          </a:solidFill>
+                          <a:latin typeface="Arial"/>
+                        </a:rPr>
+                        <a:t/>
+                      </a:r>
+                    </a:p>
+                  </a:txBody>
+                  <a:tcPr>
+                    <a:solidFill>
+                      <a:srgbClr val="F4F6FA"/>
+                    </a:solidFill>
+                  </a:tcPr>
+                </a:tc>
+                <a:tc>
+                  <a:txBody>
+                    <a:bodyPr wrap="square"/>
+                    <a:lstStyle/>
+                    <a:p>
+                      <a:r>
+                        <a:rPr sz="1100" b="0">
+                          <a:solidFill>
+                            <a:srgbClr val="1A1A1A"/>
+                          </a:solidFill>
+                          <a:latin typeface="Arial"/>
+                        </a:rPr>
+                        <a:t/>
+                      </a:r>
+                    </a:p>
+                  </a:txBody>
+                  <a:tcPr>
+                    <a:solidFill>
+                      <a:srgbClr val="F4F6FA"/>
+                    </a:solidFill>
+                  </a:tcPr>
+                </a:tc>
+                <a:tc>
+                  <a:txBody>
+                    <a:bodyPr wrap="square"/>
+                    <a:lstStyle/>
+                    <a:p>
+                      <a:r>
+                        <a:rPr sz="1100" b="0">
+                          <a:solidFill>
+                            <a:srgbClr val="1A1A1A"/>
+                          </a:solidFill>
+                          <a:latin typeface="Arial"/>
+                        </a:rPr>
+                        <a:t/>
+                      </a:r>
+                    </a:p>
+                  </a:txBody>
+                  <a:tcPr>
+                    <a:solidFill>
+                      <a:srgbClr val="F4F6FA"/>
+                    </a:solidFill>
+                  </a:tcPr>
+                </a:tc>
+              </a:tr>
+              <a:tr h="475488">
+                <a:tc>
+                  <a:txBody>
+                    <a:bodyPr wrap="square"/>
+                    <a:lstStyle/>
+                    <a:p>
+                      <a:r>
+                        <a:rPr sz="1100" b="0">
+                          <a:solidFill>
+                            <a:srgbClr val="1A1A1A"/>
+                          </a:solidFill>
+                          <a:latin typeface="Arial"/>
+                        </a:rPr>
+                        <a:t>3</a:t>
+                      </a:r>
+                    </a:p>
+                  </a:txBody>
+                  <a:tcPr>
+                    <a:solidFill>
+                      <a:srgbClr val="FFFFFF"/>
+                    </a:solidFill>
+                  </a:tcPr>
+                </a:tc>
+                <a:tc>
+                  <a:txBody>
+                    <a:bodyPr wrap="square"/>
+                    <a:lstStyle/>
+                    <a:p>
+                      <a:r>
+                        <a:rPr sz="1100" b="0">
+                          <a:solidFill>
+                            <a:srgbClr val="1A1A1A"/>
+                          </a:solidFill>
+                          <a:latin typeface="Arial"/>
+                        </a:rPr>
+                        <a:t/>
+                      </a:r>
+                    </a:p>
+                  </a:txBody>
+                  <a:tcPr>
+                    <a:solidFill>
+                      <a:srgbClr val="FFFFFF"/>
+                    </a:solidFill>
+                  </a:tcPr>
+                </a:tc>
+                <a:tc>
+                  <a:txBody>
+                    <a:bodyPr wrap="square"/>
+                    <a:lstStyle/>
+                    <a:p>
+                      <a:r>
+                        <a:rPr sz="1100" b="0">
+                          <a:solidFill>
+                            <a:srgbClr val="1A1A1A"/>
+                          </a:solidFill>
+                          <a:latin typeface="Arial"/>
+                        </a:rPr>
+                        <a:t/>
+                      </a:r>
+                    </a:p>
+                  </a:txBody>
+                  <a:tcPr>
+                    <a:solidFill>
+                      <a:srgbClr val="FFFFFF"/>
+                    </a:solidFill>
+                  </a:tcPr>
+                </a:tc>
+                <a:tc>
+                  <a:txBody>
+                    <a:bodyPr wrap="square"/>
+                    <a:lstStyle/>
+                    <a:p>
+                      <a:r>
+                        <a:rPr sz="1100" b="0">
+                          <a:solidFill>
+                            <a:srgbClr val="1A1A1A"/>
+                          </a:solidFill>
+                          <a:latin typeface="Arial"/>
+                        </a:rPr>
+                        <a:t/>
+                      </a:r>
+                    </a:p>
+                  </a:txBody>
+                  <a:tcPr>
+                    <a:solidFill>
+                      <a:srgbClr val="FFFFFF"/>
+                    </a:solidFill>
+                  </a:tcPr>
+                </a:tc>
+                <a:tc>
+                  <a:txBody>
+                    <a:bodyPr wrap="square"/>
+                    <a:lstStyle/>
+                    <a:p>
+                      <a:r>
+                        <a:rPr sz="1100" b="0">
+                          <a:solidFill>
+                            <a:srgbClr val="1A1A1A"/>
+                          </a:solidFill>
+                          <a:latin typeface="Arial"/>
+                        </a:rPr>
+                        <a:t/>
+                      </a:r>
+                    </a:p>
+                  </a:txBody>
+                  <a:tcPr>
+                    <a:solidFill>
+                      <a:srgbClr val="FFFFFF"/>
+                    </a:solidFill>
+                  </a:tcPr>
+                </a:tc>
+              </a:tr>
+              <a:tr h="475488">
+                <a:tc>
+                  <a:txBody>
+                    <a:bodyPr wrap="square"/>
+                    <a:lstStyle/>
+                    <a:p>
+                      <a:r>
+                        <a:rPr sz="1100" b="0">
+                          <a:solidFill>
+                            <a:srgbClr val="1A1A1A"/>
+                          </a:solidFill>
+                          <a:latin typeface="Arial"/>
+                        </a:rPr>
+                        <a:t>4</a:t>
+                      </a:r>
+                    </a:p>
+                  </a:txBody>
+                  <a:tcPr>
+                    <a:solidFill>
+                      <a:srgbClr val="F4F6FA"/>
+                    </a:solidFill>
+                  </a:tcPr>
+                </a:tc>
+                <a:tc>
+                  <a:txBody>
+                    <a:bodyPr wrap="square"/>
+                    <a:lstStyle/>
+                    <a:p>
+                      <a:r>
+                        <a:rPr sz="1100" b="0">
+                          <a:solidFill>
+                            <a:srgbClr val="1A1A1A"/>
+                          </a:solidFill>
+                          <a:latin typeface="Arial"/>
+                        </a:rPr>
+                        <a:t/>
+                      </a:r>
+                    </a:p>
+                  </a:txBody>
+                  <a:tcPr>
+                    <a:solidFill>
+                      <a:srgbClr val="F4F6FA"/>
+                    </a:solidFill>
+                  </a:tcPr>
+                </a:tc>
+                <a:tc>
+                  <a:txBody>
+                    <a:bodyPr wrap="square"/>
+                    <a:lstStyle/>
+                    <a:p>
+                      <a:r>
+                        <a:rPr sz="1100" b="0">
+                          <a:solidFill>
+                            <a:srgbClr val="1A1A1A"/>
+                          </a:solidFill>
+                          <a:latin typeface="Arial"/>
+                        </a:rPr>
+                        <a:t/>
+                      </a:r>
+                    </a:p>
+                  </a:txBody>
+                  <a:tcPr>
+                    <a:solidFill>
+                      <a:srgbClr val="F4F6FA"/>
+                    </a:solidFill>
+                  </a:tcPr>
+                </a:tc>
+                <a:tc>
+                  <a:txBody>
+                    <a:bodyPr wrap="square"/>
+                    <a:lstStyle/>
+                    <a:p>
+                      <a:r>
+                        <a:rPr sz="1100" b="0">
+                          <a:solidFill>
+                            <a:srgbClr val="1A1A1A"/>
+                          </a:solidFill>
+                          <a:latin typeface="Arial"/>
+                        </a:rPr>
+                        <a:t/>
+                      </a:r>
+                    </a:p>
+                  </a:txBody>
+                  <a:tcPr>
+                    <a:solidFill>
+                      <a:srgbClr val="F4F6FA"/>
+                    </a:solidFill>
+                  </a:tcPr>
+                </a:tc>
+                <a:tc>
+                  <a:txBody>
+                    <a:bodyPr wrap="square"/>
+                    <a:lstStyle/>
+                    <a:p>
+                      <a:r>
+                        <a:rPr sz="1100" b="0">
+                          <a:solidFill>
+                            <a:srgbClr val="1A1A1A"/>
+                          </a:solidFill>
+                          <a:latin typeface="Arial"/>
+                        </a:rPr>
+                        <a:t/>
+                      </a:r>
+                    </a:p>
+                  </a:txBody>
+                  <a:tcPr>
+                    <a:solidFill>
+                      <a:srgbClr val="F4F6FA"/>
+                    </a:solidFill>
+                  </a:tcPr>
+                </a:tc>
+              </a:tr>
+              <a:tr h="475488">
+                <a:tc>
+                  <a:txBody>
+                    <a:bodyPr wrap="square"/>
+                    <a:lstStyle/>
+                    <a:p>
+                      <a:r>
+                        <a:rPr sz="1100" b="0">
+                          <a:solidFill>
+                            <a:srgbClr val="1A1A1A"/>
+                          </a:solidFill>
+                          <a:latin typeface="Arial"/>
+                        </a:rPr>
+                        <a:t>5</a:t>
+                      </a:r>
+                    </a:p>
+                  </a:txBody>
+                  <a:tcPr>
+                    <a:solidFill>
+                      <a:srgbClr val="FFFFFF"/>
+                    </a:solidFill>
+                  </a:tcPr>
+                </a:tc>
+                <a:tc>
+                  <a:txBody>
+                    <a:bodyPr wrap="square"/>
+                    <a:lstStyle/>
+                    <a:p>
+                      <a:r>
+                        <a:rPr sz="1100" b="0">
+                          <a:solidFill>
+                            <a:srgbClr val="1A1A1A"/>
+                          </a:solidFill>
+                          <a:latin typeface="Arial"/>
+                        </a:rPr>
+                        <a:t/>
+                      </a:r>
+                    </a:p>
+                  </a:txBody>
+                  <a:tcPr>
+                    <a:solidFill>
+                      <a:srgbClr val="FFFFFF"/>
+                    </a:solidFill>
+                  </a:tcPr>
+                </a:tc>
+                <a:tc>
+                  <a:txBody>
+                    <a:bodyPr wrap="square"/>
+                    <a:lstStyle/>
+                    <a:p>
+                      <a:r>
+                        <a:rPr sz="1100" b="0">
+                          <a:solidFill>
+                            <a:srgbClr val="1A1A1A"/>
+                          </a:solidFill>
+                          <a:latin typeface="Arial"/>
+                        </a:rPr>
+                        <a:t/>
+                      </a:r>
+                    </a:p>
+                  </a:txBody>
+                  <a:tcPr>
+                    <a:solidFill>
+                      <a:srgbClr val="FFFFFF"/>
+                    </a:solidFill>
+                  </a:tcPr>
+                </a:tc>
+                <a:tc>
+                  <a:txBody>
+                    <a:bodyPr wrap="square"/>
+                    <a:lstStyle/>
+                    <a:p>
+                      <a:r>
+                        <a:rPr sz="1100" b="0">
+                          <a:solidFill>
+                            <a:srgbClr val="1A1A1A"/>
+                          </a:solidFill>
+                          <a:latin typeface="Arial"/>
+                        </a:rPr>
+                        <a:t/>
+                      </a:r>
+                    </a:p>
+                  </a:txBody>
+                  <a:tcPr>
+                    <a:solidFill>
+                      <a:srgbClr val="FFFFFF"/>
+                    </a:solidFill>
+                  </a:tcPr>
+                </a:tc>
+                <a:tc>
+                  <a:txBody>
+                    <a:bodyPr wrap="square"/>
+                    <a:lstStyle/>
+                    <a:p>
+                      <a:r>
+                        <a:rPr sz="1100" b="0">
+                          <a:solidFill>
+                            <a:srgbClr val="1A1A1A"/>
+                          </a:solidFill>
+                          <a:latin typeface="Arial"/>
+                        </a:rPr>
+                        <a:t/>
+                      </a:r>
+                    </a:p>
+                  </a:txBody>
+                  <a:tcPr>
+                    <a:solidFill>
+                      <a:srgbClr val="FFFFFF"/>
+                    </a:solidFill>
+                  </a:tcPr>
+                </a:tc>
+              </a:tr>
+            </a:tbl>
+          </a:graphicData>
+        </a:graphic>
+      </p:graphicFrame>
+    </p:spTree>
+  </p:cSld>
+  <p:clrMapOvr>
+    <a:masterClrMapping/>
+  </p:clrMapOvr>
+</p:sld>
+</file>
+
+<file path=ppt/slides/slide19.xml><?xml version="1.0" encoding="utf-8"?>
+<p:sld xmlns:a="http://schemas.openxmlformats.org/drawingml/2006/main" xmlns:p="http://schemas.openxmlformats.org/presentationml/2006/main" xmlns:r="http://schemas.openxmlformats.org/officeDocument/2006/relationships">
+  <p:cSld>
+    <p:bg>
+      <p:bgPr>
+        <a:solidFill>
+          <a:srgbClr val="1A1A1A"/>
         </a:solidFill>
         <a:effectLst/>
       </p:bgPr>
@@ -3828,8 +7047,8 @@
         </p:nvSpPr>
         <p:spPr>
           <a:xfrm>
-            <a:off x="365760" y="365760"/>
-            <a:ext cx="5486400" cy="365760"/>
+            <a:off x="365760" y="2011680"/>
+            <a:ext cx="11430000" cy="2011680"/>
           </a:xfrm>
           <a:prstGeom prst="rect">
             <a:avLst/>
@@ -3844,199 +7063,13 @@
           <a:p>
             <a:pPr algn="l"/>
             <a:r>
-              <a:rPr sz="1000" b="1">
-                <a:solidFill>
-                  <a:srgbClr val="CCD6F0"/>
+              <a:rPr sz="3600" b="1" i="0">
+                <a:solidFill>
+                  <a:srgbClr val="FFFFFF"/>
                 </a:solidFill>
                 <a:latin typeface="Arial"/>
               </a:rPr>
-              <a:t>PRAXISTRANSFER</a:t>
-            </a:r>
-          </a:p>
-        </p:txBody>
-      </p:sp>
-      <p:sp>
-        <p:nvSpPr>
-          <p:cNvPr id="4" name="TextBox 3"/>
-          <p:cNvSpPr txBox="1"/>
-          <p:nvPr/>
-        </p:nvSpPr>
-        <p:spPr>
-          <a:xfrm>
-            <a:off x="365760" y="640080"/>
-            <a:ext cx="9144000" cy="914400"/>
-          </a:xfrm>
-          <a:prstGeom prst="rect">
-            <a:avLst/>
-          </a:prstGeom>
-          <a:noFill/>
-        </p:spPr>
-        <p:txBody>
-          <a:bodyPr wrap="square">
-            <a:spAutoFit/>
-          </a:bodyPr>
-          <a:lstStyle/>
-          <a:p>
-            <a:pPr algn="l"/>
-            <a:r>
-              <a:rPr sz="2800" b="1">
-                <a:solidFill>
-                  <a:srgbClr val="FFFFFF"/>
-                </a:solidFill>
-                <a:latin typeface="Arial"/>
-              </a:rPr>
-              <a:t>Was nehmen Sie mit?</a:t>
-            </a:r>
-          </a:p>
-        </p:txBody>
-      </p:sp>
-      <p:sp>
-        <p:nvSpPr>
-          <p:cNvPr id="5" name="Rectangle 4"/>
-          <p:cNvSpPr/>
-          <p:nvPr/>
-        </p:nvSpPr>
-        <p:spPr>
-          <a:xfrm>
-            <a:off x="365760" y="1463040"/>
-            <a:ext cx="7315200" cy="27432"/>
-          </a:xfrm>
-          <a:prstGeom prst="rect">
-            <a:avLst/>
-          </a:prstGeom>
-          <a:solidFill>
-            <a:srgbClr val="335CC0"/>
-          </a:solidFill>
-          <a:ln>
-            <a:noFill/>
-          </a:ln>
-        </p:spPr>
-        <p:style>
-          <a:lnRef idx="1">
-            <a:schemeClr val="accent1"/>
-          </a:lnRef>
-          <a:fillRef idx="3">
-            <a:schemeClr val="accent1"/>
-          </a:fillRef>
-          <a:effectRef idx="2">
-            <a:schemeClr val="accent1"/>
-          </a:effectRef>
-          <a:fontRef idx="minor">
-            <a:schemeClr val="lt1"/>
-          </a:fontRef>
-        </p:style>
-        <p:txBody>
-          <a:bodyPr rtlCol="0" anchor="ctr"/>
-          <a:lstStyle/>
-          <a:p>
-            <a:pPr algn="ctr"/>
-          </a:p>
-        </p:txBody>
-      </p:sp>
-      <p:sp>
-        <p:nvSpPr>
-          <p:cNvPr id="6" name="TextBox 5"/>
-          <p:cNvSpPr txBox="1"/>
-          <p:nvPr/>
-        </p:nvSpPr>
-        <p:spPr>
-          <a:xfrm>
-            <a:off x="365760" y="1645920"/>
-            <a:ext cx="11430000" cy="4114800"/>
-          </a:xfrm>
-          <a:prstGeom prst="rect">
-            <a:avLst/>
-          </a:prstGeom>
-          <a:noFill/>
-        </p:spPr>
-        <p:txBody>
-          <a:bodyPr wrap="square">
-            <a:spAutoFit/>
-          </a:bodyPr>
-          <a:lstStyle/>
-          <a:p>
-            <a:pPr>
-              <a:spcBef>
-                <a:spcPts val="400"/>
-              </a:spcBef>
-            </a:pPr>
-            <a:r>
-              <a:rPr sz="1600">
-                <a:solidFill>
-                  <a:srgbClr val="E05B00"/>
-                </a:solidFill>
-                <a:latin typeface="Arial"/>
-              </a:rPr>
-              <a:t>▪  </a:t>
-            </a:r>
-            <a:r>
-              <a:rPr sz="1800">
-                <a:solidFill>
-                  <a:srgbClr val="FFFFFF"/>
-                </a:solidFill>
-                <a:latin typeface="Arial"/>
-              </a:rPr>
-              <a:t>Transferaufgabe: Wenden Sie das Gelernte in den nächsten 14 Tagen bei einem konkreten Kunden an.</a:t>
-            </a:r>
-          </a:p>
-          <a:p>
-            <a:pPr>
-              <a:spcBef>
-                <a:spcPts val="400"/>
-              </a:spcBef>
-            </a:pPr>
-            <a:r>
-              <a:rPr sz="1600">
-                <a:solidFill>
-                  <a:srgbClr val="E05B00"/>
-                </a:solidFill>
-                <a:latin typeface="Arial"/>
-              </a:rPr>
-              <a:t>▪  </a:t>
-            </a:r>
-            <a:r>
-              <a:rPr sz="1800">
-                <a:solidFill>
-                  <a:srgbClr val="FFFFFF"/>
-                </a:solidFill>
-                <a:latin typeface="Arial"/>
-              </a:rPr>
-              <a:t>Selbstcheck nach 4 Wochen: Was hat sich verändert?</a:t>
-            </a:r>
-          </a:p>
-        </p:txBody>
-      </p:sp>
-      <p:sp>
-        <p:nvSpPr>
-          <p:cNvPr id="7" name="TextBox 6"/>
-          <p:cNvSpPr txBox="1"/>
-          <p:nvPr/>
-        </p:nvSpPr>
-        <p:spPr>
-          <a:xfrm>
-            <a:off x="365760" y="6309360"/>
-            <a:ext cx="11430000" cy="365760"/>
-          </a:xfrm>
-          <a:prstGeom prst="rect">
-            <a:avLst/>
-          </a:prstGeom>
-          <a:noFill/>
-        </p:spPr>
-        <p:txBody>
-          <a:bodyPr wrap="square">
-            <a:spAutoFit/>
-          </a:bodyPr>
-          <a:lstStyle/>
-          <a:p>
-            <a:pPr algn="l"/>
-            <a:r>
-              <a:rPr sz="900" b="0">
-                <a:solidFill>
-                  <a:srgbClr val="99AACC"/>
-                </a:solidFill>
-                <a:latin typeface="Arial"/>
-              </a:rPr>
-              <a:t>M16 · NMZ-Optimierung  ·  v0.4  ·  Benedikt Zoller Coaching</a:t>
+              <a:t>Arbeitsblatt B: Maßnahmenplan</a:t>
             </a:r>
           </a:p>
         </p:txBody>
@@ -4055,7 +7088,7 @@
     <p:bg>
       <p:bgPr>
         <a:solidFill>
-          <a:srgbClr val="F5F7FA"/>
+          <a:srgbClr val="F4F6FA"/>
         </a:solidFill>
         <a:effectLst/>
       </p:bgPr>
@@ -4118,14 +7151,14 @@
         </p:nvSpPr>
         <p:spPr>
           <a:xfrm>
-            <a:off x="365760" y="868680"/>
-            <a:ext cx="7315200" cy="27432"/>
+            <a:off x="228600" y="804672"/>
+            <a:ext cx="11612880" cy="22860"/>
           </a:xfrm>
           <a:prstGeom prst="rect">
             <a:avLst/>
           </a:prstGeom>
           <a:solidFill>
-            <a:srgbClr val="E5E7EB"/>
+            <a:srgbClr val="D1D5DB"/>
           </a:solidFill>
           <a:ln>
             <a:noFill/>
@@ -4162,7 +7195,7 @@
         <p:spPr>
           <a:xfrm>
             <a:off x="365760" y="320040"/>
-            <a:ext cx="3657600" cy="365760"/>
+            <a:ext cx="4572000" cy="347472"/>
           </a:xfrm>
           <a:prstGeom prst="rect">
             <a:avLst/>
@@ -4177,7 +7210,7 @@
           <a:p>
             <a:pPr algn="l"/>
             <a:r>
-              <a:rPr sz="1000" b="1">
+              <a:rPr sz="900" b="1" i="0">
                 <a:solidFill>
                   <a:srgbClr val="003DA5"/>
                 </a:solidFill>
@@ -4197,7 +7230,7 @@
         <p:spPr>
           <a:xfrm>
             <a:off x="365760" y="502920"/>
-            <a:ext cx="9144000" cy="548640"/>
+            <a:ext cx="10058400" cy="640080"/>
           </a:xfrm>
           <a:prstGeom prst="rect">
             <a:avLst/>
@@ -4212,7 +7245,7 @@
           <a:p>
             <a:pPr algn="l"/>
             <a:r>
-              <a:rPr sz="2200" b="1">
+              <a:rPr sz="2400" b="1" i="0">
                 <a:solidFill>
                   <a:srgbClr val="1A1A1A"/>
                 </a:solidFill>
@@ -4231,7 +7264,7 @@
         </p:nvSpPr>
         <p:spPr>
           <a:xfrm>
-            <a:off x="365760" y="1188720"/>
+            <a:off x="365760" y="1234440"/>
             <a:ext cx="11430000" cy="5303520"/>
           </a:xfrm>
           <a:prstGeom prst="rect">
@@ -4247,11 +7280,11 @@
           <a:p>
             <a:pPr>
               <a:spcBef>
-                <a:spcPts val="400"/>
+                <a:spcPts val="500"/>
               </a:spcBef>
             </a:pPr>
             <a:r>
-              <a:rPr sz="1400">
+              <a:rPr sz="1500">
                 <a:solidFill>
                   <a:srgbClr val="003DA5"/>
                 </a:solidFill>
@@ -4260,7 +7293,7 @@
               <a:t>▪  </a:t>
             </a:r>
             <a:r>
-              <a:rPr sz="1600">
+              <a:rPr sz="1700">
                 <a:solidFill>
                   <a:srgbClr val="1A1A1A"/>
                 </a:solidFill>
@@ -4272,11 +7305,11 @@
           <a:p>
             <a:pPr>
               <a:spcBef>
-                <a:spcPts val="400"/>
+                <a:spcPts val="500"/>
               </a:spcBef>
             </a:pPr>
             <a:r>
-              <a:rPr sz="1400">
+              <a:rPr sz="1500">
                 <a:solidFill>
                   <a:srgbClr val="003DA5"/>
                 </a:solidFill>
@@ -4285,7 +7318,7 @@
               <a:t>▪  </a:t>
             </a:r>
             <a:r>
-              <a:rPr sz="1600">
+              <a:rPr sz="1700">
                 <a:solidFill>
                   <a:srgbClr val="1A1A1A"/>
                 </a:solidFill>
@@ -4297,11 +7330,11 @@
           <a:p>
             <a:pPr>
               <a:spcBef>
-                <a:spcPts val="400"/>
+                <a:spcPts val="500"/>
               </a:spcBef>
             </a:pPr>
             <a:r>
-              <a:rPr sz="1400">
+              <a:rPr sz="1500">
                 <a:solidFill>
                   <a:srgbClr val="003DA5"/>
                 </a:solidFill>
@@ -4310,7 +7343,7 @@
               <a:t>▪  </a:t>
             </a:r>
             <a:r>
-              <a:rPr sz="1600">
+              <a:rPr sz="1700">
                 <a:solidFill>
                   <a:srgbClr val="1A1A1A"/>
                 </a:solidFill>
@@ -4322,11 +7355,11 @@
           <a:p>
             <a:pPr>
               <a:spcBef>
-                <a:spcPts val="400"/>
+                <a:spcPts val="500"/>
               </a:spcBef>
             </a:pPr>
             <a:r>
-              <a:rPr sz="1400">
+              <a:rPr sz="1500">
                 <a:solidFill>
                   <a:srgbClr val="003DA5"/>
                 </a:solidFill>
@@ -4335,7 +7368,7 @@
               <a:t>▪  </a:t>
             </a:r>
             <a:r>
-              <a:rPr sz="1600">
+              <a:rPr sz="1700">
                 <a:solidFill>
                   <a:srgbClr val="1A1A1A"/>
                 </a:solidFill>
@@ -4347,11 +7380,11 @@
           <a:p>
             <a:pPr>
               <a:spcBef>
-                <a:spcPts val="400"/>
+                <a:spcPts val="500"/>
               </a:spcBef>
             </a:pPr>
             <a:r>
-              <a:rPr sz="1400">
+              <a:rPr sz="1500">
                 <a:solidFill>
                   <a:srgbClr val="003DA5"/>
                 </a:solidFill>
@@ -4360,7 +7393,7 @@
               <a:t>▪  </a:t>
             </a:r>
             <a:r>
-              <a:rPr sz="1600">
+              <a:rPr sz="1700">
                 <a:solidFill>
                   <a:srgbClr val="1A1A1A"/>
                 </a:solidFill>
@@ -4379,13 +7412,761 @@
 </p:sld>
 </file>
 
-<file path=ppt/slides/slide3.xml><?xml version="1.0" encoding="utf-8"?>
+<file path=ppt/slides/slide20.xml><?xml version="1.0" encoding="utf-8"?>
 <p:sld xmlns:a="http://schemas.openxmlformats.org/drawingml/2006/main" xmlns:p="http://schemas.openxmlformats.org/presentationml/2006/main" xmlns:r="http://schemas.openxmlformats.org/officeDocument/2006/relationships">
   <p:cSld>
     <p:bg>
       <p:bgPr>
         <a:solidFill>
-          <a:srgbClr val="1A1A1A"/>
+          <a:srgbClr val="FFFFFF"/>
+        </a:solidFill>
+        <a:effectLst/>
+      </p:bgPr>
+    </p:bg>
+    <p:spTree>
+      <p:nvGrpSpPr>
+        <p:cNvPr id="1" name=""/>
+        <p:cNvGrpSpPr/>
+        <p:nvPr/>
+      </p:nvGrpSpPr>
+      <p:grpSpPr/>
+      <p:sp>
+        <p:nvSpPr>
+          <p:cNvPr id="2" name="Rectangle 1"/>
+          <p:cNvSpPr/>
+          <p:nvPr/>
+        </p:nvSpPr>
+        <p:spPr>
+          <a:xfrm>
+            <a:off x="0" y="0"/>
+            <a:ext cx="73152" cy="6858000"/>
+          </a:xfrm>
+          <a:prstGeom prst="rect">
+            <a:avLst/>
+          </a:prstGeom>
+          <a:solidFill>
+            <a:srgbClr val="003DA5"/>
+          </a:solidFill>
+          <a:ln>
+            <a:noFill/>
+          </a:ln>
+        </p:spPr>
+        <p:style>
+          <a:lnRef idx="1">
+            <a:schemeClr val="accent1"/>
+          </a:lnRef>
+          <a:fillRef idx="3">
+            <a:schemeClr val="accent1"/>
+          </a:fillRef>
+          <a:effectRef idx="2">
+            <a:schemeClr val="accent1"/>
+          </a:effectRef>
+          <a:fontRef idx="minor">
+            <a:schemeClr val="lt1"/>
+          </a:fontRef>
+        </p:style>
+        <p:txBody>
+          <a:bodyPr rtlCol="0" anchor="ctr"/>
+          <a:lstStyle/>
+          <a:p>
+            <a:pPr algn="ctr"/>
+          </a:p>
+        </p:txBody>
+      </p:sp>
+      <p:sp>
+        <p:nvSpPr>
+          <p:cNvPr id="3" name="TextBox 2"/>
+          <p:cNvSpPr txBox="1"/>
+          <p:nvPr/>
+        </p:nvSpPr>
+        <p:spPr>
+          <a:xfrm>
+            <a:off x="228600" y="182880"/>
+            <a:ext cx="11430000" cy="320040"/>
+          </a:xfrm>
+          <a:prstGeom prst="rect">
+            <a:avLst/>
+          </a:prstGeom>
+          <a:noFill/>
+        </p:spPr>
+        <p:txBody>
+          <a:bodyPr wrap="square">
+            <a:spAutoFit/>
+          </a:bodyPr>
+          <a:lstStyle/>
+          <a:p>
+            <a:pPr algn="l"/>
+            <a:r>
+              <a:rPr sz="900" b="0" i="0">
+                <a:solidFill>
+                  <a:srgbClr val="556575"/>
+                </a:solidFill>
+                <a:latin typeface="Arial"/>
+              </a:rPr>
+              <a:t>M16 · 4.6 Arbeitsblätter</a:t>
+            </a:r>
+          </a:p>
+        </p:txBody>
+      </p:sp>
+      <p:sp>
+        <p:nvSpPr>
+          <p:cNvPr id="4" name="TextBox 3"/>
+          <p:cNvSpPr txBox="1"/>
+          <p:nvPr/>
+        </p:nvSpPr>
+        <p:spPr>
+          <a:xfrm>
+            <a:off x="365760" y="274320"/>
+            <a:ext cx="11430000" cy="777240"/>
+          </a:xfrm>
+          <a:prstGeom prst="rect">
+            <a:avLst/>
+          </a:prstGeom>
+          <a:noFill/>
+        </p:spPr>
+        <p:txBody>
+          <a:bodyPr wrap="square">
+            <a:spAutoFit/>
+          </a:bodyPr>
+          <a:lstStyle/>
+          <a:p>
+            <a:pPr algn="l"/>
+            <a:r>
+              <a:rPr sz="2200" b="1" i="0">
+                <a:solidFill>
+                  <a:srgbClr val="003DA5"/>
+                </a:solidFill>
+                <a:latin typeface="Arial"/>
+              </a:rPr>
+              <a:t>Arbeitsblatt B: Maßnahmenplan</a:t>
+            </a:r>
+          </a:p>
+        </p:txBody>
+      </p:sp>
+      <p:sp>
+        <p:nvSpPr>
+          <p:cNvPr id="5" name="Rectangle 4"/>
+          <p:cNvSpPr/>
+          <p:nvPr/>
+        </p:nvSpPr>
+        <p:spPr>
+          <a:xfrm>
+            <a:off x="365760" y="1005840"/>
+            <a:ext cx="11430000" cy="27432"/>
+          </a:xfrm>
+          <a:prstGeom prst="rect">
+            <a:avLst/>
+          </a:prstGeom>
+          <a:solidFill>
+            <a:srgbClr val="D1D5DB"/>
+          </a:solidFill>
+          <a:ln>
+            <a:noFill/>
+          </a:ln>
+        </p:spPr>
+        <p:style>
+          <a:lnRef idx="1">
+            <a:schemeClr val="accent1"/>
+          </a:lnRef>
+          <a:fillRef idx="3">
+            <a:schemeClr val="accent1"/>
+          </a:fillRef>
+          <a:effectRef idx="2">
+            <a:schemeClr val="accent1"/>
+          </a:effectRef>
+          <a:fontRef idx="minor">
+            <a:schemeClr val="lt1"/>
+          </a:fontRef>
+        </p:style>
+        <p:txBody>
+          <a:bodyPr rtlCol="0" anchor="ctr"/>
+          <a:lstStyle/>
+          <a:p>
+            <a:pPr algn="ctr"/>
+          </a:p>
+        </p:txBody>
+      </p:sp>
+      <p:graphicFrame>
+        <p:nvGraphicFramePr>
+          <p:cNvPr id="6" name="Table 5"/>
+          <p:cNvGraphicFramePr>
+            <a:graphicFrameLocks noGrp="1"/>
+          </p:cNvGraphicFramePr>
+          <p:nvPr/>
+        </p:nvGraphicFramePr>
+        <p:xfrm>
+          <a:off x="365760" y="1143000"/>
+          <a:ext cx="11430000" cy="1901952"/>
+        </p:xfrm>
+        <a:graphic>
+          <a:graphicData uri="http://schemas.openxmlformats.org/drawingml/2006/table">
+            <a:tbl>
+              <a:tblPr firstRow="1" bandRow="1">
+                <a:tableStyleId>{5C22544A-7EE6-4342-B048-85BDC9FD1C3A}</a:tableStyleId>
+              </a:tblPr>
+              <a:tblGrid>
+                <a:gridCol w="1905000"/>
+                <a:gridCol w="1905000"/>
+                <a:gridCol w="1905000"/>
+                <a:gridCol w="1905000"/>
+                <a:gridCol w="1905000"/>
+                <a:gridCol w="1905000"/>
+              </a:tblGrid>
+              <a:tr h="475488">
+                <a:tc>
+                  <a:txBody>
+                    <a:bodyPr wrap="square"/>
+                    <a:lstStyle/>
+                    <a:p>
+                      <a:r>
+                        <a:rPr sz="1100" b="1">
+                          <a:solidFill>
+                            <a:srgbClr val="FFFFFF"/>
+                          </a:solidFill>
+                          <a:latin typeface="Arial"/>
+                        </a:rPr>
+                        <a:t>Kunde</a:t>
+                      </a:r>
+                    </a:p>
+                  </a:txBody>
+                  <a:tcPr>
+                    <a:solidFill>
+                      <a:srgbClr val="003DA5"/>
+                    </a:solidFill>
+                  </a:tcPr>
+                </a:tc>
+                <a:tc>
+                  <a:txBody>
+                    <a:bodyPr wrap="square"/>
+                    <a:lstStyle/>
+                    <a:p>
+                      <a:r>
+                        <a:rPr sz="1100" b="1">
+                          <a:solidFill>
+                            <a:srgbClr val="FFFFFF"/>
+                          </a:solidFill>
+                          <a:latin typeface="Arial"/>
+                        </a:rPr>
+                        <a:t>Prio</a:t>
+                      </a:r>
+                    </a:p>
+                  </a:txBody>
+                  <a:tcPr>
+                    <a:solidFill>
+                      <a:srgbClr val="003DA5"/>
+                    </a:solidFill>
+                  </a:tcPr>
+                </a:tc>
+                <a:tc>
+                  <a:txBody>
+                    <a:bodyPr wrap="square"/>
+                    <a:lstStyle/>
+                    <a:p>
+                      <a:r>
+                        <a:rPr sz="1100" b="1">
+                          <a:solidFill>
+                            <a:srgbClr val="FFFFFF"/>
+                          </a:solidFill>
+                          <a:latin typeface="Arial"/>
+                        </a:rPr>
+                        <a:t>Maßnahme</a:t>
+                      </a:r>
+                    </a:p>
+                  </a:txBody>
+                  <a:tcPr>
+                    <a:solidFill>
+                      <a:srgbClr val="003DA5"/>
+                    </a:solidFill>
+                  </a:tcPr>
+                </a:tc>
+                <a:tc>
+                  <a:txBody>
+                    <a:bodyPr wrap="square"/>
+                    <a:lstStyle/>
+                    <a:p>
+                      <a:r>
+                        <a:rPr sz="1100" b="1">
+                          <a:solidFill>
+                            <a:srgbClr val="FFFFFF"/>
+                          </a:solidFill>
+                          <a:latin typeface="Arial"/>
+                        </a:rPr>
+                        <a:t>Hebel</a:t>
+                      </a:r>
+                    </a:p>
+                  </a:txBody>
+                  <a:tcPr>
+                    <a:solidFill>
+                      <a:srgbClr val="003DA5"/>
+                    </a:solidFill>
+                  </a:tcPr>
+                </a:tc>
+                <a:tc>
+                  <a:txBody>
+                    <a:bodyPr wrap="square"/>
+                    <a:lstStyle/>
+                    <a:p>
+                      <a:r>
+                        <a:rPr sz="1100" b="1">
+                          <a:solidFill>
+                            <a:srgbClr val="FFFFFF"/>
+                          </a:solidFill>
+                          <a:latin typeface="Arial"/>
+                        </a:rPr>
+                        <a:t>Termin</a:t>
+                      </a:r>
+                    </a:p>
+                  </a:txBody>
+                  <a:tcPr>
+                    <a:solidFill>
+                      <a:srgbClr val="003DA5"/>
+                    </a:solidFill>
+                  </a:tcPr>
+                </a:tc>
+                <a:tc>
+                  <a:txBody>
+                    <a:bodyPr wrap="square"/>
+                    <a:lstStyle/>
+                    <a:p>
+                      <a:r>
+                        <a:rPr sz="1100" b="1">
+                          <a:solidFill>
+                            <a:srgbClr val="FFFFFF"/>
+                          </a:solidFill>
+                          <a:latin typeface="Arial"/>
+                        </a:rPr>
+                        <a:t>Erwartete NMZ-Steigerung</a:t>
+                      </a:r>
+                    </a:p>
+                  </a:txBody>
+                  <a:tcPr>
+                    <a:solidFill>
+                      <a:srgbClr val="003DA5"/>
+                    </a:solidFill>
+                  </a:tcPr>
+                </a:tc>
+              </a:tr>
+              <a:tr h="475488">
+                <a:tc>
+                  <a:txBody>
+                    <a:bodyPr wrap="square"/>
+                    <a:lstStyle/>
+                    <a:p>
+                      <a:r>
+                        <a:rPr sz="1100" b="0">
+                          <a:solidFill>
+                            <a:srgbClr val="1A1A1A"/>
+                          </a:solidFill>
+                          <a:latin typeface="Arial"/>
+                        </a:rPr>
+                        <a:t/>
+                      </a:r>
+                    </a:p>
+                  </a:txBody>
+                  <a:tcPr>
+                    <a:solidFill>
+                      <a:srgbClr val="FFFFFF"/>
+                    </a:solidFill>
+                  </a:tcPr>
+                </a:tc>
+                <a:tc>
+                  <a:txBody>
+                    <a:bodyPr wrap="square"/>
+                    <a:lstStyle/>
+                    <a:p>
+                      <a:r>
+                        <a:rPr sz="1100" b="0">
+                          <a:solidFill>
+                            <a:srgbClr val="1A1A1A"/>
+                          </a:solidFill>
+                          <a:latin typeface="Arial"/>
+                        </a:rPr>
+                        <a:t>1</a:t>
+                      </a:r>
+                    </a:p>
+                  </a:txBody>
+                  <a:tcPr>
+                    <a:solidFill>
+                      <a:srgbClr val="FFFFFF"/>
+                    </a:solidFill>
+                  </a:tcPr>
+                </a:tc>
+                <a:tc>
+                  <a:txBody>
+                    <a:bodyPr wrap="square"/>
+                    <a:lstStyle/>
+                    <a:p>
+                      <a:r>
+                        <a:rPr sz="1100" b="0">
+                          <a:solidFill>
+                            <a:srgbClr val="1A1A1A"/>
+                          </a:solidFill>
+                          <a:latin typeface="Arial"/>
+                        </a:rPr>
+                        <a:t/>
+                      </a:r>
+                    </a:p>
+                  </a:txBody>
+                  <a:tcPr>
+                    <a:solidFill>
+                      <a:srgbClr val="FFFFFF"/>
+                    </a:solidFill>
+                  </a:tcPr>
+                </a:tc>
+                <a:tc>
+                  <a:txBody>
+                    <a:bodyPr wrap="square"/>
+                    <a:lstStyle/>
+                    <a:p>
+                      <a:r>
+                        <a:rPr sz="1100" b="0">
+                          <a:solidFill>
+                            <a:srgbClr val="1A1A1A"/>
+                          </a:solidFill>
+                          <a:latin typeface="Arial"/>
+                        </a:rPr>
+                        <a:t/>
+                      </a:r>
+                    </a:p>
+                  </a:txBody>
+                  <a:tcPr>
+                    <a:solidFill>
+                      <a:srgbClr val="FFFFFF"/>
+                    </a:solidFill>
+                  </a:tcPr>
+                </a:tc>
+                <a:tc>
+                  <a:txBody>
+                    <a:bodyPr wrap="square"/>
+                    <a:lstStyle/>
+                    <a:p>
+                      <a:r>
+                        <a:rPr sz="1100" b="0">
+                          <a:solidFill>
+                            <a:srgbClr val="1A1A1A"/>
+                          </a:solidFill>
+                          <a:latin typeface="Arial"/>
+                        </a:rPr>
+                        <a:t/>
+                      </a:r>
+                    </a:p>
+                  </a:txBody>
+                  <a:tcPr>
+                    <a:solidFill>
+                      <a:srgbClr val="FFFFFF"/>
+                    </a:solidFill>
+                  </a:tcPr>
+                </a:tc>
+                <a:tc>
+                  <a:txBody>
+                    <a:bodyPr wrap="square"/>
+                    <a:lstStyle/>
+                    <a:p>
+                      <a:r>
+                        <a:rPr sz="1100" b="0">
+                          <a:solidFill>
+                            <a:srgbClr val="1A1A1A"/>
+                          </a:solidFill>
+                          <a:latin typeface="Arial"/>
+                        </a:rPr>
+                        <a:t/>
+                      </a:r>
+                    </a:p>
+                  </a:txBody>
+                  <a:tcPr>
+                    <a:solidFill>
+                      <a:srgbClr val="FFFFFF"/>
+                    </a:solidFill>
+                  </a:tcPr>
+                </a:tc>
+              </a:tr>
+              <a:tr h="475488">
+                <a:tc>
+                  <a:txBody>
+                    <a:bodyPr wrap="square"/>
+                    <a:lstStyle/>
+                    <a:p>
+                      <a:r>
+                        <a:rPr sz="1100" b="0">
+                          <a:solidFill>
+                            <a:srgbClr val="1A1A1A"/>
+                          </a:solidFill>
+                          <a:latin typeface="Arial"/>
+                        </a:rPr>
+                        <a:t/>
+                      </a:r>
+                    </a:p>
+                  </a:txBody>
+                  <a:tcPr>
+                    <a:solidFill>
+                      <a:srgbClr val="F4F6FA"/>
+                    </a:solidFill>
+                  </a:tcPr>
+                </a:tc>
+                <a:tc>
+                  <a:txBody>
+                    <a:bodyPr wrap="square"/>
+                    <a:lstStyle/>
+                    <a:p>
+                      <a:r>
+                        <a:rPr sz="1100" b="0">
+                          <a:solidFill>
+                            <a:srgbClr val="1A1A1A"/>
+                          </a:solidFill>
+                          <a:latin typeface="Arial"/>
+                        </a:rPr>
+                        <a:t>1</a:t>
+                      </a:r>
+                    </a:p>
+                  </a:txBody>
+                  <a:tcPr>
+                    <a:solidFill>
+                      <a:srgbClr val="F4F6FA"/>
+                    </a:solidFill>
+                  </a:tcPr>
+                </a:tc>
+                <a:tc>
+                  <a:txBody>
+                    <a:bodyPr wrap="square"/>
+                    <a:lstStyle/>
+                    <a:p>
+                      <a:r>
+                        <a:rPr sz="1100" b="0">
+                          <a:solidFill>
+                            <a:srgbClr val="1A1A1A"/>
+                          </a:solidFill>
+                          <a:latin typeface="Arial"/>
+                        </a:rPr>
+                        <a:t/>
+                      </a:r>
+                    </a:p>
+                  </a:txBody>
+                  <a:tcPr>
+                    <a:solidFill>
+                      <a:srgbClr val="F4F6FA"/>
+                    </a:solidFill>
+                  </a:tcPr>
+                </a:tc>
+                <a:tc>
+                  <a:txBody>
+                    <a:bodyPr wrap="square"/>
+                    <a:lstStyle/>
+                    <a:p>
+                      <a:r>
+                        <a:rPr sz="1100" b="0">
+                          <a:solidFill>
+                            <a:srgbClr val="1A1A1A"/>
+                          </a:solidFill>
+                          <a:latin typeface="Arial"/>
+                        </a:rPr>
+                        <a:t/>
+                      </a:r>
+                    </a:p>
+                  </a:txBody>
+                  <a:tcPr>
+                    <a:solidFill>
+                      <a:srgbClr val="F4F6FA"/>
+                    </a:solidFill>
+                  </a:tcPr>
+                </a:tc>
+                <a:tc>
+                  <a:txBody>
+                    <a:bodyPr wrap="square"/>
+                    <a:lstStyle/>
+                    <a:p>
+                      <a:r>
+                        <a:rPr sz="1100" b="0">
+                          <a:solidFill>
+                            <a:srgbClr val="1A1A1A"/>
+                          </a:solidFill>
+                          <a:latin typeface="Arial"/>
+                        </a:rPr>
+                        <a:t/>
+                      </a:r>
+                    </a:p>
+                  </a:txBody>
+                  <a:tcPr>
+                    <a:solidFill>
+                      <a:srgbClr val="F4F6FA"/>
+                    </a:solidFill>
+                  </a:tcPr>
+                </a:tc>
+                <a:tc>
+                  <a:txBody>
+                    <a:bodyPr wrap="square"/>
+                    <a:lstStyle/>
+                    <a:p>
+                      <a:r>
+                        <a:rPr sz="1100" b="0">
+                          <a:solidFill>
+                            <a:srgbClr val="1A1A1A"/>
+                          </a:solidFill>
+                          <a:latin typeface="Arial"/>
+                        </a:rPr>
+                        <a:t/>
+                      </a:r>
+                    </a:p>
+                  </a:txBody>
+                  <a:tcPr>
+                    <a:solidFill>
+                      <a:srgbClr val="F4F6FA"/>
+                    </a:solidFill>
+                  </a:tcPr>
+                </a:tc>
+              </a:tr>
+              <a:tr h="475488">
+                <a:tc>
+                  <a:txBody>
+                    <a:bodyPr wrap="square"/>
+                    <a:lstStyle/>
+                    <a:p>
+                      <a:r>
+                        <a:rPr sz="1100" b="0">
+                          <a:solidFill>
+                            <a:srgbClr val="1A1A1A"/>
+                          </a:solidFill>
+                          <a:latin typeface="Arial"/>
+                        </a:rPr>
+                        <a:t/>
+                      </a:r>
+                    </a:p>
+                  </a:txBody>
+                  <a:tcPr>
+                    <a:solidFill>
+                      <a:srgbClr val="FFFFFF"/>
+                    </a:solidFill>
+                  </a:tcPr>
+                </a:tc>
+                <a:tc>
+                  <a:txBody>
+                    <a:bodyPr wrap="square"/>
+                    <a:lstStyle/>
+                    <a:p>
+                      <a:r>
+                        <a:rPr sz="1100" b="0">
+                          <a:solidFill>
+                            <a:srgbClr val="1A1A1A"/>
+                          </a:solidFill>
+                          <a:latin typeface="Arial"/>
+                        </a:rPr>
+                        <a:t>2</a:t>
+                      </a:r>
+                    </a:p>
+                  </a:txBody>
+                  <a:tcPr>
+                    <a:solidFill>
+                      <a:srgbClr val="FFFFFF"/>
+                    </a:solidFill>
+                  </a:tcPr>
+                </a:tc>
+                <a:tc>
+                  <a:txBody>
+                    <a:bodyPr wrap="square"/>
+                    <a:lstStyle/>
+                    <a:p>
+                      <a:r>
+                        <a:rPr sz="1100" b="0">
+                          <a:solidFill>
+                            <a:srgbClr val="1A1A1A"/>
+                          </a:solidFill>
+                          <a:latin typeface="Arial"/>
+                        </a:rPr>
+                        <a:t/>
+                      </a:r>
+                    </a:p>
+                  </a:txBody>
+                  <a:tcPr>
+                    <a:solidFill>
+                      <a:srgbClr val="FFFFFF"/>
+                    </a:solidFill>
+                  </a:tcPr>
+                </a:tc>
+                <a:tc>
+                  <a:txBody>
+                    <a:bodyPr wrap="square"/>
+                    <a:lstStyle/>
+                    <a:p>
+                      <a:r>
+                        <a:rPr sz="1100" b="0">
+                          <a:solidFill>
+                            <a:srgbClr val="1A1A1A"/>
+                          </a:solidFill>
+                          <a:latin typeface="Arial"/>
+                        </a:rPr>
+                        <a:t/>
+                      </a:r>
+                    </a:p>
+                  </a:txBody>
+                  <a:tcPr>
+                    <a:solidFill>
+                      <a:srgbClr val="FFFFFF"/>
+                    </a:solidFill>
+                  </a:tcPr>
+                </a:tc>
+                <a:tc>
+                  <a:txBody>
+                    <a:bodyPr wrap="square"/>
+                    <a:lstStyle/>
+                    <a:p>
+                      <a:r>
+                        <a:rPr sz="1100" b="0">
+                          <a:solidFill>
+                            <a:srgbClr val="1A1A1A"/>
+                          </a:solidFill>
+                          <a:latin typeface="Arial"/>
+                        </a:rPr>
+                        <a:t/>
+                      </a:r>
+                    </a:p>
+                  </a:txBody>
+                  <a:tcPr>
+                    <a:solidFill>
+                      <a:srgbClr val="FFFFFF"/>
+                    </a:solidFill>
+                  </a:tcPr>
+                </a:tc>
+                <a:tc>
+                  <a:txBody>
+                    <a:bodyPr wrap="square"/>
+                    <a:lstStyle/>
+                    <a:p>
+                      <a:r>
+                        <a:rPr sz="1100" b="0">
+                          <a:solidFill>
+                            <a:srgbClr val="1A1A1A"/>
+                          </a:solidFill>
+                          <a:latin typeface="Arial"/>
+                        </a:rPr>
+                        <a:t/>
+                      </a:r>
+                    </a:p>
+                  </a:txBody>
+                  <a:tcPr>
+                    <a:solidFill>
+                      <a:srgbClr val="FFFFFF"/>
+                    </a:solidFill>
+                  </a:tcPr>
+                </a:tc>
+              </a:tr>
+            </a:tbl>
+          </a:graphicData>
+        </a:graphic>
+      </p:graphicFrame>
+    </p:spTree>
+  </p:cSld>
+  <p:clrMapOvr>
+    <a:masterClrMapping/>
+  </p:clrMapOvr>
+</p:sld>
+</file>
+
+<file path=ppt/slides/slide21.xml><?xml version="1.0" encoding="utf-8"?>
+<p:sld xmlns:a="http://schemas.openxmlformats.org/drawingml/2006/main" xmlns:p="http://schemas.openxmlformats.org/presentationml/2006/main" xmlns:r="http://schemas.openxmlformats.org/officeDocument/2006/relationships">
+  <p:cSld>
+    <p:bg>
+      <p:bgPr>
+        <a:solidFill>
+          <a:srgbClr val="003DA5"/>
         </a:solidFill>
         <a:effectLst/>
       </p:bgPr>
@@ -4448,8 +8229,8 @@
         </p:nvSpPr>
         <p:spPr>
           <a:xfrm>
-            <a:off x="365760" y="2286000"/>
-            <a:ext cx="11430000" cy="1828800"/>
+            <a:off x="365760" y="347472"/>
+            <a:ext cx="7315200" cy="384048"/>
           </a:xfrm>
           <a:prstGeom prst="rect">
             <a:avLst/>
@@ -4464,13 +8245,224 @@
           <a:p>
             <a:pPr algn="l"/>
             <a:r>
-              <a:rPr sz="3600" b="1">
-                <a:solidFill>
-                  <a:srgbClr val="FFFFFF"/>
+              <a:rPr sz="900" b="1" i="0">
+                <a:solidFill>
+                  <a:srgbClr val="CCD6F0"/>
                 </a:solidFill>
                 <a:latin typeface="Arial"/>
               </a:rPr>
-              <a:t>Definition</a:t>
+              <a:t>PRAXISTRANSFER &amp; NÄCHSTE SCHRITTE</a:t>
+            </a:r>
+          </a:p>
+        </p:txBody>
+      </p:sp>
+      <p:sp>
+        <p:nvSpPr>
+          <p:cNvPr id="4" name="Rectangle 3"/>
+          <p:cNvSpPr/>
+          <p:nvPr/>
+        </p:nvSpPr>
+        <p:spPr>
+          <a:xfrm>
+            <a:off x="365760" y="804672"/>
+            <a:ext cx="8229600" cy="22860"/>
+          </a:xfrm>
+          <a:prstGeom prst="rect">
+            <a:avLst/>
+          </a:prstGeom>
+          <a:solidFill>
+            <a:srgbClr val="335CC0"/>
+          </a:solidFill>
+          <a:ln>
+            <a:noFill/>
+          </a:ln>
+        </p:spPr>
+        <p:style>
+          <a:lnRef idx="1">
+            <a:schemeClr val="accent1"/>
+          </a:lnRef>
+          <a:fillRef idx="3">
+            <a:schemeClr val="accent1"/>
+          </a:fillRef>
+          <a:effectRef idx="2">
+            <a:schemeClr val="accent1"/>
+          </a:effectRef>
+          <a:fontRef idx="minor">
+            <a:schemeClr val="lt1"/>
+          </a:fontRef>
+        </p:style>
+        <p:txBody>
+          <a:bodyPr rtlCol="0" anchor="ctr"/>
+          <a:lstStyle/>
+          <a:p>
+            <a:pPr algn="ctr"/>
+          </a:p>
+        </p:txBody>
+      </p:sp>
+      <p:sp>
+        <p:nvSpPr>
+          <p:cNvPr id="5" name="TextBox 4"/>
+          <p:cNvSpPr txBox="1"/>
+          <p:nvPr/>
+        </p:nvSpPr>
+        <p:spPr>
+          <a:xfrm>
+            <a:off x="365760" y="960120"/>
+            <a:ext cx="9144000" cy="914400"/>
+          </a:xfrm>
+          <a:prstGeom prst="rect">
+            <a:avLst/>
+          </a:prstGeom>
+          <a:noFill/>
+        </p:spPr>
+        <p:txBody>
+          <a:bodyPr wrap="square">
+            <a:spAutoFit/>
+          </a:bodyPr>
+          <a:lstStyle/>
+          <a:p>
+            <a:pPr algn="l"/>
+            <a:r>
+              <a:rPr sz="3000" b="1" i="0">
+                <a:solidFill>
+                  <a:srgbClr val="FFFFFF"/>
+                </a:solidFill>
+                <a:latin typeface="Arial"/>
+              </a:rPr>
+              <a:t>Was nehmen Sie mit?</a:t>
+            </a:r>
+          </a:p>
+        </p:txBody>
+      </p:sp>
+      <p:sp>
+        <p:nvSpPr>
+          <p:cNvPr id="6" name="TextBox 5"/>
+          <p:cNvSpPr txBox="1"/>
+          <p:nvPr/>
+        </p:nvSpPr>
+        <p:spPr>
+          <a:xfrm>
+            <a:off x="365760" y="2103120"/>
+            <a:ext cx="11430000" cy="4114800"/>
+          </a:xfrm>
+          <a:prstGeom prst="rect">
+            <a:avLst/>
+          </a:prstGeom>
+          <a:noFill/>
+        </p:spPr>
+        <p:txBody>
+          <a:bodyPr wrap="square">
+            <a:spAutoFit/>
+          </a:bodyPr>
+          <a:lstStyle/>
+          <a:p>
+            <a:pPr>
+              <a:spcBef>
+                <a:spcPts val="500"/>
+              </a:spcBef>
+            </a:pPr>
+            <a:r>
+              <a:rPr sz="1600">
+                <a:solidFill>
+                  <a:srgbClr val="E05B00"/>
+                </a:solidFill>
+                <a:latin typeface="Arial"/>
+              </a:rPr>
+              <a:t>▪  </a:t>
+            </a:r>
+            <a:r>
+              <a:rPr sz="1800">
+                <a:solidFill>
+                  <a:srgbClr val="FFFFFF"/>
+                </a:solidFill>
+                <a:latin typeface="Arial"/>
+              </a:rPr>
+              <a:t>Transferaufgabe: Wenden Sie das Gelernte in den nächsten 14 Tagen bei einem konkreten Kunden an.</a:t>
+            </a:r>
+          </a:p>
+          <a:p>
+            <a:pPr>
+              <a:spcBef>
+                <a:spcPts val="500"/>
+              </a:spcBef>
+            </a:pPr>
+            <a:r>
+              <a:rPr sz="1600">
+                <a:solidFill>
+                  <a:srgbClr val="E05B00"/>
+                </a:solidFill>
+                <a:latin typeface="Arial"/>
+              </a:rPr>
+              <a:t>▪  </a:t>
+            </a:r>
+            <a:r>
+              <a:rPr sz="1800">
+                <a:solidFill>
+                  <a:srgbClr val="FFFFFF"/>
+                </a:solidFill>
+                <a:latin typeface="Arial"/>
+              </a:rPr>
+              <a:t>Selbstcheck nach 4 Wochen: Bewerten Sie Ihre Fortschritte ehrlich.</a:t>
+            </a:r>
+          </a:p>
+          <a:p>
+            <a:pPr>
+              <a:spcBef>
+                <a:spcPts val="500"/>
+              </a:spcBef>
+            </a:pPr>
+            <a:r>
+              <a:rPr sz="1600">
+                <a:solidFill>
+                  <a:srgbClr val="E05B00"/>
+                </a:solidFill>
+                <a:latin typeface="Arial"/>
+              </a:rPr>
+              <a:t>▪  </a:t>
+            </a:r>
+            <a:r>
+              <a:rPr sz="1800">
+                <a:solidFill>
+                  <a:srgbClr val="FFFFFF"/>
+                </a:solidFill>
+                <a:latin typeface="Arial"/>
+              </a:rPr>
+              <a:t>Nächste Module: M15</a:t>
+            </a:r>
+          </a:p>
+        </p:txBody>
+      </p:sp>
+      <p:sp>
+        <p:nvSpPr>
+          <p:cNvPr id="7" name="TextBox 6"/>
+          <p:cNvSpPr txBox="1"/>
+          <p:nvPr/>
+        </p:nvSpPr>
+        <p:spPr>
+          <a:xfrm>
+            <a:off x="365760" y="6309360"/>
+            <a:ext cx="11430000" cy="365760"/>
+          </a:xfrm>
+          <a:prstGeom prst="rect">
+            <a:avLst/>
+          </a:prstGeom>
+          <a:noFill/>
+        </p:spPr>
+        <p:txBody>
+          <a:bodyPr wrap="square">
+            <a:spAutoFit/>
+          </a:bodyPr>
+          <a:lstStyle/>
+          <a:p>
+            <a:pPr algn="l"/>
+            <a:r>
+              <a:rPr sz="900" b="0" i="0">
+                <a:solidFill>
+                  <a:srgbClr val="889ACC"/>
+                </a:solidFill>
+                <a:latin typeface="Arial"/>
+              </a:rPr>
+              <a:t>M16 · NMZ-Optimierung  ·  v0.4  ·  Benedikt Zoller Coaching</a:t>
             </a:r>
           </a:p>
         </p:txBody>
@@ -4483,7 +8475,7 @@
 </p:sld>
 </file>
 
-<file path=ppt/slides/slide4.xml><?xml version="1.0" encoding="utf-8"?>
+<file path=ppt/slides/slide3.xml><?xml version="1.0" encoding="utf-8"?>
 <p:sld xmlns:a="http://schemas.openxmlformats.org/drawingml/2006/main" xmlns:p="http://schemas.openxmlformats.org/presentationml/2006/main" xmlns:r="http://schemas.openxmlformats.org/officeDocument/2006/relationships">
   <p:cSld>
     <p:bg>
@@ -4552,8 +8544,8 @@
         </p:nvSpPr>
         <p:spPr>
           <a:xfrm>
-            <a:off x="365760" y="2286000"/>
-            <a:ext cx="11430000" cy="1828800"/>
+            <a:off x="365760" y="2011680"/>
+            <a:ext cx="11430000" cy="2011680"/>
           </a:xfrm>
           <a:prstGeom prst="rect">
             <a:avLst/>
@@ -4568,17 +8560,501 @@
           <a:p>
             <a:pPr algn="l"/>
             <a:r>
-              <a:rPr sz="3600" b="1">
+              <a:rPr sz="3600" b="1" i="0">
                 <a:solidFill>
                   <a:srgbClr val="FFFFFF"/>
                 </a:solidFill>
                 <a:latin typeface="Arial"/>
               </a:rPr>
-              <a:t>Warum die NMZ dem DB überlegen ist</a:t>
-            </a:r>
-          </a:p>
-        </p:txBody>
-      </p:sp>
+              <a:t>Definition</a:t>
+            </a:r>
+          </a:p>
+        </p:txBody>
+      </p:sp>
+    </p:spTree>
+  </p:cSld>
+  <p:clrMapOvr>
+    <a:masterClrMapping/>
+  </p:clrMapOvr>
+</p:sld>
+</file>
+
+<file path=ppt/slides/slide4.xml><?xml version="1.0" encoding="utf-8"?>
+<p:sld xmlns:a="http://schemas.openxmlformats.org/drawingml/2006/main" xmlns:p="http://schemas.openxmlformats.org/presentationml/2006/main" xmlns:r="http://schemas.openxmlformats.org/officeDocument/2006/relationships">
+  <p:cSld>
+    <p:bg>
+      <p:bgPr>
+        <a:solidFill>
+          <a:srgbClr val="FFFFFF"/>
+        </a:solidFill>
+        <a:effectLst/>
+      </p:bgPr>
+    </p:bg>
+    <p:spTree>
+      <p:nvGrpSpPr>
+        <p:cNvPr id="1" name=""/>
+        <p:cNvGrpSpPr/>
+        <p:nvPr/>
+      </p:nvGrpSpPr>
+      <p:grpSpPr/>
+      <p:sp>
+        <p:nvSpPr>
+          <p:cNvPr id="2" name="Rectangle 1"/>
+          <p:cNvSpPr/>
+          <p:nvPr/>
+        </p:nvSpPr>
+        <p:spPr>
+          <a:xfrm>
+            <a:off x="0" y="0"/>
+            <a:ext cx="73152" cy="6858000"/>
+          </a:xfrm>
+          <a:prstGeom prst="rect">
+            <a:avLst/>
+          </a:prstGeom>
+          <a:solidFill>
+            <a:srgbClr val="003DA5"/>
+          </a:solidFill>
+          <a:ln>
+            <a:noFill/>
+          </a:ln>
+        </p:spPr>
+        <p:style>
+          <a:lnRef idx="1">
+            <a:schemeClr val="accent1"/>
+          </a:lnRef>
+          <a:fillRef idx="3">
+            <a:schemeClr val="accent1"/>
+          </a:fillRef>
+          <a:effectRef idx="2">
+            <a:schemeClr val="accent1"/>
+          </a:effectRef>
+          <a:fontRef idx="minor">
+            <a:schemeClr val="lt1"/>
+          </a:fontRef>
+        </p:style>
+        <p:txBody>
+          <a:bodyPr rtlCol="0" anchor="ctr"/>
+          <a:lstStyle/>
+          <a:p>
+            <a:pPr algn="ctr"/>
+          </a:p>
+        </p:txBody>
+      </p:sp>
+      <p:sp>
+        <p:nvSpPr>
+          <p:cNvPr id="3" name="TextBox 2"/>
+          <p:cNvSpPr txBox="1"/>
+          <p:nvPr/>
+        </p:nvSpPr>
+        <p:spPr>
+          <a:xfrm>
+            <a:off x="228600" y="182880"/>
+            <a:ext cx="11430000" cy="320040"/>
+          </a:xfrm>
+          <a:prstGeom prst="rect">
+            <a:avLst/>
+          </a:prstGeom>
+          <a:noFill/>
+        </p:spPr>
+        <p:txBody>
+          <a:bodyPr wrap="square">
+            <a:spAutoFit/>
+          </a:bodyPr>
+          <a:lstStyle/>
+          <a:p>
+            <a:pPr algn="l"/>
+            <a:r>
+              <a:rPr sz="900" b="0" i="0">
+                <a:solidFill>
+                  <a:srgbClr val="556575"/>
+                </a:solidFill>
+                <a:latin typeface="Arial"/>
+              </a:rPr>
+              <a:t>M16 · Modulinhalte</a:t>
+            </a:r>
+          </a:p>
+        </p:txBody>
+      </p:sp>
+      <p:sp>
+        <p:nvSpPr>
+          <p:cNvPr id="4" name="TextBox 3"/>
+          <p:cNvSpPr txBox="1"/>
+          <p:nvPr/>
+        </p:nvSpPr>
+        <p:spPr>
+          <a:xfrm>
+            <a:off x="365760" y="274320"/>
+            <a:ext cx="11430000" cy="777240"/>
+          </a:xfrm>
+          <a:prstGeom prst="rect">
+            <a:avLst/>
+          </a:prstGeom>
+          <a:noFill/>
+        </p:spPr>
+        <p:txBody>
+          <a:bodyPr wrap="square">
+            <a:spAutoFit/>
+          </a:bodyPr>
+          <a:lstStyle/>
+          <a:p>
+            <a:pPr algn="l"/>
+            <a:r>
+              <a:rPr sz="2200" b="1" i="0">
+                <a:solidFill>
+                  <a:srgbClr val="003DA5"/>
+                </a:solidFill>
+                <a:latin typeface="Arial"/>
+              </a:rPr>
+              <a:t>Definition</a:t>
+            </a:r>
+          </a:p>
+        </p:txBody>
+      </p:sp>
+      <p:sp>
+        <p:nvSpPr>
+          <p:cNvPr id="5" name="Rectangle 4"/>
+          <p:cNvSpPr/>
+          <p:nvPr/>
+        </p:nvSpPr>
+        <p:spPr>
+          <a:xfrm>
+            <a:off x="365760" y="1005840"/>
+            <a:ext cx="11430000" cy="27432"/>
+          </a:xfrm>
+          <a:prstGeom prst="rect">
+            <a:avLst/>
+          </a:prstGeom>
+          <a:solidFill>
+            <a:srgbClr val="D1D5DB"/>
+          </a:solidFill>
+          <a:ln>
+            <a:noFill/>
+          </a:ln>
+        </p:spPr>
+        <p:style>
+          <a:lnRef idx="1">
+            <a:schemeClr val="accent1"/>
+          </a:lnRef>
+          <a:fillRef idx="3">
+            <a:schemeClr val="accent1"/>
+          </a:fillRef>
+          <a:effectRef idx="2">
+            <a:schemeClr val="accent1"/>
+          </a:effectRef>
+          <a:fontRef idx="minor">
+            <a:schemeClr val="lt1"/>
+          </a:fontRef>
+        </p:style>
+        <p:txBody>
+          <a:bodyPr rtlCol="0" anchor="ctr"/>
+          <a:lstStyle/>
+          <a:p>
+            <a:pPr algn="ctr"/>
+          </a:p>
+        </p:txBody>
+      </p:sp>
+      <p:graphicFrame>
+        <p:nvGraphicFramePr>
+          <p:cNvPr id="6" name="Table 5"/>
+          <p:cNvGraphicFramePr>
+            <a:graphicFrameLocks noGrp="1"/>
+          </p:cNvGraphicFramePr>
+          <p:nvPr/>
+        </p:nvGraphicFramePr>
+        <p:xfrm>
+          <a:off x="365760" y="1143000"/>
+          <a:ext cx="11430000" cy="2852928"/>
+        </p:xfrm>
+        <a:graphic>
+          <a:graphicData uri="http://schemas.openxmlformats.org/drawingml/2006/table">
+            <a:tbl>
+              <a:tblPr firstRow="1" bandRow="1">
+                <a:tableStyleId>{5C22544A-7EE6-4342-B048-85BDC9FD1C3A}</a:tableStyleId>
+              </a:tblPr>
+              <a:tblGrid>
+                <a:gridCol w="5715000"/>
+                <a:gridCol w="5715000"/>
+              </a:tblGrid>
+              <a:tr h="475488">
+                <a:tc>
+                  <a:txBody>
+                    <a:bodyPr wrap="square"/>
+                    <a:lstStyle/>
+                    <a:p>
+                      <a:r>
+                        <a:rPr sz="1100" b="1">
+                          <a:solidFill>
+                            <a:srgbClr val="FFFFFF"/>
+                          </a:solidFill>
+                          <a:latin typeface="Arial"/>
+                        </a:rPr>
+                        <a:t>NMZ-Wert</a:t>
+                      </a:r>
+                    </a:p>
+                  </a:txBody>
+                  <a:tcPr>
+                    <a:solidFill>
+                      <a:srgbClr val="003DA5"/>
+                    </a:solidFill>
+                  </a:tcPr>
+                </a:tc>
+                <a:tc>
+                  <a:txBody>
+                    <a:bodyPr wrap="square"/>
+                    <a:lstStyle/>
+                    <a:p>
+                      <a:r>
+                        <a:rPr sz="1100" b="1">
+                          <a:solidFill>
+                            <a:srgbClr val="FFFFFF"/>
+                          </a:solidFill>
+                          <a:latin typeface="Arial"/>
+                        </a:rPr>
+                        <a:t>Interpretation</a:t>
+                      </a:r>
+                    </a:p>
+                  </a:txBody>
+                  <a:tcPr>
+                    <a:solidFill>
+                      <a:srgbClr val="003DA5"/>
+                    </a:solidFill>
+                  </a:tcPr>
+                </a:tc>
+              </a:tr>
+              <a:tr h="475488">
+                <a:tc>
+                  <a:txBody>
+                    <a:bodyPr wrap="square"/>
+                    <a:lstStyle/>
+                    <a:p>
+                      <a:r>
+                        <a:rPr sz="1100" b="0">
+                          <a:solidFill>
+                            <a:srgbClr val="1A1A1A"/>
+                          </a:solidFill>
+                          <a:latin typeface="Arial"/>
+                        </a:rPr>
+                        <a:t>&gt; 1,5 %</a:t>
+                      </a:r>
+                    </a:p>
+                  </a:txBody>
+                  <a:tcPr>
+                    <a:solidFill>
+                      <a:srgbClr val="FFFFFF"/>
+                    </a:solidFill>
+                  </a:tcPr>
+                </a:tc>
+                <a:tc>
+                  <a:txBody>
+                    <a:bodyPr wrap="square"/>
+                    <a:lstStyle/>
+                    <a:p>
+                      <a:r>
+                        <a:rPr sz="1100" b="0">
+                          <a:solidFill>
+                            <a:srgbClr val="1A1A1A"/>
+                          </a:solidFill>
+                          <a:latin typeface="Arial"/>
+                        </a:rPr>
+                        <a:t>Sehr gut – rentable, ertragstarke Beziehung</a:t>
+                      </a:r>
+                    </a:p>
+                  </a:txBody>
+                  <a:tcPr>
+                    <a:solidFill>
+                      <a:srgbClr val="FFFFFF"/>
+                    </a:solidFill>
+                  </a:tcPr>
+                </a:tc>
+              </a:tr>
+              <a:tr h="475488">
+                <a:tc>
+                  <a:txBody>
+                    <a:bodyPr wrap="square"/>
+                    <a:lstStyle/>
+                    <a:p>
+                      <a:r>
+                        <a:rPr sz="1100" b="0">
+                          <a:solidFill>
+                            <a:srgbClr val="1A1A1A"/>
+                          </a:solidFill>
+                          <a:latin typeface="Arial"/>
+                        </a:rPr>
+                        <a:t>1,0–1,5 %</a:t>
+                      </a:r>
+                    </a:p>
+                  </a:txBody>
+                  <a:tcPr>
+                    <a:solidFill>
+                      <a:srgbClr val="F4F6FA"/>
+                    </a:solidFill>
+                  </a:tcPr>
+                </a:tc>
+                <a:tc>
+                  <a:txBody>
+                    <a:bodyPr wrap="square"/>
+                    <a:lstStyle/>
+                    <a:p>
+                      <a:r>
+                        <a:rPr sz="1100" b="0">
+                          <a:solidFill>
+                            <a:srgbClr val="1A1A1A"/>
+                          </a:solidFill>
+                          <a:latin typeface="Arial"/>
+                        </a:rPr>
+                        <a:t>Gut – im Zielpfad</a:t>
+                      </a:r>
+                    </a:p>
+                  </a:txBody>
+                  <a:tcPr>
+                    <a:solidFill>
+                      <a:srgbClr val="F4F6FA"/>
+                    </a:solidFill>
+                  </a:tcPr>
+                </a:tc>
+              </a:tr>
+              <a:tr h="475488">
+                <a:tc>
+                  <a:txBody>
+                    <a:bodyPr wrap="square"/>
+                    <a:lstStyle/>
+                    <a:p>
+                      <a:r>
+                        <a:rPr sz="1100" b="0">
+                          <a:solidFill>
+                            <a:srgbClr val="1A1A1A"/>
+                          </a:solidFill>
+                          <a:latin typeface="Arial"/>
+                        </a:rPr>
+                        <a:t>0,5–1,0 %</a:t>
+                      </a:r>
+                    </a:p>
+                  </a:txBody>
+                  <a:tcPr>
+                    <a:solidFill>
+                      <a:srgbClr val="FFFFFF"/>
+                    </a:solidFill>
+                  </a:tcPr>
+                </a:tc>
+                <a:tc>
+                  <a:txBody>
+                    <a:bodyPr wrap="square"/>
+                    <a:lstStyle/>
+                    <a:p>
+                      <a:r>
+                        <a:rPr sz="1100" b="0">
+                          <a:solidFill>
+                            <a:srgbClr val="1A1A1A"/>
+                          </a:solidFill>
+                          <a:latin typeface="Arial"/>
+                        </a:rPr>
+                        <a:t>Ausbaufähig – Handlungsbedarf, Hebel prüfen</a:t>
+                      </a:r>
+                    </a:p>
+                  </a:txBody>
+                  <a:tcPr>
+                    <a:solidFill>
+                      <a:srgbClr val="FFFFFF"/>
+                    </a:solidFill>
+                  </a:tcPr>
+                </a:tc>
+              </a:tr>
+              <a:tr h="475488">
+                <a:tc>
+                  <a:txBody>
+                    <a:bodyPr wrap="square"/>
+                    <a:lstStyle/>
+                    <a:p>
+                      <a:r>
+                        <a:rPr sz="1100" b="0">
+                          <a:solidFill>
+                            <a:srgbClr val="1A1A1A"/>
+                          </a:solidFill>
+                          <a:latin typeface="Arial"/>
+                        </a:rPr>
+                        <a:t>&lt; 0,5 %</a:t>
+                      </a:r>
+                    </a:p>
+                  </a:txBody>
+                  <a:tcPr>
+                    <a:solidFill>
+                      <a:srgbClr val="F4F6FA"/>
+                    </a:solidFill>
+                  </a:tcPr>
+                </a:tc>
+                <a:tc>
+                  <a:txBody>
+                    <a:bodyPr wrap="square"/>
+                    <a:lstStyle/>
+                    <a:p>
+                      <a:r>
+                        <a:rPr sz="1100" b="0">
+                          <a:solidFill>
+                            <a:srgbClr val="1A1A1A"/>
+                          </a:solidFill>
+                          <a:latin typeface="Arial"/>
+                        </a:rPr>
+                        <a:t>Kritisch – entweder Pricing anpassen, Cross-Selling intensivieren oder Exit prüfen</a:t>
+                      </a:r>
+                    </a:p>
+                  </a:txBody>
+                  <a:tcPr>
+                    <a:solidFill>
+                      <a:srgbClr val="F4F6FA"/>
+                    </a:solidFill>
+                  </a:tcPr>
+                </a:tc>
+              </a:tr>
+              <a:tr h="475488">
+                <a:tc>
+                  <a:txBody>
+                    <a:bodyPr wrap="square"/>
+                    <a:lstStyle/>
+                    <a:p>
+                      <a:r>
+                        <a:rPr sz="1100" b="0">
+                          <a:solidFill>
+                            <a:srgbClr val="1A1A1A"/>
+                          </a:solidFill>
+                          <a:latin typeface="Arial"/>
+                        </a:rPr>
+                        <a:t>Negativ</a:t>
+                      </a:r>
+                    </a:p>
+                  </a:txBody>
+                  <a:tcPr>
+                    <a:solidFill>
+                      <a:srgbClr val="FFFFFF"/>
+                    </a:solidFill>
+                  </a:tcPr>
+                </a:tc>
+                <a:tc>
+                  <a:txBody>
+                    <a:bodyPr wrap="square"/>
+                    <a:lstStyle/>
+                    <a:p>
+                      <a:r>
+                        <a:rPr sz="1100" b="0">
+                          <a:solidFill>
+                            <a:srgbClr val="1A1A1A"/>
+                          </a:solidFill>
+                          <a:latin typeface="Arial"/>
+                        </a:rPr>
+                        <a:t>Verlustbringend – sofortiger Handlungsbedarf</a:t>
+                      </a:r>
+                    </a:p>
+                  </a:txBody>
+                  <a:tcPr>
+                    <a:solidFill>
+                      <a:srgbClr val="FFFFFF"/>
+                    </a:solidFill>
+                  </a:tcPr>
+                </a:tc>
+              </a:tr>
+            </a:tbl>
+          </a:graphicData>
+        </a:graphic>
+      </p:graphicFrame>
     </p:spTree>
   </p:cSld>
   <p:clrMapOvr>
@@ -4656,8 +9132,8 @@
         </p:nvSpPr>
         <p:spPr>
           <a:xfrm>
-            <a:off x="365760" y="2286000"/>
-            <a:ext cx="11430000" cy="1828800"/>
+            <a:off x="365760" y="2011680"/>
+            <a:ext cx="11430000" cy="2011680"/>
           </a:xfrm>
           <a:prstGeom prst="rect">
             <a:avLst/>
@@ -4672,13 +9148,13 @@
           <a:p>
             <a:pPr algn="l"/>
             <a:r>
-              <a:rPr sz="3600" b="1">
+              <a:rPr sz="3600" b="1" i="0">
                 <a:solidFill>
                   <a:srgbClr val="FFFFFF"/>
                 </a:solidFill>
                 <a:latin typeface="Arial"/>
               </a:rPr>
-              <a:t>Wo finde ich meine NMZ-Daten?</a:t>
+              <a:t>Warum die NMZ dem DB überlegen ist</a:t>
             </a:r>
           </a:p>
         </p:txBody>
@@ -4692,6 +9168,261 @@
 </file>
 
 <file path=ppt/slides/slide6.xml><?xml version="1.0" encoding="utf-8"?>
+<p:sld xmlns:a="http://schemas.openxmlformats.org/drawingml/2006/main" xmlns:p="http://schemas.openxmlformats.org/presentationml/2006/main" xmlns:r="http://schemas.openxmlformats.org/officeDocument/2006/relationships">
+  <p:cSld>
+    <p:bg>
+      <p:bgPr>
+        <a:solidFill>
+          <a:srgbClr val="FFFFFF"/>
+        </a:solidFill>
+        <a:effectLst/>
+      </p:bgPr>
+    </p:bg>
+    <p:spTree>
+      <p:nvGrpSpPr>
+        <p:cNvPr id="1" name=""/>
+        <p:cNvGrpSpPr/>
+        <p:nvPr/>
+      </p:nvGrpSpPr>
+      <p:grpSpPr/>
+      <p:sp>
+        <p:nvSpPr>
+          <p:cNvPr id="2" name="Rectangle 1"/>
+          <p:cNvSpPr/>
+          <p:nvPr/>
+        </p:nvSpPr>
+        <p:spPr>
+          <a:xfrm>
+            <a:off x="0" y="0"/>
+            <a:ext cx="73152" cy="6858000"/>
+          </a:xfrm>
+          <a:prstGeom prst="rect">
+            <a:avLst/>
+          </a:prstGeom>
+          <a:solidFill>
+            <a:srgbClr val="003DA5"/>
+          </a:solidFill>
+          <a:ln>
+            <a:noFill/>
+          </a:ln>
+        </p:spPr>
+        <p:style>
+          <a:lnRef idx="1">
+            <a:schemeClr val="accent1"/>
+          </a:lnRef>
+          <a:fillRef idx="3">
+            <a:schemeClr val="accent1"/>
+          </a:fillRef>
+          <a:effectRef idx="2">
+            <a:schemeClr val="accent1"/>
+          </a:effectRef>
+          <a:fontRef idx="minor">
+            <a:schemeClr val="lt1"/>
+          </a:fontRef>
+        </p:style>
+        <p:txBody>
+          <a:bodyPr rtlCol="0" anchor="ctr"/>
+          <a:lstStyle/>
+          <a:p>
+            <a:pPr algn="ctr"/>
+          </a:p>
+        </p:txBody>
+      </p:sp>
+      <p:sp>
+        <p:nvSpPr>
+          <p:cNvPr id="3" name="TextBox 2"/>
+          <p:cNvSpPr txBox="1"/>
+          <p:nvPr/>
+        </p:nvSpPr>
+        <p:spPr>
+          <a:xfrm>
+            <a:off x="228600" y="182880"/>
+            <a:ext cx="11430000" cy="320040"/>
+          </a:xfrm>
+          <a:prstGeom prst="rect">
+            <a:avLst/>
+          </a:prstGeom>
+          <a:noFill/>
+        </p:spPr>
+        <p:txBody>
+          <a:bodyPr wrap="square">
+            <a:spAutoFit/>
+          </a:bodyPr>
+          <a:lstStyle/>
+          <a:p>
+            <a:pPr algn="l"/>
+            <a:r>
+              <a:rPr sz="900" b="0" i="0">
+                <a:solidFill>
+                  <a:srgbClr val="556575"/>
+                </a:solidFill>
+                <a:latin typeface="Arial"/>
+              </a:rPr>
+              <a:t>M16 · Modulinhalte</a:t>
+            </a:r>
+          </a:p>
+        </p:txBody>
+      </p:sp>
+      <p:sp>
+        <p:nvSpPr>
+          <p:cNvPr id="4" name="TextBox 3"/>
+          <p:cNvSpPr txBox="1"/>
+          <p:nvPr/>
+        </p:nvSpPr>
+        <p:spPr>
+          <a:xfrm>
+            <a:off x="365760" y="274320"/>
+            <a:ext cx="11430000" cy="777240"/>
+          </a:xfrm>
+          <a:prstGeom prst="rect">
+            <a:avLst/>
+          </a:prstGeom>
+          <a:noFill/>
+        </p:spPr>
+        <p:txBody>
+          <a:bodyPr wrap="square">
+            <a:spAutoFit/>
+          </a:bodyPr>
+          <a:lstStyle/>
+          <a:p>
+            <a:pPr algn="l"/>
+            <a:r>
+              <a:rPr sz="2200" b="1" i="0">
+                <a:solidFill>
+                  <a:srgbClr val="003DA5"/>
+                </a:solidFill>
+                <a:latin typeface="Arial"/>
+              </a:rPr>
+              <a:t>Warum die NMZ dem DB überlegen ist</a:t>
+            </a:r>
+          </a:p>
+        </p:txBody>
+      </p:sp>
+      <p:sp>
+        <p:nvSpPr>
+          <p:cNvPr id="5" name="Rectangle 4"/>
+          <p:cNvSpPr/>
+          <p:nvPr/>
+        </p:nvSpPr>
+        <p:spPr>
+          <a:xfrm>
+            <a:off x="365760" y="1005840"/>
+            <a:ext cx="11430000" cy="27432"/>
+          </a:xfrm>
+          <a:prstGeom prst="rect">
+            <a:avLst/>
+          </a:prstGeom>
+          <a:solidFill>
+            <a:srgbClr val="D1D5DB"/>
+          </a:solidFill>
+          <a:ln>
+            <a:noFill/>
+          </a:ln>
+        </p:spPr>
+        <p:style>
+          <a:lnRef idx="1">
+            <a:schemeClr val="accent1"/>
+          </a:lnRef>
+          <a:fillRef idx="3">
+            <a:schemeClr val="accent1"/>
+          </a:fillRef>
+          <a:effectRef idx="2">
+            <a:schemeClr val="accent1"/>
+          </a:effectRef>
+          <a:fontRef idx="minor">
+            <a:schemeClr val="lt1"/>
+          </a:fontRef>
+        </p:style>
+        <p:txBody>
+          <a:bodyPr rtlCol="0" anchor="ctr"/>
+          <a:lstStyle/>
+          <a:p>
+            <a:pPr algn="ctr"/>
+          </a:p>
+        </p:txBody>
+      </p:sp>
+      <p:sp>
+        <p:nvSpPr>
+          <p:cNvPr id="6" name="TextBox 5"/>
+          <p:cNvSpPr txBox="1"/>
+          <p:nvPr/>
+        </p:nvSpPr>
+        <p:spPr>
+          <a:xfrm>
+            <a:off x="365760" y="1143000"/>
+            <a:ext cx="11430000" cy="5212080"/>
+          </a:xfrm>
+          <a:prstGeom prst="rect">
+            <a:avLst/>
+          </a:prstGeom>
+          <a:noFill/>
+        </p:spPr>
+        <p:txBody>
+          <a:bodyPr wrap="square">
+            <a:spAutoFit/>
+          </a:bodyPr>
+          <a:lstStyle/>
+          <a:p>
+            <a:pPr>
+              <a:spcBef>
+                <a:spcPts val="500"/>
+              </a:spcBef>
+            </a:pPr>
+            <a:r>
+              <a:rPr sz="1500">
+                <a:solidFill>
+                  <a:srgbClr val="003DA5"/>
+                </a:solidFill>
+                <a:latin typeface="Arial"/>
+              </a:rPr>
+              <a:t>▪  </a:t>
+            </a:r>
+            <a:r>
+              <a:rPr sz="1700">
+                <a:solidFill>
+                  <a:srgbClr val="1A1A1A"/>
+                </a:solidFill>
+                <a:latin typeface="Arial"/>
+              </a:rPr>
+              <a:t>Der absolute Deckungsbeitrag sagt: „Dieser Kunde bringt 12.000 EUR." Die NMZ sagt: „Dieser Kunde bringt 1,0 % – bei doppeltem Volumen wäre dasselbe Geld besser…</a:t>
+            </a:r>
+          </a:p>
+          <a:p>
+            <a:pPr>
+              <a:spcBef>
+                <a:spcPts val="500"/>
+              </a:spcBef>
+            </a:pPr>
+            <a:r>
+              <a:rPr sz="1500">
+                <a:solidFill>
+                  <a:srgbClr val="003DA5"/>
+                </a:solidFill>
+                <a:latin typeface="Arial"/>
+              </a:rPr>
+              <a:t>▪  </a:t>
+            </a:r>
+            <a:r>
+              <a:rPr sz="1700">
+                <a:solidFill>
+                  <a:srgbClr val="1A1A1A"/>
+                </a:solidFill>
+                <a:latin typeface="Arial"/>
+              </a:rPr>
+              <a:t>Rolfes (1999) betont, dass Banken ohne normierte Ertragskennzahlen systematisch Kapital in renditeschwache Engagements lenken, weil die absoluten Beträge groß…</a:t>
+            </a:r>
+          </a:p>
+        </p:txBody>
+      </p:sp>
+    </p:spTree>
+  </p:cSld>
+  <p:clrMapOvr>
+    <a:masterClrMapping/>
+  </p:clrMapOvr>
+</p:sld>
+</file>
+
+<file path=ppt/slides/slide7.xml><?xml version="1.0" encoding="utf-8"?>
 <p:sld xmlns:a="http://schemas.openxmlformats.org/drawingml/2006/main" xmlns:p="http://schemas.openxmlformats.org/presentationml/2006/main" xmlns:r="http://schemas.openxmlformats.org/officeDocument/2006/relationships">
   <p:cSld>
     <p:bg>
@@ -4760,8 +9491,8 @@
         </p:nvSpPr>
         <p:spPr>
           <a:xfrm>
-            <a:off x="365760" y="2286000"/>
-            <a:ext cx="11430000" cy="1828800"/>
+            <a:off x="365760" y="2011680"/>
+            <a:ext cx="11430000" cy="2011680"/>
           </a:xfrm>
           <a:prstGeom prst="rect">
             <a:avLst/>
@@ -4776,13 +9507,13 @@
           <a:p>
             <a:pPr algn="l"/>
             <a:r>
-              <a:rPr sz="3600" b="1">
+              <a:rPr sz="3600" b="1" i="0">
                 <a:solidFill>
                   <a:srgbClr val="FFFFFF"/>
                 </a:solidFill>
                 <a:latin typeface="Arial"/>
               </a:rPr>
-              <a:t>Leseübung: NMZ-Ranking interpretieren</a:t>
+              <a:t>Wo finde ich meine NMZ-Daten?</a:t>
             </a:r>
           </a:p>
         </p:txBody>
@@ -4795,7 +9526,556 @@
 </p:sld>
 </file>
 
-<file path=ppt/slides/slide7.xml><?xml version="1.0" encoding="utf-8"?>
+<file path=ppt/slides/slide8.xml><?xml version="1.0" encoding="utf-8"?>
+<p:sld xmlns:a="http://schemas.openxmlformats.org/drawingml/2006/main" xmlns:p="http://schemas.openxmlformats.org/presentationml/2006/main" xmlns:r="http://schemas.openxmlformats.org/officeDocument/2006/relationships">
+  <p:cSld>
+    <p:bg>
+      <p:bgPr>
+        <a:solidFill>
+          <a:srgbClr val="FFFFFF"/>
+        </a:solidFill>
+        <a:effectLst/>
+      </p:bgPr>
+    </p:bg>
+    <p:spTree>
+      <p:nvGrpSpPr>
+        <p:cNvPr id="1" name=""/>
+        <p:cNvGrpSpPr/>
+        <p:nvPr/>
+      </p:nvGrpSpPr>
+      <p:grpSpPr/>
+      <p:sp>
+        <p:nvSpPr>
+          <p:cNvPr id="2" name="Rectangle 1"/>
+          <p:cNvSpPr/>
+          <p:nvPr/>
+        </p:nvSpPr>
+        <p:spPr>
+          <a:xfrm>
+            <a:off x="0" y="0"/>
+            <a:ext cx="73152" cy="6858000"/>
+          </a:xfrm>
+          <a:prstGeom prst="rect">
+            <a:avLst/>
+          </a:prstGeom>
+          <a:solidFill>
+            <a:srgbClr val="003DA5"/>
+          </a:solidFill>
+          <a:ln>
+            <a:noFill/>
+          </a:ln>
+        </p:spPr>
+        <p:style>
+          <a:lnRef idx="1">
+            <a:schemeClr val="accent1"/>
+          </a:lnRef>
+          <a:fillRef idx="3">
+            <a:schemeClr val="accent1"/>
+          </a:fillRef>
+          <a:effectRef idx="2">
+            <a:schemeClr val="accent1"/>
+          </a:effectRef>
+          <a:fontRef idx="minor">
+            <a:schemeClr val="lt1"/>
+          </a:fontRef>
+        </p:style>
+        <p:txBody>
+          <a:bodyPr rtlCol="0" anchor="ctr"/>
+          <a:lstStyle/>
+          <a:p>
+            <a:pPr algn="ctr"/>
+          </a:p>
+        </p:txBody>
+      </p:sp>
+      <p:sp>
+        <p:nvSpPr>
+          <p:cNvPr id="3" name="TextBox 2"/>
+          <p:cNvSpPr txBox="1"/>
+          <p:nvPr/>
+        </p:nvSpPr>
+        <p:spPr>
+          <a:xfrm>
+            <a:off x="228600" y="182880"/>
+            <a:ext cx="11430000" cy="320040"/>
+          </a:xfrm>
+          <a:prstGeom prst="rect">
+            <a:avLst/>
+          </a:prstGeom>
+          <a:noFill/>
+        </p:spPr>
+        <p:txBody>
+          <a:bodyPr wrap="square">
+            <a:spAutoFit/>
+          </a:bodyPr>
+          <a:lstStyle/>
+          <a:p>
+            <a:pPr algn="l"/>
+            <a:r>
+              <a:rPr sz="900" b="0" i="0">
+                <a:solidFill>
+                  <a:srgbClr val="556575"/>
+                </a:solidFill>
+                <a:latin typeface="Arial"/>
+              </a:rPr>
+              <a:t>M16 · 4.3 NMZ-Berichte in agree lesen</a:t>
+            </a:r>
+          </a:p>
+        </p:txBody>
+      </p:sp>
+      <p:sp>
+        <p:nvSpPr>
+          <p:cNvPr id="4" name="TextBox 3"/>
+          <p:cNvSpPr txBox="1"/>
+          <p:nvPr/>
+        </p:nvSpPr>
+        <p:spPr>
+          <a:xfrm>
+            <a:off x="365760" y="274320"/>
+            <a:ext cx="11430000" cy="777240"/>
+          </a:xfrm>
+          <a:prstGeom prst="rect">
+            <a:avLst/>
+          </a:prstGeom>
+          <a:noFill/>
+        </p:spPr>
+        <p:txBody>
+          <a:bodyPr wrap="square">
+            <a:spAutoFit/>
+          </a:bodyPr>
+          <a:lstStyle/>
+          <a:p>
+            <a:pPr algn="l"/>
+            <a:r>
+              <a:rPr sz="2200" b="1" i="0">
+                <a:solidFill>
+                  <a:srgbClr val="003DA5"/>
+                </a:solidFill>
+                <a:latin typeface="Arial"/>
+              </a:rPr>
+              <a:t>Wo finde ich meine NMZ-Daten?</a:t>
+            </a:r>
+          </a:p>
+        </p:txBody>
+      </p:sp>
+      <p:sp>
+        <p:nvSpPr>
+          <p:cNvPr id="5" name="Rectangle 4"/>
+          <p:cNvSpPr/>
+          <p:nvPr/>
+        </p:nvSpPr>
+        <p:spPr>
+          <a:xfrm>
+            <a:off x="365760" y="1005840"/>
+            <a:ext cx="11430000" cy="27432"/>
+          </a:xfrm>
+          <a:prstGeom prst="rect">
+            <a:avLst/>
+          </a:prstGeom>
+          <a:solidFill>
+            <a:srgbClr val="D1D5DB"/>
+          </a:solidFill>
+          <a:ln>
+            <a:noFill/>
+          </a:ln>
+        </p:spPr>
+        <p:style>
+          <a:lnRef idx="1">
+            <a:schemeClr val="accent1"/>
+          </a:lnRef>
+          <a:fillRef idx="3">
+            <a:schemeClr val="accent1"/>
+          </a:fillRef>
+          <a:effectRef idx="2">
+            <a:schemeClr val="accent1"/>
+          </a:effectRef>
+          <a:fontRef idx="minor">
+            <a:schemeClr val="lt1"/>
+          </a:fontRef>
+        </p:style>
+        <p:txBody>
+          <a:bodyPr rtlCol="0" anchor="ctr"/>
+          <a:lstStyle/>
+          <a:p>
+            <a:pPr algn="ctr"/>
+          </a:p>
+        </p:txBody>
+      </p:sp>
+      <p:graphicFrame>
+        <p:nvGraphicFramePr>
+          <p:cNvPr id="6" name="Table 5"/>
+          <p:cNvGraphicFramePr>
+            <a:graphicFrameLocks noGrp="1"/>
+          </p:cNvGraphicFramePr>
+          <p:nvPr/>
+        </p:nvGraphicFramePr>
+        <p:xfrm>
+          <a:off x="365760" y="1143000"/>
+          <a:ext cx="11430000" cy="2377440"/>
+        </p:xfrm>
+        <a:graphic>
+          <a:graphicData uri="http://schemas.openxmlformats.org/drawingml/2006/table">
+            <a:tbl>
+              <a:tblPr firstRow="1" bandRow="1">
+                <a:tableStyleId>{5C22544A-7EE6-4342-B048-85BDC9FD1C3A}</a:tableStyleId>
+              </a:tblPr>
+              <a:tblGrid>
+                <a:gridCol w="3810000"/>
+                <a:gridCol w="3810000"/>
+                <a:gridCol w="3810000"/>
+              </a:tblGrid>
+              <a:tr h="475488">
+                <a:tc>
+                  <a:txBody>
+                    <a:bodyPr wrap="square"/>
+                    <a:lstStyle/>
+                    <a:p>
+                      <a:r>
+                        <a:rPr sz="1100" b="1">
+                          <a:solidFill>
+                            <a:srgbClr val="FFFFFF"/>
+                          </a:solidFill>
+                          <a:latin typeface="Arial"/>
+                        </a:rPr>
+                        <a:t>Auswertung</a:t>
+                      </a:r>
+                    </a:p>
+                  </a:txBody>
+                  <a:tcPr>
+                    <a:solidFill>
+                      <a:srgbClr val="003DA5"/>
+                    </a:solidFill>
+                  </a:tcPr>
+                </a:tc>
+                <a:tc>
+                  <a:txBody>
+                    <a:bodyPr wrap="square"/>
+                    <a:lstStyle/>
+                    <a:p>
+                      <a:r>
+                        <a:rPr sz="1100" b="1">
+                          <a:solidFill>
+                            <a:srgbClr val="FFFFFF"/>
+                          </a:solidFill>
+                          <a:latin typeface="Arial"/>
+                        </a:rPr>
+                        <a:t>Pfad in agree</a:t>
+                      </a:r>
+                    </a:p>
+                  </a:txBody>
+                  <a:tcPr>
+                    <a:solidFill>
+                      <a:srgbClr val="003DA5"/>
+                    </a:solidFill>
+                  </a:tcPr>
+                </a:tc>
+                <a:tc>
+                  <a:txBody>
+                    <a:bodyPr wrap="square"/>
+                    <a:lstStyle/>
+                    <a:p>
+                      <a:r>
+                        <a:rPr sz="1100" b="1">
+                          <a:solidFill>
+                            <a:srgbClr val="FFFFFF"/>
+                          </a:solidFill>
+                          <a:latin typeface="Arial"/>
+                        </a:rPr>
+                        <a:t>Information</a:t>
+                      </a:r>
+                    </a:p>
+                  </a:txBody>
+                  <a:tcPr>
+                    <a:solidFill>
+                      <a:srgbClr val="003DA5"/>
+                    </a:solidFill>
+                  </a:tcPr>
+                </a:tc>
+              </a:tr>
+              <a:tr h="475488">
+                <a:tc>
+                  <a:txBody>
+                    <a:bodyPr wrap="square"/>
+                    <a:lstStyle/>
+                    <a:p>
+                      <a:r>
+                        <a:rPr sz="1100" b="0">
+                          <a:solidFill>
+                            <a:srgbClr val="1A1A1A"/>
+                          </a:solidFill>
+                          <a:latin typeface="Arial"/>
+                        </a:rPr>
+                        <a:t>Kundenprofitabilitäts-Cockpit</a:t>
+                      </a:r>
+                    </a:p>
+                  </a:txBody>
+                  <a:tcPr>
+                    <a:solidFill>
+                      <a:srgbClr val="FFFFFF"/>
+                    </a:solidFill>
+                  </a:tcPr>
+                </a:tc>
+                <a:tc>
+                  <a:txBody>
+                    <a:bodyPr wrap="square"/>
+                    <a:lstStyle/>
+                    <a:p>
+                      <a:r>
+                        <a:rPr sz="1100" b="0">
+                          <a:solidFill>
+                            <a:srgbClr val="1A1A1A"/>
+                          </a:solidFill>
+                          <a:latin typeface="Arial"/>
+                        </a:rPr>
+                        <a:t>Firmenkunden → Controlling → Kundenprofitabilität</a:t>
+                      </a:r>
+                    </a:p>
+                  </a:txBody>
+                  <a:tcPr>
+                    <a:solidFill>
+                      <a:srgbClr val="FFFFFF"/>
+                    </a:solidFill>
+                  </a:tcPr>
+                </a:tc>
+                <a:tc>
+                  <a:txBody>
+                    <a:bodyPr wrap="square"/>
+                    <a:lstStyle/>
+                    <a:p>
+                      <a:r>
+                        <a:rPr sz="1100" b="0">
+                          <a:solidFill>
+                            <a:srgbClr val="1A1A1A"/>
+                          </a:solidFill>
+                          <a:latin typeface="Arial"/>
+                        </a:rPr>
+                        <a:t>DB I, DB II, NMZ je Kunde</a:t>
+                      </a:r>
+                    </a:p>
+                  </a:txBody>
+                  <a:tcPr>
+                    <a:solidFill>
+                      <a:srgbClr val="FFFFFF"/>
+                    </a:solidFill>
+                  </a:tcPr>
+                </a:tc>
+              </a:tr>
+              <a:tr h="475488">
+                <a:tc>
+                  <a:txBody>
+                    <a:bodyPr wrap="square"/>
+                    <a:lstStyle/>
+                    <a:p>
+                      <a:r>
+                        <a:rPr sz="1100" b="0">
+                          <a:solidFill>
+                            <a:srgbClr val="1A1A1A"/>
+                          </a:solidFill>
+                          <a:latin typeface="Arial"/>
+                        </a:rPr>
+                        <a:t>Bestandsranking nach NMZ</a:t>
+                      </a:r>
+                    </a:p>
+                  </a:txBody>
+                  <a:tcPr>
+                    <a:solidFill>
+                      <a:srgbClr val="F4F6FA"/>
+                    </a:solidFill>
+                  </a:tcPr>
+                </a:tc>
+                <a:tc>
+                  <a:txBody>
+                    <a:bodyPr wrap="square"/>
+                    <a:lstStyle/>
+                    <a:p>
+                      <a:r>
+                        <a:rPr sz="1100" b="0">
+                          <a:solidFill>
+                            <a:srgbClr val="1A1A1A"/>
+                          </a:solidFill>
+                          <a:latin typeface="Arial"/>
+                        </a:rPr>
+                        <a:t>Firmenkunden → Reporting → Ertragskennzahlen</a:t>
+                      </a:r>
+                    </a:p>
+                  </a:txBody>
+                  <a:tcPr>
+                    <a:solidFill>
+                      <a:srgbClr val="F4F6FA"/>
+                    </a:solidFill>
+                  </a:tcPr>
+                </a:tc>
+                <a:tc>
+                  <a:txBody>
+                    <a:bodyPr wrap="square"/>
+                    <a:lstStyle/>
+                    <a:p>
+                      <a:r>
+                        <a:rPr sz="1100" b="0">
+                          <a:solidFill>
+                            <a:srgbClr val="1A1A1A"/>
+                          </a:solidFill>
+                          <a:latin typeface="Arial"/>
+                        </a:rPr>
+                        <a:t>Rangliste aller Kunden nach NMZ</a:t>
+                      </a:r>
+                    </a:p>
+                  </a:txBody>
+                  <a:tcPr>
+                    <a:solidFill>
+                      <a:srgbClr val="F4F6FA"/>
+                    </a:solidFill>
+                  </a:tcPr>
+                </a:tc>
+              </a:tr>
+              <a:tr h="475488">
+                <a:tc>
+                  <a:txBody>
+                    <a:bodyPr wrap="square"/>
+                    <a:lstStyle/>
+                    <a:p>
+                      <a:r>
+                        <a:rPr sz="1100" b="0">
+                          <a:solidFill>
+                            <a:srgbClr val="1A1A1A"/>
+                          </a:solidFill>
+                          <a:latin typeface="Arial"/>
+                        </a:rPr>
+                        <a:t>Komponentenanalyse</a:t>
+                      </a:r>
+                    </a:p>
+                  </a:txBody>
+                  <a:tcPr>
+                    <a:solidFill>
+                      <a:srgbClr val="FFFFFF"/>
+                    </a:solidFill>
+                  </a:tcPr>
+                </a:tc>
+                <a:tc>
+                  <a:txBody>
+                    <a:bodyPr wrap="square"/>
+                    <a:lstStyle/>
+                    <a:p>
+                      <a:r>
+                        <a:rPr sz="1100" b="0">
+                          <a:solidFill>
+                            <a:srgbClr val="1A1A1A"/>
+                          </a:solidFill>
+                          <a:latin typeface="Arial"/>
+                        </a:rPr>
+                        <a:t>Firmenkunden → Controlling → Ertragskomponenten</a:t>
+                      </a:r>
+                    </a:p>
+                  </a:txBody>
+                  <a:tcPr>
+                    <a:solidFill>
+                      <a:srgbClr val="FFFFFF"/>
+                    </a:solidFill>
+                  </a:tcPr>
+                </a:tc>
+                <a:tc>
+                  <a:txBody>
+                    <a:bodyPr wrap="square"/>
+                    <a:lstStyle/>
+                    <a:p>
+                      <a:r>
+                        <a:rPr sz="1100" b="0">
+                          <a:solidFill>
+                            <a:srgbClr val="1A1A1A"/>
+                          </a:solidFill>
+                          <a:latin typeface="Arial"/>
+                        </a:rPr>
+                        <a:t>Aufteilung Zins / Provision / Verbund</a:t>
+                      </a:r>
+                    </a:p>
+                  </a:txBody>
+                  <a:tcPr>
+                    <a:solidFill>
+                      <a:srgbClr val="FFFFFF"/>
+                    </a:solidFill>
+                  </a:tcPr>
+                </a:tc>
+              </a:tr>
+              <a:tr h="475488">
+                <a:tc>
+                  <a:txBody>
+                    <a:bodyPr wrap="square"/>
+                    <a:lstStyle/>
+                    <a:p>
+                      <a:r>
+                        <a:rPr sz="1100" b="0">
+                          <a:solidFill>
+                            <a:srgbClr val="1A1A1A"/>
+                          </a:solidFill>
+                          <a:latin typeface="Arial"/>
+                        </a:rPr>
+                        <a:t>Verbundpartner-Cockpit</a:t>
+                      </a:r>
+                    </a:p>
+                  </a:txBody>
+                  <a:tcPr>
+                    <a:solidFill>
+                      <a:srgbClr val="F4F6FA"/>
+                    </a:solidFill>
+                  </a:tcPr>
+                </a:tc>
+                <a:tc>
+                  <a:txBody>
+                    <a:bodyPr wrap="square"/>
+                    <a:lstStyle/>
+                    <a:p>
+                      <a:r>
+                        <a:rPr sz="1100" b="0">
+                          <a:solidFill>
+                            <a:srgbClr val="1A1A1A"/>
+                          </a:solidFill>
+                          <a:latin typeface="Arial"/>
+                        </a:rPr>
+                        <a:t>Firmenkunden → Verbund → Cockpit</a:t>
+                      </a:r>
+                    </a:p>
+                  </a:txBody>
+                  <a:tcPr>
+                    <a:solidFill>
+                      <a:srgbClr val="F4F6FA"/>
+                    </a:solidFill>
+                  </a:tcPr>
+                </a:tc>
+                <a:tc>
+                  <a:txBody>
+                    <a:bodyPr wrap="square"/>
+                    <a:lstStyle/>
+                    <a:p>
+                      <a:r>
+                        <a:rPr sz="1100" b="0">
+                          <a:solidFill>
+                            <a:srgbClr val="1A1A1A"/>
+                          </a:solidFill>
+                          <a:latin typeface="Arial"/>
+                        </a:rPr>
+                        <a:t>Verbundabschlüsse und -potenziale</a:t>
+                      </a:r>
+                    </a:p>
+                  </a:txBody>
+                  <a:tcPr>
+                    <a:solidFill>
+                      <a:srgbClr val="F4F6FA"/>
+                    </a:solidFill>
+                  </a:tcPr>
+                </a:tc>
+              </a:tr>
+            </a:tbl>
+          </a:graphicData>
+        </a:graphic>
+      </p:graphicFrame>
+    </p:spTree>
+  </p:cSld>
+  <p:clrMapOvr>
+    <a:masterClrMapping/>
+  </p:clrMapOvr>
+</p:sld>
+</file>
+
+<file path=ppt/slides/slide9.xml><?xml version="1.0" encoding="utf-8"?>
 <p:sld xmlns:a="http://schemas.openxmlformats.org/drawingml/2006/main" xmlns:p="http://schemas.openxmlformats.org/presentationml/2006/main" xmlns:r="http://schemas.openxmlformats.org/officeDocument/2006/relationships">
   <p:cSld>
     <p:bg>
@@ -4864,8 +10144,8 @@
         </p:nvSpPr>
         <p:spPr>
           <a:xfrm>
-            <a:off x="365760" y="2286000"/>
-            <a:ext cx="11430000" cy="1828800"/>
+            <a:off x="365760" y="2011680"/>
+            <a:ext cx="11430000" cy="2011680"/>
           </a:xfrm>
           <a:prstGeom prst="rect">
             <a:avLst/>
@@ -4880,221 +10160,13 @@
           <a:p>
             <a:pPr algn="l"/>
             <a:r>
-              <a:rPr sz="3600" b="1">
+              <a:rPr sz="3600" b="1" i="0">
                 <a:solidFill>
                   <a:srgbClr val="FFFFFF"/>
                 </a:solidFill>
                 <a:latin typeface="Arial"/>
               </a:rPr>
-              <a:t>Schritt 1: Identifizieren (monatlich, 30 Minuten)</a:t>
-            </a:r>
-          </a:p>
-        </p:txBody>
-      </p:sp>
-    </p:spTree>
-  </p:cSld>
-  <p:clrMapOvr>
-    <a:masterClrMapping/>
-  </p:clrMapOvr>
-</p:sld>
-</file>
-
-<file path=ppt/slides/slide8.xml><?xml version="1.0" encoding="utf-8"?>
-<p:sld xmlns:a="http://schemas.openxmlformats.org/drawingml/2006/main" xmlns:p="http://schemas.openxmlformats.org/presentationml/2006/main" xmlns:r="http://schemas.openxmlformats.org/officeDocument/2006/relationships">
-  <p:cSld>
-    <p:bg>
-      <p:bgPr>
-        <a:solidFill>
-          <a:srgbClr val="1A1A1A"/>
-        </a:solidFill>
-        <a:effectLst/>
-      </p:bgPr>
-    </p:bg>
-    <p:spTree>
-      <p:nvGrpSpPr>
-        <p:cNvPr id="1" name=""/>
-        <p:cNvGrpSpPr/>
-        <p:nvPr/>
-      </p:nvGrpSpPr>
-      <p:grpSpPr/>
-      <p:sp>
-        <p:nvSpPr>
-          <p:cNvPr id="2" name="Rectangle 1"/>
-          <p:cNvSpPr/>
-          <p:nvPr/>
-        </p:nvSpPr>
-        <p:spPr>
-          <a:xfrm>
-            <a:off x="0" y="0"/>
-            <a:ext cx="73152" cy="6858000"/>
-          </a:xfrm>
-          <a:prstGeom prst="rect">
-            <a:avLst/>
-          </a:prstGeom>
-          <a:solidFill>
-            <a:srgbClr val="E05B00"/>
-          </a:solidFill>
-          <a:ln>
-            <a:noFill/>
-          </a:ln>
-        </p:spPr>
-        <p:style>
-          <a:lnRef idx="1">
-            <a:schemeClr val="accent1"/>
-          </a:lnRef>
-          <a:fillRef idx="3">
-            <a:schemeClr val="accent1"/>
-          </a:fillRef>
-          <a:effectRef idx="2">
-            <a:schemeClr val="accent1"/>
-          </a:effectRef>
-          <a:fontRef idx="minor">
-            <a:schemeClr val="lt1"/>
-          </a:fontRef>
-        </p:style>
-        <p:txBody>
-          <a:bodyPr rtlCol="0" anchor="ctr"/>
-          <a:lstStyle/>
-          <a:p>
-            <a:pPr algn="ctr"/>
-          </a:p>
-        </p:txBody>
-      </p:sp>
-      <p:sp>
-        <p:nvSpPr>
-          <p:cNvPr id="3" name="TextBox 2"/>
-          <p:cNvSpPr txBox="1"/>
-          <p:nvPr/>
-        </p:nvSpPr>
-        <p:spPr>
-          <a:xfrm>
-            <a:off x="365760" y="2286000"/>
-            <a:ext cx="11430000" cy="1828800"/>
-          </a:xfrm>
-          <a:prstGeom prst="rect">
-            <a:avLst/>
-          </a:prstGeom>
-          <a:noFill/>
-        </p:spPr>
-        <p:txBody>
-          <a:bodyPr wrap="square">
-            <a:spAutoFit/>
-          </a:bodyPr>
-          <a:lstStyle/>
-          <a:p>
-            <a:pPr algn="l"/>
-            <a:r>
-              <a:rPr sz="3600" b="1">
-                <a:solidFill>
-                  <a:srgbClr val="FFFFFF"/>
-                </a:solidFill>
-                <a:latin typeface="Arial"/>
-              </a:rPr>
-              <a:t>Schritt 2: Priorisieren</a:t>
-            </a:r>
-          </a:p>
-        </p:txBody>
-      </p:sp>
-    </p:spTree>
-  </p:cSld>
-  <p:clrMapOvr>
-    <a:masterClrMapping/>
-  </p:clrMapOvr>
-</p:sld>
-</file>
-
-<file path=ppt/slides/slide9.xml><?xml version="1.0" encoding="utf-8"?>
-<p:sld xmlns:a="http://schemas.openxmlformats.org/drawingml/2006/main" xmlns:p="http://schemas.openxmlformats.org/presentationml/2006/main" xmlns:r="http://schemas.openxmlformats.org/officeDocument/2006/relationships">
-  <p:cSld>
-    <p:bg>
-      <p:bgPr>
-        <a:solidFill>
-          <a:srgbClr val="1A1A1A"/>
-        </a:solidFill>
-        <a:effectLst/>
-      </p:bgPr>
-    </p:bg>
-    <p:spTree>
-      <p:nvGrpSpPr>
-        <p:cNvPr id="1" name=""/>
-        <p:cNvGrpSpPr/>
-        <p:nvPr/>
-      </p:nvGrpSpPr>
-      <p:grpSpPr/>
-      <p:sp>
-        <p:nvSpPr>
-          <p:cNvPr id="2" name="Rectangle 1"/>
-          <p:cNvSpPr/>
-          <p:nvPr/>
-        </p:nvSpPr>
-        <p:spPr>
-          <a:xfrm>
-            <a:off x="0" y="0"/>
-            <a:ext cx="73152" cy="6858000"/>
-          </a:xfrm>
-          <a:prstGeom prst="rect">
-            <a:avLst/>
-          </a:prstGeom>
-          <a:solidFill>
-            <a:srgbClr val="E05B00"/>
-          </a:solidFill>
-          <a:ln>
-            <a:noFill/>
-          </a:ln>
-        </p:spPr>
-        <p:style>
-          <a:lnRef idx="1">
-            <a:schemeClr val="accent1"/>
-          </a:lnRef>
-          <a:fillRef idx="3">
-            <a:schemeClr val="accent1"/>
-          </a:fillRef>
-          <a:effectRef idx="2">
-            <a:schemeClr val="accent1"/>
-          </a:effectRef>
-          <a:fontRef idx="minor">
-            <a:schemeClr val="lt1"/>
-          </a:fontRef>
-        </p:style>
-        <p:txBody>
-          <a:bodyPr rtlCol="0" anchor="ctr"/>
-          <a:lstStyle/>
-          <a:p>
-            <a:pPr algn="ctr"/>
-          </a:p>
-        </p:txBody>
-      </p:sp>
-      <p:sp>
-        <p:nvSpPr>
-          <p:cNvPr id="3" name="TextBox 2"/>
-          <p:cNvSpPr txBox="1"/>
-          <p:nvPr/>
-        </p:nvSpPr>
-        <p:spPr>
-          <a:xfrm>
-            <a:off x="365760" y="2286000"/>
-            <a:ext cx="11430000" cy="1828800"/>
-          </a:xfrm>
-          <a:prstGeom prst="rect">
-            <a:avLst/>
-          </a:prstGeom>
-          <a:noFill/>
-        </p:spPr>
-        <p:txBody>
-          <a:bodyPr wrap="square">
-            <a:spAutoFit/>
-          </a:bodyPr>
-          <a:lstStyle/>
-          <a:p>
-            <a:pPr algn="l"/>
-            <a:r>
-              <a:rPr sz="3600" b="1">
-                <a:solidFill>
-                  <a:srgbClr val="FFFFFF"/>
-                </a:solidFill>
-                <a:latin typeface="Arial"/>
-              </a:rPr>
-              <a:t>Schritt 3: Handeln und dokumentieren</a:t>
+              <a:t>Leseübung: NMZ-Ranking interpretieren</a:t>
             </a:r>
           </a:p>
         </p:txBody>

--- a/public/downloads/praesentation/M16.pptx
+++ b/public/downloads/praesentation/M16.pptx
@@ -3459,7 +3459,7 @@
     <p:bg>
       <p:bgPr>
         <a:solidFill>
-          <a:srgbClr val="191D2E"/>
+          <a:srgbClr val="1F2B56"/>
         </a:solidFill>
         <a:effectLst/>
       </p:bgPr>
@@ -4445,7 +4445,7 @@
                   </a:txBody>
                   <a:tcPr>
                     <a:solidFill>
-                      <a:srgbClr val="191D2E"/>
+                      <a:srgbClr val="1F2B56"/>
                     </a:solidFill>
                   </a:tcPr>
                 </a:tc>
@@ -4467,7 +4467,7 @@
                   </a:txBody>
                   <a:tcPr>
                     <a:solidFill>
-                      <a:srgbClr val="191D2E"/>
+                      <a:srgbClr val="1F2B56"/>
                     </a:solidFill>
                   </a:tcPr>
                 </a:tc>
@@ -4489,7 +4489,7 @@
                   </a:txBody>
                   <a:tcPr>
                     <a:solidFill>
-                      <a:srgbClr val="191D2E"/>
+                      <a:srgbClr val="1F2B56"/>
                     </a:solidFill>
                   </a:tcPr>
                 </a:tc>
@@ -5352,7 +5352,7 @@
     <p:bg>
       <p:bgPr>
         <a:solidFill>
-          <a:srgbClr val="191D2E"/>
+          <a:srgbClr val="1F2B56"/>
         </a:solidFill>
         <a:effectLst/>
       </p:bgPr>
@@ -5553,7 +5553,7 @@
     <p:bg>
       <p:bgPr>
         <a:solidFill>
-          <a:srgbClr val="191D2E"/>
+          <a:srgbClr val="1F2B56"/>
         </a:solidFill>
         <a:effectLst/>
       </p:bgPr>
@@ -6063,7 +6063,7 @@
                   </a:txBody>
                   <a:tcPr>
                     <a:solidFill>
-                      <a:srgbClr val="191D2E"/>
+                      <a:srgbClr val="1F2B56"/>
                     </a:solidFill>
                   </a:tcPr>
                 </a:tc>
@@ -6085,7 +6085,7 @@
                   </a:txBody>
                   <a:tcPr>
                     <a:solidFill>
-                      <a:srgbClr val="191D2E"/>
+                      <a:srgbClr val="1F2B56"/>
                     </a:solidFill>
                   </a:tcPr>
                 </a:tc>
@@ -6107,7 +6107,7 @@
                   </a:txBody>
                   <a:tcPr>
                     <a:solidFill>
-                      <a:srgbClr val="191D2E"/>
+                      <a:srgbClr val="1F2B56"/>
                     </a:solidFill>
                   </a:tcPr>
                 </a:tc>
@@ -6129,7 +6129,7 @@
                   </a:txBody>
                   <a:tcPr>
                     <a:solidFill>
-                      <a:srgbClr val="191D2E"/>
+                      <a:srgbClr val="1F2B56"/>
                     </a:solidFill>
                   </a:tcPr>
                 </a:tc>
@@ -6151,7 +6151,7 @@
                   </a:txBody>
                   <a:tcPr>
                     <a:solidFill>
-                      <a:srgbClr val="191D2E"/>
+                      <a:srgbClr val="1F2B56"/>
                     </a:solidFill>
                   </a:tcPr>
                 </a:tc>
@@ -7009,7 +7009,7 @@
                   </a:txBody>
                   <a:tcPr>
                     <a:solidFill>
-                      <a:srgbClr val="191D2E"/>
+                      <a:srgbClr val="1F2B56"/>
                     </a:solidFill>
                   </a:tcPr>
                 </a:tc>
@@ -7031,7 +7031,7 @@
                   </a:txBody>
                   <a:tcPr>
                     <a:solidFill>
-                      <a:srgbClr val="191D2E"/>
+                      <a:srgbClr val="1F2B56"/>
                     </a:solidFill>
                   </a:tcPr>
                 </a:tc>
@@ -7053,7 +7053,7 @@
                   </a:txBody>
                   <a:tcPr>
                     <a:solidFill>
-                      <a:srgbClr val="191D2E"/>
+                      <a:srgbClr val="1F2B56"/>
                     </a:solidFill>
                   </a:tcPr>
                 </a:tc>
@@ -7075,7 +7075,7 @@
                   </a:txBody>
                   <a:tcPr>
                     <a:solidFill>
-                      <a:srgbClr val="191D2E"/>
+                      <a:srgbClr val="1F2B56"/>
                     </a:solidFill>
                   </a:tcPr>
                 </a:tc>
@@ -7097,7 +7097,7 @@
                   </a:txBody>
                   <a:tcPr>
                     <a:solidFill>
-                      <a:srgbClr val="191D2E"/>
+                      <a:srgbClr val="1F2B56"/>
                     </a:solidFill>
                   </a:tcPr>
                 </a:tc>
@@ -7119,7 +7119,7 @@
                   </a:txBody>
                   <a:tcPr>
                     <a:solidFill>
-                      <a:srgbClr val="191D2E"/>
+                      <a:srgbClr val="1F2B56"/>
                     </a:solidFill>
                   </a:tcPr>
                 </a:tc>
@@ -7544,7 +7544,7 @@
     <p:bg>
       <p:bgPr>
         <a:solidFill>
-          <a:srgbClr val="191D2E"/>
+          <a:srgbClr val="1F2B56"/>
         </a:solidFill>
         <a:effectLst/>
       </p:bgPr>
@@ -7745,7 +7745,7 @@
     <p:bg>
       <p:bgPr>
         <a:solidFill>
-          <a:srgbClr val="191D2E"/>
+          <a:srgbClr val="1F2B56"/>
         </a:solidFill>
         <a:effectLst/>
       </p:bgPr>
@@ -8192,29 +8192,29 @@
         </p:nvSpPr>
         <p:spPr>
           <a:xfrm>
-            <a:off x="4064000" y="927100"/>
-            <a:ext cx="508000" cy="647700"/>
-          </a:xfrm>
-          <a:prstGeom prst="rect">
-            <a:avLst/>
-          </a:prstGeom>
-          <a:noFill/>
-        </p:spPr>
-        <p:txBody>
-          <a:bodyPr wrap="square">
+            <a:off x="4064000" y="939799"/>
+            <a:ext cx="762000" cy="647700"/>
+          </a:xfrm>
+          <a:prstGeom prst="rect">
+            <a:avLst/>
+          </a:prstGeom>
+          <a:noFill/>
+        </p:spPr>
+        <p:txBody>
+          <a:bodyPr wrap="none">
             <a:normAutofit/>
           </a:bodyPr>
           <a:lstStyle/>
           <a:p>
             <a:pPr algn="l"/>
             <a:r>
-              <a:rPr sz="2600" b="0" i="1">
+              <a:rPr sz="2400" b="0" i="1">
                 <a:solidFill>
                   <a:srgbClr val="1F2B56"/>
                 </a:solidFill>
                 <a:latin typeface="Georgia"/>
               </a:rPr>
-              <a:t>I.</a:t>
+              <a:t>I</a:t>
             </a:r>
           </a:p>
         </p:txBody>
@@ -8227,8 +8227,8 @@
         </p:nvSpPr>
         <p:spPr>
           <a:xfrm>
-            <a:off x="4699000" y="952500"/>
-            <a:ext cx="6858000" cy="622300"/>
+            <a:off x="4953000" y="952500"/>
+            <a:ext cx="6629400" cy="635000"/>
           </a:xfrm>
           <a:prstGeom prst="rect">
             <a:avLst/>
@@ -8262,7 +8262,7 @@
         </p:nvSpPr>
         <p:spPr>
           <a:xfrm>
-            <a:off x="4064000" y="1574800"/>
+            <a:off x="4064000" y="1587500"/>
             <a:ext cx="7518399" cy="6350"/>
           </a:xfrm>
           <a:prstGeom prst="rect">
@@ -8305,29 +8305,29 @@
         </p:nvSpPr>
         <p:spPr>
           <a:xfrm>
-            <a:off x="4064000" y="1612900"/>
-            <a:ext cx="508000" cy="647700"/>
-          </a:xfrm>
-          <a:prstGeom prst="rect">
-            <a:avLst/>
-          </a:prstGeom>
-          <a:noFill/>
-        </p:spPr>
-        <p:txBody>
-          <a:bodyPr wrap="square">
+            <a:off x="4064000" y="1638300"/>
+            <a:ext cx="762000" cy="647700"/>
+          </a:xfrm>
+          <a:prstGeom prst="rect">
+            <a:avLst/>
+          </a:prstGeom>
+          <a:noFill/>
+        </p:spPr>
+        <p:txBody>
+          <a:bodyPr wrap="none">
             <a:normAutofit/>
           </a:bodyPr>
           <a:lstStyle/>
           <a:p>
             <a:pPr algn="l"/>
             <a:r>
-              <a:rPr sz="2600" b="0" i="1">
+              <a:rPr sz="2400" b="0" i="1">
                 <a:solidFill>
                   <a:srgbClr val="1F2B56"/>
                 </a:solidFill>
                 <a:latin typeface="Georgia"/>
               </a:rPr>
-              <a:t>II.</a:t>
+              <a:t>II</a:t>
             </a:r>
           </a:p>
         </p:txBody>
@@ -8340,8 +8340,8 @@
         </p:nvSpPr>
         <p:spPr>
           <a:xfrm>
-            <a:off x="4699000" y="1638300"/>
-            <a:ext cx="6858000" cy="622300"/>
+            <a:off x="4953000" y="1651000"/>
+            <a:ext cx="6629400" cy="635000"/>
           </a:xfrm>
           <a:prstGeom prst="rect">
             <a:avLst/>
@@ -8375,7 +8375,7 @@
         </p:nvSpPr>
         <p:spPr>
           <a:xfrm>
-            <a:off x="4064000" y="2260600"/>
+            <a:off x="4064000" y="2286000"/>
             <a:ext cx="7518399" cy="6350"/>
           </a:xfrm>
           <a:prstGeom prst="rect">
@@ -8418,29 +8418,29 @@
         </p:nvSpPr>
         <p:spPr>
           <a:xfrm>
-            <a:off x="4064000" y="2298700"/>
-            <a:ext cx="508000" cy="647700"/>
-          </a:xfrm>
-          <a:prstGeom prst="rect">
-            <a:avLst/>
-          </a:prstGeom>
-          <a:noFill/>
-        </p:spPr>
-        <p:txBody>
-          <a:bodyPr wrap="square">
+            <a:off x="4064000" y="2336800"/>
+            <a:ext cx="762000" cy="647700"/>
+          </a:xfrm>
+          <a:prstGeom prst="rect">
+            <a:avLst/>
+          </a:prstGeom>
+          <a:noFill/>
+        </p:spPr>
+        <p:txBody>
+          <a:bodyPr wrap="none">
             <a:normAutofit/>
           </a:bodyPr>
           <a:lstStyle/>
           <a:p>
             <a:pPr algn="l"/>
             <a:r>
-              <a:rPr sz="2600" b="0" i="1">
+              <a:rPr sz="2400" b="0" i="1">
                 <a:solidFill>
                   <a:srgbClr val="1F2B56"/>
                 </a:solidFill>
                 <a:latin typeface="Georgia"/>
               </a:rPr>
-              <a:t>III.</a:t>
+              <a:t>III</a:t>
             </a:r>
           </a:p>
         </p:txBody>
@@ -8453,8 +8453,8 @@
         </p:nvSpPr>
         <p:spPr>
           <a:xfrm>
-            <a:off x="4699000" y="2324100"/>
-            <a:ext cx="6858000" cy="622300"/>
+            <a:off x="4953000" y="2349500"/>
+            <a:ext cx="6629400" cy="635000"/>
           </a:xfrm>
           <a:prstGeom prst="rect">
             <a:avLst/>
@@ -8488,7 +8488,7 @@
         </p:nvSpPr>
         <p:spPr>
           <a:xfrm>
-            <a:off x="4064000" y="2946400"/>
+            <a:off x="4064000" y="2984500"/>
             <a:ext cx="7518399" cy="6350"/>
           </a:xfrm>
           <a:prstGeom prst="rect">
@@ -8531,29 +8531,29 @@
         </p:nvSpPr>
         <p:spPr>
           <a:xfrm>
-            <a:off x="4064000" y="2984500"/>
-            <a:ext cx="508000" cy="647700"/>
-          </a:xfrm>
-          <a:prstGeom prst="rect">
-            <a:avLst/>
-          </a:prstGeom>
-          <a:noFill/>
-        </p:spPr>
-        <p:txBody>
-          <a:bodyPr wrap="square">
+            <a:off x="4064000" y="3035300"/>
+            <a:ext cx="762000" cy="647700"/>
+          </a:xfrm>
+          <a:prstGeom prst="rect">
+            <a:avLst/>
+          </a:prstGeom>
+          <a:noFill/>
+        </p:spPr>
+        <p:txBody>
+          <a:bodyPr wrap="none">
             <a:normAutofit/>
           </a:bodyPr>
           <a:lstStyle/>
           <a:p>
             <a:pPr algn="l"/>
             <a:r>
-              <a:rPr sz="2600" b="0" i="1">
+              <a:rPr sz="2400" b="0" i="1">
                 <a:solidFill>
                   <a:srgbClr val="1F2B56"/>
                 </a:solidFill>
                 <a:latin typeface="Georgia"/>
               </a:rPr>
-              <a:t>IV.</a:t>
+              <a:t>IV</a:t>
             </a:r>
           </a:p>
         </p:txBody>
@@ -8566,8 +8566,8 @@
         </p:nvSpPr>
         <p:spPr>
           <a:xfrm>
-            <a:off x="4699000" y="3009900"/>
-            <a:ext cx="6858000" cy="622300"/>
+            <a:off x="4953000" y="3048000"/>
+            <a:ext cx="6629400" cy="635000"/>
           </a:xfrm>
           <a:prstGeom prst="rect">
             <a:avLst/>
@@ -8601,7 +8601,7 @@
         </p:nvSpPr>
         <p:spPr>
           <a:xfrm>
-            <a:off x="4064000" y="3632200"/>
+            <a:off x="4064000" y="3683000"/>
             <a:ext cx="7518399" cy="6350"/>
           </a:xfrm>
           <a:prstGeom prst="rect">
@@ -8644,29 +8644,29 @@
         </p:nvSpPr>
         <p:spPr>
           <a:xfrm>
-            <a:off x="4064000" y="3670300"/>
-            <a:ext cx="508000" cy="647700"/>
-          </a:xfrm>
-          <a:prstGeom prst="rect">
-            <a:avLst/>
-          </a:prstGeom>
-          <a:noFill/>
-        </p:spPr>
-        <p:txBody>
-          <a:bodyPr wrap="square">
+            <a:off x="4064000" y="3733799"/>
+            <a:ext cx="762000" cy="647700"/>
+          </a:xfrm>
+          <a:prstGeom prst="rect">
+            <a:avLst/>
+          </a:prstGeom>
+          <a:noFill/>
+        </p:spPr>
+        <p:txBody>
+          <a:bodyPr wrap="none">
             <a:normAutofit/>
           </a:bodyPr>
           <a:lstStyle/>
           <a:p>
             <a:pPr algn="l"/>
             <a:r>
-              <a:rPr sz="2600" b="0" i="1">
+              <a:rPr sz="2400" b="0" i="1">
                 <a:solidFill>
                   <a:srgbClr val="1F2B56"/>
                 </a:solidFill>
                 <a:latin typeface="Georgia"/>
               </a:rPr>
-              <a:t>V.</a:t>
+              <a:t>V</a:t>
             </a:r>
           </a:p>
         </p:txBody>
@@ -8679,8 +8679,8 @@
         </p:nvSpPr>
         <p:spPr>
           <a:xfrm>
-            <a:off x="4699000" y="3695700"/>
-            <a:ext cx="6858000" cy="622300"/>
+            <a:off x="4953000" y="3746500"/>
+            <a:ext cx="6629400" cy="635000"/>
           </a:xfrm>
           <a:prstGeom prst="rect">
             <a:avLst/>
@@ -8720,7 +8720,7 @@
     <p:bg>
       <p:bgPr>
         <a:solidFill>
-          <a:srgbClr val="191D2E"/>
+          <a:srgbClr val="1F2B56"/>
         </a:solidFill>
         <a:effectLst/>
       </p:bgPr>
@@ -10025,7 +10025,7 @@
     <p:bg>
       <p:bgPr>
         <a:solidFill>
-          <a:srgbClr val="191D2E"/>
+          <a:srgbClr val="1F2B56"/>
         </a:solidFill>
         <a:effectLst/>
       </p:bgPr>
@@ -10226,7 +10226,7 @@
     <p:bg>
       <p:bgPr>
         <a:solidFill>
-          <a:srgbClr val="191D2E"/>
+          <a:srgbClr val="1F2B56"/>
         </a:solidFill>
         <a:effectLst/>
       </p:bgPr>
@@ -10427,7 +10427,7 @@
     <p:bg>
       <p:bgPr>
         <a:solidFill>
-          <a:srgbClr val="191D2E"/>
+          <a:srgbClr val="1F2B56"/>
         </a:solidFill>
         <a:effectLst/>
       </p:bgPr>
@@ -10628,7 +10628,7 @@
     <p:bg>
       <p:bgPr>
         <a:solidFill>
-          <a:srgbClr val="191D2E"/>
+          <a:srgbClr val="1F2B56"/>
         </a:solidFill>
         <a:effectLst/>
       </p:bgPr>
@@ -11179,7 +11179,7 @@
     <p:bg>
       <p:bgPr>
         <a:solidFill>
-          <a:srgbClr val="191D2E"/>
+          <a:srgbClr val="1F2B56"/>
         </a:solidFill>
         <a:effectLst/>
       </p:bgPr>
@@ -11686,7 +11686,7 @@
                   </a:txBody>
                   <a:tcPr>
                     <a:solidFill>
-                      <a:srgbClr val="191D2E"/>
+                      <a:srgbClr val="1F2B56"/>
                     </a:solidFill>
                   </a:tcPr>
                 </a:tc>
@@ -11708,7 +11708,7 @@
                   </a:txBody>
                   <a:tcPr>
                     <a:solidFill>
-                      <a:srgbClr val="191D2E"/>
+                      <a:srgbClr val="1F2B56"/>
                     </a:solidFill>
                   </a:tcPr>
                 </a:tc>
@@ -12439,7 +12439,7 @@
     <p:bg>
       <p:bgPr>
         <a:solidFill>
-          <a:srgbClr val="191D2E"/>
+          <a:srgbClr val="1F2B56"/>
         </a:solidFill>
         <a:effectLst/>
       </p:bgPr>
@@ -12640,7 +12640,7 @@
     <p:bg>
       <p:bgPr>
         <a:solidFill>
-          <a:srgbClr val="191D2E"/>
+          <a:srgbClr val="1F2B56"/>
         </a:solidFill>
         <a:effectLst/>
       </p:bgPr>
@@ -13148,7 +13148,7 @@
                   </a:txBody>
                   <a:tcPr>
                     <a:solidFill>
-                      <a:srgbClr val="191D2E"/>
+                      <a:srgbClr val="1F2B56"/>
                     </a:solidFill>
                   </a:tcPr>
                 </a:tc>
@@ -13170,7 +13170,7 @@
                   </a:txBody>
                   <a:tcPr>
                     <a:solidFill>
-                      <a:srgbClr val="191D2E"/>
+                      <a:srgbClr val="1F2B56"/>
                     </a:solidFill>
                   </a:tcPr>
                 </a:tc>
@@ -13192,7 +13192,7 @@
                   </a:txBody>
                   <a:tcPr>
                     <a:solidFill>
-                      <a:srgbClr val="191D2E"/>
+                      <a:srgbClr val="1F2B56"/>
                     </a:solidFill>
                   </a:tcPr>
                 </a:tc>
@@ -13762,7 +13762,7 @@
                   </a:txBody>
                   <a:tcPr>
                     <a:solidFill>
-                      <a:srgbClr val="191D2E"/>
+                      <a:srgbClr val="1F2B56"/>
                     </a:solidFill>
                   </a:tcPr>
                 </a:tc>
@@ -13784,7 +13784,7 @@
                   </a:txBody>
                   <a:tcPr>
                     <a:solidFill>
-                      <a:srgbClr val="191D2E"/>
+                      <a:srgbClr val="1F2B56"/>
                     </a:solidFill>
                   </a:tcPr>
                 </a:tc>
@@ -13806,7 +13806,7 @@
                   </a:txBody>
                   <a:tcPr>
                     <a:solidFill>
-                      <a:srgbClr val="191D2E"/>
+                      <a:srgbClr val="1F2B56"/>
                     </a:solidFill>
                   </a:tcPr>
                 </a:tc>
@@ -13828,7 +13828,7 @@
                   </a:txBody>
                   <a:tcPr>
                     <a:solidFill>
-                      <a:srgbClr val="191D2E"/>
+                      <a:srgbClr val="1F2B56"/>
                     </a:solidFill>
                   </a:tcPr>
                 </a:tc>
@@ -13850,7 +13850,7 @@
                   </a:txBody>
                   <a:tcPr>
                     <a:solidFill>
-                      <a:srgbClr val="191D2E"/>
+                      <a:srgbClr val="1F2B56"/>
                     </a:solidFill>
                   </a:tcPr>
                 </a:tc>
@@ -13872,7 +13872,7 @@
                   </a:txBody>
                   <a:tcPr>
                     <a:solidFill>
-                      <a:srgbClr val="191D2E"/>
+                      <a:srgbClr val="1F2B56"/>
                     </a:solidFill>
                   </a:tcPr>
                 </a:tc>

--- a/public/downloads/praesentation/M16.pptx
+++ b/public/downloads/praesentation/M16.pptx
@@ -15,8 +15,10 @@
     <p:sldId id="263" r:id="rId14"/>
     <p:sldId id="264" r:id="rId15"/>
     <p:sldId id="265" r:id="rId16"/>
+    <p:sldId id="266" r:id="rId17"/>
+    <p:sldId id="267" r:id="rId18"/>
   </p:sldIdLst>
-  <p:sldSz cx="12191695" cy="6858000" type="screen4x3"/>
+  <p:sldSz cx="12188952" cy="6858000" type="screen4x3"/>
   <p:notesSz cx="6858000" cy="9144000"/>
   <p:defaultTextStyle>
     <a:defPPr>
@@ -3090,14 +3092,6 @@
 <file path=ppt/slides/slide1.xml><?xml version="1.0" encoding="utf-8"?>
 <p:sld xmlns:a="http://schemas.openxmlformats.org/drawingml/2006/main" xmlns:p="http://schemas.openxmlformats.org/presentationml/2006/main" xmlns:r="http://schemas.openxmlformats.org/officeDocument/2006/relationships">
   <p:cSld>
-    <p:bg>
-      <p:bgPr>
-        <a:solidFill>
-          <a:srgbClr val="F8F8FA"/>
-        </a:solidFill>
-        <a:effectLst/>
-      </p:bgPr>
-    </p:bg>
     <p:spTree>
       <p:nvGrpSpPr>
         <p:cNvPr id="1" name=""/>
@@ -3107,125 +3101,20 @@
       <p:grpSpPr/>
       <p:sp>
         <p:nvSpPr>
-          <p:cNvPr id="2" name="TextBox 1"/>
-          <p:cNvSpPr txBox="1"/>
-          <p:nvPr/>
-        </p:nvSpPr>
-        <p:spPr>
-          <a:xfrm>
-            <a:off x="609600" y="304800"/>
-            <a:ext cx="3175000" cy="279400"/>
-          </a:xfrm>
-          <a:prstGeom prst="rect">
-            <a:avLst/>
-          </a:prstGeom>
-          <a:noFill/>
-        </p:spPr>
-        <p:txBody>
-          <a:bodyPr wrap="square">
-            <a:normAutofit/>
-          </a:bodyPr>
-          <a:lstStyle/>
-          <a:p>
-            <a:pPr algn="l"/>
-            <a:r>
-              <a:rPr sz="1000" b="1" i="0">
-                <a:solidFill>
-                  <a:srgbClr val="191D2E"/>
-                </a:solidFill>
-                <a:latin typeface="Arial"/>
-              </a:rPr>
-              <a:t>FKB  Campus</a:t>
-            </a:r>
-          </a:p>
-        </p:txBody>
-      </p:sp>
-      <p:sp>
-        <p:nvSpPr>
-          <p:cNvPr id="3" name="TextBox 2"/>
-          <p:cNvSpPr txBox="1"/>
-          <p:nvPr/>
-        </p:nvSpPr>
-        <p:spPr>
-          <a:xfrm>
-            <a:off x="609600" y="304800"/>
-            <a:ext cx="10972800" cy="279400"/>
-          </a:xfrm>
-          <a:prstGeom prst="rect">
-            <a:avLst/>
-          </a:prstGeom>
-          <a:noFill/>
-        </p:spPr>
-        <p:txBody>
-          <a:bodyPr wrap="square">
-            <a:normAutofit/>
-          </a:bodyPr>
-          <a:lstStyle/>
-          <a:p>
-            <a:pPr algn="r"/>
-            <a:r>
-              <a:rPr sz="900" b="0" i="0">
-                <a:solidFill>
-                  <a:srgbClr val="7B7FA0"/>
-                </a:solidFill>
-                <a:latin typeface="Courier New"/>
-              </a:rPr>
-              <a:t>M16  ·  v0.4</a:t>
-            </a:r>
-          </a:p>
-        </p:txBody>
-      </p:sp>
-      <p:sp>
-        <p:nvSpPr>
-          <p:cNvPr id="4" name="TextBox 3"/>
-          <p:cNvSpPr txBox="1"/>
-          <p:nvPr/>
-        </p:nvSpPr>
-        <p:spPr>
-          <a:xfrm>
-            <a:off x="609600" y="2794000"/>
-            <a:ext cx="10972800" cy="2032000"/>
-          </a:xfrm>
-          <a:prstGeom prst="rect">
-            <a:avLst/>
-          </a:prstGeom>
-          <a:noFill/>
-        </p:spPr>
-        <p:txBody>
-          <a:bodyPr wrap="square">
-            <a:normAutofit/>
-          </a:bodyPr>
-          <a:lstStyle/>
-          <a:p>
-            <a:pPr algn="l"/>
-            <a:r>
-              <a:rPr sz="6000" b="0" i="0">
-                <a:solidFill>
-                  <a:srgbClr val="191D2E"/>
-                </a:solidFill>
-                <a:latin typeface="Georgia"/>
-              </a:rPr>
-              <a:t>NMZ-Optimierung</a:t>
-            </a:r>
-          </a:p>
-        </p:txBody>
-      </p:sp>
-      <p:sp>
-        <p:nvSpPr>
-          <p:cNvPr id="5" name="Rectangle 4"/>
+          <p:cNvPr id="2" name="Rectangle 1"/>
           <p:cNvSpPr/>
           <p:nvPr/>
         </p:nvSpPr>
         <p:spPr>
           <a:xfrm>
-            <a:off x="609600" y="4889500"/>
-            <a:ext cx="10972800" cy="6350"/>
+            <a:off x="0" y="0"/>
+            <a:ext cx="12188952" cy="6858000"/>
           </a:xfrm>
           <a:prstGeom prst="rect">
             <a:avLst/>
           </a:prstGeom>
           <a:solidFill>
-            <a:srgbClr val="191D2E"/>
+            <a:srgbClr val="1F2C56"/>
           </a:solidFill>
           <a:ln>
             <a:noFill/>
@@ -3255,14 +3144,57 @@
       </p:sp>
       <p:sp>
         <p:nvSpPr>
-          <p:cNvPr id="6" name="TextBox 5"/>
+          <p:cNvPr id="3" name="Rectangle 2"/>
+          <p:cNvSpPr/>
+          <p:nvPr/>
+        </p:nvSpPr>
+        <p:spPr>
+          <a:xfrm>
+            <a:off x="0" y="0"/>
+            <a:ext cx="12188952" cy="54864"/>
+          </a:xfrm>
+          <a:prstGeom prst="rect">
+            <a:avLst/>
+          </a:prstGeom>
+          <a:solidFill>
+            <a:srgbClr val="D9C089"/>
+          </a:solidFill>
+          <a:ln>
+            <a:noFill/>
+          </a:ln>
+        </p:spPr>
+        <p:style>
+          <a:lnRef idx="1">
+            <a:schemeClr val="accent1"/>
+          </a:lnRef>
+          <a:fillRef idx="3">
+            <a:schemeClr val="accent1"/>
+          </a:fillRef>
+          <a:effectRef idx="2">
+            <a:schemeClr val="accent1"/>
+          </a:effectRef>
+          <a:fontRef idx="minor">
+            <a:schemeClr val="lt1"/>
+          </a:fontRef>
+        </p:style>
+        <p:txBody>
+          <a:bodyPr rtlCol="0" anchor="ctr"/>
+          <a:lstStyle/>
+          <a:p>
+            <a:pPr algn="ctr"/>
+          </a:p>
+        </p:txBody>
+      </p:sp>
+      <p:sp>
+        <p:nvSpPr>
+          <p:cNvPr id="4" name="TextBox 3"/>
           <p:cNvSpPr txBox="1"/>
           <p:nvPr/>
         </p:nvSpPr>
         <p:spPr>
           <a:xfrm>
-            <a:off x="609600" y="5016500"/>
-            <a:ext cx="5207000" cy="1143000"/>
+            <a:off x="685800" y="201168"/>
+            <a:ext cx="10817352" cy="256032"/>
           </a:xfrm>
           <a:prstGeom prst="rect">
             <a:avLst/>
@@ -3270,21 +3202,99 @@
           <a:noFill/>
         </p:spPr>
         <p:txBody>
+          <a:bodyPr wrap="none">
+            <a:spAutoFit/>
+          </a:bodyPr>
+          <a:lstStyle/>
+          <a:p>
+            <a:pPr algn="l"/>
+            <a:r>
+              <a:rPr sz="800">
+                <a:solidFill>
+                  <a:srgbClr val="C8D2E6"/>
+                </a:solidFill>
+                <a:latin typeface="JetBrains Mono"/>
+              </a:rPr>
+              <a:t>FKB CAMPUS  ·  FIRMENKUNDENAKADEMIE  ·  M16</a:t>
+            </a:r>
+          </a:p>
+        </p:txBody>
+      </p:sp>
+      <p:sp>
+        <p:nvSpPr>
+          <p:cNvPr id="5" name="TextBox 4"/>
+          <p:cNvSpPr txBox="1"/>
+          <p:nvPr/>
+        </p:nvSpPr>
+        <p:spPr>
+          <a:xfrm>
+            <a:off x="685800" y="1828800"/>
+            <a:ext cx="10817352" cy="2011680"/>
+          </a:xfrm>
+          <a:prstGeom prst="rect">
+            <a:avLst/>
+          </a:prstGeom>
+          <a:noFill/>
+        </p:spPr>
+        <p:txBody>
           <a:bodyPr wrap="square">
-            <a:normAutofit/>
+            <a:spAutoFit/>
           </a:bodyPr>
           <a:lstStyle/>
           <a:p>
             <a:pPr algn="l"/>
             <a:r>
-              <a:rPr sz="1400" b="0" i="1">
-                <a:solidFill>
-                  <a:srgbClr val="4D5270"/>
-                </a:solidFill>
-                <a:latin typeface="Georgia"/>
+              <a:rPr sz="4600" b="1" i="0">
+                <a:solidFill>
+                  <a:srgbClr val="FFFFFF"/>
+                </a:solidFill>
+                <a:latin typeface="Source Serif 4"/>
               </a:rPr>
-              <a:t>Nettomargenziffer im Firmenkundenbestand messen, verstehen und systematisch verbessern</a:t>
-            </a:r>
+              <a:t>NMZ-Optimierung</a:t>
+            </a:r>
+          </a:p>
+        </p:txBody>
+      </p:sp>
+      <p:sp>
+        <p:nvSpPr>
+          <p:cNvPr id="6" name="Rectangle 5"/>
+          <p:cNvSpPr/>
+          <p:nvPr/>
+        </p:nvSpPr>
+        <p:spPr>
+          <a:xfrm>
+            <a:off x="685800" y="5029200"/>
+            <a:ext cx="10817352" cy="12700"/>
+          </a:xfrm>
+          <a:prstGeom prst="rect">
+            <a:avLst/>
+          </a:prstGeom>
+          <a:solidFill>
+            <a:srgbClr val="FFFFFF"/>
+          </a:solidFill>
+          <a:ln>
+            <a:noFill/>
+          </a:ln>
+        </p:spPr>
+        <p:style>
+          <a:lnRef idx="1">
+            <a:schemeClr val="accent1"/>
+          </a:lnRef>
+          <a:fillRef idx="3">
+            <a:schemeClr val="accent1"/>
+          </a:fillRef>
+          <a:effectRef idx="2">
+            <a:schemeClr val="accent1"/>
+          </a:effectRef>
+          <a:fontRef idx="minor">
+            <a:schemeClr val="lt1"/>
+          </a:fontRef>
+        </p:style>
+        <p:txBody>
+          <a:bodyPr rtlCol="0" anchor="ctr"/>
+          <a:lstStyle/>
+          <a:p>
+            <a:pPr algn="ctr"/>
           </a:p>
         </p:txBody>
       </p:sp>
@@ -3296,8 +3306,8 @@
         </p:nvSpPr>
         <p:spPr>
           <a:xfrm>
-            <a:off x="6032500" y="5016500"/>
-            <a:ext cx="2540000" cy="177800"/>
+            <a:off x="685800" y="5193792"/>
+            <a:ext cx="5408676" cy="201168"/>
           </a:xfrm>
           <a:prstGeom prst="rect">
             <a:avLst/>
@@ -3305,20 +3315,20 @@
           <a:noFill/>
         </p:spPr>
         <p:txBody>
-          <a:bodyPr wrap="square">
-            <a:normAutofit/>
+          <a:bodyPr wrap="none">
+            <a:spAutoFit/>
           </a:bodyPr>
           <a:lstStyle/>
           <a:p>
             <a:pPr algn="l"/>
             <a:r>
-              <a:rPr sz="900" b="0" i="0">
-                <a:solidFill>
-                  <a:srgbClr val="7B7FA0"/>
-                </a:solidFill>
-                <a:latin typeface="Courier New"/>
+              <a:rPr sz="700">
+                <a:solidFill>
+                  <a:srgbClr val="A0B4D2"/>
+                </a:solidFill>
+                <a:latin typeface="JetBrains Mono"/>
               </a:rPr>
-              <a:t>ZIELSTUFE</a:t>
+              <a:t>KOMPETENZSTUFE</a:t>
             </a:r>
           </a:p>
         </p:txBody>
@@ -3331,8 +3341,8 @@
         </p:nvSpPr>
         <p:spPr>
           <a:xfrm>
-            <a:off x="6032500" y="5207000"/>
-            <a:ext cx="2540000" cy="508000"/>
+            <a:off x="685800" y="5394960"/>
+            <a:ext cx="5408676" cy="320040"/>
           </a:xfrm>
           <a:prstGeom prst="rect">
             <a:avLst/>
@@ -3341,17 +3351,17 @@
         </p:spPr>
         <p:txBody>
           <a:bodyPr wrap="square">
-            <a:normAutofit/>
+            <a:spAutoFit/>
           </a:bodyPr>
           <a:lstStyle/>
           <a:p>
             <a:pPr algn="l"/>
             <a:r>
-              <a:rPr sz="1400" b="0" i="0">
-                <a:solidFill>
-                  <a:srgbClr val="191D2E"/>
-                </a:solidFill>
-                <a:latin typeface="Georgia"/>
+              <a:rPr sz="1100" b="0" i="0">
+                <a:solidFill>
+                  <a:srgbClr val="FFFFFF"/>
+                </a:solidFill>
+                <a:latin typeface="Arial"/>
               </a:rPr>
               <a:t>Berater</a:t>
             </a:r>
@@ -3366,8 +3376,8 @@
         </p:nvSpPr>
         <p:spPr>
           <a:xfrm>
-            <a:off x="8890000" y="5016500"/>
-            <a:ext cx="2667000" cy="177800"/>
+            <a:off x="6094476" y="5193792"/>
+            <a:ext cx="5408676" cy="201168"/>
           </a:xfrm>
           <a:prstGeom prst="rect">
             <a:avLst/>
@@ -3375,20 +3385,20 @@
           <a:noFill/>
         </p:spPr>
         <p:txBody>
-          <a:bodyPr wrap="square">
-            <a:normAutofit/>
+          <a:bodyPr wrap="none">
+            <a:spAutoFit/>
           </a:bodyPr>
           <a:lstStyle/>
           <a:p>
             <a:pPr algn="l"/>
             <a:r>
-              <a:rPr sz="900" b="0" i="0">
-                <a:solidFill>
-                  <a:srgbClr val="7B7FA0"/>
-                </a:solidFill>
-                <a:latin typeface="Courier New"/>
+              <a:rPr sz="700">
+                <a:solidFill>
+                  <a:srgbClr val="A0B4D2"/>
+                </a:solidFill>
+                <a:latin typeface="JetBrains Mono"/>
               </a:rPr>
-              <a:t>DAUER</a:t>
+              <a:t>VERSION</a:t>
             </a:r>
           </a:p>
         </p:txBody>
@@ -3401,8 +3411,8 @@
         </p:nvSpPr>
         <p:spPr>
           <a:xfrm>
-            <a:off x="8890000" y="5207000"/>
-            <a:ext cx="2667000" cy="508000"/>
+            <a:off x="6094476" y="5394960"/>
+            <a:ext cx="5408676" cy="320040"/>
           </a:xfrm>
           <a:prstGeom prst="rect">
             <a:avLst/>
@@ -3411,19 +3421,132 @@
         </p:spPr>
         <p:txBody>
           <a:bodyPr wrap="square">
-            <a:normAutofit/>
+            <a:spAutoFit/>
           </a:bodyPr>
           <a:lstStyle/>
           <a:p>
             <a:pPr algn="l"/>
             <a:r>
-              <a:rPr sz="1400" b="0" i="0">
-                <a:solidFill>
-                  <a:srgbClr val="191D2E"/>
-                </a:solidFill>
-                <a:latin typeface="Georgia"/>
+              <a:rPr sz="1100" b="0" i="0">
+                <a:solidFill>
+                  <a:srgbClr val="FFFFFF"/>
+                </a:solidFill>
+                <a:latin typeface="Arial"/>
               </a:rPr>
-              <a:t>90 Min.</a:t>
+              <a:t>v0.4</a:t>
+            </a:r>
+          </a:p>
+        </p:txBody>
+      </p:sp>
+      <p:sp>
+        <p:nvSpPr>
+          <p:cNvPr id="11" name="Rectangle 10"/>
+          <p:cNvSpPr/>
+          <p:nvPr/>
+        </p:nvSpPr>
+        <p:spPr>
+          <a:xfrm>
+            <a:off x="0" y="6510528"/>
+            <a:ext cx="12188952" cy="347472"/>
+          </a:xfrm>
+          <a:prstGeom prst="rect">
+            <a:avLst/>
+          </a:prstGeom>
+          <a:solidFill>
+            <a:srgbClr val="0A1937"/>
+          </a:solidFill>
+          <a:ln>
+            <a:noFill/>
+          </a:ln>
+        </p:spPr>
+        <p:style>
+          <a:lnRef idx="1">
+            <a:schemeClr val="accent1"/>
+          </a:lnRef>
+          <a:fillRef idx="3">
+            <a:schemeClr val="accent1"/>
+          </a:fillRef>
+          <a:effectRef idx="2">
+            <a:schemeClr val="accent1"/>
+          </a:effectRef>
+          <a:fontRef idx="minor">
+            <a:schemeClr val="lt1"/>
+          </a:fontRef>
+        </p:style>
+        <p:txBody>
+          <a:bodyPr rtlCol="0" anchor="ctr"/>
+          <a:lstStyle/>
+          <a:p>
+            <a:pPr algn="ctr"/>
+          </a:p>
+        </p:txBody>
+      </p:sp>
+      <p:sp>
+        <p:nvSpPr>
+          <p:cNvPr id="12" name="TextBox 11"/>
+          <p:cNvSpPr txBox="1"/>
+          <p:nvPr/>
+        </p:nvSpPr>
+        <p:spPr>
+          <a:xfrm>
+            <a:off x="685800" y="6583680"/>
+            <a:ext cx="5408676" cy="256032"/>
+          </a:xfrm>
+          <a:prstGeom prst="rect">
+            <a:avLst/>
+          </a:prstGeom>
+          <a:noFill/>
+        </p:spPr>
+        <p:txBody>
+          <a:bodyPr wrap="none">
+            <a:spAutoFit/>
+          </a:bodyPr>
+          <a:lstStyle/>
+          <a:p>
+            <a:pPr algn="l"/>
+            <a:r>
+              <a:rPr sz="700">
+                <a:solidFill>
+                  <a:srgbClr val="96A5BE"/>
+                </a:solidFill>
+                <a:latin typeface="JetBrains Mono"/>
+              </a:rPr>
+              <a:t>Benedikt Zoller Coaching  ·  FKB Campus  ·  2026</a:t>
+            </a:r>
+          </a:p>
+        </p:txBody>
+      </p:sp>
+      <p:sp>
+        <p:nvSpPr>
+          <p:cNvPr id="13" name="TextBox 12"/>
+          <p:cNvSpPr txBox="1"/>
+          <p:nvPr/>
+        </p:nvSpPr>
+        <p:spPr>
+          <a:xfrm>
+            <a:off x="6094476" y="6583680"/>
+            <a:ext cx="5408676" cy="256032"/>
+          </a:xfrm>
+          <a:prstGeom prst="rect">
+            <a:avLst/>
+          </a:prstGeom>
+          <a:noFill/>
+        </p:spPr>
+        <p:txBody>
+          <a:bodyPr wrap="none">
+            <a:spAutoFit/>
+          </a:bodyPr>
+          <a:lstStyle/>
+          <a:p>
+            <a:pPr algn="r"/>
+            <a:r>
+              <a:rPr sz="700">
+                <a:solidFill>
+                  <a:srgbClr val="96A5BE"/>
+                </a:solidFill>
+                <a:latin typeface="JetBrains Mono"/>
+              </a:rPr>
+              <a:t>Trainer-Präsentation</a:t>
             </a:r>
           </a:p>
         </p:txBody>
@@ -3439,14 +3562,6 @@
 <file path=ppt/slides/slide10.xml><?xml version="1.0" encoding="utf-8"?>
 <p:sld xmlns:a="http://schemas.openxmlformats.org/drawingml/2006/main" xmlns:p="http://schemas.openxmlformats.org/presentationml/2006/main" xmlns:r="http://schemas.openxmlformats.org/officeDocument/2006/relationships">
   <p:cSld>
-    <p:bg>
-      <p:bgPr>
-        <a:solidFill>
-          <a:srgbClr val="F8F8FA"/>
-        </a:solidFill>
-        <a:effectLst/>
-      </p:bgPr>
-    </p:bg>
     <p:spTree>
       <p:nvGrpSpPr>
         <p:cNvPr id="1" name=""/>
@@ -3456,126 +3571,20 @@
       <p:grpSpPr/>
       <p:sp>
         <p:nvSpPr>
-          <p:cNvPr id="2" name="TextBox 1"/>
-          <p:cNvSpPr txBox="1"/>
-          <p:nvPr/>
-        </p:nvSpPr>
-        <p:spPr>
-          <a:xfrm>
-            <a:off x="609600" y="457200"/>
-            <a:ext cx="3175000" cy="279400"/>
-          </a:xfrm>
-          <a:prstGeom prst="rect">
-            <a:avLst/>
-          </a:prstGeom>
-          <a:noFill/>
-        </p:spPr>
-        <p:txBody>
-          <a:bodyPr wrap="square">
-            <a:normAutofit/>
-          </a:bodyPr>
-          <a:lstStyle/>
-          <a:p>
-            <a:pPr algn="l"/>
-            <a:r>
-              <a:rPr sz="1000" b="1" i="0">
-                <a:solidFill>
-                  <a:srgbClr val="191D2E"/>
-                </a:solidFill>
-                <a:latin typeface="Arial"/>
-              </a:rPr>
-              <a:t>FKB  Campus</a:t>
-            </a:r>
-          </a:p>
-        </p:txBody>
-      </p:sp>
-      <p:sp>
-        <p:nvSpPr>
-          <p:cNvPr id="3" name="TextBox 2"/>
-          <p:cNvSpPr txBox="1"/>
-          <p:nvPr/>
-        </p:nvSpPr>
-        <p:spPr>
-          <a:xfrm>
-            <a:off x="609600" y="457200"/>
-            <a:ext cx="10972800" cy="279400"/>
-          </a:xfrm>
-          <a:prstGeom prst="rect">
-            <a:avLst/>
-          </a:prstGeom>
-          <a:noFill/>
-        </p:spPr>
-        <p:txBody>
-          <a:bodyPr wrap="square">
-            <a:normAutofit/>
-          </a:bodyPr>
-          <a:lstStyle/>
-          <a:p>
-            <a:pPr algn="r"/>
-            <a:r>
-              <a:rPr sz="900" b="0" i="0">
-                <a:solidFill>
-                  <a:srgbClr val="7B7FA0"/>
-                </a:solidFill>
-                <a:latin typeface="Courier New"/>
-              </a:rPr>
-              <a:t>Ende · v0.4</a:t>
-            </a:r>
-          </a:p>
-        </p:txBody>
-      </p:sp>
-      <p:sp>
-        <p:nvSpPr>
-          <p:cNvPr id="4" name="TextBox 3"/>
-          <p:cNvSpPr txBox="1"/>
-          <p:nvPr/>
-        </p:nvSpPr>
-        <p:spPr>
-          <a:xfrm>
-            <a:off x="609600" y="1143000"/>
-            <a:ext cx="10972800" cy="3556000"/>
-          </a:xfrm>
-          <a:prstGeom prst="rect">
-            <a:avLst/>
-          </a:prstGeom>
-          <a:noFill/>
-        </p:spPr>
-        <p:txBody>
-          <a:bodyPr wrap="square">
-            <a:normAutofit/>
-          </a:bodyPr>
-          <a:lstStyle/>
-          <a:p>
-            <a:pPr algn="l"/>
-            <a:r>
-              <a:rPr sz="9600" b="0" i="0">
-                <a:solidFill>
-                  <a:srgbClr val="191D2E"/>
-                </a:solidFill>
-                <a:latin typeface="Georgia"/>
-              </a:rPr>
-              <a:t>Danke.
-Fragen?</a:t>
-            </a:r>
-          </a:p>
-        </p:txBody>
-      </p:sp>
-      <p:sp>
-        <p:nvSpPr>
-          <p:cNvPr id="5" name="Rectangle 4"/>
+          <p:cNvPr id="2" name="Rectangle 1"/>
           <p:cNvSpPr/>
           <p:nvPr/>
         </p:nvSpPr>
         <p:spPr>
           <a:xfrm>
-            <a:off x="609600" y="4826000"/>
-            <a:ext cx="10972800" cy="6350"/>
+            <a:off x="0" y="0"/>
+            <a:ext cx="12188952" cy="6858000"/>
           </a:xfrm>
           <a:prstGeom prst="rect">
             <a:avLst/>
           </a:prstGeom>
           <a:solidFill>
-            <a:srgbClr val="191D2E"/>
+            <a:srgbClr val="EDEDF3"/>
           </a:solidFill>
           <a:ln>
             <a:noFill/>
@@ -3605,14 +3614,57 @@
       </p:sp>
       <p:sp>
         <p:nvSpPr>
-          <p:cNvPr id="6" name="TextBox 5"/>
+          <p:cNvPr id="3" name="Rectangle 2"/>
+          <p:cNvSpPr/>
+          <p:nvPr/>
+        </p:nvSpPr>
+        <p:spPr>
+          <a:xfrm>
+            <a:off x="0" y="0"/>
+            <a:ext cx="12188952" cy="50292"/>
+          </a:xfrm>
+          <a:prstGeom prst="rect">
+            <a:avLst/>
+          </a:prstGeom>
+          <a:solidFill>
+            <a:srgbClr val="1F2C56"/>
+          </a:solidFill>
+          <a:ln>
+            <a:noFill/>
+          </a:ln>
+        </p:spPr>
+        <p:style>
+          <a:lnRef idx="1">
+            <a:schemeClr val="accent1"/>
+          </a:lnRef>
+          <a:fillRef idx="3">
+            <a:schemeClr val="accent1"/>
+          </a:fillRef>
+          <a:effectRef idx="2">
+            <a:schemeClr val="accent1"/>
+          </a:effectRef>
+          <a:fontRef idx="minor">
+            <a:schemeClr val="lt1"/>
+          </a:fontRef>
+        </p:style>
+        <p:txBody>
+          <a:bodyPr rtlCol="0" anchor="ctr"/>
+          <a:lstStyle/>
+          <a:p>
+            <a:pPr algn="ctr"/>
+          </a:p>
+        </p:txBody>
+      </p:sp>
+      <p:sp>
+        <p:nvSpPr>
+          <p:cNvPr id="4" name="TextBox 3"/>
           <p:cNvSpPr txBox="1"/>
           <p:nvPr/>
         </p:nvSpPr>
         <p:spPr>
           <a:xfrm>
-            <a:off x="609600" y="4953000"/>
-            <a:ext cx="5715000" cy="1143000"/>
+            <a:off x="685800" y="109728"/>
+            <a:ext cx="10817352" cy="228600"/>
           </a:xfrm>
           <a:prstGeom prst="rect">
             <a:avLst/>
@@ -3620,21 +3672,107 @@
           <a:noFill/>
         </p:spPr>
         <p:txBody>
-          <a:bodyPr wrap="square">
-            <a:normAutofit/>
+          <a:bodyPr wrap="none">
+            <a:spAutoFit/>
           </a:bodyPr>
           <a:lstStyle/>
           <a:p>
             <a:pPr algn="l"/>
             <a:r>
-              <a:rPr sz="1400" b="0" i="1">
-                <a:solidFill>
-                  <a:srgbClr val="191D2E"/>
-                </a:solidFill>
-                <a:latin typeface="Georgia"/>
+              <a:rPr sz="750">
+                <a:solidFill>
+                  <a:srgbClr val="78808C"/>
+                </a:solidFill>
+                <a:latin typeface="JetBrains Mono"/>
               </a:rPr>
-              <a:t>Modul «NMZ-Optimierung» auf FKB Campus — 5 Lernziele, Praxisfall und Quellenapparat.</a:t>
-            </a:r>
+              <a:t>M16  ·  INHALT</a:t>
+            </a:r>
+          </a:p>
+        </p:txBody>
+      </p:sp>
+      <p:sp>
+        <p:nvSpPr>
+          <p:cNvPr id="5" name="Rectangle 4"/>
+          <p:cNvSpPr/>
+          <p:nvPr/>
+        </p:nvSpPr>
+        <p:spPr>
+          <a:xfrm>
+            <a:off x="0" y="1234440"/>
+            <a:ext cx="12188952" cy="12700"/>
+          </a:xfrm>
+          <a:prstGeom prst="rect">
+            <a:avLst/>
+          </a:prstGeom>
+          <a:solidFill>
+            <a:srgbClr val="D8DFE4"/>
+          </a:solidFill>
+          <a:ln>
+            <a:noFill/>
+          </a:ln>
+        </p:spPr>
+        <p:style>
+          <a:lnRef idx="1">
+            <a:schemeClr val="accent1"/>
+          </a:lnRef>
+          <a:fillRef idx="3">
+            <a:schemeClr val="accent1"/>
+          </a:fillRef>
+          <a:effectRef idx="2">
+            <a:schemeClr val="accent1"/>
+          </a:effectRef>
+          <a:fontRef idx="minor">
+            <a:schemeClr val="lt1"/>
+          </a:fontRef>
+        </p:style>
+        <p:txBody>
+          <a:bodyPr rtlCol="0" anchor="ctr"/>
+          <a:lstStyle/>
+          <a:p>
+            <a:pPr algn="ctr"/>
+          </a:p>
+        </p:txBody>
+      </p:sp>
+      <p:sp>
+        <p:nvSpPr>
+          <p:cNvPr id="6" name="Rectangle 5"/>
+          <p:cNvSpPr/>
+          <p:nvPr/>
+        </p:nvSpPr>
+        <p:spPr>
+          <a:xfrm>
+            <a:off x="685800" y="502920"/>
+            <a:ext cx="36576" cy="658368"/>
+          </a:xfrm>
+          <a:prstGeom prst="rect">
+            <a:avLst/>
+          </a:prstGeom>
+          <a:solidFill>
+            <a:srgbClr val="D9C089"/>
+          </a:solidFill>
+          <a:ln>
+            <a:noFill/>
+          </a:ln>
+        </p:spPr>
+        <p:style>
+          <a:lnRef idx="1">
+            <a:schemeClr val="accent1"/>
+          </a:lnRef>
+          <a:fillRef idx="3">
+            <a:schemeClr val="accent1"/>
+          </a:fillRef>
+          <a:effectRef idx="2">
+            <a:schemeClr val="accent1"/>
+          </a:effectRef>
+          <a:fontRef idx="minor">
+            <a:schemeClr val="lt1"/>
+          </a:fontRef>
+        </p:style>
+        <p:txBody>
+          <a:bodyPr rtlCol="0" anchor="ctr"/>
+          <a:lstStyle/>
+          <a:p>
+            <a:pPr algn="ctr"/>
           </a:p>
         </p:txBody>
       </p:sp>
@@ -3646,8 +3784,8 @@
         </p:nvSpPr>
         <p:spPr>
           <a:xfrm>
-            <a:off x="6731000" y="4953000"/>
-            <a:ext cx="2413000" cy="177800"/>
+            <a:off x="813816" y="502920"/>
+            <a:ext cx="10634472" cy="685800"/>
           </a:xfrm>
           <a:prstGeom prst="rect">
             <a:avLst/>
@@ -3656,19 +3794,19 @@
         </p:spPr>
         <p:txBody>
           <a:bodyPr wrap="square">
-            <a:normAutofit/>
+            <a:spAutoFit/>
           </a:bodyPr>
           <a:lstStyle/>
           <a:p>
             <a:pPr algn="l"/>
             <a:r>
-              <a:rPr sz="900" b="0" i="0">
-                <a:solidFill>
-                  <a:srgbClr val="7B7FA0"/>
-                </a:solidFill>
-                <a:latin typeface="Courier New"/>
+              <a:rPr sz="2400" b="1" i="0">
+                <a:solidFill>
+                  <a:srgbClr val="1F2C56"/>
+                </a:solidFill>
+                <a:latin typeface="Source Serif 4"/>
               </a:rPr>
-              <a:t>Trainer</a:t>
+              <a:t>Schritt 3: Handeln und dokumentieren</a:t>
             </a:r>
           </a:p>
         </p:txBody>
@@ -3681,8 +3819,8 @@
         </p:nvSpPr>
         <p:spPr>
           <a:xfrm>
-            <a:off x="6731000" y="5156200"/>
-            <a:ext cx="2413000" cy="381000"/>
+            <a:off x="685800" y="1417320"/>
+            <a:ext cx="10817352" cy="5029200"/>
           </a:xfrm>
           <a:prstGeom prst="rect">
             <a:avLst/>
@@ -3691,55 +3829,279 @@
         </p:spPr>
         <p:txBody>
           <a:bodyPr wrap="square">
-            <a:normAutofit/>
+            <a:spAutoFit/>
           </a:bodyPr>
           <a:lstStyle/>
           <a:p>
-            <a:pPr algn="l"/>
-            <a:r>
-              <a:rPr sz="1400" b="0" i="0">
-                <a:solidFill>
-                  <a:srgbClr val="4D5270"/>
-                </a:solidFill>
-                <a:latin typeface="Georgia"/>
+            <a:pPr>
+              <a:spcBef>
+                <a:spcPts val="400"/>
+              </a:spcBef>
+              <a:spcAft>
+                <a:spcPts val="200"/>
+              </a:spcAft>
+            </a:pPr>
+            <a:r>
+              <a:rPr sz="1200">
+                <a:solidFill>
+                  <a:srgbClr val="3D5466"/>
+                </a:solidFill>
+                <a:latin typeface="Arial"/>
               </a:rPr>
-              <a:t>[Name · Kontakt]</a:t>
-            </a:r>
-          </a:p>
-        </p:txBody>
-      </p:sp>
-      <p:sp>
-        <p:nvSpPr>
-          <p:cNvPr id="9" name="TextBox 8"/>
-          <p:cNvSpPr txBox="1"/>
-          <p:nvPr/>
-        </p:nvSpPr>
-        <p:spPr>
-          <a:xfrm>
-            <a:off x="9398000" y="4953000"/>
-            <a:ext cx="2184400" cy="177800"/>
-          </a:xfrm>
-          <a:prstGeom prst="rect">
-            <a:avLst/>
-          </a:prstGeom>
-          <a:noFill/>
-        </p:spPr>
-        <p:txBody>
-          <a:bodyPr wrap="square">
-            <a:normAutofit/>
-          </a:bodyPr>
-          <a:lstStyle/>
-          <a:p>
-            <a:pPr algn="l"/>
-            <a:r>
-              <a:rPr sz="900" b="0" i="0">
-                <a:solidFill>
-                  <a:srgbClr val="7B7FA0"/>
-                </a:solidFill>
-                <a:latin typeface="Courier New"/>
+              <a:t>Für jeden Prio-1-Kunden: konkrete Maßnahme definieren, Termin setzen, in agree dokumentieren. Die Maßnahme muss einem der vier NMZ-Hebel zugeordnet sein:</a:t>
+            </a:r>
+          </a:p>
+          <a:p>
+            <a:pPr>
+              <a:spcBef>
+                <a:spcPts val="400"/>
+              </a:spcBef>
+              <a:spcAft>
+                <a:spcPts val="200"/>
+              </a:spcAft>
+            </a:pPr>
+            <a:r>
+              <a:rPr sz="1300">
+                <a:solidFill>
+                  <a:srgbClr val="3D5466"/>
+                </a:solidFill>
+                <a:latin typeface="Arial"/>
               </a:rPr>
-              <a:t>Modul</a:t>
-            </a:r>
+              <a:t>▸  Zinshebel: Konditionengespräch vorbereiten (→ M14)</a:t>
+            </a:r>
+          </a:p>
+          <a:p>
+            <a:pPr>
+              <a:spcBef>
+                <a:spcPts val="400"/>
+              </a:spcBef>
+              <a:spcAft>
+                <a:spcPts val="200"/>
+              </a:spcAft>
+            </a:pPr>
+            <a:r>
+              <a:rPr sz="1300">
+                <a:solidFill>
+                  <a:srgbClr val="3D5466"/>
+                </a:solidFill>
+                <a:latin typeface="Arial"/>
+              </a:rPr>
+              <a:t>▸  Verbundhebel: Verbundpartner-Termin vereinbaren (→ M13)</a:t>
+            </a:r>
+          </a:p>
+          <a:p>
+            <a:pPr>
+              <a:spcBef>
+                <a:spcPts val="400"/>
+              </a:spcBef>
+              <a:spcAft>
+                <a:spcPts val="200"/>
+              </a:spcAft>
+            </a:pPr>
+            <a:r>
+              <a:rPr sz="1300">
+                <a:solidFill>
+                  <a:srgbClr val="3D5466"/>
+                </a:solidFill>
+                <a:latin typeface="Arial"/>
+              </a:rPr>
+              <a:t>▸  Risikohebel: Rating-Gespräch, Besicherungsoptimierung (gemeinsam mit Marktfolge/Kredit)</a:t>
+            </a:r>
+          </a:p>
+          <a:p>
+            <a:pPr>
+              <a:spcBef>
+                <a:spcPts val="400"/>
+              </a:spcBef>
+              <a:spcAft>
+                <a:spcPts val="200"/>
+              </a:spcAft>
+            </a:pPr>
+            <a:r>
+              <a:rPr sz="1300">
+                <a:solidFill>
+                  <a:srgbClr val="3D5466"/>
+                </a:solidFill>
+                <a:latin typeface="Arial"/>
+              </a:rPr>
+              <a:t>▸  Kostenhebel: Betreuungsintensität überprüfen (Führungsgespräch)</a:t>
+            </a:r>
+          </a:p>
+          <a:p>
+            <a:pPr>
+              <a:spcBef>
+                <a:spcPts val="600"/>
+              </a:spcBef>
+              <a:spcAft>
+                <a:spcPts val="200"/>
+              </a:spcAft>
+            </a:pPr>
+            <a:r>
+              <a:rPr sz="1200" i="1">
+                <a:solidFill>
+                  <a:srgbClr val="3D5466"/>
+                </a:solidFill>
+                <a:latin typeface="Arial"/>
+              </a:rPr>
+              <a:t>→  Stichwort-Leitfaden: Margenverteidigung im Konditionsgespräch</a:t>
+            </a:r>
+          </a:p>
+          <a:p>
+            <a:pPr>
+              <a:spcBef>
+                <a:spcPts val="600"/>
+              </a:spcBef>
+              <a:spcAft>
+                <a:spcPts val="200"/>
+              </a:spcAft>
+            </a:pPr>
+            <a:r>
+              <a:rPr sz="1200" i="1">
+                <a:solidFill>
+                  <a:srgbClr val="3D5466"/>
+                </a:solidFill>
+                <a:latin typeface="Arial"/>
+              </a:rPr>
+              <a:t>→  Das Ablesen der NMZ ist der einfache Teil. Das Gespräch mit dem Kunden über eine Margenanpassung ist der schwierige. Drei praxiserprobte Argumentationslinien:</a:t>
+            </a:r>
+          </a:p>
+          <a:p>
+            <a:pPr>
+              <a:spcBef>
+                <a:spcPts val="400"/>
+              </a:spcBef>
+              <a:spcAft>
+                <a:spcPts val="200"/>
+              </a:spcAft>
+            </a:pPr>
+            <a:r>
+              <a:rPr sz="1200">
+                <a:solidFill>
+                  <a:srgbClr val="3D5466"/>
+                </a:solidFill>
+                <a:latin typeface="Arial"/>
+              </a:rPr>
+              <a:t>## 4.5 Praxiscase: Felix Braun optimiert seinen Bestand</a:t>
+            </a:r>
+          </a:p>
+          <a:p>
+            <a:pPr>
+              <a:spcBef>
+                <a:spcPts val="400"/>
+              </a:spcBef>
+              <a:spcAft>
+                <a:spcPts val="200"/>
+              </a:spcAft>
+            </a:pPr>
+            <a:r>
+              <a:rPr sz="1200">
+                <a:solidFill>
+                  <a:srgbClr val="3D5466"/>
+                </a:solidFill>
+                <a:latin typeface="Arial"/>
+              </a:rPr>
+              <a:t>Ausgangssituation</a:t>
+            </a:r>
+          </a:p>
+          <a:p>
+            <a:pPr>
+              <a:spcBef>
+                <a:spcPts val="400"/>
+              </a:spcBef>
+              <a:spcAft>
+                <a:spcPts val="200"/>
+              </a:spcAft>
+            </a:pPr>
+            <a:r>
+              <a:rPr sz="1200">
+                <a:solidFill>
+                  <a:srgbClr val="3D5466"/>
+                </a:solidFill>
+                <a:latin typeface="Arial"/>
+              </a:rPr>
+              <a:t>Analyse</a:t>
+            </a:r>
+          </a:p>
+          <a:p>
+            <a:pPr>
+              <a:spcBef>
+                <a:spcPts val="400"/>
+              </a:spcBef>
+              <a:spcAft>
+                <a:spcPts val="200"/>
+              </a:spcAft>
+            </a:pPr>
+            <a:r>
+              <a:rPr sz="1200">
+                <a:solidFill>
+                  <a:srgbClr val="3D5466"/>
+                </a:solidFill>
+                <a:latin typeface="Arial"/>
+              </a:rPr>
+              <a:t>Felix ruft das Bestandsranking auf. Er sieht sofort: Sieben Kunden haben eine NMZ unter 0,5 %, davon zwei mit negativem DB. Die Hauptursache variiert:</a:t>
+            </a:r>
+          </a:p>
+          <a:p>
+            <a:pPr>
+              <a:spcBef>
+                <a:spcPts val="400"/>
+              </a:spcBef>
+              <a:spcAft>
+                <a:spcPts val="200"/>
+              </a:spcAft>
+            </a:pPr>
+            <a:r>
+              <a:rPr sz="1200">
+                <a:solidFill>
+                  <a:srgbClr val="3D5466"/>
+                </a:solidFill>
+                <a:latin typeface="Arial"/>
+              </a:rPr>
+              <a:t>Felix priorisiert</a:t>
+            </a:r>
+          </a:p>
+        </p:txBody>
+      </p:sp>
+      <p:sp>
+        <p:nvSpPr>
+          <p:cNvPr id="9" name="Rectangle 8"/>
+          <p:cNvSpPr/>
+          <p:nvPr/>
+        </p:nvSpPr>
+        <p:spPr>
+          <a:xfrm>
+            <a:off x="0" y="6510528"/>
+            <a:ext cx="12188952" cy="347472"/>
+          </a:xfrm>
+          <a:prstGeom prst="rect">
+            <a:avLst/>
+          </a:prstGeom>
+          <a:solidFill>
+            <a:srgbClr val="0A1937"/>
+          </a:solidFill>
+          <a:ln>
+            <a:noFill/>
+          </a:ln>
+        </p:spPr>
+        <p:style>
+          <a:lnRef idx="1">
+            <a:schemeClr val="accent1"/>
+          </a:lnRef>
+          <a:fillRef idx="3">
+            <a:schemeClr val="accent1"/>
+          </a:fillRef>
+          <a:effectRef idx="2">
+            <a:schemeClr val="accent1"/>
+          </a:effectRef>
+          <a:fontRef idx="minor">
+            <a:schemeClr val="lt1"/>
+          </a:fontRef>
+        </p:style>
+        <p:txBody>
+          <a:bodyPr rtlCol="0" anchor="ctr"/>
+          <a:lstStyle/>
+          <a:p>
+            <a:pPr algn="ctr"/>
           </a:p>
         </p:txBody>
       </p:sp>
@@ -3751,8 +4113,8 @@
         </p:nvSpPr>
         <p:spPr>
           <a:xfrm>
-            <a:off x="9398000" y="5156200"/>
-            <a:ext cx="2184400" cy="381000"/>
+            <a:off x="685800" y="6583680"/>
+            <a:ext cx="6490411" cy="256032"/>
           </a:xfrm>
           <a:prstGeom prst="rect">
             <a:avLst/>
@@ -3760,20 +4122,875 @@
           <a:noFill/>
         </p:spPr>
         <p:txBody>
+          <a:bodyPr wrap="none">
+            <a:spAutoFit/>
+          </a:bodyPr>
+          <a:lstStyle/>
+          <a:p>
+            <a:pPr algn="l"/>
+            <a:r>
+              <a:rPr sz="700">
+                <a:solidFill>
+                  <a:srgbClr val="A0B4D2"/>
+                </a:solidFill>
+                <a:latin typeface="JetBrains Mono"/>
+              </a:rPr>
+              <a:t>Benedikt Zoller Coaching  ·  FKB Campus  ·  M16</a:t>
+            </a:r>
+          </a:p>
+        </p:txBody>
+      </p:sp>
+    </p:spTree>
+  </p:cSld>
+  <p:clrMapOvr>
+    <a:masterClrMapping/>
+  </p:clrMapOvr>
+</p:sld>
+</file>
+
+<file path=ppt/slides/slide11.xml><?xml version="1.0" encoding="utf-8"?>
+<p:sld xmlns:a="http://schemas.openxmlformats.org/drawingml/2006/main" xmlns:p="http://schemas.openxmlformats.org/presentationml/2006/main" xmlns:r="http://schemas.openxmlformats.org/officeDocument/2006/relationships">
+  <p:cSld>
+    <p:spTree>
+      <p:nvGrpSpPr>
+        <p:cNvPr id="1" name=""/>
+        <p:cNvGrpSpPr/>
+        <p:nvPr/>
+      </p:nvGrpSpPr>
+      <p:grpSpPr/>
+      <p:sp>
+        <p:nvSpPr>
+          <p:cNvPr id="2" name="Rectangle 1"/>
+          <p:cNvSpPr/>
+          <p:nvPr/>
+        </p:nvSpPr>
+        <p:spPr>
+          <a:xfrm>
+            <a:off x="0" y="0"/>
+            <a:ext cx="12188952" cy="6858000"/>
+          </a:xfrm>
+          <a:prstGeom prst="rect">
+            <a:avLst/>
+          </a:prstGeom>
+          <a:solidFill>
+            <a:srgbClr val="EDEDF3"/>
+          </a:solidFill>
+          <a:ln>
+            <a:noFill/>
+          </a:ln>
+        </p:spPr>
+        <p:style>
+          <a:lnRef idx="1">
+            <a:schemeClr val="accent1"/>
+          </a:lnRef>
+          <a:fillRef idx="3">
+            <a:schemeClr val="accent1"/>
+          </a:fillRef>
+          <a:effectRef idx="2">
+            <a:schemeClr val="accent1"/>
+          </a:effectRef>
+          <a:fontRef idx="minor">
+            <a:schemeClr val="lt1"/>
+          </a:fontRef>
+        </p:style>
+        <p:txBody>
+          <a:bodyPr rtlCol="0" anchor="ctr"/>
+          <a:lstStyle/>
+          <a:p>
+            <a:pPr algn="ctr"/>
+          </a:p>
+        </p:txBody>
+      </p:sp>
+      <p:sp>
+        <p:nvSpPr>
+          <p:cNvPr id="3" name="Rectangle 2"/>
+          <p:cNvSpPr/>
+          <p:nvPr/>
+        </p:nvSpPr>
+        <p:spPr>
+          <a:xfrm>
+            <a:off x="0" y="0"/>
+            <a:ext cx="12188952" cy="50292"/>
+          </a:xfrm>
+          <a:prstGeom prst="rect">
+            <a:avLst/>
+          </a:prstGeom>
+          <a:solidFill>
+            <a:srgbClr val="1F2C56"/>
+          </a:solidFill>
+          <a:ln>
+            <a:noFill/>
+          </a:ln>
+        </p:spPr>
+        <p:style>
+          <a:lnRef idx="1">
+            <a:schemeClr val="accent1"/>
+          </a:lnRef>
+          <a:fillRef idx="3">
+            <a:schemeClr val="accent1"/>
+          </a:fillRef>
+          <a:effectRef idx="2">
+            <a:schemeClr val="accent1"/>
+          </a:effectRef>
+          <a:fontRef idx="minor">
+            <a:schemeClr val="lt1"/>
+          </a:fontRef>
+        </p:style>
+        <p:txBody>
+          <a:bodyPr rtlCol="0" anchor="ctr"/>
+          <a:lstStyle/>
+          <a:p>
+            <a:pPr algn="ctr"/>
+          </a:p>
+        </p:txBody>
+      </p:sp>
+      <p:sp>
+        <p:nvSpPr>
+          <p:cNvPr id="4" name="TextBox 3"/>
+          <p:cNvSpPr txBox="1"/>
+          <p:nvPr/>
+        </p:nvSpPr>
+        <p:spPr>
+          <a:xfrm>
+            <a:off x="685800" y="109728"/>
+            <a:ext cx="10817352" cy="228600"/>
+          </a:xfrm>
+          <a:prstGeom prst="rect">
+            <a:avLst/>
+          </a:prstGeom>
+          <a:noFill/>
+        </p:spPr>
+        <p:txBody>
+          <a:bodyPr wrap="none">
+            <a:spAutoFit/>
+          </a:bodyPr>
+          <a:lstStyle/>
+          <a:p>
+            <a:pPr algn="l"/>
+            <a:r>
+              <a:rPr sz="750">
+                <a:solidFill>
+                  <a:srgbClr val="78808C"/>
+                </a:solidFill>
+                <a:latin typeface="JetBrains Mono"/>
+              </a:rPr>
+              <a:t>M16  ·  INHALT</a:t>
+            </a:r>
+          </a:p>
+        </p:txBody>
+      </p:sp>
+      <p:sp>
+        <p:nvSpPr>
+          <p:cNvPr id="5" name="Rectangle 4"/>
+          <p:cNvSpPr/>
+          <p:nvPr/>
+        </p:nvSpPr>
+        <p:spPr>
+          <a:xfrm>
+            <a:off x="0" y="1234440"/>
+            <a:ext cx="12188952" cy="12700"/>
+          </a:xfrm>
+          <a:prstGeom prst="rect">
+            <a:avLst/>
+          </a:prstGeom>
+          <a:solidFill>
+            <a:srgbClr val="D8DFE4"/>
+          </a:solidFill>
+          <a:ln>
+            <a:noFill/>
+          </a:ln>
+        </p:spPr>
+        <p:style>
+          <a:lnRef idx="1">
+            <a:schemeClr val="accent1"/>
+          </a:lnRef>
+          <a:fillRef idx="3">
+            <a:schemeClr val="accent1"/>
+          </a:fillRef>
+          <a:effectRef idx="2">
+            <a:schemeClr val="accent1"/>
+          </a:effectRef>
+          <a:fontRef idx="minor">
+            <a:schemeClr val="lt1"/>
+          </a:fontRef>
+        </p:style>
+        <p:txBody>
+          <a:bodyPr rtlCol="0" anchor="ctr"/>
+          <a:lstStyle/>
+          <a:p>
+            <a:pPr algn="ctr"/>
+          </a:p>
+        </p:txBody>
+      </p:sp>
+      <p:sp>
+        <p:nvSpPr>
+          <p:cNvPr id="6" name="Rectangle 5"/>
+          <p:cNvSpPr/>
+          <p:nvPr/>
+        </p:nvSpPr>
+        <p:spPr>
+          <a:xfrm>
+            <a:off x="685800" y="502920"/>
+            <a:ext cx="36576" cy="658368"/>
+          </a:xfrm>
+          <a:prstGeom prst="rect">
+            <a:avLst/>
+          </a:prstGeom>
+          <a:solidFill>
+            <a:srgbClr val="D9C089"/>
+          </a:solidFill>
+          <a:ln>
+            <a:noFill/>
+          </a:ln>
+        </p:spPr>
+        <p:style>
+          <a:lnRef idx="1">
+            <a:schemeClr val="accent1"/>
+          </a:lnRef>
+          <a:fillRef idx="3">
+            <a:schemeClr val="accent1"/>
+          </a:fillRef>
+          <a:effectRef idx="2">
+            <a:schemeClr val="accent1"/>
+          </a:effectRef>
+          <a:fontRef idx="minor">
+            <a:schemeClr val="lt1"/>
+          </a:fontRef>
+        </p:style>
+        <p:txBody>
+          <a:bodyPr rtlCol="0" anchor="ctr"/>
+          <a:lstStyle/>
+          <a:p>
+            <a:pPr algn="ctr"/>
+          </a:p>
+        </p:txBody>
+      </p:sp>
+      <p:sp>
+        <p:nvSpPr>
+          <p:cNvPr id="7" name="TextBox 6"/>
+          <p:cNvSpPr txBox="1"/>
+          <p:nvPr/>
+        </p:nvSpPr>
+        <p:spPr>
+          <a:xfrm>
+            <a:off x="813816" y="502920"/>
+            <a:ext cx="10634472" cy="685800"/>
+          </a:xfrm>
+          <a:prstGeom prst="rect">
+            <a:avLst/>
+          </a:prstGeom>
+          <a:noFill/>
+        </p:spPr>
+        <p:txBody>
           <a:bodyPr wrap="square">
-            <a:normAutofit/>
+            <a:spAutoFit/>
           </a:bodyPr>
           <a:lstStyle/>
           <a:p>
             <a:pPr algn="l"/>
             <a:r>
-              <a:rPr sz="1400" b="0" i="0">
-                <a:solidFill>
-                  <a:srgbClr val="191D2E"/>
-                </a:solidFill>
-                <a:latin typeface="Georgia"/>
+              <a:rPr sz="2400" b="1" i="0">
+                <a:solidFill>
+                  <a:srgbClr val="1F2C56"/>
+                </a:solidFill>
+                <a:latin typeface="Source Serif 4"/>
               </a:rPr>
-              <a:t>M16 · Berater</a:t>
+              <a:t>Arbeitsblatt A: Mein NMZ-Bestandsbild</a:t>
+            </a:r>
+          </a:p>
+        </p:txBody>
+      </p:sp>
+      <p:sp>
+        <p:nvSpPr>
+          <p:cNvPr id="8" name="TextBox 7"/>
+          <p:cNvSpPr txBox="1"/>
+          <p:nvPr/>
+        </p:nvSpPr>
+        <p:spPr>
+          <a:xfrm>
+            <a:off x="685800" y="1417320"/>
+            <a:ext cx="10817352" cy="5029200"/>
+          </a:xfrm>
+          <a:prstGeom prst="rect">
+            <a:avLst/>
+          </a:prstGeom>
+          <a:noFill/>
+        </p:spPr>
+        <p:txBody>
+          <a:bodyPr wrap="square">
+            <a:spAutoFit/>
+          </a:bodyPr>
+          <a:lstStyle/>
+          <a:p>
+            <a:pPr>
+              <a:spcBef>
+                <a:spcPts val="400"/>
+              </a:spcBef>
+              <a:spcAft>
+                <a:spcPts val="200"/>
+              </a:spcAft>
+            </a:pPr>
+            <a:r>
+              <a:rPr sz="1200">
+                <a:solidFill>
+                  <a:srgbClr val="3D5466"/>
+                </a:solidFill>
+                <a:latin typeface="Arial"/>
+              </a:rPr>
+              <a:t>(Daten aus agree-NMZ-Ranking, Stand: _____________)</a:t>
+            </a:r>
+          </a:p>
+          <a:p>
+            <a:pPr>
+              <a:spcBef>
+                <a:spcPts val="400"/>
+              </a:spcBef>
+              <a:spcAft>
+                <a:spcPts val="200"/>
+              </a:spcAft>
+            </a:pPr>
+            <a:r>
+              <a:rPr sz="1200">
+                <a:solidFill>
+                  <a:srgbClr val="3D5466"/>
+                </a:solidFill>
+                <a:latin typeface="Arial"/>
+              </a:rPr>
+              <a:t>Bestand-NMZ gesamt: ________ % | Interner Benchmark: ________ %</a:t>
+            </a:r>
+          </a:p>
+          <a:p>
+            <a:pPr>
+              <a:spcBef>
+                <a:spcPts val="400"/>
+              </a:spcBef>
+              <a:spcAft>
+                <a:spcPts val="200"/>
+              </a:spcAft>
+            </a:pPr>
+            <a:r>
+              <a:rPr sz="1200">
+                <a:solidFill>
+                  <a:srgbClr val="3D5466"/>
+                </a:solidFill>
+                <a:latin typeface="Arial"/>
+              </a:rPr>
+              <a:t>Dominantes Schwachfeld in meinem Bestand:</a:t>
+            </a:r>
+          </a:p>
+          <a:p>
+            <a:pPr>
+              <a:spcBef>
+                <a:spcPts val="400"/>
+              </a:spcBef>
+              <a:spcAft>
+                <a:spcPts val="200"/>
+              </a:spcAft>
+            </a:pPr>
+            <a:r>
+              <a:rPr sz="1200">
+                <a:solidFill>
+                  <a:srgbClr val="3D5466"/>
+                </a:solidFill>
+                <a:latin typeface="Arial"/>
+              </a:rPr>
+              <a:t>☐ Zinsmarge zu niedrig  ☐ Verbundgeschäft fehlt  ☐ Risikokosten zu hoch  ☐ Betreuungskosten zu hoch</a:t>
+            </a:r>
+          </a:p>
+        </p:txBody>
+      </p:sp>
+      <p:sp>
+        <p:nvSpPr>
+          <p:cNvPr id="9" name="Rectangle 8"/>
+          <p:cNvSpPr/>
+          <p:nvPr/>
+        </p:nvSpPr>
+        <p:spPr>
+          <a:xfrm>
+            <a:off x="0" y="6510528"/>
+            <a:ext cx="12188952" cy="347472"/>
+          </a:xfrm>
+          <a:prstGeom prst="rect">
+            <a:avLst/>
+          </a:prstGeom>
+          <a:solidFill>
+            <a:srgbClr val="0A1937"/>
+          </a:solidFill>
+          <a:ln>
+            <a:noFill/>
+          </a:ln>
+        </p:spPr>
+        <p:style>
+          <a:lnRef idx="1">
+            <a:schemeClr val="accent1"/>
+          </a:lnRef>
+          <a:fillRef idx="3">
+            <a:schemeClr val="accent1"/>
+          </a:fillRef>
+          <a:effectRef idx="2">
+            <a:schemeClr val="accent1"/>
+          </a:effectRef>
+          <a:fontRef idx="minor">
+            <a:schemeClr val="lt1"/>
+          </a:fontRef>
+        </p:style>
+        <p:txBody>
+          <a:bodyPr rtlCol="0" anchor="ctr"/>
+          <a:lstStyle/>
+          <a:p>
+            <a:pPr algn="ctr"/>
+          </a:p>
+        </p:txBody>
+      </p:sp>
+      <p:sp>
+        <p:nvSpPr>
+          <p:cNvPr id="10" name="TextBox 9"/>
+          <p:cNvSpPr txBox="1"/>
+          <p:nvPr/>
+        </p:nvSpPr>
+        <p:spPr>
+          <a:xfrm>
+            <a:off x="685800" y="6583680"/>
+            <a:ext cx="6490411" cy="256032"/>
+          </a:xfrm>
+          <a:prstGeom prst="rect">
+            <a:avLst/>
+          </a:prstGeom>
+          <a:noFill/>
+        </p:spPr>
+        <p:txBody>
+          <a:bodyPr wrap="none">
+            <a:spAutoFit/>
+          </a:bodyPr>
+          <a:lstStyle/>
+          <a:p>
+            <a:pPr algn="l"/>
+            <a:r>
+              <a:rPr sz="700">
+                <a:solidFill>
+                  <a:srgbClr val="A0B4D2"/>
+                </a:solidFill>
+                <a:latin typeface="JetBrains Mono"/>
+              </a:rPr>
+              <a:t>Benedikt Zoller Coaching  ·  FKB Campus  ·  M16</a:t>
+            </a:r>
+          </a:p>
+        </p:txBody>
+      </p:sp>
+    </p:spTree>
+  </p:cSld>
+  <p:clrMapOvr>
+    <a:masterClrMapping/>
+  </p:clrMapOvr>
+</p:sld>
+</file>
+
+<file path=ppt/slides/slide12.xml><?xml version="1.0" encoding="utf-8"?>
+<p:sld xmlns:a="http://schemas.openxmlformats.org/drawingml/2006/main" xmlns:p="http://schemas.openxmlformats.org/presentationml/2006/main" xmlns:r="http://schemas.openxmlformats.org/officeDocument/2006/relationships">
+  <p:cSld>
+    <p:spTree>
+      <p:nvGrpSpPr>
+        <p:cNvPr id="1" name=""/>
+        <p:cNvGrpSpPr/>
+        <p:nvPr/>
+      </p:nvGrpSpPr>
+      <p:grpSpPr/>
+      <p:sp>
+        <p:nvSpPr>
+          <p:cNvPr id="2" name="Rectangle 1"/>
+          <p:cNvSpPr/>
+          <p:nvPr/>
+        </p:nvSpPr>
+        <p:spPr>
+          <a:xfrm>
+            <a:off x="0" y="0"/>
+            <a:ext cx="12188952" cy="6858000"/>
+          </a:xfrm>
+          <a:prstGeom prst="rect">
+            <a:avLst/>
+          </a:prstGeom>
+          <a:solidFill>
+            <a:srgbClr val="EDEDF3"/>
+          </a:solidFill>
+          <a:ln>
+            <a:noFill/>
+          </a:ln>
+        </p:spPr>
+        <p:style>
+          <a:lnRef idx="1">
+            <a:schemeClr val="accent1"/>
+          </a:lnRef>
+          <a:fillRef idx="3">
+            <a:schemeClr val="accent1"/>
+          </a:fillRef>
+          <a:effectRef idx="2">
+            <a:schemeClr val="accent1"/>
+          </a:effectRef>
+          <a:fontRef idx="minor">
+            <a:schemeClr val="lt1"/>
+          </a:fontRef>
+        </p:style>
+        <p:txBody>
+          <a:bodyPr rtlCol="0" anchor="ctr"/>
+          <a:lstStyle/>
+          <a:p>
+            <a:pPr algn="ctr"/>
+          </a:p>
+        </p:txBody>
+      </p:sp>
+      <p:sp>
+        <p:nvSpPr>
+          <p:cNvPr id="3" name="Rectangle 2"/>
+          <p:cNvSpPr/>
+          <p:nvPr/>
+        </p:nvSpPr>
+        <p:spPr>
+          <a:xfrm>
+            <a:off x="0" y="0"/>
+            <a:ext cx="12188952" cy="50292"/>
+          </a:xfrm>
+          <a:prstGeom prst="rect">
+            <a:avLst/>
+          </a:prstGeom>
+          <a:solidFill>
+            <a:srgbClr val="1F2C56"/>
+          </a:solidFill>
+          <a:ln>
+            <a:noFill/>
+          </a:ln>
+        </p:spPr>
+        <p:style>
+          <a:lnRef idx="1">
+            <a:schemeClr val="accent1"/>
+          </a:lnRef>
+          <a:fillRef idx="3">
+            <a:schemeClr val="accent1"/>
+          </a:fillRef>
+          <a:effectRef idx="2">
+            <a:schemeClr val="accent1"/>
+          </a:effectRef>
+          <a:fontRef idx="minor">
+            <a:schemeClr val="lt1"/>
+          </a:fontRef>
+        </p:style>
+        <p:txBody>
+          <a:bodyPr rtlCol="0" anchor="ctr"/>
+          <a:lstStyle/>
+          <a:p>
+            <a:pPr algn="ctr"/>
+          </a:p>
+        </p:txBody>
+      </p:sp>
+      <p:sp>
+        <p:nvSpPr>
+          <p:cNvPr id="4" name="TextBox 3"/>
+          <p:cNvSpPr txBox="1"/>
+          <p:nvPr/>
+        </p:nvSpPr>
+        <p:spPr>
+          <a:xfrm>
+            <a:off x="685800" y="109728"/>
+            <a:ext cx="10817352" cy="228600"/>
+          </a:xfrm>
+          <a:prstGeom prst="rect">
+            <a:avLst/>
+          </a:prstGeom>
+          <a:noFill/>
+        </p:spPr>
+        <p:txBody>
+          <a:bodyPr wrap="none">
+            <a:spAutoFit/>
+          </a:bodyPr>
+          <a:lstStyle/>
+          <a:p>
+            <a:pPr algn="l"/>
+            <a:r>
+              <a:rPr sz="750">
+                <a:solidFill>
+                  <a:srgbClr val="78808C"/>
+                </a:solidFill>
+                <a:latin typeface="JetBrains Mono"/>
+              </a:rPr>
+              <a:t>M16  ·  INHALT</a:t>
+            </a:r>
+          </a:p>
+        </p:txBody>
+      </p:sp>
+      <p:sp>
+        <p:nvSpPr>
+          <p:cNvPr id="5" name="Rectangle 4"/>
+          <p:cNvSpPr/>
+          <p:nvPr/>
+        </p:nvSpPr>
+        <p:spPr>
+          <a:xfrm>
+            <a:off x="0" y="1234440"/>
+            <a:ext cx="12188952" cy="12700"/>
+          </a:xfrm>
+          <a:prstGeom prst="rect">
+            <a:avLst/>
+          </a:prstGeom>
+          <a:solidFill>
+            <a:srgbClr val="D8DFE4"/>
+          </a:solidFill>
+          <a:ln>
+            <a:noFill/>
+          </a:ln>
+        </p:spPr>
+        <p:style>
+          <a:lnRef idx="1">
+            <a:schemeClr val="accent1"/>
+          </a:lnRef>
+          <a:fillRef idx="3">
+            <a:schemeClr val="accent1"/>
+          </a:fillRef>
+          <a:effectRef idx="2">
+            <a:schemeClr val="accent1"/>
+          </a:effectRef>
+          <a:fontRef idx="minor">
+            <a:schemeClr val="lt1"/>
+          </a:fontRef>
+        </p:style>
+        <p:txBody>
+          <a:bodyPr rtlCol="0" anchor="ctr"/>
+          <a:lstStyle/>
+          <a:p>
+            <a:pPr algn="ctr"/>
+          </a:p>
+        </p:txBody>
+      </p:sp>
+      <p:sp>
+        <p:nvSpPr>
+          <p:cNvPr id="6" name="Rectangle 5"/>
+          <p:cNvSpPr/>
+          <p:nvPr/>
+        </p:nvSpPr>
+        <p:spPr>
+          <a:xfrm>
+            <a:off x="685800" y="502920"/>
+            <a:ext cx="36576" cy="658368"/>
+          </a:xfrm>
+          <a:prstGeom prst="rect">
+            <a:avLst/>
+          </a:prstGeom>
+          <a:solidFill>
+            <a:srgbClr val="D9C089"/>
+          </a:solidFill>
+          <a:ln>
+            <a:noFill/>
+          </a:ln>
+        </p:spPr>
+        <p:style>
+          <a:lnRef idx="1">
+            <a:schemeClr val="accent1"/>
+          </a:lnRef>
+          <a:fillRef idx="3">
+            <a:schemeClr val="accent1"/>
+          </a:fillRef>
+          <a:effectRef idx="2">
+            <a:schemeClr val="accent1"/>
+          </a:effectRef>
+          <a:fontRef idx="minor">
+            <a:schemeClr val="lt1"/>
+          </a:fontRef>
+        </p:style>
+        <p:txBody>
+          <a:bodyPr rtlCol="0" anchor="ctr"/>
+          <a:lstStyle/>
+          <a:p>
+            <a:pPr algn="ctr"/>
+          </a:p>
+        </p:txBody>
+      </p:sp>
+      <p:sp>
+        <p:nvSpPr>
+          <p:cNvPr id="7" name="TextBox 6"/>
+          <p:cNvSpPr txBox="1"/>
+          <p:nvPr/>
+        </p:nvSpPr>
+        <p:spPr>
+          <a:xfrm>
+            <a:off x="813816" y="502920"/>
+            <a:ext cx="10634472" cy="685800"/>
+          </a:xfrm>
+          <a:prstGeom prst="rect">
+            <a:avLst/>
+          </a:prstGeom>
+          <a:noFill/>
+        </p:spPr>
+        <p:txBody>
+          <a:bodyPr wrap="square">
+            <a:spAutoFit/>
+          </a:bodyPr>
+          <a:lstStyle/>
+          <a:p>
+            <a:pPr algn="l"/>
+            <a:r>
+              <a:rPr sz="2400" b="1" i="0">
+                <a:solidFill>
+                  <a:srgbClr val="1F2C56"/>
+                </a:solidFill>
+                <a:latin typeface="Source Serif 4"/>
+              </a:rPr>
+              <a:t>Arbeitsblatt B: Maßnahmenplan</a:t>
+            </a:r>
+          </a:p>
+        </p:txBody>
+      </p:sp>
+      <p:sp>
+        <p:nvSpPr>
+          <p:cNvPr id="8" name="TextBox 7"/>
+          <p:cNvSpPr txBox="1"/>
+          <p:nvPr/>
+        </p:nvSpPr>
+        <p:spPr>
+          <a:xfrm>
+            <a:off x="685800" y="1417320"/>
+            <a:ext cx="10817352" cy="5029200"/>
+          </a:xfrm>
+          <a:prstGeom prst="rect">
+            <a:avLst/>
+          </a:prstGeom>
+          <a:noFill/>
+        </p:spPr>
+        <p:txBody>
+          <a:bodyPr wrap="square">
+            <a:spAutoFit/>
+          </a:bodyPr>
+          <a:lstStyle/>
+          <a:p>
+            <a:pPr>
+              <a:spcBef>
+                <a:spcPts val="400"/>
+              </a:spcBef>
+              <a:spcAft>
+                <a:spcPts val="200"/>
+              </a:spcAft>
+            </a:pPr>
+            <a:r>
+              <a:rPr sz="1200">
+                <a:solidFill>
+                  <a:srgbClr val="3D5466"/>
+                </a:solidFill>
+                <a:latin typeface="Arial"/>
+              </a:rPr>
+              <a:t>Mein Ziel für die nächsten 90 Tage:</a:t>
+            </a:r>
+          </a:p>
+          <a:p>
+            <a:pPr>
+              <a:spcBef>
+                <a:spcPts val="400"/>
+              </a:spcBef>
+              <a:spcAft>
+                <a:spcPts val="200"/>
+              </a:spcAft>
+            </a:pPr>
+            <a:r>
+              <a:rPr sz="1200">
+                <a:solidFill>
+                  <a:srgbClr val="3D5466"/>
+                </a:solidFill>
+                <a:latin typeface="Arial"/>
+              </a:rPr>
+              <a:t>Bestand-NMZ von ________ % auf ________ % verbessern.</a:t>
+            </a:r>
+          </a:p>
+          <a:p>
+            <a:pPr>
+              <a:spcBef>
+                <a:spcPts val="400"/>
+              </a:spcBef>
+              <a:spcAft>
+                <a:spcPts val="200"/>
+              </a:spcAft>
+            </a:pPr>
+            <a:r>
+              <a:rPr sz="1200">
+                <a:solidFill>
+                  <a:srgbClr val="3D5466"/>
+                </a:solidFill>
+                <a:latin typeface="Arial"/>
+              </a:rPr>
+              <a:t># 5. PRAXISTRANSFER</a:t>
+            </a:r>
+          </a:p>
+        </p:txBody>
+      </p:sp>
+      <p:sp>
+        <p:nvSpPr>
+          <p:cNvPr id="9" name="Rectangle 8"/>
+          <p:cNvSpPr/>
+          <p:nvPr/>
+        </p:nvSpPr>
+        <p:spPr>
+          <a:xfrm>
+            <a:off x="0" y="6510528"/>
+            <a:ext cx="12188952" cy="347472"/>
+          </a:xfrm>
+          <a:prstGeom prst="rect">
+            <a:avLst/>
+          </a:prstGeom>
+          <a:solidFill>
+            <a:srgbClr val="0A1937"/>
+          </a:solidFill>
+          <a:ln>
+            <a:noFill/>
+          </a:ln>
+        </p:spPr>
+        <p:style>
+          <a:lnRef idx="1">
+            <a:schemeClr val="accent1"/>
+          </a:lnRef>
+          <a:fillRef idx="3">
+            <a:schemeClr val="accent1"/>
+          </a:fillRef>
+          <a:effectRef idx="2">
+            <a:schemeClr val="accent1"/>
+          </a:effectRef>
+          <a:fontRef idx="minor">
+            <a:schemeClr val="lt1"/>
+          </a:fontRef>
+        </p:style>
+        <p:txBody>
+          <a:bodyPr rtlCol="0" anchor="ctr"/>
+          <a:lstStyle/>
+          <a:p>
+            <a:pPr algn="ctr"/>
+          </a:p>
+        </p:txBody>
+      </p:sp>
+      <p:sp>
+        <p:nvSpPr>
+          <p:cNvPr id="10" name="TextBox 9"/>
+          <p:cNvSpPr txBox="1"/>
+          <p:nvPr/>
+        </p:nvSpPr>
+        <p:spPr>
+          <a:xfrm>
+            <a:off x="685800" y="6583680"/>
+            <a:ext cx="6490411" cy="256032"/>
+          </a:xfrm>
+          <a:prstGeom prst="rect">
+            <a:avLst/>
+          </a:prstGeom>
+          <a:noFill/>
+        </p:spPr>
+        <p:txBody>
+          <a:bodyPr wrap="none">
+            <a:spAutoFit/>
+          </a:bodyPr>
+          <a:lstStyle/>
+          <a:p>
+            <a:pPr algn="l"/>
+            <a:r>
+              <a:rPr sz="700">
+                <a:solidFill>
+                  <a:srgbClr val="A0B4D2"/>
+                </a:solidFill>
+                <a:latin typeface="JetBrains Mono"/>
+              </a:rPr>
+              <a:t>Benedikt Zoller Coaching  ·  FKB Campus  ·  M16</a:t>
             </a:r>
           </a:p>
         </p:txBody>
@@ -3789,14 +5006,6 @@
 <file path=ppt/slides/slide2.xml><?xml version="1.0" encoding="utf-8"?>
 <p:sld xmlns:a="http://schemas.openxmlformats.org/drawingml/2006/main" xmlns:p="http://schemas.openxmlformats.org/presentationml/2006/main" xmlns:r="http://schemas.openxmlformats.org/officeDocument/2006/relationships">
   <p:cSld>
-    <p:bg>
-      <p:bgPr>
-        <a:solidFill>
-          <a:srgbClr val="F8F8FA"/>
-        </a:solidFill>
-        <a:effectLst/>
-      </p:bgPr>
-    </p:bg>
     <p:spTree>
       <p:nvGrpSpPr>
         <p:cNvPr id="1" name=""/>
@@ -3806,125 +5015,20 @@
       <p:grpSpPr/>
       <p:sp>
         <p:nvSpPr>
-          <p:cNvPr id="2" name="TextBox 1"/>
-          <p:cNvSpPr txBox="1"/>
-          <p:nvPr/>
-        </p:nvSpPr>
-        <p:spPr>
-          <a:xfrm>
-            <a:off x="609600" y="279400"/>
-            <a:ext cx="2540000" cy="279400"/>
-          </a:xfrm>
-          <a:prstGeom prst="rect">
-            <a:avLst/>
-          </a:prstGeom>
-          <a:noFill/>
-        </p:spPr>
-        <p:txBody>
-          <a:bodyPr wrap="square">
-            <a:normAutofit/>
-          </a:bodyPr>
-          <a:lstStyle/>
-          <a:p>
-            <a:pPr algn="l"/>
-            <a:r>
-              <a:rPr sz="1000" b="1" i="0">
-                <a:solidFill>
-                  <a:srgbClr val="191D2E"/>
-                </a:solidFill>
-                <a:latin typeface="Arial"/>
-              </a:rPr>
-              <a:t>FKB  Campus</a:t>
-            </a:r>
-          </a:p>
-        </p:txBody>
-      </p:sp>
-      <p:sp>
-        <p:nvSpPr>
-          <p:cNvPr id="3" name="TextBox 2"/>
-          <p:cNvSpPr txBox="1"/>
-          <p:nvPr/>
-        </p:nvSpPr>
-        <p:spPr>
-          <a:xfrm>
-            <a:off x="609600" y="279400"/>
-            <a:ext cx="10972800" cy="279400"/>
-          </a:xfrm>
-          <a:prstGeom prst="rect">
-            <a:avLst/>
-          </a:prstGeom>
-          <a:noFill/>
-        </p:spPr>
-        <p:txBody>
-          <a:bodyPr wrap="square">
-            <a:normAutofit/>
-          </a:bodyPr>
-          <a:lstStyle/>
-          <a:p>
-            <a:pPr algn="r"/>
-            <a:r>
-              <a:rPr sz="900" b="0" i="0">
-                <a:solidFill>
-                  <a:srgbClr val="7B7FA0"/>
-                </a:solidFill>
-                <a:latin typeface="Courier New"/>
-              </a:rPr>
-              <a:t>§ 00 — LERNZIELE</a:t>
-            </a:r>
-          </a:p>
-        </p:txBody>
-      </p:sp>
-      <p:sp>
-        <p:nvSpPr>
-          <p:cNvPr id="4" name="TextBox 3"/>
-          <p:cNvSpPr txBox="1"/>
-          <p:nvPr/>
-        </p:nvSpPr>
-        <p:spPr>
-          <a:xfrm>
-            <a:off x="609600" y="6426200"/>
-            <a:ext cx="10972800" cy="228600"/>
-          </a:xfrm>
-          <a:prstGeom prst="rect">
-            <a:avLst/>
-          </a:prstGeom>
-          <a:noFill/>
-        </p:spPr>
-        <p:txBody>
-          <a:bodyPr wrap="square">
-            <a:normAutofit/>
-          </a:bodyPr>
-          <a:lstStyle/>
-          <a:p>
-            <a:pPr algn="r"/>
-            <a:r>
-              <a:rPr sz="900" b="0" i="0">
-                <a:solidFill>
-                  <a:srgbClr val="7B7FA0"/>
-                </a:solidFill>
-                <a:latin typeface="Courier New"/>
-              </a:rPr>
-              <a:t>02</a:t>
-            </a:r>
-          </a:p>
-        </p:txBody>
-      </p:sp>
-      <p:sp>
-        <p:nvSpPr>
-          <p:cNvPr id="5" name="Rectangle 4"/>
+          <p:cNvPr id="2" name="Rectangle 1"/>
           <p:cNvSpPr/>
           <p:nvPr/>
         </p:nvSpPr>
         <p:spPr>
           <a:xfrm>
-            <a:off x="609600" y="825500"/>
-            <a:ext cx="10972800" cy="6350"/>
+            <a:off x="0" y="0"/>
+            <a:ext cx="12188952" cy="6858000"/>
           </a:xfrm>
           <a:prstGeom prst="rect">
             <a:avLst/>
           </a:prstGeom>
           <a:solidFill>
-            <a:srgbClr val="191D2E"/>
+            <a:srgbClr val="EDEDF3"/>
           </a:solidFill>
           <a:ln>
             <a:noFill/>
@@ -3954,55 +5058,20 @@
       </p:sp>
       <p:sp>
         <p:nvSpPr>
-          <p:cNvPr id="6" name="TextBox 5"/>
-          <p:cNvSpPr txBox="1"/>
-          <p:nvPr/>
-        </p:nvSpPr>
-        <p:spPr>
-          <a:xfrm>
-            <a:off x="609600" y="920750"/>
-            <a:ext cx="3175000" cy="1651000"/>
-          </a:xfrm>
-          <a:prstGeom prst="rect">
-            <a:avLst/>
-          </a:prstGeom>
-          <a:noFill/>
-        </p:spPr>
-        <p:txBody>
-          <a:bodyPr wrap="square">
-            <a:normAutofit/>
-          </a:bodyPr>
-          <a:lstStyle/>
-          <a:p>
-            <a:pPr algn="l"/>
-            <a:r>
-              <a:rPr sz="4800" b="0" i="1">
-                <a:solidFill>
-                  <a:srgbClr val="1F2B56"/>
-                </a:solidFill>
-                <a:latin typeface="Georgia"/>
-              </a:rPr>
-              <a:t>Inhalt.</a:t>
-            </a:r>
-          </a:p>
-        </p:txBody>
-      </p:sp>
-      <p:sp>
-        <p:nvSpPr>
-          <p:cNvPr id="7" name="Rectangle 6"/>
+          <p:cNvPr id="3" name="Rectangle 2"/>
           <p:cNvSpPr/>
           <p:nvPr/>
         </p:nvSpPr>
         <p:spPr>
           <a:xfrm>
-            <a:off x="4064000" y="889000"/>
-            <a:ext cx="7518399" cy="6350"/>
+            <a:off x="0" y="0"/>
+            <a:ext cx="12188952" cy="50292"/>
           </a:xfrm>
           <a:prstGeom prst="rect">
             <a:avLst/>
           </a:prstGeom>
           <a:solidFill>
-            <a:srgbClr val="E0E0E8"/>
+            <a:srgbClr val="1F2C56"/>
           </a:solidFill>
           <a:ln>
             <a:noFill/>
@@ -4032,14 +5101,14 @@
       </p:sp>
       <p:sp>
         <p:nvSpPr>
-          <p:cNvPr id="8" name="TextBox 7"/>
+          <p:cNvPr id="4" name="TextBox 3"/>
           <p:cNvSpPr txBox="1"/>
           <p:nvPr/>
         </p:nvSpPr>
         <p:spPr>
           <a:xfrm>
-            <a:off x="4064000" y="939799"/>
-            <a:ext cx="762000" cy="647700"/>
+            <a:off x="685800" y="109728"/>
+            <a:ext cx="10817352" cy="228600"/>
           </a:xfrm>
           <a:prstGeom prst="rect">
             <a:avLst/>
@@ -4048,74 +5117,39 @@
         </p:spPr>
         <p:txBody>
           <a:bodyPr wrap="none">
-            <a:normAutofit/>
+            <a:spAutoFit/>
           </a:bodyPr>
           <a:lstStyle/>
           <a:p>
             <a:pPr algn="l"/>
             <a:r>
-              <a:rPr sz="2400" b="0" i="1">
-                <a:solidFill>
-                  <a:srgbClr val="1F2B56"/>
-                </a:solidFill>
-                <a:latin typeface="Georgia"/>
+              <a:rPr sz="750">
+                <a:solidFill>
+                  <a:srgbClr val="78808C"/>
+                </a:solidFill>
+                <a:latin typeface="JetBrains Mono"/>
               </a:rPr>
-              <a:t>I</a:t>
-            </a:r>
-          </a:p>
-        </p:txBody>
-      </p:sp>
-      <p:sp>
-        <p:nvSpPr>
-          <p:cNvPr id="9" name="TextBox 8"/>
-          <p:cNvSpPr txBox="1"/>
-          <p:nvPr/>
-        </p:nvSpPr>
-        <p:spPr>
-          <a:xfrm>
-            <a:off x="4953000" y="952500"/>
-            <a:ext cx="6629400" cy="635000"/>
-          </a:xfrm>
-          <a:prstGeom prst="rect">
-            <a:avLst/>
-          </a:prstGeom>
-          <a:noFill/>
-        </p:spPr>
-        <p:txBody>
-          <a:bodyPr wrap="square">
-            <a:normAutofit/>
-          </a:bodyPr>
-          <a:lstStyle/>
-          <a:p>
-            <a:pPr algn="l"/>
-            <a:r>
-              <a:rPr sz="1400" b="0" i="0">
-                <a:solidFill>
-                  <a:srgbClr val="191D2E"/>
-                </a:solidFill>
-                <a:latin typeface="Georgia"/>
-              </a:rPr>
-              <a:t>Erklären, was die Nettomargenziffer (NMZ) misst, wie sie berechnet wird und warum sie die zentrale Steuerungsgröße im VR-Firmenkundensegment ist</a:t>
-            </a:r>
-          </a:p>
-        </p:txBody>
-      </p:sp>
-      <p:sp>
-        <p:nvSpPr>
-          <p:cNvPr id="10" name="Rectangle 9"/>
+              <a:t>LERNZIELE  ·  M16</a:t>
+            </a:r>
+          </a:p>
+        </p:txBody>
+      </p:sp>
+      <p:sp>
+        <p:nvSpPr>
+          <p:cNvPr id="5" name="Rectangle 4"/>
           <p:cNvSpPr/>
           <p:nvPr/>
         </p:nvSpPr>
         <p:spPr>
           <a:xfrm>
-            <a:off x="4064000" y="1587500"/>
-            <a:ext cx="7518399" cy="6350"/>
+            <a:off x="0" y="1234440"/>
+            <a:ext cx="12188952" cy="12700"/>
           </a:xfrm>
           <a:prstGeom prst="rect">
             <a:avLst/>
           </a:prstGeom>
           <a:solidFill>
-            <a:srgbClr val="E0E0E8"/>
+            <a:srgbClr val="D8DFE4"/>
           </a:solidFill>
           <a:ln>
             <a:noFill/>
@@ -4145,14 +5179,14 @@
       </p:sp>
       <p:sp>
         <p:nvSpPr>
-          <p:cNvPr id="11" name="TextBox 10"/>
+          <p:cNvPr id="6" name="TextBox 5"/>
           <p:cNvSpPr txBox="1"/>
           <p:nvPr/>
         </p:nvSpPr>
         <p:spPr>
           <a:xfrm>
-            <a:off x="4064000" y="1638300"/>
-            <a:ext cx="762000" cy="647700"/>
+            <a:off x="685800" y="502920"/>
+            <a:ext cx="10817352" cy="658368"/>
           </a:xfrm>
           <a:prstGeom prst="rect">
             <a:avLst/>
@@ -4160,34 +5194,34 @@
           <a:noFill/>
         </p:spPr>
         <p:txBody>
-          <a:bodyPr wrap="none">
-            <a:normAutofit/>
+          <a:bodyPr wrap="square">
+            <a:spAutoFit/>
           </a:bodyPr>
           <a:lstStyle/>
           <a:p>
             <a:pPr algn="l"/>
             <a:r>
-              <a:rPr sz="2400" b="0" i="1">
-                <a:solidFill>
-                  <a:srgbClr val="1F2B56"/>
-                </a:solidFill>
-                <a:latin typeface="Georgia"/>
+              <a:rPr sz="2600" b="1" i="0">
+                <a:solidFill>
+                  <a:srgbClr val="1F2C56"/>
+                </a:solidFill>
+                <a:latin typeface="Source Serif 4"/>
               </a:rPr>
-              <a:t>II</a:t>
-            </a:r>
-          </a:p>
-        </p:txBody>
-      </p:sp>
-      <p:sp>
-        <p:nvSpPr>
-          <p:cNvPr id="12" name="TextBox 11"/>
+              <a:t>Was Sie heute mitnehmen</a:t>
+            </a:r>
+          </a:p>
+        </p:txBody>
+      </p:sp>
+      <p:sp>
+        <p:nvSpPr>
+          <p:cNvPr id="7" name="TextBox 6"/>
           <p:cNvSpPr txBox="1"/>
           <p:nvPr/>
         </p:nvSpPr>
         <p:spPr>
           <a:xfrm>
-            <a:off x="4953000" y="1651000"/>
-            <a:ext cx="6629400" cy="635000"/>
+            <a:off x="685800" y="1371600"/>
+            <a:ext cx="10817352" cy="5120640"/>
           </a:xfrm>
           <a:prstGeom prst="rect">
             <a:avLst/>
@@ -4196,39 +5230,122 @@
         </p:spPr>
         <p:txBody>
           <a:bodyPr wrap="square">
-            <a:normAutofit/>
+            <a:spAutoFit/>
           </a:bodyPr>
           <a:lstStyle/>
           <a:p>
-            <a:pPr algn="l"/>
-            <a:r>
-              <a:rPr sz="1400" b="0" i="0">
-                <a:solidFill>
-                  <a:srgbClr val="191D2E"/>
-                </a:solidFill>
-                <a:latin typeface="Georgia"/>
+            <a:pPr>
+              <a:spcBef>
+                <a:spcPts val="800"/>
+              </a:spcBef>
+              <a:spcAft>
+                <a:spcPts val="200"/>
+              </a:spcAft>
+            </a:pPr>
+            <a:r>
+              <a:rPr sz="1400">
+                <a:solidFill>
+                  <a:srgbClr val="3D5466"/>
+                </a:solidFill>
+                <a:latin typeface="Arial"/>
               </a:rPr>
-              <a:t>Unterschiede zwischen NMZ auf Einzel-, Segment- und Bestandsebene erläutern und die eigene NMZ in den internen Benchmark einordnen</a:t>
-            </a:r>
-          </a:p>
-        </p:txBody>
-      </p:sp>
-      <p:sp>
-        <p:nvSpPr>
-          <p:cNvPr id="13" name="Rectangle 12"/>
+              <a:t>▸  Erklären, was die Nettomargenziffer (NMZ) misst, wie sie berechnet wird und warum sie die zentrale Steuerungsgröße im VR-Firmenkundensegment ist</a:t>
+            </a:r>
+          </a:p>
+          <a:p>
+            <a:pPr>
+              <a:spcBef>
+                <a:spcPts val="800"/>
+              </a:spcBef>
+              <a:spcAft>
+                <a:spcPts val="200"/>
+              </a:spcAft>
+            </a:pPr>
+            <a:r>
+              <a:rPr sz="1400">
+                <a:solidFill>
+                  <a:srgbClr val="3D5466"/>
+                </a:solidFill>
+                <a:latin typeface="Arial"/>
+              </a:rPr>
+              <a:t>▸  Unterschiede zwischen NMZ auf Einzel-, Segment- und Bestandsebene erläutern und die eigene NMZ in den internen Benchmark einordnen</a:t>
+            </a:r>
+          </a:p>
+          <a:p>
+            <a:pPr>
+              <a:spcBef>
+                <a:spcPts val="800"/>
+              </a:spcBef>
+              <a:spcAft>
+                <a:spcPts val="200"/>
+              </a:spcAft>
+            </a:pPr>
+            <a:r>
+              <a:rPr sz="1400">
+                <a:solidFill>
+                  <a:srgbClr val="3D5466"/>
+                </a:solidFill>
+                <a:latin typeface="Arial"/>
+              </a:rPr>
+              <a:t>▸  NMZ-Berichte in agree lesen und die drei Kunden mit dem größten Verbesserungspotenzial im eigenen Bestand identifizieren</a:t>
+            </a:r>
+          </a:p>
+          <a:p>
+            <a:pPr>
+              <a:spcBef>
+                <a:spcPts val="800"/>
+              </a:spcBef>
+              <a:spcAft>
+                <a:spcPts val="200"/>
+              </a:spcAft>
+            </a:pPr>
+            <a:r>
+              <a:rPr sz="1400">
+                <a:solidFill>
+                  <a:srgbClr val="3D5466"/>
+                </a:solidFill>
+                <a:latin typeface="Arial"/>
+              </a:rPr>
+              <a:t>▸  Für jeden identifizierten Kunden mind. eine konkrete NMZ-Verbesserungsmaßnahme ableiten und den Hebel begründen</a:t>
+            </a:r>
+          </a:p>
+          <a:p>
+            <a:pPr>
+              <a:spcBef>
+                <a:spcPts val="800"/>
+              </a:spcBef>
+              <a:spcAft>
+                <a:spcPts val="200"/>
+              </a:spcAft>
+            </a:pPr>
+            <a:r>
+              <a:rPr sz="1400">
+                <a:solidFill>
+                  <a:srgbClr val="3D5466"/>
+                </a:solidFill>
+                <a:latin typeface="Arial"/>
+              </a:rPr>
+              <a:t>▸  Die NMZ-Struktur des Gesamtbestands nach Ertragskomponenten analysieren und das dominante Schwachfeld benennen</a:t>
+            </a:r>
+          </a:p>
+        </p:txBody>
+      </p:sp>
+      <p:sp>
+        <p:nvSpPr>
+          <p:cNvPr id="8" name="Rectangle 7"/>
           <p:cNvSpPr/>
           <p:nvPr/>
         </p:nvSpPr>
         <p:spPr>
           <a:xfrm>
-            <a:off x="4064000" y="2286000"/>
-            <a:ext cx="7518399" cy="6350"/>
+            <a:off x="0" y="6510528"/>
+            <a:ext cx="12188952" cy="347472"/>
           </a:xfrm>
           <a:prstGeom prst="rect">
             <a:avLst/>
           </a:prstGeom>
           <a:solidFill>
-            <a:srgbClr val="E0E0E8"/>
+            <a:srgbClr val="0A1937"/>
           </a:solidFill>
           <a:ln>
             <a:noFill/>
@@ -4258,14 +5375,14 @@
       </p:sp>
       <p:sp>
         <p:nvSpPr>
-          <p:cNvPr id="14" name="TextBox 13"/>
+          <p:cNvPr id="9" name="TextBox 8"/>
           <p:cNvSpPr txBox="1"/>
           <p:nvPr/>
         </p:nvSpPr>
         <p:spPr>
           <a:xfrm>
-            <a:off x="4064000" y="2336800"/>
-            <a:ext cx="762000" cy="647700"/>
+            <a:off x="685800" y="6583680"/>
+            <a:ext cx="6490411" cy="256032"/>
           </a:xfrm>
           <a:prstGeom prst="rect">
             <a:avLst/>
@@ -4274,280 +5391,19 @@
         </p:spPr>
         <p:txBody>
           <a:bodyPr wrap="none">
-            <a:normAutofit/>
+            <a:spAutoFit/>
           </a:bodyPr>
           <a:lstStyle/>
           <a:p>
             <a:pPr algn="l"/>
             <a:r>
-              <a:rPr sz="2400" b="0" i="1">
-                <a:solidFill>
-                  <a:srgbClr val="1F2B56"/>
-                </a:solidFill>
-                <a:latin typeface="Georgia"/>
+              <a:rPr sz="700">
+                <a:solidFill>
+                  <a:srgbClr val="A0B4D2"/>
+                </a:solidFill>
+                <a:latin typeface="JetBrains Mono"/>
               </a:rPr>
-              <a:t>III</a:t>
-            </a:r>
-          </a:p>
-        </p:txBody>
-      </p:sp>
-      <p:sp>
-        <p:nvSpPr>
-          <p:cNvPr id="15" name="TextBox 14"/>
-          <p:cNvSpPr txBox="1"/>
-          <p:nvPr/>
-        </p:nvSpPr>
-        <p:spPr>
-          <a:xfrm>
-            <a:off x="4953000" y="2349500"/>
-            <a:ext cx="6629400" cy="635000"/>
-          </a:xfrm>
-          <a:prstGeom prst="rect">
-            <a:avLst/>
-          </a:prstGeom>
-          <a:noFill/>
-        </p:spPr>
-        <p:txBody>
-          <a:bodyPr wrap="square">
-            <a:normAutofit/>
-          </a:bodyPr>
-          <a:lstStyle/>
-          <a:p>
-            <a:pPr algn="l"/>
-            <a:r>
-              <a:rPr sz="1400" b="0" i="0">
-                <a:solidFill>
-                  <a:srgbClr val="191D2E"/>
-                </a:solidFill>
-                <a:latin typeface="Georgia"/>
-              </a:rPr>
-              <a:t>NMZ-Berichte in agree lesen und die drei Kunden mit dem größten Verbesserungspotenzial im eigenen Bestand identifizieren</a:t>
-            </a:r>
-          </a:p>
-        </p:txBody>
-      </p:sp>
-      <p:sp>
-        <p:nvSpPr>
-          <p:cNvPr id="16" name="Rectangle 15"/>
-          <p:cNvSpPr/>
-          <p:nvPr/>
-        </p:nvSpPr>
-        <p:spPr>
-          <a:xfrm>
-            <a:off x="4064000" y="2984500"/>
-            <a:ext cx="7518399" cy="6350"/>
-          </a:xfrm>
-          <a:prstGeom prst="rect">
-            <a:avLst/>
-          </a:prstGeom>
-          <a:solidFill>
-            <a:srgbClr val="E0E0E8"/>
-          </a:solidFill>
-          <a:ln>
-            <a:noFill/>
-          </a:ln>
-        </p:spPr>
-        <p:style>
-          <a:lnRef idx="1">
-            <a:schemeClr val="accent1"/>
-          </a:lnRef>
-          <a:fillRef idx="3">
-            <a:schemeClr val="accent1"/>
-          </a:fillRef>
-          <a:effectRef idx="2">
-            <a:schemeClr val="accent1"/>
-          </a:effectRef>
-          <a:fontRef idx="minor">
-            <a:schemeClr val="lt1"/>
-          </a:fontRef>
-        </p:style>
-        <p:txBody>
-          <a:bodyPr rtlCol="0" anchor="ctr"/>
-          <a:lstStyle/>
-          <a:p>
-            <a:pPr algn="ctr"/>
-          </a:p>
-        </p:txBody>
-      </p:sp>
-      <p:sp>
-        <p:nvSpPr>
-          <p:cNvPr id="17" name="TextBox 16"/>
-          <p:cNvSpPr txBox="1"/>
-          <p:nvPr/>
-        </p:nvSpPr>
-        <p:spPr>
-          <a:xfrm>
-            <a:off x="4064000" y="3035300"/>
-            <a:ext cx="762000" cy="647700"/>
-          </a:xfrm>
-          <a:prstGeom prst="rect">
-            <a:avLst/>
-          </a:prstGeom>
-          <a:noFill/>
-        </p:spPr>
-        <p:txBody>
-          <a:bodyPr wrap="none">
-            <a:normAutofit/>
-          </a:bodyPr>
-          <a:lstStyle/>
-          <a:p>
-            <a:pPr algn="l"/>
-            <a:r>
-              <a:rPr sz="2400" b="0" i="1">
-                <a:solidFill>
-                  <a:srgbClr val="1F2B56"/>
-                </a:solidFill>
-                <a:latin typeface="Georgia"/>
-              </a:rPr>
-              <a:t>IV</a:t>
-            </a:r>
-          </a:p>
-        </p:txBody>
-      </p:sp>
-      <p:sp>
-        <p:nvSpPr>
-          <p:cNvPr id="18" name="TextBox 17"/>
-          <p:cNvSpPr txBox="1"/>
-          <p:nvPr/>
-        </p:nvSpPr>
-        <p:spPr>
-          <a:xfrm>
-            <a:off x="4953000" y="3048000"/>
-            <a:ext cx="6629400" cy="635000"/>
-          </a:xfrm>
-          <a:prstGeom prst="rect">
-            <a:avLst/>
-          </a:prstGeom>
-          <a:noFill/>
-        </p:spPr>
-        <p:txBody>
-          <a:bodyPr wrap="square">
-            <a:normAutofit/>
-          </a:bodyPr>
-          <a:lstStyle/>
-          <a:p>
-            <a:pPr algn="l"/>
-            <a:r>
-              <a:rPr sz="1400" b="0" i="0">
-                <a:solidFill>
-                  <a:srgbClr val="191D2E"/>
-                </a:solidFill>
-                <a:latin typeface="Georgia"/>
-              </a:rPr>
-              <a:t>Für jeden identifizierten Kunden mind. eine konkrete NMZ-Verbesserungsmaßnahme ableiten und den Hebel begründen</a:t>
-            </a:r>
-          </a:p>
-        </p:txBody>
-      </p:sp>
-      <p:sp>
-        <p:nvSpPr>
-          <p:cNvPr id="19" name="Rectangle 18"/>
-          <p:cNvSpPr/>
-          <p:nvPr/>
-        </p:nvSpPr>
-        <p:spPr>
-          <a:xfrm>
-            <a:off x="4064000" y="3683000"/>
-            <a:ext cx="7518399" cy="6350"/>
-          </a:xfrm>
-          <a:prstGeom prst="rect">
-            <a:avLst/>
-          </a:prstGeom>
-          <a:solidFill>
-            <a:srgbClr val="E0E0E8"/>
-          </a:solidFill>
-          <a:ln>
-            <a:noFill/>
-          </a:ln>
-        </p:spPr>
-        <p:style>
-          <a:lnRef idx="1">
-            <a:schemeClr val="accent1"/>
-          </a:lnRef>
-          <a:fillRef idx="3">
-            <a:schemeClr val="accent1"/>
-          </a:fillRef>
-          <a:effectRef idx="2">
-            <a:schemeClr val="accent1"/>
-          </a:effectRef>
-          <a:fontRef idx="minor">
-            <a:schemeClr val="lt1"/>
-          </a:fontRef>
-        </p:style>
-        <p:txBody>
-          <a:bodyPr rtlCol="0" anchor="ctr"/>
-          <a:lstStyle/>
-          <a:p>
-            <a:pPr algn="ctr"/>
-          </a:p>
-        </p:txBody>
-      </p:sp>
-      <p:sp>
-        <p:nvSpPr>
-          <p:cNvPr id="20" name="TextBox 19"/>
-          <p:cNvSpPr txBox="1"/>
-          <p:nvPr/>
-        </p:nvSpPr>
-        <p:spPr>
-          <a:xfrm>
-            <a:off x="4064000" y="3733799"/>
-            <a:ext cx="762000" cy="647700"/>
-          </a:xfrm>
-          <a:prstGeom prst="rect">
-            <a:avLst/>
-          </a:prstGeom>
-          <a:noFill/>
-        </p:spPr>
-        <p:txBody>
-          <a:bodyPr wrap="none">
-            <a:normAutofit/>
-          </a:bodyPr>
-          <a:lstStyle/>
-          <a:p>
-            <a:pPr algn="l"/>
-            <a:r>
-              <a:rPr sz="2400" b="0" i="1">
-                <a:solidFill>
-                  <a:srgbClr val="1F2B56"/>
-                </a:solidFill>
-                <a:latin typeface="Georgia"/>
-              </a:rPr>
-              <a:t>V</a:t>
-            </a:r>
-          </a:p>
-        </p:txBody>
-      </p:sp>
-      <p:sp>
-        <p:nvSpPr>
-          <p:cNvPr id="21" name="TextBox 20"/>
-          <p:cNvSpPr txBox="1"/>
-          <p:nvPr/>
-        </p:nvSpPr>
-        <p:spPr>
-          <a:xfrm>
-            <a:off x="4953000" y="3746500"/>
-            <a:ext cx="6629400" cy="635000"/>
-          </a:xfrm>
-          <a:prstGeom prst="rect">
-            <a:avLst/>
-          </a:prstGeom>
-          <a:noFill/>
-        </p:spPr>
-        <p:txBody>
-          <a:bodyPr wrap="square">
-            <a:normAutofit/>
-          </a:bodyPr>
-          <a:lstStyle/>
-          <a:p>
-            <a:pPr algn="l"/>
-            <a:r>
-              <a:rPr sz="1400" b="0" i="0">
-                <a:solidFill>
-                  <a:srgbClr val="191D2E"/>
-                </a:solidFill>
-                <a:latin typeface="Georgia"/>
-              </a:rPr>
-              <a:t>Die NMZ-Struktur des Gesamtbestands nach Ertragskomponenten analysieren und das dominante Schwachfeld benennen</a:t>
+              <a:t>Benedikt Zoller Coaching  ·  FKB Campus  ·  M16</a:t>
             </a:r>
           </a:p>
         </p:txBody>
@@ -4563,14 +5419,6 @@
 <file path=ppt/slides/slide3.xml><?xml version="1.0" encoding="utf-8"?>
 <p:sld xmlns:a="http://schemas.openxmlformats.org/drawingml/2006/main" xmlns:p="http://schemas.openxmlformats.org/presentationml/2006/main" xmlns:r="http://schemas.openxmlformats.org/officeDocument/2006/relationships">
   <p:cSld>
-    <p:bg>
-      <p:bgPr>
-        <a:solidFill>
-          <a:srgbClr val="1F2B56"/>
-        </a:solidFill>
-        <a:effectLst/>
-      </p:bgPr>
-    </p:bg>
     <p:spTree>
       <p:nvGrpSpPr>
         <p:cNvPr id="1" name=""/>
@@ -4580,14 +5428,100 @@
       <p:grpSpPr/>
       <p:sp>
         <p:nvSpPr>
-          <p:cNvPr id="2" name="TextBox 1"/>
+          <p:cNvPr id="2" name="Rectangle 1"/>
+          <p:cNvSpPr/>
+          <p:nvPr/>
+        </p:nvSpPr>
+        <p:spPr>
+          <a:xfrm>
+            <a:off x="0" y="0"/>
+            <a:ext cx="12188952" cy="6858000"/>
+          </a:xfrm>
+          <a:prstGeom prst="rect">
+            <a:avLst/>
+          </a:prstGeom>
+          <a:solidFill>
+            <a:srgbClr val="EDEDF3"/>
+          </a:solidFill>
+          <a:ln>
+            <a:noFill/>
+          </a:ln>
+        </p:spPr>
+        <p:style>
+          <a:lnRef idx="1">
+            <a:schemeClr val="accent1"/>
+          </a:lnRef>
+          <a:fillRef idx="3">
+            <a:schemeClr val="accent1"/>
+          </a:fillRef>
+          <a:effectRef idx="2">
+            <a:schemeClr val="accent1"/>
+          </a:effectRef>
+          <a:fontRef idx="minor">
+            <a:schemeClr val="lt1"/>
+          </a:fontRef>
+        </p:style>
+        <p:txBody>
+          <a:bodyPr rtlCol="0" anchor="ctr"/>
+          <a:lstStyle/>
+          <a:p>
+            <a:pPr algn="ctr"/>
+          </a:p>
+        </p:txBody>
+      </p:sp>
+      <p:sp>
+        <p:nvSpPr>
+          <p:cNvPr id="3" name="Rectangle 2"/>
+          <p:cNvSpPr/>
+          <p:nvPr/>
+        </p:nvSpPr>
+        <p:spPr>
+          <a:xfrm>
+            <a:off x="0" y="0"/>
+            <a:ext cx="12188952" cy="50292"/>
+          </a:xfrm>
+          <a:prstGeom prst="rect">
+            <a:avLst/>
+          </a:prstGeom>
+          <a:solidFill>
+            <a:srgbClr val="1F2C56"/>
+          </a:solidFill>
+          <a:ln>
+            <a:noFill/>
+          </a:ln>
+        </p:spPr>
+        <p:style>
+          <a:lnRef idx="1">
+            <a:schemeClr val="accent1"/>
+          </a:lnRef>
+          <a:fillRef idx="3">
+            <a:schemeClr val="accent1"/>
+          </a:fillRef>
+          <a:effectRef idx="2">
+            <a:schemeClr val="accent1"/>
+          </a:effectRef>
+          <a:fontRef idx="minor">
+            <a:schemeClr val="lt1"/>
+          </a:fontRef>
+        </p:style>
+        <p:txBody>
+          <a:bodyPr rtlCol="0" anchor="ctr"/>
+          <a:lstStyle/>
+          <a:p>
+            <a:pPr algn="ctr"/>
+          </a:p>
+        </p:txBody>
+      </p:sp>
+      <p:sp>
+        <p:nvSpPr>
+          <p:cNvPr id="4" name="TextBox 3"/>
           <p:cNvSpPr txBox="1"/>
           <p:nvPr/>
         </p:nvSpPr>
         <p:spPr>
           <a:xfrm>
-            <a:off x="609600" y="279400"/>
-            <a:ext cx="2540000" cy="279400"/>
+            <a:off x="685800" y="109728"/>
+            <a:ext cx="10817352" cy="228600"/>
           </a:xfrm>
           <a:prstGeom prst="rect">
             <a:avLst/>
@@ -4595,34 +5529,259 @@
           <a:noFill/>
         </p:spPr>
         <p:txBody>
+          <a:bodyPr wrap="none">
+            <a:spAutoFit/>
+          </a:bodyPr>
+          <a:lstStyle/>
+          <a:p>
+            <a:pPr algn="l"/>
+            <a:r>
+              <a:rPr sz="750">
+                <a:solidFill>
+                  <a:srgbClr val="78808C"/>
+                </a:solidFill>
+                <a:latin typeface="JetBrains Mono"/>
+              </a:rPr>
+              <a:t>M16  ·  INHALT</a:t>
+            </a:r>
+          </a:p>
+        </p:txBody>
+      </p:sp>
+      <p:sp>
+        <p:nvSpPr>
+          <p:cNvPr id="5" name="Rectangle 4"/>
+          <p:cNvSpPr/>
+          <p:nvPr/>
+        </p:nvSpPr>
+        <p:spPr>
+          <a:xfrm>
+            <a:off x="0" y="1234440"/>
+            <a:ext cx="12188952" cy="12700"/>
+          </a:xfrm>
+          <a:prstGeom prst="rect">
+            <a:avLst/>
+          </a:prstGeom>
+          <a:solidFill>
+            <a:srgbClr val="D8DFE4"/>
+          </a:solidFill>
+          <a:ln>
+            <a:noFill/>
+          </a:ln>
+        </p:spPr>
+        <p:style>
+          <a:lnRef idx="1">
+            <a:schemeClr val="accent1"/>
+          </a:lnRef>
+          <a:fillRef idx="3">
+            <a:schemeClr val="accent1"/>
+          </a:fillRef>
+          <a:effectRef idx="2">
+            <a:schemeClr val="accent1"/>
+          </a:effectRef>
+          <a:fontRef idx="minor">
+            <a:schemeClr val="lt1"/>
+          </a:fontRef>
+        </p:style>
+        <p:txBody>
+          <a:bodyPr rtlCol="0" anchor="ctr"/>
+          <a:lstStyle/>
+          <a:p>
+            <a:pPr algn="ctr"/>
+          </a:p>
+        </p:txBody>
+      </p:sp>
+      <p:sp>
+        <p:nvSpPr>
+          <p:cNvPr id="6" name="Rectangle 5"/>
+          <p:cNvSpPr/>
+          <p:nvPr/>
+        </p:nvSpPr>
+        <p:spPr>
+          <a:xfrm>
+            <a:off x="685800" y="502920"/>
+            <a:ext cx="36576" cy="658368"/>
+          </a:xfrm>
+          <a:prstGeom prst="rect">
+            <a:avLst/>
+          </a:prstGeom>
+          <a:solidFill>
+            <a:srgbClr val="D9C089"/>
+          </a:solidFill>
+          <a:ln>
+            <a:noFill/>
+          </a:ln>
+        </p:spPr>
+        <p:style>
+          <a:lnRef idx="1">
+            <a:schemeClr val="accent1"/>
+          </a:lnRef>
+          <a:fillRef idx="3">
+            <a:schemeClr val="accent1"/>
+          </a:fillRef>
+          <a:effectRef idx="2">
+            <a:schemeClr val="accent1"/>
+          </a:effectRef>
+          <a:fontRef idx="minor">
+            <a:schemeClr val="lt1"/>
+          </a:fontRef>
+        </p:style>
+        <p:txBody>
+          <a:bodyPr rtlCol="0" anchor="ctr"/>
+          <a:lstStyle/>
+          <a:p>
+            <a:pPr algn="ctr"/>
+          </a:p>
+        </p:txBody>
+      </p:sp>
+      <p:sp>
+        <p:nvSpPr>
+          <p:cNvPr id="7" name="TextBox 6"/>
+          <p:cNvSpPr txBox="1"/>
+          <p:nvPr/>
+        </p:nvSpPr>
+        <p:spPr>
+          <a:xfrm>
+            <a:off x="813816" y="502920"/>
+            <a:ext cx="10634472" cy="685800"/>
+          </a:xfrm>
+          <a:prstGeom prst="rect">
+            <a:avLst/>
+          </a:prstGeom>
+          <a:noFill/>
+        </p:spPr>
+        <p:txBody>
           <a:bodyPr wrap="square">
-            <a:normAutofit/>
+            <a:spAutoFit/>
           </a:bodyPr>
           <a:lstStyle/>
           <a:p>
             <a:pPr algn="l"/>
             <a:r>
-              <a:rPr sz="1000" b="1" i="0">
-                <a:solidFill>
-                  <a:srgbClr val="F8F8FA"/>
+              <a:rPr sz="2400" b="1" i="0">
+                <a:solidFill>
+                  <a:srgbClr val="1F2C56"/>
+                </a:solidFill>
+                <a:latin typeface="Source Serif 4"/>
+              </a:rPr>
+              <a:t>Definition</a:t>
+            </a:r>
+          </a:p>
+        </p:txBody>
+      </p:sp>
+      <p:sp>
+        <p:nvSpPr>
+          <p:cNvPr id="8" name="TextBox 7"/>
+          <p:cNvSpPr txBox="1"/>
+          <p:nvPr/>
+        </p:nvSpPr>
+        <p:spPr>
+          <a:xfrm>
+            <a:off x="685800" y="1417320"/>
+            <a:ext cx="10817352" cy="5029200"/>
+          </a:xfrm>
+          <a:prstGeom prst="rect">
+            <a:avLst/>
+          </a:prstGeom>
+          <a:noFill/>
+        </p:spPr>
+        <p:txBody>
+          <a:bodyPr wrap="square">
+            <a:spAutoFit/>
+          </a:bodyPr>
+          <a:lstStyle/>
+          <a:p>
+            <a:pPr>
+              <a:spcBef>
+                <a:spcPts val="400"/>
+              </a:spcBef>
+              <a:spcAft>
+                <a:spcPts val="200"/>
+              </a:spcAft>
+            </a:pPr>
+            <a:r>
+              <a:rPr sz="1200">
+                <a:solidFill>
+                  <a:srgbClr val="3D5466"/>
                 </a:solidFill>
                 <a:latin typeface="Arial"/>
               </a:rPr>
-              <a:t>FKB  Campus</a:t>
-            </a:r>
-          </a:p>
-        </p:txBody>
-      </p:sp>
-      <p:sp>
-        <p:nvSpPr>
-          <p:cNvPr id="3" name="TextBox 2"/>
+              <a:t>NMZ (%) = Deckungsbeitrag II × 100 / Kreditvolumen</a:t>
+            </a:r>
+          </a:p>
+          <a:p>
+            <a:pPr>
+              <a:spcBef>
+                <a:spcPts val="400"/>
+              </a:spcBef>
+              <a:spcAft>
+                <a:spcPts val="200"/>
+              </a:spcAft>
+            </a:pPr>
+            <a:r>
+              <a:rPr sz="1200">
+                <a:solidFill>
+                  <a:srgbClr val="3D5466"/>
+                </a:solidFill>
+                <a:latin typeface="Arial"/>
+              </a:rPr>
+              <a:t>Sie ist damit die auf das Volumen normierte Version des Kundendeckungsbeitrags (M14), was Vergleiche zwischen Kunden unterschiedlicher Größe erst möglich macht.</a:t>
+            </a:r>
+          </a:p>
+        </p:txBody>
+      </p:sp>
+      <p:sp>
+        <p:nvSpPr>
+          <p:cNvPr id="9" name="Rectangle 8"/>
+          <p:cNvSpPr/>
+          <p:nvPr/>
+        </p:nvSpPr>
+        <p:spPr>
+          <a:xfrm>
+            <a:off x="0" y="6510528"/>
+            <a:ext cx="12188952" cy="347472"/>
+          </a:xfrm>
+          <a:prstGeom prst="rect">
+            <a:avLst/>
+          </a:prstGeom>
+          <a:solidFill>
+            <a:srgbClr val="0A1937"/>
+          </a:solidFill>
+          <a:ln>
+            <a:noFill/>
+          </a:ln>
+        </p:spPr>
+        <p:style>
+          <a:lnRef idx="1">
+            <a:schemeClr val="accent1"/>
+          </a:lnRef>
+          <a:fillRef idx="3">
+            <a:schemeClr val="accent1"/>
+          </a:fillRef>
+          <a:effectRef idx="2">
+            <a:schemeClr val="accent1"/>
+          </a:effectRef>
+          <a:fontRef idx="minor">
+            <a:schemeClr val="lt1"/>
+          </a:fontRef>
+        </p:style>
+        <p:txBody>
+          <a:bodyPr rtlCol="0" anchor="ctr"/>
+          <a:lstStyle/>
+          <a:p>
+            <a:pPr algn="ctr"/>
+          </a:p>
+        </p:txBody>
+      </p:sp>
+      <p:sp>
+        <p:nvSpPr>
+          <p:cNvPr id="10" name="TextBox 9"/>
           <p:cNvSpPr txBox="1"/>
           <p:nvPr/>
         </p:nvSpPr>
         <p:spPr>
           <a:xfrm>
-            <a:off x="609600" y="279400"/>
-            <a:ext cx="10972800" cy="279400"/>
+            <a:off x="685800" y="6583680"/>
+            <a:ext cx="6490411" cy="256032"/>
           </a:xfrm>
           <a:prstGeom prst="rect">
             <a:avLst/>
@@ -4630,160 +5789,20 @@
           <a:noFill/>
         </p:spPr>
         <p:txBody>
-          <a:bodyPr wrap="square">
-            <a:normAutofit/>
+          <a:bodyPr wrap="none">
+            <a:spAutoFit/>
           </a:bodyPr>
           <a:lstStyle/>
           <a:p>
-            <a:pPr algn="r"/>
-            <a:r>
-              <a:rPr sz="900" b="0" i="0">
-                <a:solidFill>
-                  <a:srgbClr val="7B7FA0"/>
-                </a:solidFill>
-                <a:latin typeface="Courier New"/>
+            <a:pPr algn="l"/>
+            <a:r>
+              <a:rPr sz="700">
+                <a:solidFill>
+                  <a:srgbClr val="A0B4D2"/>
+                </a:solidFill>
+                <a:latin typeface="JetBrains Mono"/>
               </a:rPr>
-              <a:t>DIE NETTOMARGENZIFFER: WAS SIE WIRKLICH MISST</a:t>
-            </a:r>
-          </a:p>
-        </p:txBody>
-      </p:sp>
-      <p:sp>
-        <p:nvSpPr>
-          <p:cNvPr id="4" name="TextBox 3"/>
-          <p:cNvSpPr txBox="1"/>
-          <p:nvPr/>
-        </p:nvSpPr>
-        <p:spPr>
-          <a:xfrm>
-            <a:off x="609600" y="6426200"/>
-            <a:ext cx="10972800" cy="228600"/>
-          </a:xfrm>
-          <a:prstGeom prst="rect">
-            <a:avLst/>
-          </a:prstGeom>
-          <a:noFill/>
-        </p:spPr>
-        <p:txBody>
-          <a:bodyPr wrap="square">
-            <a:normAutofit/>
-          </a:bodyPr>
-          <a:lstStyle/>
-          <a:p>
-            <a:pPr algn="r"/>
-            <a:r>
-              <a:rPr sz="900" b="0" i="0">
-                <a:solidFill>
-                  <a:srgbClr val="7B7FA0"/>
-                </a:solidFill>
-                <a:latin typeface="Courier New"/>
-              </a:rPr>
-              <a:t>03</a:t>
-            </a:r>
-          </a:p>
-        </p:txBody>
-      </p:sp>
-      <p:sp>
-        <p:nvSpPr>
-          <p:cNvPr id="5" name="TextBox 4"/>
-          <p:cNvSpPr txBox="1"/>
-          <p:nvPr/>
-        </p:nvSpPr>
-        <p:spPr>
-          <a:xfrm>
-            <a:off x="609600" y="635000"/>
-            <a:ext cx="5461000" cy="5461000"/>
-          </a:xfrm>
-          <a:prstGeom prst="rect">
-            <a:avLst/>
-          </a:prstGeom>
-          <a:noFill/>
-        </p:spPr>
-        <p:txBody>
-          <a:bodyPr wrap="square">
-            <a:normAutofit/>
-          </a:bodyPr>
-          <a:lstStyle/>
-          <a:p>
-            <a:pPr algn="l"/>
-            <a:r>
-              <a:rPr sz="28000" b="0" i="1">
-                <a:solidFill>
-                  <a:srgbClr val="D9BF7A"/>
-                </a:solidFill>
-                <a:latin typeface="Georgia"/>
-              </a:rPr>
-              <a:t>I</a:t>
-            </a:r>
-          </a:p>
-        </p:txBody>
-      </p:sp>
-      <p:sp>
-        <p:nvSpPr>
-          <p:cNvPr id="6" name="TextBox 5"/>
-          <p:cNvSpPr txBox="1"/>
-          <p:nvPr/>
-        </p:nvSpPr>
-        <p:spPr>
-          <a:xfrm>
-            <a:off x="6731000" y="4064000"/>
-            <a:ext cx="4851400" cy="1778000"/>
-          </a:xfrm>
-          <a:prstGeom prst="rect">
-            <a:avLst/>
-          </a:prstGeom>
-          <a:noFill/>
-        </p:spPr>
-        <p:txBody>
-          <a:bodyPr wrap="square">
-            <a:normAutofit/>
-          </a:bodyPr>
-          <a:lstStyle/>
-          <a:p>
-            <a:pPr algn="r"/>
-            <a:r>
-              <a:rPr sz="3800" b="0" i="0">
-                <a:solidFill>
-                  <a:srgbClr val="F8F8FA"/>
-                </a:solidFill>
-                <a:latin typeface="Georgia"/>
-              </a:rPr>
-              <a:t>Die Nettomargenziffer: Was sie wirklich misst</a:t>
-            </a:r>
-          </a:p>
-        </p:txBody>
-      </p:sp>
-      <p:sp>
-        <p:nvSpPr>
-          <p:cNvPr id="7" name="TextBox 6"/>
-          <p:cNvSpPr txBox="1"/>
-          <p:nvPr/>
-        </p:nvSpPr>
-        <p:spPr>
-          <a:xfrm>
-            <a:off x="6731000" y="5842000"/>
-            <a:ext cx="4851400" cy="635000"/>
-          </a:xfrm>
-          <a:prstGeom prst="rect">
-            <a:avLst/>
-          </a:prstGeom>
-          <a:noFill/>
-        </p:spPr>
-        <p:txBody>
-          <a:bodyPr wrap="square">
-            <a:normAutofit/>
-          </a:bodyPr>
-          <a:lstStyle/>
-          <a:p>
-            <a:pPr algn="r"/>
-            <a:r>
-              <a:rPr sz="1400" b="0" i="1">
-                <a:solidFill>
-                  <a:srgbClr val="7B7FA0"/>
-                </a:solidFill>
-                <a:latin typeface="Georgia"/>
-              </a:rPr>
-              <a:t>Warum der DB alleine lügt</a:t>
+              <a:t>Benedikt Zoller Coaching  ·  FKB Campus  ·  M16</a:t>
             </a:r>
           </a:p>
         </p:txBody>
@@ -4799,14 +5818,6 @@
 <file path=ppt/slides/slide4.xml><?xml version="1.0" encoding="utf-8"?>
 <p:sld xmlns:a="http://schemas.openxmlformats.org/drawingml/2006/main" xmlns:p="http://schemas.openxmlformats.org/presentationml/2006/main" xmlns:r="http://schemas.openxmlformats.org/officeDocument/2006/relationships">
   <p:cSld>
-    <p:bg>
-      <p:bgPr>
-        <a:solidFill>
-          <a:srgbClr val="F8F8FA"/>
-        </a:solidFill>
-        <a:effectLst/>
-      </p:bgPr>
-    </p:bg>
     <p:spTree>
       <p:nvGrpSpPr>
         <p:cNvPr id="1" name=""/>
@@ -4816,125 +5827,20 @@
       <p:grpSpPr/>
       <p:sp>
         <p:nvSpPr>
-          <p:cNvPr id="2" name="TextBox 1"/>
-          <p:cNvSpPr txBox="1"/>
-          <p:nvPr/>
-        </p:nvSpPr>
-        <p:spPr>
-          <a:xfrm>
-            <a:off x="609600" y="279400"/>
-            <a:ext cx="2540000" cy="279400"/>
-          </a:xfrm>
-          <a:prstGeom prst="rect">
-            <a:avLst/>
-          </a:prstGeom>
-          <a:noFill/>
-        </p:spPr>
-        <p:txBody>
-          <a:bodyPr wrap="square">
-            <a:normAutofit/>
-          </a:bodyPr>
-          <a:lstStyle/>
-          <a:p>
-            <a:pPr algn="l"/>
-            <a:r>
-              <a:rPr sz="1000" b="1" i="0">
-                <a:solidFill>
-                  <a:srgbClr val="191D2E"/>
-                </a:solidFill>
-                <a:latin typeface="Arial"/>
-              </a:rPr>
-              <a:t>FKB  Campus</a:t>
-            </a:r>
-          </a:p>
-        </p:txBody>
-      </p:sp>
-      <p:sp>
-        <p:nvSpPr>
-          <p:cNvPr id="3" name="TextBox 2"/>
-          <p:cNvSpPr txBox="1"/>
-          <p:nvPr/>
-        </p:nvSpPr>
-        <p:spPr>
-          <a:xfrm>
-            <a:off x="609600" y="279400"/>
-            <a:ext cx="10972800" cy="279400"/>
-          </a:xfrm>
-          <a:prstGeom prst="rect">
-            <a:avLst/>
-          </a:prstGeom>
-          <a:noFill/>
-        </p:spPr>
-        <p:txBody>
-          <a:bodyPr wrap="square">
-            <a:normAutofit/>
-          </a:bodyPr>
-          <a:lstStyle/>
-          <a:p>
-            <a:pPr algn="r"/>
-            <a:r>
-              <a:rPr sz="900" b="0" i="0">
-                <a:solidFill>
-                  <a:srgbClr val="7B7FA0"/>
-                </a:solidFill>
-                <a:latin typeface="Courier New"/>
-              </a:rPr>
-              <a:t>I · DIE NETTOMARGENZIFFER: WAS SIE WIRKLICH MISST</a:t>
-            </a:r>
-          </a:p>
-        </p:txBody>
-      </p:sp>
-      <p:sp>
-        <p:nvSpPr>
-          <p:cNvPr id="4" name="TextBox 3"/>
-          <p:cNvSpPr txBox="1"/>
-          <p:nvPr/>
-        </p:nvSpPr>
-        <p:spPr>
-          <a:xfrm>
-            <a:off x="609600" y="6426200"/>
-            <a:ext cx="10972800" cy="228600"/>
-          </a:xfrm>
-          <a:prstGeom prst="rect">
-            <a:avLst/>
-          </a:prstGeom>
-          <a:noFill/>
-        </p:spPr>
-        <p:txBody>
-          <a:bodyPr wrap="square">
-            <a:normAutofit/>
-          </a:bodyPr>
-          <a:lstStyle/>
-          <a:p>
-            <a:pPr algn="r"/>
-            <a:r>
-              <a:rPr sz="900" b="0" i="0">
-                <a:solidFill>
-                  <a:srgbClr val="7B7FA0"/>
-                </a:solidFill>
-                <a:latin typeface="Courier New"/>
-              </a:rPr>
-              <a:t>04</a:t>
-            </a:r>
-          </a:p>
-        </p:txBody>
-      </p:sp>
-      <p:sp>
-        <p:nvSpPr>
-          <p:cNvPr id="5" name="Rectangle 4"/>
+          <p:cNvPr id="2" name="Rectangle 1"/>
           <p:cNvSpPr/>
           <p:nvPr/>
         </p:nvSpPr>
         <p:spPr>
           <a:xfrm>
-            <a:off x="609600" y="825500"/>
-            <a:ext cx="10972800" cy="6350"/>
+            <a:off x="0" y="0"/>
+            <a:ext cx="12188952" cy="6858000"/>
           </a:xfrm>
           <a:prstGeom prst="rect">
             <a:avLst/>
           </a:prstGeom>
           <a:solidFill>
-            <a:srgbClr val="191D2E"/>
+            <a:srgbClr val="EDEDF3"/>
           </a:solidFill>
           <a:ln>
             <a:noFill/>
@@ -4964,90 +5870,20 @@
       </p:sp>
       <p:sp>
         <p:nvSpPr>
-          <p:cNvPr id="6" name="TextBox 5"/>
-          <p:cNvSpPr txBox="1"/>
-          <p:nvPr/>
-        </p:nvSpPr>
-        <p:spPr>
-          <a:xfrm>
-            <a:off x="609600" y="889000"/>
-            <a:ext cx="3810000" cy="177800"/>
-          </a:xfrm>
-          <a:prstGeom prst="rect">
-            <a:avLst/>
-          </a:prstGeom>
-          <a:noFill/>
-        </p:spPr>
-        <p:txBody>
-          <a:bodyPr wrap="square">
-            <a:normAutofit/>
-          </a:bodyPr>
-          <a:lstStyle/>
-          <a:p>
-            <a:pPr algn="l"/>
-            <a:r>
-              <a:rPr sz="900" b="0" i="0">
-                <a:solidFill>
-                  <a:srgbClr val="7B7FA0"/>
-                </a:solidFill>
-                <a:latin typeface="Courier New"/>
-              </a:rPr>
-              <a:t>Kernaussage</a:t>
-            </a:r>
-          </a:p>
-        </p:txBody>
-      </p:sp>
-      <p:sp>
-        <p:nvSpPr>
-          <p:cNvPr id="7" name="TextBox 6"/>
-          <p:cNvSpPr txBox="1"/>
-          <p:nvPr/>
-        </p:nvSpPr>
-        <p:spPr>
-          <a:xfrm>
-            <a:off x="609600" y="920750"/>
-            <a:ext cx="10972800" cy="1778000"/>
-          </a:xfrm>
-          <a:prstGeom prst="rect">
-            <a:avLst/>
-          </a:prstGeom>
-          <a:noFill/>
-        </p:spPr>
-        <p:txBody>
-          <a:bodyPr wrap="square">
-            <a:normAutofit/>
-          </a:bodyPr>
-          <a:lstStyle/>
-          <a:p>
-            <a:pPr algn="l"/>
-            <a:r>
-              <a:rPr sz="3800" b="0" i="0">
-                <a:solidFill>
-                  <a:srgbClr val="191D2E"/>
-                </a:solidFill>
-                <a:latin typeface="Georgia"/>
-              </a:rPr>
-              <a:t>Deckungsbeitrag täuscht — NMZ zeigt die Wahrheit</a:t>
-            </a:r>
-          </a:p>
-        </p:txBody>
-      </p:sp>
-      <p:sp>
-        <p:nvSpPr>
-          <p:cNvPr id="8" name="Rectangle 7"/>
+          <p:cNvPr id="3" name="Rectangle 2"/>
           <p:cNvSpPr/>
           <p:nvPr/>
         </p:nvSpPr>
         <p:spPr>
           <a:xfrm>
-            <a:off x="609600" y="2762250"/>
-            <a:ext cx="10972800" cy="6350"/>
+            <a:off x="0" y="0"/>
+            <a:ext cx="12188952" cy="50292"/>
           </a:xfrm>
           <a:prstGeom prst="rect">
             <a:avLst/>
           </a:prstGeom>
           <a:solidFill>
-            <a:srgbClr val="191D2E"/>
+            <a:srgbClr val="1F2C56"/>
           </a:solidFill>
           <a:ln>
             <a:noFill/>
@@ -5077,14 +5913,14 @@
       </p:sp>
       <p:sp>
         <p:nvSpPr>
-          <p:cNvPr id="9" name="TextBox 8"/>
+          <p:cNvPr id="4" name="TextBox 3"/>
           <p:cNvSpPr txBox="1"/>
           <p:nvPr/>
         </p:nvSpPr>
         <p:spPr>
           <a:xfrm>
-            <a:off x="609600" y="2825750"/>
-            <a:ext cx="5207000" cy="2857500"/>
+            <a:off x="685800" y="109728"/>
+            <a:ext cx="10817352" cy="228600"/>
           </a:xfrm>
           <a:prstGeom prst="rect">
             <a:avLst/>
@@ -5092,21 +5928,284 @@
           <a:noFill/>
         </p:spPr>
         <p:txBody>
+          <a:bodyPr wrap="none">
+            <a:spAutoFit/>
+          </a:bodyPr>
+          <a:lstStyle/>
+          <a:p>
+            <a:pPr algn="l"/>
+            <a:r>
+              <a:rPr sz="750">
+                <a:solidFill>
+                  <a:srgbClr val="78808C"/>
+                </a:solidFill>
+                <a:latin typeface="JetBrains Mono"/>
+              </a:rPr>
+              <a:t>M16  ·  INHALT</a:t>
+            </a:r>
+          </a:p>
+        </p:txBody>
+      </p:sp>
+      <p:sp>
+        <p:nvSpPr>
+          <p:cNvPr id="5" name="Rectangle 4"/>
+          <p:cNvSpPr/>
+          <p:nvPr/>
+        </p:nvSpPr>
+        <p:spPr>
+          <a:xfrm>
+            <a:off x="0" y="1234440"/>
+            <a:ext cx="12188952" cy="12700"/>
+          </a:xfrm>
+          <a:prstGeom prst="rect">
+            <a:avLst/>
+          </a:prstGeom>
+          <a:solidFill>
+            <a:srgbClr val="D8DFE4"/>
+          </a:solidFill>
+          <a:ln>
+            <a:noFill/>
+          </a:ln>
+        </p:spPr>
+        <p:style>
+          <a:lnRef idx="1">
+            <a:schemeClr val="accent1"/>
+          </a:lnRef>
+          <a:fillRef idx="3">
+            <a:schemeClr val="accent1"/>
+          </a:fillRef>
+          <a:effectRef idx="2">
+            <a:schemeClr val="accent1"/>
+          </a:effectRef>
+          <a:fontRef idx="minor">
+            <a:schemeClr val="lt1"/>
+          </a:fontRef>
+        </p:style>
+        <p:txBody>
+          <a:bodyPr rtlCol="0" anchor="ctr"/>
+          <a:lstStyle/>
+          <a:p>
+            <a:pPr algn="ctr"/>
+          </a:p>
+        </p:txBody>
+      </p:sp>
+      <p:sp>
+        <p:nvSpPr>
+          <p:cNvPr id="6" name="Rectangle 5"/>
+          <p:cNvSpPr/>
+          <p:nvPr/>
+        </p:nvSpPr>
+        <p:spPr>
+          <a:xfrm>
+            <a:off x="685800" y="502920"/>
+            <a:ext cx="36576" cy="658368"/>
+          </a:xfrm>
+          <a:prstGeom prst="rect">
+            <a:avLst/>
+          </a:prstGeom>
+          <a:solidFill>
+            <a:srgbClr val="D9C089"/>
+          </a:solidFill>
+          <a:ln>
+            <a:noFill/>
+          </a:ln>
+        </p:spPr>
+        <p:style>
+          <a:lnRef idx="1">
+            <a:schemeClr val="accent1"/>
+          </a:lnRef>
+          <a:fillRef idx="3">
+            <a:schemeClr val="accent1"/>
+          </a:fillRef>
+          <a:effectRef idx="2">
+            <a:schemeClr val="accent1"/>
+          </a:effectRef>
+          <a:fontRef idx="minor">
+            <a:schemeClr val="lt1"/>
+          </a:fontRef>
+        </p:style>
+        <p:txBody>
+          <a:bodyPr rtlCol="0" anchor="ctr"/>
+          <a:lstStyle/>
+          <a:p>
+            <a:pPr algn="ctr"/>
+          </a:p>
+        </p:txBody>
+      </p:sp>
+      <p:sp>
+        <p:nvSpPr>
+          <p:cNvPr id="7" name="TextBox 6"/>
+          <p:cNvSpPr txBox="1"/>
+          <p:nvPr/>
+        </p:nvSpPr>
+        <p:spPr>
+          <a:xfrm>
+            <a:off x="813816" y="502920"/>
+            <a:ext cx="10634472" cy="685800"/>
+          </a:xfrm>
+          <a:prstGeom prst="rect">
+            <a:avLst/>
+          </a:prstGeom>
+          <a:noFill/>
+        </p:spPr>
+        <p:txBody>
           <a:bodyPr wrap="square">
-            <a:normAutofit/>
+            <a:spAutoFit/>
           </a:bodyPr>
           <a:lstStyle/>
           <a:p>
             <a:pPr algn="l"/>
             <a:r>
-              <a:rPr sz="1400" b="0" i="0">
-                <a:solidFill>
-                  <a:srgbClr val="191D2E"/>
-                </a:solidFill>
-                <a:latin typeface="Georgia"/>
+              <a:rPr sz="2400" b="1" i="0">
+                <a:solidFill>
+                  <a:srgbClr val="1F2C56"/>
+                </a:solidFill>
+                <a:latin typeface="Source Serif 4"/>
               </a:rPr>
-              <a:t>Der Deckungsbeitrag ignoriert das Risiko. Zwei Kunden mit gleichem DB können völlig unterschiedlich ertragreich sein — wenn einer ein deutlich schlechteres Rating hat und damit mehr Eigenkapital bindet.</a:t>
-            </a:r>
+              <a:t>Warum die NMZ dem DB überlegen ist</a:t>
+            </a:r>
+          </a:p>
+        </p:txBody>
+      </p:sp>
+      <p:sp>
+        <p:nvSpPr>
+          <p:cNvPr id="8" name="TextBox 7"/>
+          <p:cNvSpPr txBox="1"/>
+          <p:nvPr/>
+        </p:nvSpPr>
+        <p:spPr>
+          <a:xfrm>
+            <a:off x="685800" y="1417320"/>
+            <a:ext cx="10817352" cy="5029200"/>
+          </a:xfrm>
+          <a:prstGeom prst="rect">
+            <a:avLst/>
+          </a:prstGeom>
+          <a:noFill/>
+        </p:spPr>
+        <p:txBody>
+          <a:bodyPr wrap="square">
+            <a:spAutoFit/>
+          </a:bodyPr>
+          <a:lstStyle/>
+          <a:p>
+            <a:pPr>
+              <a:spcBef>
+                <a:spcPts val="400"/>
+              </a:spcBef>
+              <a:spcAft>
+                <a:spcPts val="200"/>
+              </a:spcAft>
+            </a:pPr>
+            <a:r>
+              <a:rPr sz="1200">
+                <a:solidFill>
+                  <a:srgbClr val="3D5466"/>
+                </a:solidFill>
+                <a:latin typeface="Arial"/>
+              </a:rPr>
+              <a:t>Rolfes (1999) betont, dass Banken ohne normierte Ertragskennzahlen systematisch Kapital in renditeschwache Engagements lenken, weil die absoluten Beträge groß aussehen.</a:t>
+            </a:r>
+          </a:p>
+          <a:p>
+            <a:pPr>
+              <a:spcBef>
+                <a:spcPts val="400"/>
+              </a:spcBef>
+              <a:spcAft>
+                <a:spcPts val="200"/>
+              </a:spcAft>
+            </a:pPr>
+            <a:r>
+              <a:rPr sz="1200">
+                <a:solidFill>
+                  <a:srgbClr val="3D5466"/>
+                </a:solidFill>
+                <a:latin typeface="Arial"/>
+              </a:rPr>
+              <a:t>## 4.2 Die NMZ-Komponenten im Detail</a:t>
+            </a:r>
+          </a:p>
+          <a:p>
+            <a:pPr>
+              <a:spcBef>
+                <a:spcPts val="400"/>
+              </a:spcBef>
+              <a:spcAft>
+                <a:spcPts val="200"/>
+              </a:spcAft>
+            </a:pPr>
+            <a:r>
+              <a:rPr sz="1200">
+                <a:solidFill>
+                  <a:srgbClr val="3D5466"/>
+                </a:solidFill>
+                <a:latin typeface="Arial"/>
+              </a:rPr>
+              <a:t>Die NMZ wird von vier Treibern bewegt – jeder Treiber entspricht einem Hebel für die Optimierung:</a:t>
+            </a:r>
+          </a:p>
+          <a:p>
+            <a:pPr>
+              <a:spcBef>
+                <a:spcPts val="400"/>
+              </a:spcBef>
+              <a:spcAft>
+                <a:spcPts val="200"/>
+              </a:spcAft>
+            </a:pPr>
+            <a:r>
+              <a:rPr sz="1200">
+                <a:solidFill>
+                  <a:srgbClr val="3D5466"/>
+                </a:solidFill>
+                <a:latin typeface="Arial"/>
+              </a:rPr>
+              <a:t>## 4.3 NMZ-Berichte in agree lesen</a:t>
+            </a:r>
+          </a:p>
+        </p:txBody>
+      </p:sp>
+      <p:sp>
+        <p:nvSpPr>
+          <p:cNvPr id="9" name="Rectangle 8"/>
+          <p:cNvSpPr/>
+          <p:nvPr/>
+        </p:nvSpPr>
+        <p:spPr>
+          <a:xfrm>
+            <a:off x="0" y="6510528"/>
+            <a:ext cx="12188952" cy="347472"/>
+          </a:xfrm>
+          <a:prstGeom prst="rect">
+            <a:avLst/>
+          </a:prstGeom>
+          <a:solidFill>
+            <a:srgbClr val="0A1937"/>
+          </a:solidFill>
+          <a:ln>
+            <a:noFill/>
+          </a:ln>
+        </p:spPr>
+        <p:style>
+          <a:lnRef idx="1">
+            <a:schemeClr val="accent1"/>
+          </a:lnRef>
+          <a:fillRef idx="3">
+            <a:schemeClr val="accent1"/>
+          </a:fillRef>
+          <a:effectRef idx="2">
+            <a:schemeClr val="accent1"/>
+          </a:effectRef>
+          <a:fontRef idx="minor">
+            <a:schemeClr val="lt1"/>
+          </a:fontRef>
+        </p:style>
+        <p:txBody>
+          <a:bodyPr rtlCol="0" anchor="ctr"/>
+          <a:lstStyle/>
+          <a:p>
+            <a:pPr algn="ctr"/>
           </a:p>
         </p:txBody>
       </p:sp>
@@ -5118,8 +6217,8 @@
         </p:nvSpPr>
         <p:spPr>
           <a:xfrm>
-            <a:off x="6096000" y="2825750"/>
-            <a:ext cx="4851400" cy="177800"/>
+            <a:off x="685800" y="6583680"/>
+            <a:ext cx="6490411" cy="256032"/>
           </a:xfrm>
           <a:prstGeom prst="rect">
             <a:avLst/>
@@ -5127,55 +6226,20 @@
           <a:noFill/>
         </p:spPr>
         <p:txBody>
-          <a:bodyPr wrap="square">
-            <a:normAutofit/>
+          <a:bodyPr wrap="none">
+            <a:spAutoFit/>
           </a:bodyPr>
           <a:lstStyle/>
           <a:p>
             <a:pPr algn="l"/>
             <a:r>
-              <a:rPr sz="900" b="0" i="0">
-                <a:solidFill>
-                  <a:srgbClr val="1F2B56"/>
-                </a:solidFill>
-                <a:latin typeface="Courier New"/>
+              <a:rPr sz="700">
+                <a:solidFill>
+                  <a:srgbClr val="A0B4D2"/>
+                </a:solidFill>
+                <a:latin typeface="JetBrains Mono"/>
               </a:rPr>
-              <a:t>Mitnahme</a:t>
-            </a:r>
-          </a:p>
-        </p:txBody>
-      </p:sp>
-      <p:sp>
-        <p:nvSpPr>
-          <p:cNvPr id="11" name="TextBox 10"/>
-          <p:cNvSpPr txBox="1"/>
-          <p:nvPr/>
-        </p:nvSpPr>
-        <p:spPr>
-          <a:xfrm>
-            <a:off x="6096000" y="3041650"/>
-            <a:ext cx="4851400" cy="2667000"/>
-          </a:xfrm>
-          <a:prstGeom prst="rect">
-            <a:avLst/>
-          </a:prstGeom>
-          <a:noFill/>
-        </p:spPr>
-        <p:txBody>
-          <a:bodyPr wrap="square">
-            <a:normAutofit/>
-          </a:bodyPr>
-          <a:lstStyle/>
-          <a:p>
-            <a:pPr algn="l"/>
-            <a:r>
-              <a:rPr sz="1400" b="0" i="1">
-                <a:solidFill>
-                  <a:srgbClr val="191D2E"/>
-                </a:solidFill>
-                <a:latin typeface="Georgia"/>
-              </a:rPr>
-              <a:t>NMZ = Deckungsbeitrag ÷ risikoadjustiertes Kapital. Sie misst die Rendite auf das eingesetzte Risikokapital — die eigentliche Steuerungsgröße.</a:t>
+              <a:t>Benedikt Zoller Coaching  ·  FKB Campus  ·  M16</a:t>
             </a:r>
           </a:p>
         </p:txBody>
@@ -5191,14 +6255,6 @@
 <file path=ppt/slides/slide5.xml><?xml version="1.0" encoding="utf-8"?>
 <p:sld xmlns:a="http://schemas.openxmlformats.org/drawingml/2006/main" xmlns:p="http://schemas.openxmlformats.org/presentationml/2006/main" xmlns:r="http://schemas.openxmlformats.org/officeDocument/2006/relationships">
   <p:cSld>
-    <p:bg>
-      <p:bgPr>
-        <a:solidFill>
-          <a:srgbClr val="1F2B56"/>
-        </a:solidFill>
-        <a:effectLst/>
-      </p:bgPr>
-    </p:bg>
     <p:spTree>
       <p:nvGrpSpPr>
         <p:cNvPr id="1" name=""/>
@@ -5208,71 +6264,87 @@
       <p:grpSpPr/>
       <p:sp>
         <p:nvSpPr>
-          <p:cNvPr id="2" name="TextBox 1"/>
-          <p:cNvSpPr txBox="1"/>
-          <p:nvPr/>
-        </p:nvSpPr>
-        <p:spPr>
-          <a:xfrm>
-            <a:off x="609600" y="279400"/>
-            <a:ext cx="2540000" cy="279400"/>
-          </a:xfrm>
-          <a:prstGeom prst="rect">
-            <a:avLst/>
-          </a:prstGeom>
-          <a:noFill/>
-        </p:spPr>
-        <p:txBody>
-          <a:bodyPr wrap="square">
-            <a:normAutofit/>
-          </a:bodyPr>
-          <a:lstStyle/>
-          <a:p>
-            <a:pPr algn="l"/>
-            <a:r>
-              <a:rPr sz="1000" b="1" i="0">
-                <a:solidFill>
-                  <a:srgbClr val="F8F8FA"/>
-                </a:solidFill>
-                <a:latin typeface="Arial"/>
-              </a:rPr>
-              <a:t>FKB  Campus</a:t>
-            </a:r>
-          </a:p>
-        </p:txBody>
-      </p:sp>
-      <p:sp>
-        <p:nvSpPr>
-          <p:cNvPr id="3" name="TextBox 2"/>
-          <p:cNvSpPr txBox="1"/>
-          <p:nvPr/>
-        </p:nvSpPr>
-        <p:spPr>
-          <a:xfrm>
-            <a:off x="609600" y="279400"/>
-            <a:ext cx="10972800" cy="279400"/>
-          </a:xfrm>
-          <a:prstGeom prst="rect">
-            <a:avLst/>
-          </a:prstGeom>
-          <a:noFill/>
-        </p:spPr>
-        <p:txBody>
-          <a:bodyPr wrap="square">
-            <a:normAutofit/>
-          </a:bodyPr>
-          <a:lstStyle/>
-          <a:p>
-            <a:pPr algn="r"/>
-            <a:r>
-              <a:rPr sz="900" b="0" i="0">
-                <a:solidFill>
-                  <a:srgbClr val="7B7FA0"/>
-                </a:solidFill>
-                <a:latin typeface="Courier New"/>
-              </a:rPr>
-              <a:t>NMZ IM AGREE LESEN UND INTERPRETIEREN</a:t>
-            </a:r>
+          <p:cNvPr id="2" name="Rectangle 1"/>
+          <p:cNvSpPr/>
+          <p:nvPr/>
+        </p:nvSpPr>
+        <p:spPr>
+          <a:xfrm>
+            <a:off x="0" y="0"/>
+            <a:ext cx="12188952" cy="6858000"/>
+          </a:xfrm>
+          <a:prstGeom prst="rect">
+            <a:avLst/>
+          </a:prstGeom>
+          <a:solidFill>
+            <a:srgbClr val="FFFFFF"/>
+          </a:solidFill>
+          <a:ln>
+            <a:noFill/>
+          </a:ln>
+        </p:spPr>
+        <p:style>
+          <a:lnRef idx="1">
+            <a:schemeClr val="accent1"/>
+          </a:lnRef>
+          <a:fillRef idx="3">
+            <a:schemeClr val="accent1"/>
+          </a:fillRef>
+          <a:effectRef idx="2">
+            <a:schemeClr val="accent1"/>
+          </a:effectRef>
+          <a:fontRef idx="minor">
+            <a:schemeClr val="lt1"/>
+          </a:fontRef>
+        </p:style>
+        <p:txBody>
+          <a:bodyPr rtlCol="0" anchor="ctr"/>
+          <a:lstStyle/>
+          <a:p>
+            <a:pPr algn="ctr"/>
+          </a:p>
+        </p:txBody>
+      </p:sp>
+      <p:sp>
+        <p:nvSpPr>
+          <p:cNvPr id="3" name="Rectangle 2"/>
+          <p:cNvSpPr/>
+          <p:nvPr/>
+        </p:nvSpPr>
+        <p:spPr>
+          <a:xfrm>
+            <a:off x="0" y="0"/>
+            <a:ext cx="12188952" cy="50292"/>
+          </a:xfrm>
+          <a:prstGeom prst="rect">
+            <a:avLst/>
+          </a:prstGeom>
+          <a:solidFill>
+            <a:srgbClr val="1F2C56"/>
+          </a:solidFill>
+          <a:ln>
+            <a:noFill/>
+          </a:ln>
+        </p:spPr>
+        <p:style>
+          <a:lnRef idx="1">
+            <a:schemeClr val="accent1"/>
+          </a:lnRef>
+          <a:fillRef idx="3">
+            <a:schemeClr val="accent1"/>
+          </a:fillRef>
+          <a:effectRef idx="2">
+            <a:schemeClr val="accent1"/>
+          </a:effectRef>
+          <a:fontRef idx="minor">
+            <a:schemeClr val="lt1"/>
+          </a:fontRef>
+        </p:style>
+        <p:txBody>
+          <a:bodyPr rtlCol="0" anchor="ctr"/>
+          <a:lstStyle/>
+          <a:p>
+            <a:pPr algn="ctr"/>
           </a:p>
         </p:txBody>
       </p:sp>
@@ -5284,8 +6356,8 @@
         </p:nvSpPr>
         <p:spPr>
           <a:xfrm>
-            <a:off x="609600" y="6426200"/>
-            <a:ext cx="10972800" cy="228600"/>
+            <a:off x="685800" y="109728"/>
+            <a:ext cx="10817352" cy="228600"/>
           </a:xfrm>
           <a:prstGeom prst="rect">
             <a:avLst/>
@@ -5293,20 +6365,20 @@
           <a:noFill/>
         </p:spPr>
         <p:txBody>
-          <a:bodyPr wrap="square">
-            <a:normAutofit/>
+          <a:bodyPr wrap="none">
+            <a:spAutoFit/>
           </a:bodyPr>
           <a:lstStyle/>
           <a:p>
-            <a:pPr algn="r"/>
-            <a:r>
-              <a:rPr sz="900" b="0" i="0">
-                <a:solidFill>
-                  <a:srgbClr val="7B7FA0"/>
-                </a:solidFill>
-                <a:latin typeface="Courier New"/>
+            <a:pPr algn="l"/>
+            <a:r>
+              <a:rPr sz="750">
+                <a:solidFill>
+                  <a:srgbClr val="78808C"/>
+                </a:solidFill>
+                <a:latin typeface="JetBrains Mono"/>
               </a:rPr>
-              <a:t>05</a:t>
+              <a:t>M16  ·  SCHAUBILD</a:t>
             </a:r>
           </a:p>
         </p:txBody>
@@ -5319,8 +6391,8 @@
         </p:nvSpPr>
         <p:spPr>
           <a:xfrm>
-            <a:off x="609600" y="635000"/>
-            <a:ext cx="5461000" cy="5461000"/>
+            <a:off x="685800" y="502920"/>
+            <a:ext cx="10817352" cy="594360"/>
           </a:xfrm>
           <a:prstGeom prst="rect">
             <a:avLst/>
@@ -5329,33 +6401,143 @@
         </p:spPr>
         <p:txBody>
           <a:bodyPr wrap="square">
-            <a:normAutofit/>
+            <a:spAutoFit/>
           </a:bodyPr>
           <a:lstStyle/>
           <a:p>
             <a:pPr algn="l"/>
             <a:r>
-              <a:rPr sz="28000" b="0" i="1">
-                <a:solidFill>
-                  <a:srgbClr val="D9BF7A"/>
-                </a:solidFill>
-                <a:latin typeface="Georgia"/>
+              <a:rPr sz="2000" b="1" i="0">
+                <a:solidFill>
+                  <a:srgbClr val="1F2C56"/>
+                </a:solidFill>
+                <a:latin typeface="Source Serif 4"/>
               </a:rPr>
-              <a:t>II</a:t>
-            </a:r>
-          </a:p>
-        </p:txBody>
-      </p:sp>
-      <p:sp>
-        <p:nvSpPr>
-          <p:cNvPr id="6" name="TextBox 5"/>
+              <a:t>Nettomargenbeitrag NMZ</a:t>
+            </a:r>
+          </a:p>
+        </p:txBody>
+      </p:sp>
+      <p:sp>
+        <p:nvSpPr>
+          <p:cNvPr id="6" name="Rectangle 5"/>
+          <p:cNvSpPr/>
+          <p:nvPr/>
+        </p:nvSpPr>
+        <p:spPr>
+          <a:xfrm>
+            <a:off x="685800" y="1143000"/>
+            <a:ext cx="10817352" cy="25400"/>
+          </a:xfrm>
+          <a:prstGeom prst="rect">
+            <a:avLst/>
+          </a:prstGeom>
+          <a:solidFill>
+            <a:srgbClr val="D9C089"/>
+          </a:solidFill>
+          <a:ln>
+            <a:noFill/>
+          </a:ln>
+        </p:spPr>
+        <p:style>
+          <a:lnRef idx="1">
+            <a:schemeClr val="accent1"/>
+          </a:lnRef>
+          <a:fillRef idx="3">
+            <a:schemeClr val="accent1"/>
+          </a:fillRef>
+          <a:effectRef idx="2">
+            <a:schemeClr val="accent1"/>
+          </a:effectRef>
+          <a:fontRef idx="minor">
+            <a:schemeClr val="lt1"/>
+          </a:fontRef>
+        </p:style>
+        <p:txBody>
+          <a:bodyPr rtlCol="0" anchor="ctr"/>
+          <a:lstStyle/>
+          <a:p>
+            <a:pPr algn="ctr"/>
+          </a:p>
+        </p:txBody>
+      </p:sp>
+      <p:pic>
+        <p:nvPicPr>
+          <p:cNvPr id="7" name="Picture 6" descr="image.png"/>
+          <p:cNvPicPr>
+            <a:picLocks noChangeAspect="1"/>
+          </p:cNvPicPr>
+          <p:nvPr/>
+        </p:nvPicPr>
+        <p:blipFill>
+          <a:blip r:embed="rId2"/>
+          <a:stretch>
+            <a:fillRect/>
+          </a:stretch>
+        </p:blipFill>
+        <p:spPr>
+          <a:xfrm>
+            <a:off x="2163921" y="1325880"/>
+            <a:ext cx="7861110" cy="4937760"/>
+          </a:xfrm>
+          <a:prstGeom prst="rect">
+            <a:avLst/>
+          </a:prstGeom>
+        </p:spPr>
+      </p:pic>
+      <p:sp>
+        <p:nvSpPr>
+          <p:cNvPr id="8" name="Rectangle 7"/>
+          <p:cNvSpPr/>
+          <p:nvPr/>
+        </p:nvSpPr>
+        <p:spPr>
+          <a:xfrm>
+            <a:off x="0" y="6510528"/>
+            <a:ext cx="12188952" cy="347472"/>
+          </a:xfrm>
+          <a:prstGeom prst="rect">
+            <a:avLst/>
+          </a:prstGeom>
+          <a:solidFill>
+            <a:srgbClr val="0A1937"/>
+          </a:solidFill>
+          <a:ln>
+            <a:noFill/>
+          </a:ln>
+        </p:spPr>
+        <p:style>
+          <a:lnRef idx="1">
+            <a:schemeClr val="accent1"/>
+          </a:lnRef>
+          <a:fillRef idx="3">
+            <a:schemeClr val="accent1"/>
+          </a:fillRef>
+          <a:effectRef idx="2">
+            <a:schemeClr val="accent1"/>
+          </a:effectRef>
+          <a:fontRef idx="minor">
+            <a:schemeClr val="lt1"/>
+          </a:fontRef>
+        </p:style>
+        <p:txBody>
+          <a:bodyPr rtlCol="0" anchor="ctr"/>
+          <a:lstStyle/>
+          <a:p>
+            <a:pPr algn="ctr"/>
+          </a:p>
+        </p:txBody>
+      </p:sp>
+      <p:sp>
+        <p:nvSpPr>
+          <p:cNvPr id="9" name="TextBox 8"/>
           <p:cNvSpPr txBox="1"/>
           <p:nvPr/>
         </p:nvSpPr>
         <p:spPr>
           <a:xfrm>
-            <a:off x="6731000" y="4064000"/>
-            <a:ext cx="4851400" cy="1778000"/>
+            <a:off x="685800" y="6583680"/>
+            <a:ext cx="6490411" cy="256032"/>
           </a:xfrm>
           <a:prstGeom prst="rect">
             <a:avLst/>
@@ -5363,55 +6545,55 @@
           <a:noFill/>
         </p:spPr>
         <p:txBody>
-          <a:bodyPr wrap="square">
-            <a:normAutofit/>
+          <a:bodyPr wrap="none">
+            <a:spAutoFit/>
           </a:bodyPr>
           <a:lstStyle/>
           <a:p>
+            <a:pPr algn="l"/>
+            <a:r>
+              <a:rPr sz="700">
+                <a:solidFill>
+                  <a:srgbClr val="A0B4D2"/>
+                </a:solidFill>
+                <a:latin typeface="JetBrains Mono"/>
+              </a:rPr>
+              <a:t>Benedikt Zoller Coaching  ·  FKB Campus  ·  M16</a:t>
+            </a:r>
+          </a:p>
+        </p:txBody>
+      </p:sp>
+      <p:sp>
+        <p:nvSpPr>
+          <p:cNvPr id="10" name="TextBox 9"/>
+          <p:cNvSpPr txBox="1"/>
+          <p:nvPr/>
+        </p:nvSpPr>
+        <p:spPr>
+          <a:xfrm>
+            <a:off x="7176211" y="6583680"/>
+            <a:ext cx="4326940" cy="256032"/>
+          </a:xfrm>
+          <a:prstGeom prst="rect">
+            <a:avLst/>
+          </a:prstGeom>
+          <a:noFill/>
+        </p:spPr>
+        <p:txBody>
+          <a:bodyPr wrap="none">
+            <a:spAutoFit/>
+          </a:bodyPr>
+          <a:lstStyle/>
+          <a:p>
             <a:pPr algn="r"/>
             <a:r>
-              <a:rPr sz="3800" b="0" i="0">
-                <a:solidFill>
-                  <a:srgbClr val="F8F8FA"/>
-                </a:solidFill>
-                <a:latin typeface="Georgia"/>
+              <a:rPr sz="700">
+                <a:solidFill>
+                  <a:srgbClr val="A0B4D2"/>
+                </a:solidFill>
+                <a:latin typeface="JetBrains Mono"/>
               </a:rPr>
-              <a:t>NMZ im agree lesen und interpretieren</a:t>
-            </a:r>
-          </a:p>
-        </p:txBody>
-      </p:sp>
-      <p:sp>
-        <p:nvSpPr>
-          <p:cNvPr id="7" name="TextBox 6"/>
-          <p:cNvSpPr txBox="1"/>
-          <p:nvPr/>
-        </p:nvSpPr>
-        <p:spPr>
-          <a:xfrm>
-            <a:off x="6731000" y="5842000"/>
-            <a:ext cx="4851400" cy="635000"/>
-          </a:xfrm>
-          <a:prstGeom prst="rect">
-            <a:avLst/>
-          </a:prstGeom>
-          <a:noFill/>
-        </p:spPr>
-        <p:txBody>
-          <a:bodyPr wrap="square">
-            <a:normAutofit/>
-          </a:bodyPr>
-          <a:lstStyle/>
-          <a:p>
-            <a:pPr algn="r"/>
-            <a:r>
-              <a:rPr sz="1400" b="0" i="1">
-                <a:solidFill>
-                  <a:srgbClr val="7B7FA0"/>
-                </a:solidFill>
-                <a:latin typeface="Georgia"/>
-              </a:rPr>
-              <a:t>Aus dem Bericht zur Handlung</a:t>
+              <a:t>Schaubild</a:t>
             </a:r>
           </a:p>
         </p:txBody>
@@ -5427,14 +6609,6 @@
 <file path=ppt/slides/slide6.xml><?xml version="1.0" encoding="utf-8"?>
 <p:sld xmlns:a="http://schemas.openxmlformats.org/drawingml/2006/main" xmlns:p="http://schemas.openxmlformats.org/presentationml/2006/main" xmlns:r="http://schemas.openxmlformats.org/officeDocument/2006/relationships">
   <p:cSld>
-    <p:bg>
-      <p:bgPr>
-        <a:solidFill>
-          <a:srgbClr val="F8F8FA"/>
-        </a:solidFill>
-        <a:effectLst/>
-      </p:bgPr>
-    </p:bg>
     <p:spTree>
       <p:nvGrpSpPr>
         <p:cNvPr id="1" name=""/>
@@ -5444,125 +6618,20 @@
       <p:grpSpPr/>
       <p:sp>
         <p:nvSpPr>
-          <p:cNvPr id="2" name="TextBox 1"/>
-          <p:cNvSpPr txBox="1"/>
-          <p:nvPr/>
-        </p:nvSpPr>
-        <p:spPr>
-          <a:xfrm>
-            <a:off x="609600" y="279400"/>
-            <a:ext cx="2540000" cy="279400"/>
-          </a:xfrm>
-          <a:prstGeom prst="rect">
-            <a:avLst/>
-          </a:prstGeom>
-          <a:noFill/>
-        </p:spPr>
-        <p:txBody>
-          <a:bodyPr wrap="square">
-            <a:normAutofit/>
-          </a:bodyPr>
-          <a:lstStyle/>
-          <a:p>
-            <a:pPr algn="l"/>
-            <a:r>
-              <a:rPr sz="1000" b="1" i="0">
-                <a:solidFill>
-                  <a:srgbClr val="191D2E"/>
-                </a:solidFill>
-                <a:latin typeface="Arial"/>
-              </a:rPr>
-              <a:t>FKB  Campus</a:t>
-            </a:r>
-          </a:p>
-        </p:txBody>
-      </p:sp>
-      <p:sp>
-        <p:nvSpPr>
-          <p:cNvPr id="3" name="TextBox 2"/>
-          <p:cNvSpPr txBox="1"/>
-          <p:nvPr/>
-        </p:nvSpPr>
-        <p:spPr>
-          <a:xfrm>
-            <a:off x="609600" y="279400"/>
-            <a:ext cx="10972800" cy="279400"/>
-          </a:xfrm>
-          <a:prstGeom prst="rect">
-            <a:avLst/>
-          </a:prstGeom>
-          <a:noFill/>
-        </p:spPr>
-        <p:txBody>
-          <a:bodyPr wrap="square">
-            <a:normAutofit/>
-          </a:bodyPr>
-          <a:lstStyle/>
-          <a:p>
-            <a:pPr algn="r"/>
-            <a:r>
-              <a:rPr sz="900" b="0" i="0">
-                <a:solidFill>
-                  <a:srgbClr val="7B7FA0"/>
-                </a:solidFill>
-                <a:latin typeface="Courier New"/>
-              </a:rPr>
-              <a:t>II · NMZ IM AGREE LESEN UND INTERPRETIEREN</a:t>
-            </a:r>
-          </a:p>
-        </p:txBody>
-      </p:sp>
-      <p:sp>
-        <p:nvSpPr>
-          <p:cNvPr id="4" name="TextBox 3"/>
-          <p:cNvSpPr txBox="1"/>
-          <p:nvPr/>
-        </p:nvSpPr>
-        <p:spPr>
-          <a:xfrm>
-            <a:off x="609600" y="6426200"/>
-            <a:ext cx="10972800" cy="228600"/>
-          </a:xfrm>
-          <a:prstGeom prst="rect">
-            <a:avLst/>
-          </a:prstGeom>
-          <a:noFill/>
-        </p:spPr>
-        <p:txBody>
-          <a:bodyPr wrap="square">
-            <a:normAutofit/>
-          </a:bodyPr>
-          <a:lstStyle/>
-          <a:p>
-            <a:pPr algn="r"/>
-            <a:r>
-              <a:rPr sz="900" b="0" i="0">
-                <a:solidFill>
-                  <a:srgbClr val="7B7FA0"/>
-                </a:solidFill>
-                <a:latin typeface="Courier New"/>
-              </a:rPr>
-              <a:t>06</a:t>
-            </a:r>
-          </a:p>
-        </p:txBody>
-      </p:sp>
-      <p:sp>
-        <p:nvSpPr>
-          <p:cNvPr id="5" name="Rectangle 4"/>
+          <p:cNvPr id="2" name="Rectangle 1"/>
           <p:cNvSpPr/>
           <p:nvPr/>
         </p:nvSpPr>
         <p:spPr>
           <a:xfrm>
-            <a:off x="609600" y="825500"/>
-            <a:ext cx="10972800" cy="6350"/>
+            <a:off x="0" y="0"/>
+            <a:ext cx="12188952" cy="6858000"/>
           </a:xfrm>
           <a:prstGeom prst="rect">
             <a:avLst/>
           </a:prstGeom>
           <a:solidFill>
-            <a:srgbClr val="191D2E"/>
+            <a:srgbClr val="EDEDF3"/>
           </a:solidFill>
           <a:ln>
             <a:noFill/>
@@ -5592,55 +6661,20 @@
       </p:sp>
       <p:sp>
         <p:nvSpPr>
-          <p:cNvPr id="6" name="TextBox 5"/>
-          <p:cNvSpPr txBox="1"/>
-          <p:nvPr/>
-        </p:nvSpPr>
-        <p:spPr>
-          <a:xfrm>
-            <a:off x="609600" y="920750"/>
-            <a:ext cx="10972800" cy="1778000"/>
-          </a:xfrm>
-          <a:prstGeom prst="rect">
-            <a:avLst/>
-          </a:prstGeom>
-          <a:noFill/>
-        </p:spPr>
-        <p:txBody>
-          <a:bodyPr wrap="square">
-            <a:normAutofit/>
-          </a:bodyPr>
-          <a:lstStyle/>
-          <a:p>
-            <a:pPr algn="l"/>
-            <a:r>
-              <a:rPr sz="3800" b="0" i="0">
-                <a:solidFill>
-                  <a:srgbClr val="191D2E"/>
-                </a:solidFill>
-                <a:latin typeface="Georgia"/>
-              </a:rPr>
-              <a:t>Drei Ebenen der NMZ-Steuerung</a:t>
-            </a:r>
-          </a:p>
-        </p:txBody>
-      </p:sp>
-      <p:sp>
-        <p:nvSpPr>
-          <p:cNvPr id="7" name="Rectangle 6"/>
+          <p:cNvPr id="3" name="Rectangle 2"/>
           <p:cNvSpPr/>
           <p:nvPr/>
         </p:nvSpPr>
         <p:spPr>
           <a:xfrm>
-            <a:off x="609600" y="2762250"/>
-            <a:ext cx="10972800" cy="6350"/>
+            <a:off x="0" y="0"/>
+            <a:ext cx="12188952" cy="50292"/>
           </a:xfrm>
           <a:prstGeom prst="rect">
             <a:avLst/>
           </a:prstGeom>
           <a:solidFill>
-            <a:srgbClr val="E0E0E8"/>
+            <a:srgbClr val="1F2C56"/>
           </a:solidFill>
           <a:ln>
             <a:noFill/>
@@ -5670,14 +6704,170 @@
       </p:sp>
       <p:sp>
         <p:nvSpPr>
+          <p:cNvPr id="4" name="TextBox 3"/>
+          <p:cNvSpPr txBox="1"/>
+          <p:nvPr/>
+        </p:nvSpPr>
+        <p:spPr>
+          <a:xfrm>
+            <a:off x="685800" y="109728"/>
+            <a:ext cx="10817352" cy="228600"/>
+          </a:xfrm>
+          <a:prstGeom prst="rect">
+            <a:avLst/>
+          </a:prstGeom>
+          <a:noFill/>
+        </p:spPr>
+        <p:txBody>
+          <a:bodyPr wrap="none">
+            <a:spAutoFit/>
+          </a:bodyPr>
+          <a:lstStyle/>
+          <a:p>
+            <a:pPr algn="l"/>
+            <a:r>
+              <a:rPr sz="750">
+                <a:solidFill>
+                  <a:srgbClr val="78808C"/>
+                </a:solidFill>
+                <a:latin typeface="JetBrains Mono"/>
+              </a:rPr>
+              <a:t>M16  ·  INHALT</a:t>
+            </a:r>
+          </a:p>
+        </p:txBody>
+      </p:sp>
+      <p:sp>
+        <p:nvSpPr>
+          <p:cNvPr id="5" name="Rectangle 4"/>
+          <p:cNvSpPr/>
+          <p:nvPr/>
+        </p:nvSpPr>
+        <p:spPr>
+          <a:xfrm>
+            <a:off x="0" y="1234440"/>
+            <a:ext cx="12188952" cy="12700"/>
+          </a:xfrm>
+          <a:prstGeom prst="rect">
+            <a:avLst/>
+          </a:prstGeom>
+          <a:solidFill>
+            <a:srgbClr val="D8DFE4"/>
+          </a:solidFill>
+          <a:ln>
+            <a:noFill/>
+          </a:ln>
+        </p:spPr>
+        <p:style>
+          <a:lnRef idx="1">
+            <a:schemeClr val="accent1"/>
+          </a:lnRef>
+          <a:fillRef idx="3">
+            <a:schemeClr val="accent1"/>
+          </a:fillRef>
+          <a:effectRef idx="2">
+            <a:schemeClr val="accent1"/>
+          </a:effectRef>
+          <a:fontRef idx="minor">
+            <a:schemeClr val="lt1"/>
+          </a:fontRef>
+        </p:style>
+        <p:txBody>
+          <a:bodyPr rtlCol="0" anchor="ctr"/>
+          <a:lstStyle/>
+          <a:p>
+            <a:pPr algn="ctr"/>
+          </a:p>
+        </p:txBody>
+      </p:sp>
+      <p:sp>
+        <p:nvSpPr>
+          <p:cNvPr id="6" name="Rectangle 5"/>
+          <p:cNvSpPr/>
+          <p:nvPr/>
+        </p:nvSpPr>
+        <p:spPr>
+          <a:xfrm>
+            <a:off x="685800" y="502920"/>
+            <a:ext cx="36576" cy="658368"/>
+          </a:xfrm>
+          <a:prstGeom prst="rect">
+            <a:avLst/>
+          </a:prstGeom>
+          <a:solidFill>
+            <a:srgbClr val="D9C089"/>
+          </a:solidFill>
+          <a:ln>
+            <a:noFill/>
+          </a:ln>
+        </p:spPr>
+        <p:style>
+          <a:lnRef idx="1">
+            <a:schemeClr val="accent1"/>
+          </a:lnRef>
+          <a:fillRef idx="3">
+            <a:schemeClr val="accent1"/>
+          </a:fillRef>
+          <a:effectRef idx="2">
+            <a:schemeClr val="accent1"/>
+          </a:effectRef>
+          <a:fontRef idx="minor">
+            <a:schemeClr val="lt1"/>
+          </a:fontRef>
+        </p:style>
+        <p:txBody>
+          <a:bodyPr rtlCol="0" anchor="ctr"/>
+          <a:lstStyle/>
+          <a:p>
+            <a:pPr algn="ctr"/>
+          </a:p>
+        </p:txBody>
+      </p:sp>
+      <p:sp>
+        <p:nvSpPr>
+          <p:cNvPr id="7" name="TextBox 6"/>
+          <p:cNvSpPr txBox="1"/>
+          <p:nvPr/>
+        </p:nvSpPr>
+        <p:spPr>
+          <a:xfrm>
+            <a:off x="813816" y="502920"/>
+            <a:ext cx="10634472" cy="685800"/>
+          </a:xfrm>
+          <a:prstGeom prst="rect">
+            <a:avLst/>
+          </a:prstGeom>
+          <a:noFill/>
+        </p:spPr>
+        <p:txBody>
+          <a:bodyPr wrap="square">
+            <a:spAutoFit/>
+          </a:bodyPr>
+          <a:lstStyle/>
+          <a:p>
+            <a:pPr algn="l"/>
+            <a:r>
+              <a:rPr sz="2400" b="1" i="0">
+                <a:solidFill>
+                  <a:srgbClr val="1F2C56"/>
+                </a:solidFill>
+                <a:latin typeface="Source Serif 4"/>
+              </a:rPr>
+              <a:t>Wo finde ich meine NMZ-Daten?</a:t>
+            </a:r>
+          </a:p>
+        </p:txBody>
+      </p:sp>
+      <p:sp>
+        <p:nvSpPr>
           <p:cNvPr id="8" name="TextBox 7"/>
           <p:cNvSpPr txBox="1"/>
           <p:nvPr/>
         </p:nvSpPr>
         <p:spPr>
           <a:xfrm>
-            <a:off x="609600" y="2851150"/>
-            <a:ext cx="10972800" cy="3448050"/>
+            <a:off x="685800" y="1417320"/>
+            <a:ext cx="10817352" cy="5029200"/>
           </a:xfrm>
           <a:prstGeom prst="rect">
             <a:avLst/>
@@ -5686,64 +6876,104 @@
         </p:spPr>
         <p:txBody>
           <a:bodyPr wrap="square">
-            <a:normAutofit/>
+            <a:spAutoFit/>
           </a:bodyPr>
           <a:lstStyle/>
           <a:p>
             <a:pPr>
               <a:spcBef>
-                <a:spcPts val="600"/>
+                <a:spcPts val="400"/>
               </a:spcBef>
               <a:spcAft>
-                <a:spcPts val="600"/>
+                <a:spcPts val="200"/>
               </a:spcAft>
             </a:pPr>
             <a:r>
-              <a:rPr sz="1400">
-                <a:solidFill>
-                  <a:srgbClr val="191D2E"/>
-                </a:solidFill>
-                <a:latin typeface="Georgia"/>
+              <a:rPr sz="1200">
+                <a:solidFill>
+                  <a:srgbClr val="3D5466"/>
+                </a:solidFill>
+                <a:latin typeface="Arial"/>
               </a:rPr>
-              <a:t>–  Einzelkunde: Welcher Kunde ist ertragsstark, welcher defizitär?</a:t>
-            </a:r>
-          </a:p>
-          <a:p>
-            <a:pPr>
-              <a:spcBef>
-                <a:spcPts val="600"/>
-              </a:spcBef>
-              <a:spcAft>
-                <a:spcPts val="600"/>
-              </a:spcAft>
-            </a:pPr>
-            <a:r>
-              <a:rPr sz="1400">
-                <a:solidFill>
-                  <a:srgbClr val="191D2E"/>
-                </a:solidFill>
-                <a:latin typeface="Georgia"/>
+              <a:t>In agree (Atruvia) stehen NMZ-relevante Auswertungen über folgende Einstiegspunkte zur Verfügung:</a:t>
+            </a:r>
+          </a:p>
+        </p:txBody>
+      </p:sp>
+      <p:sp>
+        <p:nvSpPr>
+          <p:cNvPr id="9" name="Rectangle 8"/>
+          <p:cNvSpPr/>
+          <p:nvPr/>
+        </p:nvSpPr>
+        <p:spPr>
+          <a:xfrm>
+            <a:off x="0" y="6510528"/>
+            <a:ext cx="12188952" cy="347472"/>
+          </a:xfrm>
+          <a:prstGeom prst="rect">
+            <a:avLst/>
+          </a:prstGeom>
+          <a:solidFill>
+            <a:srgbClr val="0A1937"/>
+          </a:solidFill>
+          <a:ln>
+            <a:noFill/>
+          </a:ln>
+        </p:spPr>
+        <p:style>
+          <a:lnRef idx="1">
+            <a:schemeClr val="accent1"/>
+          </a:lnRef>
+          <a:fillRef idx="3">
+            <a:schemeClr val="accent1"/>
+          </a:fillRef>
+          <a:effectRef idx="2">
+            <a:schemeClr val="accent1"/>
+          </a:effectRef>
+          <a:fontRef idx="minor">
+            <a:schemeClr val="lt1"/>
+          </a:fontRef>
+        </p:style>
+        <p:txBody>
+          <a:bodyPr rtlCol="0" anchor="ctr"/>
+          <a:lstStyle/>
+          <a:p>
+            <a:pPr algn="ctr"/>
+          </a:p>
+        </p:txBody>
+      </p:sp>
+      <p:sp>
+        <p:nvSpPr>
+          <p:cNvPr id="10" name="TextBox 9"/>
+          <p:cNvSpPr txBox="1"/>
+          <p:nvPr/>
+        </p:nvSpPr>
+        <p:spPr>
+          <a:xfrm>
+            <a:off x="685800" y="6583680"/>
+            <a:ext cx="6490411" cy="256032"/>
+          </a:xfrm>
+          <a:prstGeom prst="rect">
+            <a:avLst/>
+          </a:prstGeom>
+          <a:noFill/>
+        </p:spPr>
+        <p:txBody>
+          <a:bodyPr wrap="none">
+            <a:spAutoFit/>
+          </a:bodyPr>
+          <a:lstStyle/>
+          <a:p>
+            <a:pPr algn="l"/>
+            <a:r>
+              <a:rPr sz="700">
+                <a:solidFill>
+                  <a:srgbClr val="A0B4D2"/>
+                </a:solidFill>
+                <a:latin typeface="JetBrains Mono"/>
               </a:rPr>
-              <a:t>–  Segment: Welche Branche/Größenklasse trägt meinen Bestand?</a:t>
-            </a:r>
-          </a:p>
-          <a:p>
-            <a:pPr>
-              <a:spcBef>
-                <a:spcPts val="600"/>
-              </a:spcBef>
-              <a:spcAft>
-                <a:spcPts val="600"/>
-              </a:spcAft>
-            </a:pPr>
-            <a:r>
-              <a:rPr sz="1400">
-                <a:solidFill>
-                  <a:srgbClr val="191D2E"/>
-                </a:solidFill>
-                <a:latin typeface="Georgia"/>
-              </a:rPr>
-              <a:t>–  Gesamtbestand: Wo liegt meine NMZ im Benchmark-Vergleich?</a:t>
+              <a:t>Benedikt Zoller Coaching  ·  FKB Campus  ·  M16</a:t>
             </a:r>
           </a:p>
         </p:txBody>
@@ -5759,14 +6989,6 @@
 <file path=ppt/slides/slide7.xml><?xml version="1.0" encoding="utf-8"?>
 <p:sld xmlns:a="http://schemas.openxmlformats.org/drawingml/2006/main" xmlns:p="http://schemas.openxmlformats.org/presentationml/2006/main" xmlns:r="http://schemas.openxmlformats.org/officeDocument/2006/relationships">
   <p:cSld>
-    <p:bg>
-      <p:bgPr>
-        <a:solidFill>
-          <a:srgbClr val="F8F8FA"/>
-        </a:solidFill>
-        <a:effectLst/>
-      </p:bgPr>
-    </p:bg>
     <p:spTree>
       <p:nvGrpSpPr>
         <p:cNvPr id="1" name=""/>
@@ -5776,125 +6998,20 @@
       <p:grpSpPr/>
       <p:sp>
         <p:nvSpPr>
-          <p:cNvPr id="2" name="TextBox 1"/>
-          <p:cNvSpPr txBox="1"/>
-          <p:nvPr/>
-        </p:nvSpPr>
-        <p:spPr>
-          <a:xfrm>
-            <a:off x="609600" y="279400"/>
-            <a:ext cx="2540000" cy="279400"/>
-          </a:xfrm>
-          <a:prstGeom prst="rect">
-            <a:avLst/>
-          </a:prstGeom>
-          <a:noFill/>
-        </p:spPr>
-        <p:txBody>
-          <a:bodyPr wrap="square">
-            <a:normAutofit/>
-          </a:bodyPr>
-          <a:lstStyle/>
-          <a:p>
-            <a:pPr algn="l"/>
-            <a:r>
-              <a:rPr sz="1000" b="1" i="0">
-                <a:solidFill>
-                  <a:srgbClr val="191D2E"/>
-                </a:solidFill>
-                <a:latin typeface="Arial"/>
-              </a:rPr>
-              <a:t>FKB  Campus</a:t>
-            </a:r>
-          </a:p>
-        </p:txBody>
-      </p:sp>
-      <p:sp>
-        <p:nvSpPr>
-          <p:cNvPr id="3" name="TextBox 2"/>
-          <p:cNvSpPr txBox="1"/>
-          <p:nvPr/>
-        </p:nvSpPr>
-        <p:spPr>
-          <a:xfrm>
-            <a:off x="609600" y="279400"/>
-            <a:ext cx="10972800" cy="279400"/>
-          </a:xfrm>
-          <a:prstGeom prst="rect">
-            <a:avLst/>
-          </a:prstGeom>
-          <a:noFill/>
-        </p:spPr>
-        <p:txBody>
-          <a:bodyPr wrap="square">
-            <a:normAutofit/>
-          </a:bodyPr>
-          <a:lstStyle/>
-          <a:p>
-            <a:pPr algn="r"/>
-            <a:r>
-              <a:rPr sz="900" b="0" i="0">
-                <a:solidFill>
-                  <a:srgbClr val="7B7FA0"/>
-                </a:solidFill>
-                <a:latin typeface="Courier New"/>
-              </a:rPr>
-              <a:t>II · NMZ IM AGREE LESEN UND INTERPRETIEREN</a:t>
-            </a:r>
-          </a:p>
-        </p:txBody>
-      </p:sp>
-      <p:sp>
-        <p:nvSpPr>
-          <p:cNvPr id="4" name="TextBox 3"/>
-          <p:cNvSpPr txBox="1"/>
-          <p:nvPr/>
-        </p:nvSpPr>
-        <p:spPr>
-          <a:xfrm>
-            <a:off x="609600" y="6426200"/>
-            <a:ext cx="10972800" cy="228600"/>
-          </a:xfrm>
-          <a:prstGeom prst="rect">
-            <a:avLst/>
-          </a:prstGeom>
-          <a:noFill/>
-        </p:spPr>
-        <p:txBody>
-          <a:bodyPr wrap="square">
-            <a:normAutofit/>
-          </a:bodyPr>
-          <a:lstStyle/>
-          <a:p>
-            <a:pPr algn="r"/>
-            <a:r>
-              <a:rPr sz="900" b="0" i="0">
-                <a:solidFill>
-                  <a:srgbClr val="7B7FA0"/>
-                </a:solidFill>
-                <a:latin typeface="Courier New"/>
-              </a:rPr>
-              <a:t>07</a:t>
-            </a:r>
-          </a:p>
-        </p:txBody>
-      </p:sp>
-      <p:sp>
-        <p:nvSpPr>
-          <p:cNvPr id="5" name="Rectangle 4"/>
+          <p:cNvPr id="2" name="Rectangle 1"/>
           <p:cNvSpPr/>
           <p:nvPr/>
         </p:nvSpPr>
         <p:spPr>
           <a:xfrm>
-            <a:off x="609600" y="825500"/>
-            <a:ext cx="10972800" cy="6350"/>
+            <a:off x="0" y="0"/>
+            <a:ext cx="12188952" cy="6858000"/>
           </a:xfrm>
           <a:prstGeom prst="rect">
             <a:avLst/>
           </a:prstGeom>
           <a:solidFill>
-            <a:srgbClr val="191D2E"/>
+            <a:srgbClr val="EDEDF3"/>
           </a:solidFill>
           <a:ln>
             <a:noFill/>
@@ -5924,55 +7041,20 @@
       </p:sp>
       <p:sp>
         <p:nvSpPr>
-          <p:cNvPr id="6" name="TextBox 5"/>
-          <p:cNvSpPr txBox="1"/>
-          <p:nvPr/>
-        </p:nvSpPr>
-        <p:spPr>
-          <a:xfrm>
-            <a:off x="609600" y="920750"/>
-            <a:ext cx="10972800" cy="1778000"/>
-          </a:xfrm>
-          <a:prstGeom prst="rect">
-            <a:avLst/>
-          </a:prstGeom>
-          <a:noFill/>
-        </p:spPr>
-        <p:txBody>
-          <a:bodyPr wrap="square">
-            <a:normAutofit/>
-          </a:bodyPr>
-          <a:lstStyle/>
-          <a:p>
-            <a:pPr algn="l"/>
-            <a:r>
-              <a:rPr sz="3800" b="0" i="0">
-                <a:solidFill>
-                  <a:srgbClr val="191D2E"/>
-                </a:solidFill>
-                <a:latin typeface="Georgia"/>
-              </a:rPr>
-              <a:t>NMZ-Verbesserung: Vier Hebel</a:t>
-            </a:r>
-          </a:p>
-        </p:txBody>
-      </p:sp>
-      <p:sp>
-        <p:nvSpPr>
-          <p:cNvPr id="7" name="Rectangle 6"/>
+          <p:cNvPr id="3" name="Rectangle 2"/>
           <p:cNvSpPr/>
           <p:nvPr/>
         </p:nvSpPr>
         <p:spPr>
           <a:xfrm>
-            <a:off x="609600" y="2762250"/>
-            <a:ext cx="10972800" cy="6350"/>
+            <a:off x="0" y="0"/>
+            <a:ext cx="12188952" cy="50292"/>
           </a:xfrm>
           <a:prstGeom prst="rect">
             <a:avLst/>
           </a:prstGeom>
           <a:solidFill>
-            <a:srgbClr val="E0E0E8"/>
+            <a:srgbClr val="1F2C56"/>
           </a:solidFill>
           <a:ln>
             <a:noFill/>
@@ -6002,14 +7084,170 @@
       </p:sp>
       <p:sp>
         <p:nvSpPr>
+          <p:cNvPr id="4" name="TextBox 3"/>
+          <p:cNvSpPr txBox="1"/>
+          <p:nvPr/>
+        </p:nvSpPr>
+        <p:spPr>
+          <a:xfrm>
+            <a:off x="685800" y="109728"/>
+            <a:ext cx="10817352" cy="228600"/>
+          </a:xfrm>
+          <a:prstGeom prst="rect">
+            <a:avLst/>
+          </a:prstGeom>
+          <a:noFill/>
+        </p:spPr>
+        <p:txBody>
+          <a:bodyPr wrap="none">
+            <a:spAutoFit/>
+          </a:bodyPr>
+          <a:lstStyle/>
+          <a:p>
+            <a:pPr algn="l"/>
+            <a:r>
+              <a:rPr sz="750">
+                <a:solidFill>
+                  <a:srgbClr val="78808C"/>
+                </a:solidFill>
+                <a:latin typeface="JetBrains Mono"/>
+              </a:rPr>
+              <a:t>M16  ·  INHALT</a:t>
+            </a:r>
+          </a:p>
+        </p:txBody>
+      </p:sp>
+      <p:sp>
+        <p:nvSpPr>
+          <p:cNvPr id="5" name="Rectangle 4"/>
+          <p:cNvSpPr/>
+          <p:nvPr/>
+        </p:nvSpPr>
+        <p:spPr>
+          <a:xfrm>
+            <a:off x="0" y="1234440"/>
+            <a:ext cx="12188952" cy="12700"/>
+          </a:xfrm>
+          <a:prstGeom prst="rect">
+            <a:avLst/>
+          </a:prstGeom>
+          <a:solidFill>
+            <a:srgbClr val="D8DFE4"/>
+          </a:solidFill>
+          <a:ln>
+            <a:noFill/>
+          </a:ln>
+        </p:spPr>
+        <p:style>
+          <a:lnRef idx="1">
+            <a:schemeClr val="accent1"/>
+          </a:lnRef>
+          <a:fillRef idx="3">
+            <a:schemeClr val="accent1"/>
+          </a:fillRef>
+          <a:effectRef idx="2">
+            <a:schemeClr val="accent1"/>
+          </a:effectRef>
+          <a:fontRef idx="minor">
+            <a:schemeClr val="lt1"/>
+          </a:fontRef>
+        </p:style>
+        <p:txBody>
+          <a:bodyPr rtlCol="0" anchor="ctr"/>
+          <a:lstStyle/>
+          <a:p>
+            <a:pPr algn="ctr"/>
+          </a:p>
+        </p:txBody>
+      </p:sp>
+      <p:sp>
+        <p:nvSpPr>
+          <p:cNvPr id="6" name="Rectangle 5"/>
+          <p:cNvSpPr/>
+          <p:nvPr/>
+        </p:nvSpPr>
+        <p:spPr>
+          <a:xfrm>
+            <a:off x="685800" y="502920"/>
+            <a:ext cx="36576" cy="658368"/>
+          </a:xfrm>
+          <a:prstGeom prst="rect">
+            <a:avLst/>
+          </a:prstGeom>
+          <a:solidFill>
+            <a:srgbClr val="D9C089"/>
+          </a:solidFill>
+          <a:ln>
+            <a:noFill/>
+          </a:ln>
+        </p:spPr>
+        <p:style>
+          <a:lnRef idx="1">
+            <a:schemeClr val="accent1"/>
+          </a:lnRef>
+          <a:fillRef idx="3">
+            <a:schemeClr val="accent1"/>
+          </a:fillRef>
+          <a:effectRef idx="2">
+            <a:schemeClr val="accent1"/>
+          </a:effectRef>
+          <a:fontRef idx="minor">
+            <a:schemeClr val="lt1"/>
+          </a:fontRef>
+        </p:style>
+        <p:txBody>
+          <a:bodyPr rtlCol="0" anchor="ctr"/>
+          <a:lstStyle/>
+          <a:p>
+            <a:pPr algn="ctr"/>
+          </a:p>
+        </p:txBody>
+      </p:sp>
+      <p:sp>
+        <p:nvSpPr>
+          <p:cNvPr id="7" name="TextBox 6"/>
+          <p:cNvSpPr txBox="1"/>
+          <p:nvPr/>
+        </p:nvSpPr>
+        <p:spPr>
+          <a:xfrm>
+            <a:off x="813816" y="502920"/>
+            <a:ext cx="10634472" cy="685800"/>
+          </a:xfrm>
+          <a:prstGeom prst="rect">
+            <a:avLst/>
+          </a:prstGeom>
+          <a:noFill/>
+        </p:spPr>
+        <p:txBody>
+          <a:bodyPr wrap="square">
+            <a:spAutoFit/>
+          </a:bodyPr>
+          <a:lstStyle/>
+          <a:p>
+            <a:pPr algn="l"/>
+            <a:r>
+              <a:rPr sz="2400" b="1" i="0">
+                <a:solidFill>
+                  <a:srgbClr val="1F2C56"/>
+                </a:solidFill>
+                <a:latin typeface="Source Serif 4"/>
+              </a:rPr>
+              <a:t>Leseübung: NMZ-Ranking interpretieren</a:t>
+            </a:r>
+          </a:p>
+        </p:txBody>
+      </p:sp>
+      <p:sp>
+        <p:nvSpPr>
           <p:cNvPr id="8" name="TextBox 7"/>
           <p:cNvSpPr txBox="1"/>
           <p:nvPr/>
         </p:nvSpPr>
         <p:spPr>
           <a:xfrm>
-            <a:off x="609600" y="2851150"/>
-            <a:ext cx="10972800" cy="3448050"/>
+            <a:off x="685800" y="1417320"/>
+            <a:ext cx="10817352" cy="5029200"/>
           </a:xfrm>
           <a:prstGeom prst="rect">
             <a:avLst/>
@@ -6018,83 +7256,180 @@
         </p:spPr>
         <p:txBody>
           <a:bodyPr wrap="square">
-            <a:normAutofit/>
+            <a:spAutoFit/>
           </a:bodyPr>
           <a:lstStyle/>
           <a:p>
             <a:pPr>
               <a:spcBef>
-                <a:spcPts val="600"/>
+                <a:spcPts val="400"/>
               </a:spcBef>
               <a:spcAft>
-                <a:spcPts val="600"/>
+                <a:spcPts val="200"/>
               </a:spcAft>
             </a:pPr>
             <a:r>
-              <a:rPr sz="1400">
-                <a:solidFill>
-                  <a:srgbClr val="191D2E"/>
-                </a:solidFill>
-                <a:latin typeface="Georgia"/>
+              <a:rPr sz="1200">
+                <a:solidFill>
+                  <a:srgbClr val="3D5466"/>
+                </a:solidFill>
+                <a:latin typeface="Arial"/>
               </a:rPr>
-              <a:t>–  Konditionsanpassung: Risikogerechtes Pricing durchsetzen</a:t>
+              <a:t>Stellen Sie sich vor, Ihr Bestand zeigt folgendes NMZ-Ranking (Auszug):</a:t>
             </a:r>
           </a:p>
           <a:p>
             <a:pPr>
               <a:spcBef>
-                <a:spcPts val="600"/>
+                <a:spcPts val="400"/>
               </a:spcBef>
               <a:spcAft>
-                <a:spcPts val="600"/>
+                <a:spcPts val="200"/>
               </a:spcAft>
             </a:pPr>
             <a:r>
-              <a:rPr sz="1400">
-                <a:solidFill>
-                  <a:srgbClr val="191D2E"/>
-                </a:solidFill>
-                <a:latin typeface="Georgia"/>
+              <a:rPr sz="1200">
+                <a:solidFill>
+                  <a:srgbClr val="3D5466"/>
+                </a:solidFill>
+                <a:latin typeface="Arial"/>
               </a:rPr>
-              <a:t>–  Cross-Selling: Provisionserträge erhöhen ohne Kreditrisiko</a:t>
+              <a:t>Sofortmaßnahmen aus diesem Ranking:</a:t>
             </a:r>
           </a:p>
           <a:p>
             <a:pPr>
               <a:spcBef>
-                <a:spcPts val="600"/>
+                <a:spcPts val="400"/>
               </a:spcBef>
               <a:spcAft>
-                <a:spcPts val="600"/>
+                <a:spcPts val="200"/>
               </a:spcAft>
             </a:pPr>
             <a:r>
-              <a:rPr sz="1400">
-                <a:solidFill>
-                  <a:srgbClr val="191D2E"/>
-                </a:solidFill>
-                <a:latin typeface="Georgia"/>
+              <a:rPr sz="1300">
+                <a:solidFill>
+                  <a:srgbClr val="3D5466"/>
+                </a:solidFill>
+                <a:latin typeface="Arial"/>
               </a:rPr>
-              <a:t>–  Rating-Verbesserung: Bessere Daten vom Kunden → niedrigere Risikokosten</a:t>
+              <a:t>▸  Huber Bau GmbH (0,30 %): Rating prüfen, Besicherung optimieren, Verbund aktivieren</a:t>
             </a:r>
           </a:p>
           <a:p>
             <a:pPr>
               <a:spcBef>
-                <a:spcPts val="600"/>
+                <a:spcPts val="400"/>
               </a:spcBef>
               <a:spcAft>
-                <a:spcPts val="600"/>
+                <a:spcPts val="200"/>
               </a:spcAft>
             </a:pPr>
             <a:r>
-              <a:rPr sz="1400">
-                <a:solidFill>
-                  <a:srgbClr val="191D2E"/>
-                </a:solidFill>
-                <a:latin typeface="Georgia"/>
+              <a:rPr sz="1300">
+                <a:solidFill>
+                  <a:srgbClr val="3D5466"/>
+                </a:solidFill>
+                <a:latin typeface="Arial"/>
               </a:rPr>
-              <a:t>–  Bestandsoptimierung: Defizitäre Engagements aktiv steuern</a:t>
+              <a:t>▸  Fischer Transport (−0,30 %): Konditionengespräch unverzüglich, Exit-Prüfung falls keine Verbesserung möglich</a:t>
+            </a:r>
+          </a:p>
+          <a:p>
+            <a:pPr>
+              <a:spcBef>
+                <a:spcPts val="400"/>
+              </a:spcBef>
+              <a:spcAft>
+                <a:spcPts val="200"/>
+              </a:spcAft>
+            </a:pPr>
+            <a:r>
+              <a:rPr sz="1200">
+                <a:solidFill>
+                  <a:srgbClr val="3D5466"/>
+                </a:solidFill>
+                <a:latin typeface="Arial"/>
+              </a:rPr>
+              <a:t>## 4.4 Der NMZ-Optimierungsprozess: 3 Schritte</a:t>
+            </a:r>
+          </a:p>
+        </p:txBody>
+      </p:sp>
+      <p:sp>
+        <p:nvSpPr>
+          <p:cNvPr id="9" name="Rectangle 8"/>
+          <p:cNvSpPr/>
+          <p:nvPr/>
+        </p:nvSpPr>
+        <p:spPr>
+          <a:xfrm>
+            <a:off x="0" y="6510528"/>
+            <a:ext cx="12188952" cy="347472"/>
+          </a:xfrm>
+          <a:prstGeom prst="rect">
+            <a:avLst/>
+          </a:prstGeom>
+          <a:solidFill>
+            <a:srgbClr val="0A1937"/>
+          </a:solidFill>
+          <a:ln>
+            <a:noFill/>
+          </a:ln>
+        </p:spPr>
+        <p:style>
+          <a:lnRef idx="1">
+            <a:schemeClr val="accent1"/>
+          </a:lnRef>
+          <a:fillRef idx="3">
+            <a:schemeClr val="accent1"/>
+          </a:fillRef>
+          <a:effectRef idx="2">
+            <a:schemeClr val="accent1"/>
+          </a:effectRef>
+          <a:fontRef idx="minor">
+            <a:schemeClr val="lt1"/>
+          </a:fontRef>
+        </p:style>
+        <p:txBody>
+          <a:bodyPr rtlCol="0" anchor="ctr"/>
+          <a:lstStyle/>
+          <a:p>
+            <a:pPr algn="ctr"/>
+          </a:p>
+        </p:txBody>
+      </p:sp>
+      <p:sp>
+        <p:nvSpPr>
+          <p:cNvPr id="10" name="TextBox 9"/>
+          <p:cNvSpPr txBox="1"/>
+          <p:nvPr/>
+        </p:nvSpPr>
+        <p:spPr>
+          <a:xfrm>
+            <a:off x="685800" y="6583680"/>
+            <a:ext cx="6490411" cy="256032"/>
+          </a:xfrm>
+          <a:prstGeom prst="rect">
+            <a:avLst/>
+          </a:prstGeom>
+          <a:noFill/>
+        </p:spPr>
+        <p:txBody>
+          <a:bodyPr wrap="none">
+            <a:spAutoFit/>
+          </a:bodyPr>
+          <a:lstStyle/>
+          <a:p>
+            <a:pPr algn="l"/>
+            <a:r>
+              <a:rPr sz="700">
+                <a:solidFill>
+                  <a:srgbClr val="A0B4D2"/>
+                </a:solidFill>
+                <a:latin typeface="JetBrains Mono"/>
+              </a:rPr>
+              <a:t>Benedikt Zoller Coaching  ·  FKB Campus  ·  M16</a:t>
             </a:r>
           </a:p>
         </p:txBody>
@@ -6110,14 +7445,6 @@
 <file path=ppt/slides/slide8.xml><?xml version="1.0" encoding="utf-8"?>
 <p:sld xmlns:a="http://schemas.openxmlformats.org/drawingml/2006/main" xmlns:p="http://schemas.openxmlformats.org/presentationml/2006/main" xmlns:r="http://schemas.openxmlformats.org/officeDocument/2006/relationships">
   <p:cSld>
-    <p:bg>
-      <p:bgPr>
-        <a:solidFill>
-          <a:srgbClr val="1F2B56"/>
-        </a:solidFill>
-        <a:effectLst/>
-      </p:bgPr>
-    </p:bg>
     <p:spTree>
       <p:nvGrpSpPr>
         <p:cNvPr id="1" name=""/>
@@ -6127,14 +7454,100 @@
       <p:grpSpPr/>
       <p:sp>
         <p:nvSpPr>
-          <p:cNvPr id="2" name="TextBox 1"/>
+          <p:cNvPr id="2" name="Rectangle 1"/>
+          <p:cNvSpPr/>
+          <p:nvPr/>
+        </p:nvSpPr>
+        <p:spPr>
+          <a:xfrm>
+            <a:off x="0" y="0"/>
+            <a:ext cx="12188952" cy="6858000"/>
+          </a:xfrm>
+          <a:prstGeom prst="rect">
+            <a:avLst/>
+          </a:prstGeom>
+          <a:solidFill>
+            <a:srgbClr val="EDEDF3"/>
+          </a:solidFill>
+          <a:ln>
+            <a:noFill/>
+          </a:ln>
+        </p:spPr>
+        <p:style>
+          <a:lnRef idx="1">
+            <a:schemeClr val="accent1"/>
+          </a:lnRef>
+          <a:fillRef idx="3">
+            <a:schemeClr val="accent1"/>
+          </a:fillRef>
+          <a:effectRef idx="2">
+            <a:schemeClr val="accent1"/>
+          </a:effectRef>
+          <a:fontRef idx="minor">
+            <a:schemeClr val="lt1"/>
+          </a:fontRef>
+        </p:style>
+        <p:txBody>
+          <a:bodyPr rtlCol="0" anchor="ctr"/>
+          <a:lstStyle/>
+          <a:p>
+            <a:pPr algn="ctr"/>
+          </a:p>
+        </p:txBody>
+      </p:sp>
+      <p:sp>
+        <p:nvSpPr>
+          <p:cNvPr id="3" name="Rectangle 2"/>
+          <p:cNvSpPr/>
+          <p:nvPr/>
+        </p:nvSpPr>
+        <p:spPr>
+          <a:xfrm>
+            <a:off x="0" y="0"/>
+            <a:ext cx="12188952" cy="50292"/>
+          </a:xfrm>
+          <a:prstGeom prst="rect">
+            <a:avLst/>
+          </a:prstGeom>
+          <a:solidFill>
+            <a:srgbClr val="1F2C56"/>
+          </a:solidFill>
+          <a:ln>
+            <a:noFill/>
+          </a:ln>
+        </p:spPr>
+        <p:style>
+          <a:lnRef idx="1">
+            <a:schemeClr val="accent1"/>
+          </a:lnRef>
+          <a:fillRef idx="3">
+            <a:schemeClr val="accent1"/>
+          </a:fillRef>
+          <a:effectRef idx="2">
+            <a:schemeClr val="accent1"/>
+          </a:effectRef>
+          <a:fontRef idx="minor">
+            <a:schemeClr val="lt1"/>
+          </a:fontRef>
+        </p:style>
+        <p:txBody>
+          <a:bodyPr rtlCol="0" anchor="ctr"/>
+          <a:lstStyle/>
+          <a:p>
+            <a:pPr algn="ctr"/>
+          </a:p>
+        </p:txBody>
+      </p:sp>
+      <p:sp>
+        <p:nvSpPr>
+          <p:cNvPr id="4" name="TextBox 3"/>
           <p:cNvSpPr txBox="1"/>
           <p:nvPr/>
         </p:nvSpPr>
         <p:spPr>
           <a:xfrm>
-            <a:off x="609600" y="279400"/>
-            <a:ext cx="2540000" cy="279400"/>
+            <a:off x="685800" y="109728"/>
+            <a:ext cx="10817352" cy="228600"/>
           </a:xfrm>
           <a:prstGeom prst="rect">
             <a:avLst/>
@@ -6142,34 +7555,240 @@
           <a:noFill/>
         </p:spPr>
         <p:txBody>
+          <a:bodyPr wrap="none">
+            <a:spAutoFit/>
+          </a:bodyPr>
+          <a:lstStyle/>
+          <a:p>
+            <a:pPr algn="l"/>
+            <a:r>
+              <a:rPr sz="750">
+                <a:solidFill>
+                  <a:srgbClr val="78808C"/>
+                </a:solidFill>
+                <a:latin typeface="JetBrains Mono"/>
+              </a:rPr>
+              <a:t>M16  ·  INHALT</a:t>
+            </a:r>
+          </a:p>
+        </p:txBody>
+      </p:sp>
+      <p:sp>
+        <p:nvSpPr>
+          <p:cNvPr id="5" name="Rectangle 4"/>
+          <p:cNvSpPr/>
+          <p:nvPr/>
+        </p:nvSpPr>
+        <p:spPr>
+          <a:xfrm>
+            <a:off x="0" y="1234440"/>
+            <a:ext cx="12188952" cy="12700"/>
+          </a:xfrm>
+          <a:prstGeom prst="rect">
+            <a:avLst/>
+          </a:prstGeom>
+          <a:solidFill>
+            <a:srgbClr val="D8DFE4"/>
+          </a:solidFill>
+          <a:ln>
+            <a:noFill/>
+          </a:ln>
+        </p:spPr>
+        <p:style>
+          <a:lnRef idx="1">
+            <a:schemeClr val="accent1"/>
+          </a:lnRef>
+          <a:fillRef idx="3">
+            <a:schemeClr val="accent1"/>
+          </a:fillRef>
+          <a:effectRef idx="2">
+            <a:schemeClr val="accent1"/>
+          </a:effectRef>
+          <a:fontRef idx="minor">
+            <a:schemeClr val="lt1"/>
+          </a:fontRef>
+        </p:style>
+        <p:txBody>
+          <a:bodyPr rtlCol="0" anchor="ctr"/>
+          <a:lstStyle/>
+          <a:p>
+            <a:pPr algn="ctr"/>
+          </a:p>
+        </p:txBody>
+      </p:sp>
+      <p:sp>
+        <p:nvSpPr>
+          <p:cNvPr id="6" name="Rectangle 5"/>
+          <p:cNvSpPr/>
+          <p:nvPr/>
+        </p:nvSpPr>
+        <p:spPr>
+          <a:xfrm>
+            <a:off x="685800" y="502920"/>
+            <a:ext cx="36576" cy="658368"/>
+          </a:xfrm>
+          <a:prstGeom prst="rect">
+            <a:avLst/>
+          </a:prstGeom>
+          <a:solidFill>
+            <a:srgbClr val="D9C089"/>
+          </a:solidFill>
+          <a:ln>
+            <a:noFill/>
+          </a:ln>
+        </p:spPr>
+        <p:style>
+          <a:lnRef idx="1">
+            <a:schemeClr val="accent1"/>
+          </a:lnRef>
+          <a:fillRef idx="3">
+            <a:schemeClr val="accent1"/>
+          </a:fillRef>
+          <a:effectRef idx="2">
+            <a:schemeClr val="accent1"/>
+          </a:effectRef>
+          <a:fontRef idx="minor">
+            <a:schemeClr val="lt1"/>
+          </a:fontRef>
+        </p:style>
+        <p:txBody>
+          <a:bodyPr rtlCol="0" anchor="ctr"/>
+          <a:lstStyle/>
+          <a:p>
+            <a:pPr algn="ctr"/>
+          </a:p>
+        </p:txBody>
+      </p:sp>
+      <p:sp>
+        <p:nvSpPr>
+          <p:cNvPr id="7" name="TextBox 6"/>
+          <p:cNvSpPr txBox="1"/>
+          <p:nvPr/>
+        </p:nvSpPr>
+        <p:spPr>
+          <a:xfrm>
+            <a:off x="813816" y="502920"/>
+            <a:ext cx="10634472" cy="685800"/>
+          </a:xfrm>
+          <a:prstGeom prst="rect">
+            <a:avLst/>
+          </a:prstGeom>
+          <a:noFill/>
+        </p:spPr>
+        <p:txBody>
           <a:bodyPr wrap="square">
-            <a:normAutofit/>
+            <a:spAutoFit/>
           </a:bodyPr>
           <a:lstStyle/>
           <a:p>
             <a:pPr algn="l"/>
             <a:r>
-              <a:rPr sz="1000" b="1" i="0">
-                <a:solidFill>
-                  <a:srgbClr val="F8F8FA"/>
+              <a:rPr sz="2400" b="1" i="0">
+                <a:solidFill>
+                  <a:srgbClr val="1F2C56"/>
+                </a:solidFill>
+                <a:latin typeface="Source Serif 4"/>
+              </a:rPr>
+              <a:t>Schritt 1: Identifizieren (monatlich, 30 Minuten)</a:t>
+            </a:r>
+          </a:p>
+        </p:txBody>
+      </p:sp>
+      <p:sp>
+        <p:nvSpPr>
+          <p:cNvPr id="8" name="TextBox 7"/>
+          <p:cNvSpPr txBox="1"/>
+          <p:nvPr/>
+        </p:nvSpPr>
+        <p:spPr>
+          <a:xfrm>
+            <a:off x="685800" y="1417320"/>
+            <a:ext cx="10817352" cy="5029200"/>
+          </a:xfrm>
+          <a:prstGeom prst="rect">
+            <a:avLst/>
+          </a:prstGeom>
+          <a:noFill/>
+        </p:spPr>
+        <p:txBody>
+          <a:bodyPr wrap="square">
+            <a:spAutoFit/>
+          </a:bodyPr>
+          <a:lstStyle/>
+          <a:p>
+            <a:pPr>
+              <a:spcBef>
+                <a:spcPts val="400"/>
+              </a:spcBef>
+              <a:spcAft>
+                <a:spcPts val="200"/>
+              </a:spcAft>
+            </a:pPr>
+            <a:r>
+              <a:rPr sz="1200">
+                <a:solidFill>
+                  <a:srgbClr val="3D5466"/>
                 </a:solidFill>
                 <a:latin typeface="Arial"/>
               </a:rPr>
-              <a:t>FKB  Campus</a:t>
-            </a:r>
-          </a:p>
-        </p:txBody>
-      </p:sp>
-      <p:sp>
-        <p:nvSpPr>
-          <p:cNvPr id="3" name="TextBox 2"/>
+              <a:t>Einmal im Monat: agree-NMZ-Ranking aufrufen. Die fünf Kunden mit der niedrigsten NMZ markieren. Für jeden prüfen: Was ist die Hauptursache? (Marge? Kein Verbund? Rating? Betreuungskosten?)</a:t>
+            </a:r>
+          </a:p>
+        </p:txBody>
+      </p:sp>
+      <p:sp>
+        <p:nvSpPr>
+          <p:cNvPr id="9" name="Rectangle 8"/>
+          <p:cNvSpPr/>
+          <p:nvPr/>
+        </p:nvSpPr>
+        <p:spPr>
+          <a:xfrm>
+            <a:off x="0" y="6510528"/>
+            <a:ext cx="12188952" cy="347472"/>
+          </a:xfrm>
+          <a:prstGeom prst="rect">
+            <a:avLst/>
+          </a:prstGeom>
+          <a:solidFill>
+            <a:srgbClr val="0A1937"/>
+          </a:solidFill>
+          <a:ln>
+            <a:noFill/>
+          </a:ln>
+        </p:spPr>
+        <p:style>
+          <a:lnRef idx="1">
+            <a:schemeClr val="accent1"/>
+          </a:lnRef>
+          <a:fillRef idx="3">
+            <a:schemeClr val="accent1"/>
+          </a:fillRef>
+          <a:effectRef idx="2">
+            <a:schemeClr val="accent1"/>
+          </a:effectRef>
+          <a:fontRef idx="minor">
+            <a:schemeClr val="lt1"/>
+          </a:fontRef>
+        </p:style>
+        <p:txBody>
+          <a:bodyPr rtlCol="0" anchor="ctr"/>
+          <a:lstStyle/>
+          <a:p>
+            <a:pPr algn="ctr"/>
+          </a:p>
+        </p:txBody>
+      </p:sp>
+      <p:sp>
+        <p:nvSpPr>
+          <p:cNvPr id="10" name="TextBox 9"/>
           <p:cNvSpPr txBox="1"/>
           <p:nvPr/>
         </p:nvSpPr>
         <p:spPr>
           <a:xfrm>
-            <a:off x="609600" y="279400"/>
-            <a:ext cx="10972800" cy="279400"/>
+            <a:off x="685800" y="6583680"/>
+            <a:ext cx="6490411" cy="256032"/>
           </a:xfrm>
           <a:prstGeom prst="rect">
             <a:avLst/>
@@ -6177,160 +7796,20 @@
           <a:noFill/>
         </p:spPr>
         <p:txBody>
-          <a:bodyPr wrap="square">
-            <a:normAutofit/>
+          <a:bodyPr wrap="none">
+            <a:spAutoFit/>
           </a:bodyPr>
           <a:lstStyle/>
           <a:p>
-            <a:pPr algn="r"/>
-            <a:r>
-              <a:rPr sz="900" b="0" i="0">
-                <a:solidFill>
-                  <a:srgbClr val="7B7FA0"/>
-                </a:solidFill>
-                <a:latin typeface="Courier New"/>
+            <a:pPr algn="l"/>
+            <a:r>
+              <a:rPr sz="700">
+                <a:solidFill>
+                  <a:srgbClr val="A0B4D2"/>
+                </a:solidFill>
+                <a:latin typeface="JetBrains Mono"/>
               </a:rPr>
-              <a:t>DREI KUNDEN — DREI MASSNAHMEN</a:t>
-            </a:r>
-          </a:p>
-        </p:txBody>
-      </p:sp>
-      <p:sp>
-        <p:nvSpPr>
-          <p:cNvPr id="4" name="TextBox 3"/>
-          <p:cNvSpPr txBox="1"/>
-          <p:nvPr/>
-        </p:nvSpPr>
-        <p:spPr>
-          <a:xfrm>
-            <a:off x="609600" y="6426200"/>
-            <a:ext cx="10972800" cy="228600"/>
-          </a:xfrm>
-          <a:prstGeom prst="rect">
-            <a:avLst/>
-          </a:prstGeom>
-          <a:noFill/>
-        </p:spPr>
-        <p:txBody>
-          <a:bodyPr wrap="square">
-            <a:normAutofit/>
-          </a:bodyPr>
-          <a:lstStyle/>
-          <a:p>
-            <a:pPr algn="r"/>
-            <a:r>
-              <a:rPr sz="900" b="0" i="0">
-                <a:solidFill>
-                  <a:srgbClr val="7B7FA0"/>
-                </a:solidFill>
-                <a:latin typeface="Courier New"/>
-              </a:rPr>
-              <a:t>08</a:t>
-            </a:r>
-          </a:p>
-        </p:txBody>
-      </p:sp>
-      <p:sp>
-        <p:nvSpPr>
-          <p:cNvPr id="5" name="TextBox 4"/>
-          <p:cNvSpPr txBox="1"/>
-          <p:nvPr/>
-        </p:nvSpPr>
-        <p:spPr>
-          <a:xfrm>
-            <a:off x="609600" y="635000"/>
-            <a:ext cx="5461000" cy="5461000"/>
-          </a:xfrm>
-          <a:prstGeom prst="rect">
-            <a:avLst/>
-          </a:prstGeom>
-          <a:noFill/>
-        </p:spPr>
-        <p:txBody>
-          <a:bodyPr wrap="square">
-            <a:normAutofit/>
-          </a:bodyPr>
-          <a:lstStyle/>
-          <a:p>
-            <a:pPr algn="l"/>
-            <a:r>
-              <a:rPr sz="28000" b="0" i="1">
-                <a:solidFill>
-                  <a:srgbClr val="D9BF7A"/>
-                </a:solidFill>
-                <a:latin typeface="Georgia"/>
-              </a:rPr>
-              <a:t>III</a:t>
-            </a:r>
-          </a:p>
-        </p:txBody>
-      </p:sp>
-      <p:sp>
-        <p:nvSpPr>
-          <p:cNvPr id="6" name="TextBox 5"/>
-          <p:cNvSpPr txBox="1"/>
-          <p:nvPr/>
-        </p:nvSpPr>
-        <p:spPr>
-          <a:xfrm>
-            <a:off x="6731000" y="4064000"/>
-            <a:ext cx="4851400" cy="1778000"/>
-          </a:xfrm>
-          <a:prstGeom prst="rect">
-            <a:avLst/>
-          </a:prstGeom>
-          <a:noFill/>
-        </p:spPr>
-        <p:txBody>
-          <a:bodyPr wrap="square">
-            <a:normAutofit/>
-          </a:bodyPr>
-          <a:lstStyle/>
-          <a:p>
-            <a:pPr algn="r"/>
-            <a:r>
-              <a:rPr sz="3800" b="0" i="0">
-                <a:solidFill>
-                  <a:srgbClr val="F8F8FA"/>
-                </a:solidFill>
-                <a:latin typeface="Georgia"/>
-              </a:rPr>
-              <a:t>Drei Kunden — drei Maßnahmen</a:t>
-            </a:r>
-          </a:p>
-        </p:txBody>
-      </p:sp>
-      <p:sp>
-        <p:nvSpPr>
-          <p:cNvPr id="7" name="TextBox 6"/>
-          <p:cNvSpPr txBox="1"/>
-          <p:nvPr/>
-        </p:nvSpPr>
-        <p:spPr>
-          <a:xfrm>
-            <a:off x="6731000" y="5842000"/>
-            <a:ext cx="4851400" cy="635000"/>
-          </a:xfrm>
-          <a:prstGeom prst="rect">
-            <a:avLst/>
-          </a:prstGeom>
-          <a:noFill/>
-        </p:spPr>
-        <p:txBody>
-          <a:bodyPr wrap="square">
-            <a:normAutofit/>
-          </a:bodyPr>
-          <a:lstStyle/>
-          <a:p>
-            <a:pPr algn="r"/>
-            <a:r>
-              <a:rPr sz="1400" b="0" i="1">
-                <a:solidFill>
-                  <a:srgbClr val="7B7FA0"/>
-                </a:solidFill>
-                <a:latin typeface="Georgia"/>
-              </a:rPr>
-              <a:t>Vom Bericht zur Handlung</a:t>
+              <a:t>Benedikt Zoller Coaching  ·  FKB Campus  ·  M16</a:t>
             </a:r>
           </a:p>
         </p:txBody>
@@ -6346,14 +7825,6 @@
 <file path=ppt/slides/slide9.xml><?xml version="1.0" encoding="utf-8"?>
 <p:sld xmlns:a="http://schemas.openxmlformats.org/drawingml/2006/main" xmlns:p="http://schemas.openxmlformats.org/presentationml/2006/main" xmlns:r="http://schemas.openxmlformats.org/officeDocument/2006/relationships">
   <p:cSld>
-    <p:bg>
-      <p:bgPr>
-        <a:solidFill>
-          <a:srgbClr val="F8F8FA"/>
-        </a:solidFill>
-        <a:effectLst/>
-      </p:bgPr>
-    </p:bg>
     <p:spTree>
       <p:nvGrpSpPr>
         <p:cNvPr id="1" name=""/>
@@ -6363,125 +7834,20 @@
       <p:grpSpPr/>
       <p:sp>
         <p:nvSpPr>
-          <p:cNvPr id="2" name="TextBox 1"/>
-          <p:cNvSpPr txBox="1"/>
-          <p:nvPr/>
-        </p:nvSpPr>
-        <p:spPr>
-          <a:xfrm>
-            <a:off x="609600" y="279400"/>
-            <a:ext cx="2540000" cy="279400"/>
-          </a:xfrm>
-          <a:prstGeom prst="rect">
-            <a:avLst/>
-          </a:prstGeom>
-          <a:noFill/>
-        </p:spPr>
-        <p:txBody>
-          <a:bodyPr wrap="square">
-            <a:normAutofit/>
-          </a:bodyPr>
-          <a:lstStyle/>
-          <a:p>
-            <a:pPr algn="l"/>
-            <a:r>
-              <a:rPr sz="1000" b="1" i="0">
-                <a:solidFill>
-                  <a:srgbClr val="191D2E"/>
-                </a:solidFill>
-                <a:latin typeface="Arial"/>
-              </a:rPr>
-              <a:t>FKB  Campus</a:t>
-            </a:r>
-          </a:p>
-        </p:txBody>
-      </p:sp>
-      <p:sp>
-        <p:nvSpPr>
-          <p:cNvPr id="3" name="TextBox 2"/>
-          <p:cNvSpPr txBox="1"/>
-          <p:nvPr/>
-        </p:nvSpPr>
-        <p:spPr>
-          <a:xfrm>
-            <a:off x="609600" y="279400"/>
-            <a:ext cx="10972800" cy="279400"/>
-          </a:xfrm>
-          <a:prstGeom prst="rect">
-            <a:avLst/>
-          </a:prstGeom>
-          <a:noFill/>
-        </p:spPr>
-        <p:txBody>
-          <a:bodyPr wrap="square">
-            <a:normAutofit/>
-          </a:bodyPr>
-          <a:lstStyle/>
-          <a:p>
-            <a:pPr algn="r"/>
-            <a:r>
-              <a:rPr sz="900" b="0" i="0">
-                <a:solidFill>
-                  <a:srgbClr val="7B7FA0"/>
-                </a:solidFill>
-                <a:latin typeface="Courier New"/>
-              </a:rPr>
-              <a:t>III · DREI KUNDEN — DREI MASSNAHMEN</a:t>
-            </a:r>
-          </a:p>
-        </p:txBody>
-      </p:sp>
-      <p:sp>
-        <p:nvSpPr>
-          <p:cNvPr id="4" name="TextBox 3"/>
-          <p:cNvSpPr txBox="1"/>
-          <p:nvPr/>
-        </p:nvSpPr>
-        <p:spPr>
-          <a:xfrm>
-            <a:off x="609600" y="6426200"/>
-            <a:ext cx="10972800" cy="228600"/>
-          </a:xfrm>
-          <a:prstGeom prst="rect">
-            <a:avLst/>
-          </a:prstGeom>
-          <a:noFill/>
-        </p:spPr>
-        <p:txBody>
-          <a:bodyPr wrap="square">
-            <a:normAutofit/>
-          </a:bodyPr>
-          <a:lstStyle/>
-          <a:p>
-            <a:pPr algn="r"/>
-            <a:r>
-              <a:rPr sz="900" b="0" i="0">
-                <a:solidFill>
-                  <a:srgbClr val="7B7FA0"/>
-                </a:solidFill>
-                <a:latin typeface="Courier New"/>
-              </a:rPr>
-              <a:t>09</a:t>
-            </a:r>
-          </a:p>
-        </p:txBody>
-      </p:sp>
-      <p:sp>
-        <p:nvSpPr>
-          <p:cNvPr id="5" name="Rectangle 4"/>
+          <p:cNvPr id="2" name="Rectangle 1"/>
           <p:cNvSpPr/>
           <p:nvPr/>
         </p:nvSpPr>
         <p:spPr>
           <a:xfrm>
-            <a:off x="609600" y="825500"/>
-            <a:ext cx="10972800" cy="6350"/>
+            <a:off x="0" y="0"/>
+            <a:ext cx="12188952" cy="6858000"/>
           </a:xfrm>
           <a:prstGeom prst="rect">
             <a:avLst/>
           </a:prstGeom>
           <a:solidFill>
-            <a:srgbClr val="191D2E"/>
+            <a:srgbClr val="EDEDF3"/>
           </a:solidFill>
           <a:ln>
             <a:noFill/>
@@ -6511,55 +7877,20 @@
       </p:sp>
       <p:sp>
         <p:nvSpPr>
-          <p:cNvPr id="6" name="TextBox 5"/>
-          <p:cNvSpPr txBox="1"/>
-          <p:nvPr/>
-        </p:nvSpPr>
-        <p:spPr>
-          <a:xfrm>
-            <a:off x="609600" y="920750"/>
-            <a:ext cx="10972800" cy="1778000"/>
-          </a:xfrm>
-          <a:prstGeom prst="rect">
-            <a:avLst/>
-          </a:prstGeom>
-          <a:noFill/>
-        </p:spPr>
-        <p:txBody>
-          <a:bodyPr wrap="square">
-            <a:normAutofit/>
-          </a:bodyPr>
-          <a:lstStyle/>
-          <a:p>
-            <a:pPr algn="l"/>
-            <a:r>
-              <a:rPr sz="3800" b="0" i="0">
-                <a:solidFill>
-                  <a:srgbClr val="191D2E"/>
-                </a:solidFill>
-                <a:latin typeface="Georgia"/>
-              </a:rPr>
-              <a:t>So gehen Sie vor</a:t>
-            </a:r>
-          </a:p>
-        </p:txBody>
-      </p:sp>
-      <p:sp>
-        <p:nvSpPr>
-          <p:cNvPr id="7" name="Rectangle 6"/>
+          <p:cNvPr id="3" name="Rectangle 2"/>
           <p:cNvSpPr/>
           <p:nvPr/>
         </p:nvSpPr>
         <p:spPr>
           <a:xfrm>
-            <a:off x="609600" y="2762250"/>
-            <a:ext cx="10972800" cy="6350"/>
+            <a:off x="0" y="0"/>
+            <a:ext cx="12188952" cy="50292"/>
           </a:xfrm>
           <a:prstGeom prst="rect">
             <a:avLst/>
           </a:prstGeom>
           <a:solidFill>
-            <a:srgbClr val="E0E0E8"/>
+            <a:srgbClr val="1F2C56"/>
           </a:solidFill>
           <a:ln>
             <a:noFill/>
@@ -6589,14 +7920,170 @@
       </p:sp>
       <p:sp>
         <p:nvSpPr>
+          <p:cNvPr id="4" name="TextBox 3"/>
+          <p:cNvSpPr txBox="1"/>
+          <p:nvPr/>
+        </p:nvSpPr>
+        <p:spPr>
+          <a:xfrm>
+            <a:off x="685800" y="109728"/>
+            <a:ext cx="10817352" cy="228600"/>
+          </a:xfrm>
+          <a:prstGeom prst="rect">
+            <a:avLst/>
+          </a:prstGeom>
+          <a:noFill/>
+        </p:spPr>
+        <p:txBody>
+          <a:bodyPr wrap="none">
+            <a:spAutoFit/>
+          </a:bodyPr>
+          <a:lstStyle/>
+          <a:p>
+            <a:pPr algn="l"/>
+            <a:r>
+              <a:rPr sz="750">
+                <a:solidFill>
+                  <a:srgbClr val="78808C"/>
+                </a:solidFill>
+                <a:latin typeface="JetBrains Mono"/>
+              </a:rPr>
+              <a:t>M16  ·  INHALT</a:t>
+            </a:r>
+          </a:p>
+        </p:txBody>
+      </p:sp>
+      <p:sp>
+        <p:nvSpPr>
+          <p:cNvPr id="5" name="Rectangle 4"/>
+          <p:cNvSpPr/>
+          <p:nvPr/>
+        </p:nvSpPr>
+        <p:spPr>
+          <a:xfrm>
+            <a:off x="0" y="1234440"/>
+            <a:ext cx="12188952" cy="12700"/>
+          </a:xfrm>
+          <a:prstGeom prst="rect">
+            <a:avLst/>
+          </a:prstGeom>
+          <a:solidFill>
+            <a:srgbClr val="D8DFE4"/>
+          </a:solidFill>
+          <a:ln>
+            <a:noFill/>
+          </a:ln>
+        </p:spPr>
+        <p:style>
+          <a:lnRef idx="1">
+            <a:schemeClr val="accent1"/>
+          </a:lnRef>
+          <a:fillRef idx="3">
+            <a:schemeClr val="accent1"/>
+          </a:fillRef>
+          <a:effectRef idx="2">
+            <a:schemeClr val="accent1"/>
+          </a:effectRef>
+          <a:fontRef idx="minor">
+            <a:schemeClr val="lt1"/>
+          </a:fontRef>
+        </p:style>
+        <p:txBody>
+          <a:bodyPr rtlCol="0" anchor="ctr"/>
+          <a:lstStyle/>
+          <a:p>
+            <a:pPr algn="ctr"/>
+          </a:p>
+        </p:txBody>
+      </p:sp>
+      <p:sp>
+        <p:nvSpPr>
+          <p:cNvPr id="6" name="Rectangle 5"/>
+          <p:cNvSpPr/>
+          <p:nvPr/>
+        </p:nvSpPr>
+        <p:spPr>
+          <a:xfrm>
+            <a:off x="685800" y="502920"/>
+            <a:ext cx="36576" cy="658368"/>
+          </a:xfrm>
+          <a:prstGeom prst="rect">
+            <a:avLst/>
+          </a:prstGeom>
+          <a:solidFill>
+            <a:srgbClr val="D9C089"/>
+          </a:solidFill>
+          <a:ln>
+            <a:noFill/>
+          </a:ln>
+        </p:spPr>
+        <p:style>
+          <a:lnRef idx="1">
+            <a:schemeClr val="accent1"/>
+          </a:lnRef>
+          <a:fillRef idx="3">
+            <a:schemeClr val="accent1"/>
+          </a:fillRef>
+          <a:effectRef idx="2">
+            <a:schemeClr val="accent1"/>
+          </a:effectRef>
+          <a:fontRef idx="minor">
+            <a:schemeClr val="lt1"/>
+          </a:fontRef>
+        </p:style>
+        <p:txBody>
+          <a:bodyPr rtlCol="0" anchor="ctr"/>
+          <a:lstStyle/>
+          <a:p>
+            <a:pPr algn="ctr"/>
+          </a:p>
+        </p:txBody>
+      </p:sp>
+      <p:sp>
+        <p:nvSpPr>
+          <p:cNvPr id="7" name="TextBox 6"/>
+          <p:cNvSpPr txBox="1"/>
+          <p:nvPr/>
+        </p:nvSpPr>
+        <p:spPr>
+          <a:xfrm>
+            <a:off x="813816" y="502920"/>
+            <a:ext cx="10634472" cy="685800"/>
+          </a:xfrm>
+          <a:prstGeom prst="rect">
+            <a:avLst/>
+          </a:prstGeom>
+          <a:noFill/>
+        </p:spPr>
+        <p:txBody>
+          <a:bodyPr wrap="square">
+            <a:spAutoFit/>
+          </a:bodyPr>
+          <a:lstStyle/>
+          <a:p>
+            <a:pPr algn="l"/>
+            <a:r>
+              <a:rPr sz="2400" b="1" i="0">
+                <a:solidFill>
+                  <a:srgbClr val="1F2C56"/>
+                </a:solidFill>
+                <a:latin typeface="Source Serif 4"/>
+              </a:rPr>
+              <a:t>Schritt 2: Priorisieren</a:t>
+            </a:r>
+          </a:p>
+        </p:txBody>
+      </p:sp>
+      <p:sp>
+        <p:nvSpPr>
           <p:cNvPr id="8" name="TextBox 7"/>
           <p:cNvSpPr txBox="1"/>
           <p:nvPr/>
         </p:nvSpPr>
         <p:spPr>
           <a:xfrm>
-            <a:off x="609600" y="2851150"/>
-            <a:ext cx="10972800" cy="3448050"/>
+            <a:off x="685800" y="1417320"/>
+            <a:ext cx="10817352" cy="5029200"/>
           </a:xfrm>
           <a:prstGeom prst="rect">
             <a:avLst/>
@@ -6605,102 +8092,161 @@
         </p:spPr>
         <p:txBody>
           <a:bodyPr wrap="square">
-            <a:normAutofit/>
+            <a:spAutoFit/>
           </a:bodyPr>
           <a:lstStyle/>
           <a:p>
             <a:pPr>
               <a:spcBef>
-                <a:spcPts val="600"/>
+                <a:spcPts val="400"/>
               </a:spcBef>
               <a:spcAft>
-                <a:spcPts val="600"/>
+                <a:spcPts val="200"/>
               </a:spcAft>
             </a:pPr>
             <a:r>
-              <a:rPr sz="1400">
-                <a:solidFill>
-                  <a:srgbClr val="191D2E"/>
-                </a:solidFill>
-                <a:latin typeface="Georgia"/>
+              <a:rPr sz="1200">
+                <a:solidFill>
+                  <a:srgbClr val="3D5466"/>
+                </a:solidFill>
+                <a:latin typeface="Arial"/>
               </a:rPr>
-              <a:t>–  NMZ-Bericht aus agree ziehen: Kunden nach NMZ sortieren</a:t>
+              <a:t>Nicht alle fünf auf einmal angehen. Priorisierung nach zwei Kriterien:</a:t>
             </a:r>
           </a:p>
           <a:p>
             <a:pPr>
               <a:spcBef>
-                <a:spcPts val="600"/>
+                <a:spcPts val="400"/>
               </a:spcBef>
               <a:spcAft>
-                <a:spcPts val="600"/>
+                <a:spcPts val="200"/>
               </a:spcAft>
             </a:pPr>
             <a:r>
-              <a:rPr sz="1400">
-                <a:solidFill>
-                  <a:srgbClr val="191D2E"/>
-                </a:solidFill>
-                <a:latin typeface="Georgia"/>
+              <a:rPr sz="1300">
+                <a:solidFill>
+                  <a:srgbClr val="3D5466"/>
+                </a:solidFill>
+                <a:latin typeface="Arial"/>
               </a:rPr>
-              <a:t>–  Die drei Kunden mit größtem Verbesserungspotenzial identifizieren</a:t>
+              <a:t>▸  Potenzial der Verbesserung: Wie stark könnte sich die NMZ verbessern?</a:t>
             </a:r>
           </a:p>
           <a:p>
             <a:pPr>
               <a:spcBef>
-                <a:spcPts val="600"/>
+                <a:spcPts val="400"/>
               </a:spcBef>
               <a:spcAft>
-                <a:spcPts val="600"/>
+                <a:spcPts val="200"/>
               </a:spcAft>
             </a:pPr>
             <a:r>
-              <a:rPr sz="1400">
-                <a:solidFill>
-                  <a:srgbClr val="191D2E"/>
-                </a:solidFill>
-                <a:latin typeface="Georgia"/>
+              <a:rPr sz="1300">
+                <a:solidFill>
+                  <a:srgbClr val="3D5466"/>
+                </a:solidFill>
+                <a:latin typeface="Arial"/>
               </a:rPr>
-              <a:t>–  Je Kunde: Haupthebel bestimmen (Kondition, Cross-Selling, Rating)</a:t>
+              <a:t>▸  Hebelverfügbarkeit: Wie schnell und einfach lässt sich der Hebel aktivieren?</a:t>
             </a:r>
           </a:p>
           <a:p>
             <a:pPr>
               <a:spcBef>
-                <a:spcPts val="600"/>
+                <a:spcPts val="400"/>
               </a:spcBef>
               <a:spcAft>
-                <a:spcPts val="600"/>
+                <a:spcPts val="200"/>
               </a:spcAft>
             </a:pPr>
             <a:r>
-              <a:rPr sz="1400">
-                <a:solidFill>
-                  <a:srgbClr val="191D2E"/>
-                </a:solidFill>
-                <a:latin typeface="Georgia"/>
+              <a:rPr sz="1200">
+                <a:solidFill>
+                  <a:srgbClr val="3D5466"/>
+                </a:solidFill>
+                <a:latin typeface="Arial"/>
               </a:rPr>
-              <a:t>–  Maßnahme und Zeitplan im CRM dokumentieren</a:t>
-            </a:r>
-          </a:p>
-          <a:p>
-            <a:pPr>
-              <a:spcBef>
-                <a:spcPts val="600"/>
-              </a:spcBef>
-              <a:spcAft>
-                <a:spcPts val="600"/>
-              </a:spcAft>
-            </a:pPr>
-            <a:r>
-              <a:rPr sz="1400">
-                <a:solidFill>
-                  <a:srgbClr val="191D2E"/>
-                </a:solidFill>
-                <a:latin typeface="Georgia"/>
+              <a:t>Einfache Priorisierungsmatrix:</a:t>
+            </a:r>
+          </a:p>
+        </p:txBody>
+      </p:sp>
+      <p:sp>
+        <p:nvSpPr>
+          <p:cNvPr id="9" name="Rectangle 8"/>
+          <p:cNvSpPr/>
+          <p:nvPr/>
+        </p:nvSpPr>
+        <p:spPr>
+          <a:xfrm>
+            <a:off x="0" y="6510528"/>
+            <a:ext cx="12188952" cy="347472"/>
+          </a:xfrm>
+          <a:prstGeom prst="rect">
+            <a:avLst/>
+          </a:prstGeom>
+          <a:solidFill>
+            <a:srgbClr val="0A1937"/>
+          </a:solidFill>
+          <a:ln>
+            <a:noFill/>
+          </a:ln>
+        </p:spPr>
+        <p:style>
+          <a:lnRef idx="1">
+            <a:schemeClr val="accent1"/>
+          </a:lnRef>
+          <a:fillRef idx="3">
+            <a:schemeClr val="accent1"/>
+          </a:fillRef>
+          <a:effectRef idx="2">
+            <a:schemeClr val="accent1"/>
+          </a:effectRef>
+          <a:fontRef idx="minor">
+            <a:schemeClr val="lt1"/>
+          </a:fontRef>
+        </p:style>
+        <p:txBody>
+          <a:bodyPr rtlCol="0" anchor="ctr"/>
+          <a:lstStyle/>
+          <a:p>
+            <a:pPr algn="ctr"/>
+          </a:p>
+        </p:txBody>
+      </p:sp>
+      <p:sp>
+        <p:nvSpPr>
+          <p:cNvPr id="10" name="TextBox 9"/>
+          <p:cNvSpPr txBox="1"/>
+          <p:nvPr/>
+        </p:nvSpPr>
+        <p:spPr>
+          <a:xfrm>
+            <a:off x="685800" y="6583680"/>
+            <a:ext cx="6490411" cy="256032"/>
+          </a:xfrm>
+          <a:prstGeom prst="rect">
+            <a:avLst/>
+          </a:prstGeom>
+          <a:noFill/>
+        </p:spPr>
+        <p:txBody>
+          <a:bodyPr wrap="none">
+            <a:spAutoFit/>
+          </a:bodyPr>
+          <a:lstStyle/>
+          <a:p>
+            <a:pPr algn="l"/>
+            <a:r>
+              <a:rPr sz="700">
+                <a:solidFill>
+                  <a:srgbClr val="A0B4D2"/>
+                </a:solidFill>
+                <a:latin typeface="JetBrains Mono"/>
               </a:rPr>
-              <a:t>–  Im Teammeeting teilen: Was funktioniert? Was nicht?</a:t>
+              <a:t>Benedikt Zoller Coaching  ·  FKB Campus  ·  M16</a:t>
             </a:r>
           </a:p>
         </p:txBody>

--- a/public/downloads/praesentation/M16.pptx
+++ b/public/downloads/praesentation/M16.pptx
@@ -3257,7 +3257,42 @@
       </p:sp>
       <p:sp>
         <p:nvSpPr>
-          <p:cNvPr id="6" name="Rectangle 5"/>
+          <p:cNvPr id="6" name="TextBox 5"/>
+          <p:cNvSpPr txBox="1"/>
+          <p:nvPr/>
+        </p:nvSpPr>
+        <p:spPr>
+          <a:xfrm>
+            <a:off x="685800" y="3977639"/>
+            <a:ext cx="10817352" cy="731520"/>
+          </a:xfrm>
+          <a:prstGeom prst="rect">
+            <a:avLst/>
+          </a:prstGeom>
+          <a:noFill/>
+        </p:spPr>
+        <p:txBody>
+          <a:bodyPr wrap="square">
+            <a:spAutoFit/>
+          </a:bodyPr>
+          <a:lstStyle/>
+          <a:p>
+            <a:pPr algn="l"/>
+            <a:r>
+              <a:rPr sz="1900" b="0" i="1">
+                <a:solidFill>
+                  <a:srgbClr val="BECDE6"/>
+                </a:solidFill>
+                <a:latin typeface="Source Serif 4"/>
+              </a:rPr>
+              <a:t>Nettomargenziffer im Firmenkundenbestand messen, verstehen und systematisch verbessern</a:t>
+            </a:r>
+          </a:p>
+        </p:txBody>
+      </p:sp>
+      <p:sp>
+        <p:nvSpPr>
+          <p:cNvPr id="7" name="Rectangle 6"/>
           <p:cNvSpPr/>
           <p:nvPr/>
         </p:nvSpPr>
@@ -3300,14 +3335,14 @@
       </p:sp>
       <p:sp>
         <p:nvSpPr>
-          <p:cNvPr id="7" name="TextBox 6"/>
+          <p:cNvPr id="8" name="TextBox 7"/>
           <p:cNvSpPr txBox="1"/>
           <p:nvPr/>
         </p:nvSpPr>
         <p:spPr>
           <a:xfrm>
             <a:off x="685800" y="5193792"/>
-            <a:ext cx="5408676" cy="201168"/>
+            <a:ext cx="3605784" cy="201168"/>
           </a:xfrm>
           <a:prstGeom prst="rect">
             <a:avLst/>
@@ -3328,21 +3363,21 @@
                 </a:solidFill>
                 <a:latin typeface="JetBrains Mono"/>
               </a:rPr>
-              <a:t>KOMPETENZSTUFE</a:t>
-            </a:r>
-          </a:p>
-        </p:txBody>
-      </p:sp>
-      <p:sp>
-        <p:nvSpPr>
-          <p:cNvPr id="8" name="TextBox 7"/>
+              <a:t>KOMPETENZFELD</a:t>
+            </a:r>
+          </a:p>
+        </p:txBody>
+      </p:sp>
+      <p:sp>
+        <p:nvSpPr>
+          <p:cNvPr id="9" name="TextBox 8"/>
           <p:cNvSpPr txBox="1"/>
           <p:nvPr/>
         </p:nvSpPr>
         <p:spPr>
           <a:xfrm>
             <a:off x="685800" y="5394960"/>
-            <a:ext cx="5408676" cy="320040"/>
+            <a:ext cx="3605784" cy="320040"/>
           </a:xfrm>
           <a:prstGeom prst="rect">
             <a:avLst/>
@@ -3363,21 +3398,21 @@
                 </a:solidFill>
                 <a:latin typeface="Arial"/>
               </a:rPr>
-              <a:t>Berater</a:t>
-            </a:r>
-          </a:p>
-        </p:txBody>
-      </p:sp>
-      <p:sp>
-        <p:nvSpPr>
-          <p:cNvPr id="9" name="TextBox 8"/>
+              <a:t>K-04 Vertrieb &amp; Ertragsoptimierung</a:t>
+            </a:r>
+          </a:p>
+        </p:txBody>
+      </p:sp>
+      <p:sp>
+        <p:nvSpPr>
+          <p:cNvPr id="10" name="TextBox 9"/>
           <p:cNvSpPr txBox="1"/>
           <p:nvPr/>
         </p:nvSpPr>
         <p:spPr>
           <a:xfrm>
-            <a:off x="6094476" y="5193792"/>
-            <a:ext cx="5408676" cy="201168"/>
+            <a:off x="4291584" y="5193792"/>
+            <a:ext cx="3605784" cy="201168"/>
           </a:xfrm>
           <a:prstGeom prst="rect">
             <a:avLst/>
@@ -3398,21 +3433,21 @@
                 </a:solidFill>
                 <a:latin typeface="JetBrains Mono"/>
               </a:rPr>
-              <a:t>VERSION</a:t>
-            </a:r>
-          </a:p>
-        </p:txBody>
-      </p:sp>
-      <p:sp>
-        <p:nvSpPr>
-          <p:cNvPr id="10" name="TextBox 9"/>
+              <a:t>KOMPETENZSTUFE</a:t>
+            </a:r>
+          </a:p>
+        </p:txBody>
+      </p:sp>
+      <p:sp>
+        <p:nvSpPr>
+          <p:cNvPr id="11" name="TextBox 10"/>
           <p:cNvSpPr txBox="1"/>
           <p:nvPr/>
         </p:nvSpPr>
         <p:spPr>
           <a:xfrm>
-            <a:off x="6094476" y="5394960"/>
-            <a:ext cx="5408676" cy="320040"/>
+            <a:off x="4291584" y="5394960"/>
+            <a:ext cx="3605784" cy="320040"/>
           </a:xfrm>
           <a:prstGeom prst="rect">
             <a:avLst/>
@@ -3433,6 +3468,76 @@
                 </a:solidFill>
                 <a:latin typeface="Arial"/>
               </a:rPr>
+              <a:t>Berater</a:t>
+            </a:r>
+          </a:p>
+        </p:txBody>
+      </p:sp>
+      <p:sp>
+        <p:nvSpPr>
+          <p:cNvPr id="12" name="TextBox 11"/>
+          <p:cNvSpPr txBox="1"/>
+          <p:nvPr/>
+        </p:nvSpPr>
+        <p:spPr>
+          <a:xfrm>
+            <a:off x="7897368" y="5193792"/>
+            <a:ext cx="3605784" cy="201168"/>
+          </a:xfrm>
+          <a:prstGeom prst="rect">
+            <a:avLst/>
+          </a:prstGeom>
+          <a:noFill/>
+        </p:spPr>
+        <p:txBody>
+          <a:bodyPr wrap="none">
+            <a:spAutoFit/>
+          </a:bodyPr>
+          <a:lstStyle/>
+          <a:p>
+            <a:pPr algn="l"/>
+            <a:r>
+              <a:rPr sz="700">
+                <a:solidFill>
+                  <a:srgbClr val="A0B4D2"/>
+                </a:solidFill>
+                <a:latin typeface="JetBrains Mono"/>
+              </a:rPr>
+              <a:t>VERSION</a:t>
+            </a:r>
+          </a:p>
+        </p:txBody>
+      </p:sp>
+      <p:sp>
+        <p:nvSpPr>
+          <p:cNvPr id="13" name="TextBox 12"/>
+          <p:cNvSpPr txBox="1"/>
+          <p:nvPr/>
+        </p:nvSpPr>
+        <p:spPr>
+          <a:xfrm>
+            <a:off x="7897368" y="5394960"/>
+            <a:ext cx="3605784" cy="320040"/>
+          </a:xfrm>
+          <a:prstGeom prst="rect">
+            <a:avLst/>
+          </a:prstGeom>
+          <a:noFill/>
+        </p:spPr>
+        <p:txBody>
+          <a:bodyPr wrap="square">
+            <a:spAutoFit/>
+          </a:bodyPr>
+          <a:lstStyle/>
+          <a:p>
+            <a:pPr algn="l"/>
+            <a:r>
+              <a:rPr sz="1100" b="0" i="0">
+                <a:solidFill>
+                  <a:srgbClr val="FFFFFF"/>
+                </a:solidFill>
+                <a:latin typeface="Arial"/>
+              </a:rPr>
               <a:t>v0.4</a:t>
             </a:r>
           </a:p>
@@ -3440,7 +3545,7 @@
       </p:sp>
       <p:sp>
         <p:nvSpPr>
-          <p:cNvPr id="11" name="Rectangle 10"/>
+          <p:cNvPr id="14" name="Rectangle 13"/>
           <p:cNvSpPr/>
           <p:nvPr/>
         </p:nvSpPr>
@@ -3483,7 +3588,7 @@
       </p:sp>
       <p:sp>
         <p:nvSpPr>
-          <p:cNvPr id="12" name="TextBox 11"/>
+          <p:cNvPr id="15" name="TextBox 14"/>
           <p:cNvSpPr txBox="1"/>
           <p:nvPr/>
         </p:nvSpPr>
@@ -3518,7 +3623,7 @@
       </p:sp>
       <p:sp>
         <p:nvSpPr>
-          <p:cNvPr id="13" name="TextBox 12"/>
+          <p:cNvPr id="16" name="TextBox 15"/>
           <p:cNvSpPr txBox="1"/>
           <p:nvPr/>
         </p:nvSpPr>
